--- a/public/downloads/praesentation/M04.pptx
+++ b/public/downloads/praesentation/M04.pptx
@@ -15,6 +15,10 @@
     <p:sldId id="263" r:id="rId14"/>
     <p:sldId id="264" r:id="rId15"/>
     <p:sldId id="265" r:id="rId16"/>
+    <p:sldId id="266" r:id="rId17"/>
+    <p:sldId id="267" r:id="rId18"/>
+    <p:sldId id="268" r:id="rId19"/>
+    <p:sldId id="269" r:id="rId20"/>
   </p:sldIdLst>
   <p:sldSz cx="12188952" cy="6858000" type="screen4x3"/>
   <p:notesSz cx="6858000" cy="9144000"/>
@@ -3156,8 +3160,8 @@
         </p:nvSpPr>
         <p:spPr>
           <a:xfrm>
-            <a:off x="365760" y="365760"/>
-            <a:ext cx="11430000" cy="457200"/>
+            <a:off x="365760" y="320040"/>
+            <a:ext cx="11430000" cy="411480"/>
           </a:xfrm>
           <a:prstGeom prst="rect">
             <a:avLst/>
@@ -3172,13 +3176,13 @@
           <a:p>
             <a:pPr algn="l"/>
             <a:r>
-              <a:rPr sz="1100" b="0">
+              <a:rPr sz="1100" b="0" i="0">
                 <a:solidFill>
-                  <a:srgbClr val="FFFFFF"/>
+                  <a:srgbClr val="BBCCEE"/>
                 </a:solidFill>
                 <a:latin typeface="Arial"/>
               </a:rPr>
-              <a:t>M04  ·  K-01 Finanzanalyse &amp; Kreditexpertise  ·  Berater  ·  90 Min.</a:t>
+              <a:t>M04  ·  K-01 Finanzanalyse &amp; Kreditexpertise  ·  Zielstufe: Berater  ·  90 Min.</a:t>
             </a:r>
           </a:p>
         </p:txBody>
@@ -3191,14 +3195,14 @@
         </p:nvSpPr>
         <p:spPr>
           <a:xfrm>
-            <a:off x="365760" y="868680"/>
-            <a:ext cx="7315200" cy="27432"/>
+            <a:off x="365760" y="804672"/>
+            <a:ext cx="8229600" cy="22860"/>
           </a:xfrm>
           <a:prstGeom prst="rect">
             <a:avLst/>
           </a:prstGeom>
           <a:solidFill>
-            <a:srgbClr val="FFFFFF"/>
+            <a:srgbClr val="335CC0"/>
           </a:solidFill>
           <a:ln>
             <a:noFill/>
@@ -3234,8 +3238,8 @@
         </p:nvSpPr>
         <p:spPr>
           <a:xfrm>
-            <a:off x="365760" y="1097280"/>
-            <a:ext cx="11430000" cy="2286000"/>
+            <a:off x="365760" y="1005840"/>
+            <a:ext cx="11430000" cy="2560320"/>
           </a:xfrm>
           <a:prstGeom prst="rect">
             <a:avLst/>
@@ -3250,7 +3254,7 @@
           <a:p>
             <a:pPr algn="l"/>
             <a:r>
-              <a:rPr sz="4000" b="1">
+              <a:rPr sz="4200" b="1" i="0">
                 <a:solidFill>
                   <a:srgbClr val="FFFFFF"/>
                 </a:solidFill>
@@ -3269,8 +3273,8 @@
         </p:nvSpPr>
         <p:spPr>
           <a:xfrm>
-            <a:off x="365760" y="3200400"/>
-            <a:ext cx="9144000" cy="914400"/>
+            <a:off x="365760" y="3383280"/>
+            <a:ext cx="10058400" cy="822960"/>
           </a:xfrm>
           <a:prstGeom prst="rect">
             <a:avLst/>
@@ -3285,7 +3289,7 @@
           <a:p>
             <a:pPr algn="l"/>
             <a:r>
-              <a:rPr sz="2000" b="0">
+              <a:rPr sz="2000" b="0" i="1">
                 <a:solidFill>
                   <a:srgbClr val="CCD6F0"/>
                 </a:solidFill>
@@ -3304,8 +3308,8 @@
         </p:nvSpPr>
         <p:spPr>
           <a:xfrm>
-            <a:off x="365760" y="6217920"/>
-            <a:ext cx="11430000" cy="457200"/>
+            <a:off x="365760" y="6309360"/>
+            <a:ext cx="11430000" cy="365760"/>
           </a:xfrm>
           <a:prstGeom prst="rect">
             <a:avLst/>
@@ -3320,9 +3324,9 @@
           <a:p>
             <a:pPr algn="l"/>
             <a:r>
-              <a:rPr sz="1000" b="0">
+              <a:rPr sz="900" b="0" i="0">
                 <a:solidFill>
-                  <a:srgbClr val="99AACC"/>
+                  <a:srgbClr val="889ACC"/>
                 </a:solidFill>
                 <a:latin typeface="Arial"/>
               </a:rPr>
@@ -3345,7 +3349,2363 @@
     <p:bg>
       <p:bgPr>
         <a:solidFill>
-          <a:srgbClr val="003DA5"/>
+          <a:srgbClr val="FFFFFF"/>
+        </a:solidFill>
+        <a:effectLst/>
+      </p:bgPr>
+    </p:bg>
+    <p:spTree>
+      <p:nvGrpSpPr>
+        <p:cNvPr id="1" name=""/>
+        <p:cNvGrpSpPr/>
+        <p:nvPr/>
+      </p:nvGrpSpPr>
+      <p:grpSpPr/>
+      <p:sp>
+        <p:nvSpPr>
+          <p:cNvPr id="2" name="Rectangle 1"/>
+          <p:cNvSpPr/>
+          <p:nvPr/>
+        </p:nvSpPr>
+        <p:spPr>
+          <a:xfrm>
+            <a:off x="0" y="0"/>
+            <a:ext cx="73152" cy="6858000"/>
+          </a:xfrm>
+          <a:prstGeom prst="rect">
+            <a:avLst/>
+          </a:prstGeom>
+          <a:solidFill>
+            <a:srgbClr val="003DA5"/>
+          </a:solidFill>
+          <a:ln>
+            <a:noFill/>
+          </a:ln>
+        </p:spPr>
+        <p:style>
+          <a:lnRef idx="1">
+            <a:schemeClr val="accent1"/>
+          </a:lnRef>
+          <a:fillRef idx="3">
+            <a:schemeClr val="accent1"/>
+          </a:fillRef>
+          <a:effectRef idx="2">
+            <a:schemeClr val="accent1"/>
+          </a:effectRef>
+          <a:fontRef idx="minor">
+            <a:schemeClr val="lt1"/>
+          </a:fontRef>
+        </p:style>
+        <p:txBody>
+          <a:bodyPr rtlCol="0" anchor="ctr"/>
+          <a:lstStyle/>
+          <a:p>
+            <a:pPr algn="ctr"/>
+          </a:p>
+        </p:txBody>
+      </p:sp>
+      <p:sp>
+        <p:nvSpPr>
+          <p:cNvPr id="3" name="TextBox 2"/>
+          <p:cNvSpPr txBox="1"/>
+          <p:nvPr/>
+        </p:nvSpPr>
+        <p:spPr>
+          <a:xfrm>
+            <a:off x="228600" y="182880"/>
+            <a:ext cx="11430000" cy="320040"/>
+          </a:xfrm>
+          <a:prstGeom prst="rect">
+            <a:avLst/>
+          </a:prstGeom>
+          <a:noFill/>
+        </p:spPr>
+        <p:txBody>
+          <a:bodyPr wrap="square">
+            <a:spAutoFit/>
+          </a:bodyPr>
+          <a:lstStyle/>
+          <a:p>
+            <a:pPr algn="l"/>
+            <a:r>
+              <a:rPr sz="900" b="0" i="0">
+                <a:solidFill>
+                  <a:srgbClr val="556575"/>
+                </a:solidFill>
+                <a:latin typeface="Arial"/>
+              </a:rPr>
+              <a:t>M04 · Modulinhalte</a:t>
+            </a:r>
+          </a:p>
+        </p:txBody>
+      </p:sp>
+      <p:sp>
+        <p:nvSpPr>
+          <p:cNvPr id="4" name="TextBox 3"/>
+          <p:cNvSpPr txBox="1"/>
+          <p:nvPr/>
+        </p:nvSpPr>
+        <p:spPr>
+          <a:xfrm>
+            <a:off x="365760" y="274320"/>
+            <a:ext cx="11430000" cy="777240"/>
+          </a:xfrm>
+          <a:prstGeom prst="rect">
+            <a:avLst/>
+          </a:prstGeom>
+          <a:noFill/>
+        </p:spPr>
+        <p:txBody>
+          <a:bodyPr wrap="square">
+            <a:spAutoFit/>
+          </a:bodyPr>
+          <a:lstStyle/>
+          <a:p>
+            <a:pPr algn="l"/>
+            <a:r>
+              <a:rPr sz="2200" b="1" i="0">
+                <a:solidFill>
+                  <a:srgbClr val="003DA5"/>
+                </a:solidFill>
+                <a:latin typeface="Arial"/>
+              </a:rPr>
+              <a:t>Ampel-Checkliste: Gesamtbewertung Kreditrisiko</a:t>
+            </a:r>
+          </a:p>
+        </p:txBody>
+      </p:sp>
+      <p:sp>
+        <p:nvSpPr>
+          <p:cNvPr id="5" name="Rectangle 4"/>
+          <p:cNvSpPr/>
+          <p:nvPr/>
+        </p:nvSpPr>
+        <p:spPr>
+          <a:xfrm>
+            <a:off x="365760" y="1005840"/>
+            <a:ext cx="11430000" cy="27432"/>
+          </a:xfrm>
+          <a:prstGeom prst="rect">
+            <a:avLst/>
+          </a:prstGeom>
+          <a:solidFill>
+            <a:srgbClr val="D1D5DB"/>
+          </a:solidFill>
+          <a:ln>
+            <a:noFill/>
+          </a:ln>
+        </p:spPr>
+        <p:style>
+          <a:lnRef idx="1">
+            <a:schemeClr val="accent1"/>
+          </a:lnRef>
+          <a:fillRef idx="3">
+            <a:schemeClr val="accent1"/>
+          </a:fillRef>
+          <a:effectRef idx="2">
+            <a:schemeClr val="accent1"/>
+          </a:effectRef>
+          <a:fontRef idx="minor">
+            <a:schemeClr val="lt1"/>
+          </a:fontRef>
+        </p:style>
+        <p:txBody>
+          <a:bodyPr rtlCol="0" anchor="ctr"/>
+          <a:lstStyle/>
+          <a:p>
+            <a:pPr algn="ctr"/>
+          </a:p>
+        </p:txBody>
+      </p:sp>
+      <p:graphicFrame>
+        <p:nvGraphicFramePr>
+          <p:cNvPr id="6" name="Table 5"/>
+          <p:cNvGraphicFramePr>
+            <a:graphicFrameLocks noGrp="1"/>
+          </p:cNvGraphicFramePr>
+          <p:nvPr/>
+        </p:nvGraphicFramePr>
+        <p:xfrm>
+          <a:off x="365760" y="1143000"/>
+          <a:ext cx="11430000" cy="5029200"/>
+        </p:xfrm>
+        <a:graphic>
+          <a:graphicData uri="http://schemas.openxmlformats.org/drawingml/2006/table">
+            <a:tbl>
+              <a:tblPr firstRow="1" bandRow="1">
+                <a:tableStyleId>{5C22544A-7EE6-4342-B048-85BDC9FD1C3A}</a:tableStyleId>
+              </a:tblPr>
+              <a:tblGrid>
+                <a:gridCol w="1905000"/>
+                <a:gridCol w="1905000"/>
+                <a:gridCol w="1905000"/>
+                <a:gridCol w="1905000"/>
+                <a:gridCol w="1905000"/>
+                <a:gridCol w="1905000"/>
+              </a:tblGrid>
+              <a:tr h="314325">
+                <a:tc>
+                  <a:txBody>
+                    <a:bodyPr wrap="square"/>
+                    <a:lstStyle/>
+                    <a:p>
+                      <a:r>
+                        <a:rPr sz="1100" b="1">
+                          <a:solidFill>
+                            <a:srgbClr val="FFFFFF"/>
+                          </a:solidFill>
+                          <a:latin typeface="Arial"/>
+                        </a:rPr>
+                        <a:t>Nr.</a:t>
+                      </a:r>
+                    </a:p>
+                  </a:txBody>
+                  <a:tcPr>
+                    <a:solidFill>
+                      <a:srgbClr val="003DA5"/>
+                    </a:solidFill>
+                  </a:tcPr>
+                </a:tc>
+                <a:tc>
+                  <a:txBody>
+                    <a:bodyPr wrap="square"/>
+                    <a:lstStyle/>
+                    <a:p>
+                      <a:r>
+                        <a:rPr sz="1100" b="1">
+                          <a:solidFill>
+                            <a:srgbClr val="FFFFFF"/>
+                          </a:solidFill>
+                          <a:latin typeface="Arial"/>
+                        </a:rPr>
+                        <a:t>Indikator</a:t>
+                      </a:r>
+                    </a:p>
+                  </a:txBody>
+                  <a:tcPr>
+                    <a:solidFill>
+                      <a:srgbClr val="003DA5"/>
+                    </a:solidFill>
+                  </a:tcPr>
+                </a:tc>
+                <a:tc>
+                  <a:txBody>
+                    <a:bodyPr wrap="square"/>
+                    <a:lstStyle/>
+                    <a:p>
+                      <a:r>
+                        <a:rPr sz="1100" b="1">
+                          <a:solidFill>
+                            <a:srgbClr val="FFFFFF"/>
+                          </a:solidFill>
+                          <a:latin typeface="Arial"/>
+                        </a:rPr>
+                        <a:t>Grün (0)</a:t>
+                      </a:r>
+                    </a:p>
+                  </a:txBody>
+                  <a:tcPr>
+                    <a:solidFill>
+                      <a:srgbClr val="003DA5"/>
+                    </a:solidFill>
+                  </a:tcPr>
+                </a:tc>
+                <a:tc>
+                  <a:txBody>
+                    <a:bodyPr wrap="square"/>
+                    <a:lstStyle/>
+                    <a:p>
+                      <a:r>
+                        <a:rPr sz="1100" b="1">
+                          <a:solidFill>
+                            <a:srgbClr val="FFFFFF"/>
+                          </a:solidFill>
+                          <a:latin typeface="Arial"/>
+                        </a:rPr>
+                        <a:t>Gelb (1)</a:t>
+                      </a:r>
+                    </a:p>
+                  </a:txBody>
+                  <a:tcPr>
+                    <a:solidFill>
+                      <a:srgbClr val="003DA5"/>
+                    </a:solidFill>
+                  </a:tcPr>
+                </a:tc>
+                <a:tc>
+                  <a:txBody>
+                    <a:bodyPr wrap="square"/>
+                    <a:lstStyle/>
+                    <a:p>
+                      <a:r>
+                        <a:rPr sz="1100" b="1">
+                          <a:solidFill>
+                            <a:srgbClr val="FFFFFF"/>
+                          </a:solidFill>
+                          <a:latin typeface="Arial"/>
+                        </a:rPr>
+                        <a:t>Rot (2)</a:t>
+                      </a:r>
+                    </a:p>
+                  </a:txBody>
+                  <a:tcPr>
+                    <a:solidFill>
+                      <a:srgbClr val="003DA5"/>
+                    </a:solidFill>
+                  </a:tcPr>
+                </a:tc>
+                <a:tc>
+                  <a:txBody>
+                    <a:bodyPr wrap="square"/>
+                    <a:lstStyle/>
+                    <a:p>
+                      <a:r>
+                        <a:rPr sz="1100" b="1">
+                          <a:solidFill>
+                            <a:srgbClr val="FFFFFF"/>
+                          </a:solidFill>
+                          <a:latin typeface="Arial"/>
+                        </a:rPr>
+                        <a:t>Punkte</a:t>
+                      </a:r>
+                    </a:p>
+                  </a:txBody>
+                  <a:tcPr>
+                    <a:solidFill>
+                      <a:srgbClr val="003DA5"/>
+                    </a:solidFill>
+                  </a:tcPr>
+                </a:tc>
+              </a:tr>
+              <a:tr h="314325">
+                <a:tc>
+                  <a:txBody>
+                    <a:bodyPr wrap="square"/>
+                    <a:lstStyle/>
+                    <a:p>
+                      <a:r>
+                        <a:rPr sz="1100" b="0">
+                          <a:solidFill>
+                            <a:srgbClr val="1A1A1A"/>
+                          </a:solidFill>
+                          <a:latin typeface="Arial"/>
+                        </a:rPr>
+                        <a:t>Q1</a:t>
+                      </a:r>
+                    </a:p>
+                  </a:txBody>
+                  <a:tcPr>
+                    <a:solidFill>
+                      <a:srgbClr val="FFFFFF"/>
+                    </a:solidFill>
+                  </a:tcPr>
+                </a:tc>
+                <a:tc>
+                  <a:txBody>
+                    <a:bodyPr wrap="square"/>
+                    <a:lstStyle/>
+                    <a:p>
+                      <a:r>
+                        <a:rPr sz="1100" b="0">
+                          <a:solidFill>
+                            <a:srgbClr val="1A1A1A"/>
+                          </a:solidFill>
+                          <a:latin typeface="Arial"/>
+                        </a:rPr>
+                        <a:t>EBITDA-Marge</a:t>
+                      </a:r>
+                    </a:p>
+                  </a:txBody>
+                  <a:tcPr>
+                    <a:solidFill>
+                      <a:srgbClr val="FFFFFF"/>
+                    </a:solidFill>
+                  </a:tcPr>
+                </a:tc>
+                <a:tc>
+                  <a:txBody>
+                    <a:bodyPr wrap="square"/>
+                    <a:lstStyle/>
+                    <a:p>
+                      <a:r>
+                        <a:rPr sz="1100" b="0">
+                          <a:solidFill>
+                            <a:srgbClr val="1A1A1A"/>
+                          </a:solidFill>
+                          <a:latin typeface="Arial"/>
+                        </a:rPr>
+                        <a:t>&gt; 8 %</a:t>
+                      </a:r>
+                    </a:p>
+                  </a:txBody>
+                  <a:tcPr>
+                    <a:solidFill>
+                      <a:srgbClr val="FFFFFF"/>
+                    </a:solidFill>
+                  </a:tcPr>
+                </a:tc>
+                <a:tc>
+                  <a:txBody>
+                    <a:bodyPr wrap="square"/>
+                    <a:lstStyle/>
+                    <a:p>
+                      <a:r>
+                        <a:rPr sz="1100" b="0">
+                          <a:solidFill>
+                            <a:srgbClr val="1A1A1A"/>
+                          </a:solidFill>
+                          <a:latin typeface="Arial"/>
+                        </a:rPr>
+                        <a:t>5–8 %</a:t>
+                      </a:r>
+                    </a:p>
+                  </a:txBody>
+                  <a:tcPr>
+                    <a:solidFill>
+                      <a:srgbClr val="FFFFFF"/>
+                    </a:solidFill>
+                  </a:tcPr>
+                </a:tc>
+                <a:tc>
+                  <a:txBody>
+                    <a:bodyPr wrap="square"/>
+                    <a:lstStyle/>
+                    <a:p>
+                      <a:r>
+                        <a:rPr sz="1100" b="0">
+                          <a:solidFill>
+                            <a:srgbClr val="1A1A1A"/>
+                          </a:solidFill>
+                          <a:latin typeface="Arial"/>
+                        </a:rPr>
+                        <a:t>&lt; 5 %</a:t>
+                      </a:r>
+                    </a:p>
+                  </a:txBody>
+                  <a:tcPr>
+                    <a:solidFill>
+                      <a:srgbClr val="FFFFFF"/>
+                    </a:solidFill>
+                  </a:tcPr>
+                </a:tc>
+                <a:tc>
+                  <a:txBody>
+                    <a:bodyPr wrap="square"/>
+                    <a:lstStyle/>
+                    <a:p>
+                      <a:r>
+                        <a:rPr sz="1100" b="0">
+                          <a:solidFill>
+                            <a:srgbClr val="1A1A1A"/>
+                          </a:solidFill>
+                          <a:latin typeface="Arial"/>
+                        </a:rPr>
+                        <a:t>______</a:t>
+                      </a:r>
+                    </a:p>
+                  </a:txBody>
+                  <a:tcPr>
+                    <a:solidFill>
+                      <a:srgbClr val="FFFFFF"/>
+                    </a:solidFill>
+                  </a:tcPr>
+                </a:tc>
+              </a:tr>
+              <a:tr h="314325">
+                <a:tc>
+                  <a:txBody>
+                    <a:bodyPr wrap="square"/>
+                    <a:lstStyle/>
+                    <a:p>
+                      <a:r>
+                        <a:rPr sz="1100" b="0">
+                          <a:solidFill>
+                            <a:srgbClr val="1A1A1A"/>
+                          </a:solidFill>
+                          <a:latin typeface="Arial"/>
+                        </a:rPr>
+                        <a:t>Q2</a:t>
+                      </a:r>
+                    </a:p>
+                  </a:txBody>
+                  <a:tcPr>
+                    <a:solidFill>
+                      <a:srgbClr val="F4F6FA"/>
+                    </a:solidFill>
+                  </a:tcPr>
+                </a:tc>
+                <a:tc>
+                  <a:txBody>
+                    <a:bodyPr wrap="square"/>
+                    <a:lstStyle/>
+                    <a:p>
+                      <a:r>
+                        <a:rPr sz="1100" b="0">
+                          <a:solidFill>
+                            <a:srgbClr val="1A1A1A"/>
+                          </a:solidFill>
+                          <a:latin typeface="Arial"/>
+                        </a:rPr>
+                        <a:t>Leverage NFK/EBITDA</a:t>
+                      </a:r>
+                    </a:p>
+                  </a:txBody>
+                  <a:tcPr>
+                    <a:solidFill>
+                      <a:srgbClr val="F4F6FA"/>
+                    </a:solidFill>
+                  </a:tcPr>
+                </a:tc>
+                <a:tc>
+                  <a:txBody>
+                    <a:bodyPr wrap="square"/>
+                    <a:lstStyle/>
+                    <a:p>
+                      <a:r>
+                        <a:rPr sz="1100" b="0">
+                          <a:solidFill>
+                            <a:srgbClr val="1A1A1A"/>
+                          </a:solidFill>
+                          <a:latin typeface="Arial"/>
+                        </a:rPr>
+                        <a:t>&lt; 3,0x</a:t>
+                      </a:r>
+                    </a:p>
+                  </a:txBody>
+                  <a:tcPr>
+                    <a:solidFill>
+                      <a:srgbClr val="F4F6FA"/>
+                    </a:solidFill>
+                  </a:tcPr>
+                </a:tc>
+                <a:tc>
+                  <a:txBody>
+                    <a:bodyPr wrap="square"/>
+                    <a:lstStyle/>
+                    <a:p>
+                      <a:r>
+                        <a:rPr sz="1100" b="0">
+                          <a:solidFill>
+                            <a:srgbClr val="1A1A1A"/>
+                          </a:solidFill>
+                          <a:latin typeface="Arial"/>
+                        </a:rPr>
+                        <a:t>3,0–4,0x</a:t>
+                      </a:r>
+                    </a:p>
+                  </a:txBody>
+                  <a:tcPr>
+                    <a:solidFill>
+                      <a:srgbClr val="F4F6FA"/>
+                    </a:solidFill>
+                  </a:tcPr>
+                </a:tc>
+                <a:tc>
+                  <a:txBody>
+                    <a:bodyPr wrap="square"/>
+                    <a:lstStyle/>
+                    <a:p>
+                      <a:r>
+                        <a:rPr sz="1100" b="0">
+                          <a:solidFill>
+                            <a:srgbClr val="1A1A1A"/>
+                          </a:solidFill>
+                          <a:latin typeface="Arial"/>
+                        </a:rPr>
+                        <a:t>&gt; 4,0x</a:t>
+                      </a:r>
+                    </a:p>
+                  </a:txBody>
+                  <a:tcPr>
+                    <a:solidFill>
+                      <a:srgbClr val="F4F6FA"/>
+                    </a:solidFill>
+                  </a:tcPr>
+                </a:tc>
+                <a:tc>
+                  <a:txBody>
+                    <a:bodyPr wrap="square"/>
+                    <a:lstStyle/>
+                    <a:p>
+                      <a:r>
+                        <a:rPr sz="1100" b="0">
+                          <a:solidFill>
+                            <a:srgbClr val="1A1A1A"/>
+                          </a:solidFill>
+                          <a:latin typeface="Arial"/>
+                        </a:rPr>
+                        <a:t>______</a:t>
+                      </a:r>
+                    </a:p>
+                  </a:txBody>
+                  <a:tcPr>
+                    <a:solidFill>
+                      <a:srgbClr val="F4F6FA"/>
+                    </a:solidFill>
+                  </a:tcPr>
+                </a:tc>
+              </a:tr>
+              <a:tr h="314325">
+                <a:tc>
+                  <a:txBody>
+                    <a:bodyPr wrap="square"/>
+                    <a:lstStyle/>
+                    <a:p>
+                      <a:r>
+                        <a:rPr sz="1100" b="0">
+                          <a:solidFill>
+                            <a:srgbClr val="1A1A1A"/>
+                          </a:solidFill>
+                          <a:latin typeface="Arial"/>
+                        </a:rPr>
+                        <a:t>Q3</a:t>
+                      </a:r>
+                    </a:p>
+                  </a:txBody>
+                  <a:tcPr>
+                    <a:solidFill>
+                      <a:srgbClr val="FFFFFF"/>
+                    </a:solidFill>
+                  </a:tcPr>
+                </a:tc>
+                <a:tc>
+                  <a:txBody>
+                    <a:bodyPr wrap="square"/>
+                    <a:lstStyle/>
+                    <a:p>
+                      <a:r>
+                        <a:rPr sz="1100" b="0">
+                          <a:solidFill>
+                            <a:srgbClr val="1A1A1A"/>
+                          </a:solidFill>
+                          <a:latin typeface="Arial"/>
+                        </a:rPr>
+                        <a:t>Eigenkapitalquote</a:t>
+                      </a:r>
+                    </a:p>
+                  </a:txBody>
+                  <a:tcPr>
+                    <a:solidFill>
+                      <a:srgbClr val="FFFFFF"/>
+                    </a:solidFill>
+                  </a:tcPr>
+                </a:tc>
+                <a:tc>
+                  <a:txBody>
+                    <a:bodyPr wrap="square"/>
+                    <a:lstStyle/>
+                    <a:p>
+                      <a:r>
+                        <a:rPr sz="1100" b="0">
+                          <a:solidFill>
+                            <a:srgbClr val="1A1A1A"/>
+                          </a:solidFill>
+                          <a:latin typeface="Arial"/>
+                        </a:rPr>
+                        <a:t>&gt; 20 %</a:t>
+                      </a:r>
+                    </a:p>
+                  </a:txBody>
+                  <a:tcPr>
+                    <a:solidFill>
+                      <a:srgbClr val="FFFFFF"/>
+                    </a:solidFill>
+                  </a:tcPr>
+                </a:tc>
+                <a:tc>
+                  <a:txBody>
+                    <a:bodyPr wrap="square"/>
+                    <a:lstStyle/>
+                    <a:p>
+                      <a:r>
+                        <a:rPr sz="1100" b="0">
+                          <a:solidFill>
+                            <a:srgbClr val="1A1A1A"/>
+                          </a:solidFill>
+                          <a:latin typeface="Arial"/>
+                        </a:rPr>
+                        <a:t>10–20 %</a:t>
+                      </a:r>
+                    </a:p>
+                  </a:txBody>
+                  <a:tcPr>
+                    <a:solidFill>
+                      <a:srgbClr val="FFFFFF"/>
+                    </a:solidFill>
+                  </a:tcPr>
+                </a:tc>
+                <a:tc>
+                  <a:txBody>
+                    <a:bodyPr wrap="square"/>
+                    <a:lstStyle/>
+                    <a:p>
+                      <a:r>
+                        <a:rPr sz="1100" b="0">
+                          <a:solidFill>
+                            <a:srgbClr val="1A1A1A"/>
+                          </a:solidFill>
+                          <a:latin typeface="Arial"/>
+                        </a:rPr>
+                        <a:t>&lt; 10 %</a:t>
+                      </a:r>
+                    </a:p>
+                  </a:txBody>
+                  <a:tcPr>
+                    <a:solidFill>
+                      <a:srgbClr val="FFFFFF"/>
+                    </a:solidFill>
+                  </a:tcPr>
+                </a:tc>
+                <a:tc>
+                  <a:txBody>
+                    <a:bodyPr wrap="square"/>
+                    <a:lstStyle/>
+                    <a:p>
+                      <a:r>
+                        <a:rPr sz="1100" b="0">
+                          <a:solidFill>
+                            <a:srgbClr val="1A1A1A"/>
+                          </a:solidFill>
+                          <a:latin typeface="Arial"/>
+                        </a:rPr>
+                        <a:t>______</a:t>
+                      </a:r>
+                    </a:p>
+                  </a:txBody>
+                  <a:tcPr>
+                    <a:solidFill>
+                      <a:srgbClr val="FFFFFF"/>
+                    </a:solidFill>
+                  </a:tcPr>
+                </a:tc>
+              </a:tr>
+              <a:tr h="314325">
+                <a:tc>
+                  <a:txBody>
+                    <a:bodyPr wrap="square"/>
+                    <a:lstStyle/>
+                    <a:p>
+                      <a:r>
+                        <a:rPr sz="1100" b="0">
+                          <a:solidFill>
+                            <a:srgbClr val="1A1A1A"/>
+                          </a:solidFill>
+                          <a:latin typeface="Arial"/>
+                        </a:rPr>
+                        <a:t>Q4</a:t>
+                      </a:r>
+                    </a:p>
+                  </a:txBody>
+                  <a:tcPr>
+                    <a:solidFill>
+                      <a:srgbClr val="F4F6FA"/>
+                    </a:solidFill>
+                  </a:tcPr>
+                </a:tc>
+                <a:tc>
+                  <a:txBody>
+                    <a:bodyPr wrap="square"/>
+                    <a:lstStyle/>
+                    <a:p>
+                      <a:r>
+                        <a:rPr sz="1100" b="0">
+                          <a:solidFill>
+                            <a:srgbClr val="1A1A1A"/>
+                          </a:solidFill>
+                          <a:latin typeface="Arial"/>
+                        </a:rPr>
+                        <a:t>KK-Inanspruchnahme (Ø)</a:t>
+                      </a:r>
+                    </a:p>
+                  </a:txBody>
+                  <a:tcPr>
+                    <a:solidFill>
+                      <a:srgbClr val="F4F6FA"/>
+                    </a:solidFill>
+                  </a:tcPr>
+                </a:tc>
+                <a:tc>
+                  <a:txBody>
+                    <a:bodyPr wrap="square"/>
+                    <a:lstStyle/>
+                    <a:p>
+                      <a:r>
+                        <a:rPr sz="1100" b="0">
+                          <a:solidFill>
+                            <a:srgbClr val="1A1A1A"/>
+                          </a:solidFill>
+                          <a:latin typeface="Arial"/>
+                        </a:rPr>
+                        <a:t>&lt; 60 %</a:t>
+                      </a:r>
+                    </a:p>
+                  </a:txBody>
+                  <a:tcPr>
+                    <a:solidFill>
+                      <a:srgbClr val="F4F6FA"/>
+                    </a:solidFill>
+                  </a:tcPr>
+                </a:tc>
+                <a:tc>
+                  <a:txBody>
+                    <a:bodyPr wrap="square"/>
+                    <a:lstStyle/>
+                    <a:p>
+                      <a:r>
+                        <a:rPr sz="1100" b="0">
+                          <a:solidFill>
+                            <a:srgbClr val="1A1A1A"/>
+                          </a:solidFill>
+                          <a:latin typeface="Arial"/>
+                        </a:rPr>
+                        <a:t>60–85 %</a:t>
+                      </a:r>
+                    </a:p>
+                  </a:txBody>
+                  <a:tcPr>
+                    <a:solidFill>
+                      <a:srgbClr val="F4F6FA"/>
+                    </a:solidFill>
+                  </a:tcPr>
+                </a:tc>
+                <a:tc>
+                  <a:txBody>
+                    <a:bodyPr wrap="square"/>
+                    <a:lstStyle/>
+                    <a:p>
+                      <a:r>
+                        <a:rPr sz="1100" b="0">
+                          <a:solidFill>
+                            <a:srgbClr val="1A1A1A"/>
+                          </a:solidFill>
+                          <a:latin typeface="Arial"/>
+                        </a:rPr>
+                        <a:t>&gt; 85 %</a:t>
+                      </a:r>
+                    </a:p>
+                  </a:txBody>
+                  <a:tcPr>
+                    <a:solidFill>
+                      <a:srgbClr val="F4F6FA"/>
+                    </a:solidFill>
+                  </a:tcPr>
+                </a:tc>
+                <a:tc>
+                  <a:txBody>
+                    <a:bodyPr wrap="square"/>
+                    <a:lstStyle/>
+                    <a:p>
+                      <a:r>
+                        <a:rPr sz="1100" b="0">
+                          <a:solidFill>
+                            <a:srgbClr val="1A1A1A"/>
+                          </a:solidFill>
+                          <a:latin typeface="Arial"/>
+                        </a:rPr>
+                        <a:t>______</a:t>
+                      </a:r>
+                    </a:p>
+                  </a:txBody>
+                  <a:tcPr>
+                    <a:solidFill>
+                      <a:srgbClr val="F4F6FA"/>
+                    </a:solidFill>
+                  </a:tcPr>
+                </a:tc>
+              </a:tr>
+              <a:tr h="314325">
+                <a:tc>
+                  <a:txBody>
+                    <a:bodyPr wrap="square"/>
+                    <a:lstStyle/>
+                    <a:p>
+                      <a:r>
+                        <a:rPr sz="1100" b="0">
+                          <a:solidFill>
+                            <a:srgbClr val="1A1A1A"/>
+                          </a:solidFill>
+                          <a:latin typeface="Arial"/>
+                        </a:rPr>
+                        <a:t>Q5</a:t>
+                      </a:r>
+                    </a:p>
+                  </a:txBody>
+                  <a:tcPr>
+                    <a:solidFill>
+                      <a:srgbClr val="FFFFFF"/>
+                    </a:solidFill>
+                  </a:tcPr>
+                </a:tc>
+                <a:tc>
+                  <a:txBody>
+                    <a:bodyPr wrap="square"/>
+                    <a:lstStyle/>
+                    <a:p>
+                      <a:r>
+                        <a:rPr sz="1100" b="0">
+                          <a:solidFill>
+                            <a:srgbClr val="1A1A1A"/>
+                          </a:solidFill>
+                          <a:latin typeface="Arial"/>
+                        </a:rPr>
+                        <a:t>Jahresabschluss-Vorlage</a:t>
+                      </a:r>
+                    </a:p>
+                  </a:txBody>
+                  <a:tcPr>
+                    <a:solidFill>
+                      <a:srgbClr val="FFFFFF"/>
+                    </a:solidFill>
+                  </a:tcPr>
+                </a:tc>
+                <a:tc>
+                  <a:txBody>
+                    <a:bodyPr wrap="square"/>
+                    <a:lstStyle/>
+                    <a:p>
+                      <a:r>
+                        <a:rPr sz="1100" b="0">
+                          <a:solidFill>
+                            <a:srgbClr val="1A1A1A"/>
+                          </a:solidFill>
+                          <a:latin typeface="Arial"/>
+                        </a:rPr>
+                        <a:t>&lt; 6 Monate</a:t>
+                      </a:r>
+                    </a:p>
+                  </a:txBody>
+                  <a:tcPr>
+                    <a:solidFill>
+                      <a:srgbClr val="FFFFFF"/>
+                    </a:solidFill>
+                  </a:tcPr>
+                </a:tc>
+                <a:tc>
+                  <a:txBody>
+                    <a:bodyPr wrap="square"/>
+                    <a:lstStyle/>
+                    <a:p>
+                      <a:r>
+                        <a:rPr sz="1100" b="0">
+                          <a:solidFill>
+                            <a:srgbClr val="1A1A1A"/>
+                          </a:solidFill>
+                          <a:latin typeface="Arial"/>
+                        </a:rPr>
+                        <a:t>6–9 Monate</a:t>
+                      </a:r>
+                    </a:p>
+                  </a:txBody>
+                  <a:tcPr>
+                    <a:solidFill>
+                      <a:srgbClr val="FFFFFF"/>
+                    </a:solidFill>
+                  </a:tcPr>
+                </a:tc>
+                <a:tc>
+                  <a:txBody>
+                    <a:bodyPr wrap="square"/>
+                    <a:lstStyle/>
+                    <a:p>
+                      <a:r>
+                        <a:rPr sz="1100" b="0">
+                          <a:solidFill>
+                            <a:srgbClr val="1A1A1A"/>
+                          </a:solidFill>
+                          <a:latin typeface="Arial"/>
+                        </a:rPr>
+                        <a:t>&gt; 9 Monate</a:t>
+                      </a:r>
+                    </a:p>
+                  </a:txBody>
+                  <a:tcPr>
+                    <a:solidFill>
+                      <a:srgbClr val="FFFFFF"/>
+                    </a:solidFill>
+                  </a:tcPr>
+                </a:tc>
+                <a:tc>
+                  <a:txBody>
+                    <a:bodyPr wrap="square"/>
+                    <a:lstStyle/>
+                    <a:p>
+                      <a:r>
+                        <a:rPr sz="1100" b="0">
+                          <a:solidFill>
+                            <a:srgbClr val="1A1A1A"/>
+                          </a:solidFill>
+                          <a:latin typeface="Arial"/>
+                        </a:rPr>
+                        <a:t>______</a:t>
+                      </a:r>
+                    </a:p>
+                  </a:txBody>
+                  <a:tcPr>
+                    <a:solidFill>
+                      <a:srgbClr val="FFFFFF"/>
+                    </a:solidFill>
+                  </a:tcPr>
+                </a:tc>
+              </a:tr>
+              <a:tr h="314325">
+                <a:tc>
+                  <a:txBody>
+                    <a:bodyPr wrap="square"/>
+                    <a:lstStyle/>
+                    <a:p>
+                      <a:r>
+                        <a:rPr sz="1100" b="0">
+                          <a:solidFill>
+                            <a:srgbClr val="1A1A1A"/>
+                          </a:solidFill>
+                          <a:latin typeface="Arial"/>
+                        </a:rPr>
+                        <a:t>QL1</a:t>
+                      </a:r>
+                    </a:p>
+                  </a:txBody>
+                  <a:tcPr>
+                    <a:solidFill>
+                      <a:srgbClr val="F4F6FA"/>
+                    </a:solidFill>
+                  </a:tcPr>
+                </a:tc>
+                <a:tc>
+                  <a:txBody>
+                    <a:bodyPr wrap="square"/>
+                    <a:lstStyle/>
+                    <a:p>
+                      <a:r>
+                        <a:rPr sz="1100" b="0">
+                          <a:solidFill>
+                            <a:srgbClr val="1A1A1A"/>
+                          </a:solidFill>
+                          <a:latin typeface="Arial"/>
+                        </a:rPr>
+                        <a:t>Transparenz im Gespräch</a:t>
+                      </a:r>
+                    </a:p>
+                  </a:txBody>
+                  <a:tcPr>
+                    <a:solidFill>
+                      <a:srgbClr val="F4F6FA"/>
+                    </a:solidFill>
+                  </a:tcPr>
+                </a:tc>
+                <a:tc>
+                  <a:txBody>
+                    <a:bodyPr wrap="square"/>
+                    <a:lstStyle/>
+                    <a:p>
+                      <a:r>
+                        <a:rPr sz="1100" b="0">
+                          <a:solidFill>
+                            <a:srgbClr val="1A1A1A"/>
+                          </a:solidFill>
+                          <a:latin typeface="Arial"/>
+                        </a:rPr>
+                        <a:t>Offen, kooperativ</a:t>
+                      </a:r>
+                    </a:p>
+                  </a:txBody>
+                  <a:tcPr>
+                    <a:solidFill>
+                      <a:srgbClr val="F4F6FA"/>
+                    </a:solidFill>
+                  </a:tcPr>
+                </a:tc>
+                <a:tc>
+                  <a:txBody>
+                    <a:bodyPr wrap="square"/>
+                    <a:lstStyle/>
+                    <a:p>
+                      <a:r>
+                        <a:rPr sz="1100" b="0">
+                          <a:solidFill>
+                            <a:srgbClr val="1A1A1A"/>
+                          </a:solidFill>
+                          <a:latin typeface="Arial"/>
+                        </a:rPr>
+                        <a:t>Eingeschränkt</a:t>
+                      </a:r>
+                    </a:p>
+                  </a:txBody>
+                  <a:tcPr>
+                    <a:solidFill>
+                      <a:srgbClr val="F4F6FA"/>
+                    </a:solidFill>
+                  </a:tcPr>
+                </a:tc>
+                <a:tc>
+                  <a:txBody>
+                    <a:bodyPr wrap="square"/>
+                    <a:lstStyle/>
+                    <a:p>
+                      <a:r>
+                        <a:rPr sz="1100" b="0">
+                          <a:solidFill>
+                            <a:srgbClr val="1A1A1A"/>
+                          </a:solidFill>
+                          <a:latin typeface="Arial"/>
+                        </a:rPr>
+                        <a:t>Verweigert / ausweichend</a:t>
+                      </a:r>
+                    </a:p>
+                  </a:txBody>
+                  <a:tcPr>
+                    <a:solidFill>
+                      <a:srgbClr val="F4F6FA"/>
+                    </a:solidFill>
+                  </a:tcPr>
+                </a:tc>
+                <a:tc>
+                  <a:txBody>
+                    <a:bodyPr wrap="square"/>
+                    <a:lstStyle/>
+                    <a:p>
+                      <a:r>
+                        <a:rPr sz="1100" b="0">
+                          <a:solidFill>
+                            <a:srgbClr val="1A1A1A"/>
+                          </a:solidFill>
+                          <a:latin typeface="Arial"/>
+                        </a:rPr>
+                        <a:t>______</a:t>
+                      </a:r>
+                    </a:p>
+                  </a:txBody>
+                  <a:tcPr>
+                    <a:solidFill>
+                      <a:srgbClr val="F4F6FA"/>
+                    </a:solidFill>
+                  </a:tcPr>
+                </a:tc>
+              </a:tr>
+              <a:tr h="314325">
+                <a:tc>
+                  <a:txBody>
+                    <a:bodyPr wrap="square"/>
+                    <a:lstStyle/>
+                    <a:p>
+                      <a:r>
+                        <a:rPr sz="1100" b="0">
+                          <a:solidFill>
+                            <a:srgbClr val="1A1A1A"/>
+                          </a:solidFill>
+                          <a:latin typeface="Arial"/>
+                        </a:rPr>
+                        <a:t>QL2</a:t>
+                      </a:r>
+                    </a:p>
+                  </a:txBody>
+                  <a:tcPr>
+                    <a:solidFill>
+                      <a:srgbClr val="FFFFFF"/>
+                    </a:solidFill>
+                  </a:tcPr>
+                </a:tc>
+                <a:tc>
+                  <a:txBody>
+                    <a:bodyPr wrap="square"/>
+                    <a:lstStyle/>
+                    <a:p>
+                      <a:r>
+                        <a:rPr sz="1100" b="0">
+                          <a:solidFill>
+                            <a:srgbClr val="1A1A1A"/>
+                          </a:solidFill>
+                          <a:latin typeface="Arial"/>
+                        </a:rPr>
+                        <a:t>Gesprächsverhalten</a:t>
+                      </a:r>
+                    </a:p>
+                  </a:txBody>
+                  <a:tcPr>
+                    <a:solidFill>
+                      <a:srgbClr val="FFFFFF"/>
+                    </a:solidFill>
+                  </a:tcPr>
+                </a:tc>
+                <a:tc>
+                  <a:txBody>
+                    <a:bodyPr wrap="square"/>
+                    <a:lstStyle/>
+                    <a:p>
+                      <a:r>
+                        <a:rPr sz="1100" b="0">
+                          <a:solidFill>
+                            <a:srgbClr val="1A1A1A"/>
+                          </a:solidFill>
+                          <a:latin typeface="Arial"/>
+                        </a:rPr>
+                        <a:t>Sachlich, direkt</a:t>
+                      </a:r>
+                    </a:p>
+                  </a:txBody>
+                  <a:tcPr>
+                    <a:solidFill>
+                      <a:srgbClr val="FFFFFF"/>
+                    </a:solidFill>
+                  </a:tcPr>
+                </a:tc>
+                <a:tc>
+                  <a:txBody>
+                    <a:bodyPr wrap="square"/>
+                    <a:lstStyle/>
+                    <a:p>
+                      <a:r>
+                        <a:rPr sz="1100" b="0">
+                          <a:solidFill>
+                            <a:srgbClr val="1A1A1A"/>
+                          </a:solidFill>
+                          <a:latin typeface="Arial"/>
+                        </a:rPr>
+                        <a:t>Zögerlich</a:t>
+                      </a:r>
+                    </a:p>
+                  </a:txBody>
+                  <a:tcPr>
+                    <a:solidFill>
+                      <a:srgbClr val="FFFFFF"/>
+                    </a:solidFill>
+                  </a:tcPr>
+                </a:tc>
+                <a:tc>
+                  <a:txBody>
+                    <a:bodyPr wrap="square"/>
+                    <a:lstStyle/>
+                    <a:p>
+                      <a:r>
+                        <a:rPr sz="1100" b="0">
+                          <a:solidFill>
+                            <a:srgbClr val="1A1A1A"/>
+                          </a:solidFill>
+                          <a:latin typeface="Arial"/>
+                        </a:rPr>
+                        <a:t>Aggressiv / ablenkend</a:t>
+                      </a:r>
+                    </a:p>
+                  </a:txBody>
+                  <a:tcPr>
+                    <a:solidFill>
+                      <a:srgbClr val="FFFFFF"/>
+                    </a:solidFill>
+                  </a:tcPr>
+                </a:tc>
+                <a:tc>
+                  <a:txBody>
+                    <a:bodyPr wrap="square"/>
+                    <a:lstStyle/>
+                    <a:p>
+                      <a:r>
+                        <a:rPr sz="1100" b="0">
+                          <a:solidFill>
+                            <a:srgbClr val="1A1A1A"/>
+                          </a:solidFill>
+                          <a:latin typeface="Arial"/>
+                        </a:rPr>
+                        <a:t>______</a:t>
+                      </a:r>
+                    </a:p>
+                  </a:txBody>
+                  <a:tcPr>
+                    <a:solidFill>
+                      <a:srgbClr val="FFFFFF"/>
+                    </a:solidFill>
+                  </a:tcPr>
+                </a:tc>
+              </a:tr>
+              <a:tr h="314325">
+                <a:tc>
+                  <a:txBody>
+                    <a:bodyPr wrap="square"/>
+                    <a:lstStyle/>
+                    <a:p>
+                      <a:r>
+                        <a:rPr sz="1100" b="0">
+                          <a:solidFill>
+                            <a:srgbClr val="1A1A1A"/>
+                          </a:solidFill>
+                          <a:latin typeface="Arial"/>
+                        </a:rPr>
+                        <a:t>QL3</a:t>
+                      </a:r>
+                    </a:p>
+                  </a:txBody>
+                  <a:tcPr>
+                    <a:solidFill>
+                      <a:srgbClr val="F4F6FA"/>
+                    </a:solidFill>
+                  </a:tcPr>
+                </a:tc>
+                <a:tc>
+                  <a:txBody>
+                    <a:bodyPr wrap="square"/>
+                    <a:lstStyle/>
+                    <a:p>
+                      <a:r>
+                        <a:rPr sz="1100" b="0">
+                          <a:solidFill>
+                            <a:srgbClr val="1A1A1A"/>
+                          </a:solidFill>
+                          <a:latin typeface="Arial"/>
+                        </a:rPr>
+                        <a:t>Managementstabilität</a:t>
+                      </a:r>
+                    </a:p>
+                  </a:txBody>
+                  <a:tcPr>
+                    <a:solidFill>
+                      <a:srgbClr val="F4F6FA"/>
+                    </a:solidFill>
+                  </a:tcPr>
+                </a:tc>
+                <a:tc>
+                  <a:txBody>
+                    <a:bodyPr wrap="square"/>
+                    <a:lstStyle/>
+                    <a:p>
+                      <a:r>
+                        <a:rPr sz="1100" b="0">
+                          <a:solidFill>
+                            <a:srgbClr val="1A1A1A"/>
+                          </a:solidFill>
+                          <a:latin typeface="Arial"/>
+                        </a:rPr>
+                        <a:t>Stabil, kompetent</a:t>
+                      </a:r>
+                    </a:p>
+                  </a:txBody>
+                  <a:tcPr>
+                    <a:solidFill>
+                      <a:srgbClr val="F4F6FA"/>
+                    </a:solidFill>
+                  </a:tcPr>
+                </a:tc>
+                <a:tc>
+                  <a:txBody>
+                    <a:bodyPr wrap="square"/>
+                    <a:lstStyle/>
+                    <a:p>
+                      <a:r>
+                        <a:rPr sz="1100" b="0">
+                          <a:solidFill>
+                            <a:srgbClr val="1A1A1A"/>
+                          </a:solidFill>
+                          <a:latin typeface="Arial"/>
+                        </a:rPr>
+                        <a:t>Personenwechsel</a:t>
+                      </a:r>
+                    </a:p>
+                  </a:txBody>
+                  <a:tcPr>
+                    <a:solidFill>
+                      <a:srgbClr val="F4F6FA"/>
+                    </a:solidFill>
+                  </a:tcPr>
+                </a:tc>
+                <a:tc>
+                  <a:txBody>
+                    <a:bodyPr wrap="square"/>
+                    <a:lstStyle/>
+                    <a:p>
+                      <a:r>
+                        <a:rPr sz="1100" b="0">
+                          <a:solidFill>
+                            <a:srgbClr val="1A1A1A"/>
+                          </a:solidFill>
+                          <a:latin typeface="Arial"/>
+                        </a:rPr>
+                        <a:t>Häufiger Wechsel / Vakanz</a:t>
+                      </a:r>
+                    </a:p>
+                  </a:txBody>
+                  <a:tcPr>
+                    <a:solidFill>
+                      <a:srgbClr val="F4F6FA"/>
+                    </a:solidFill>
+                  </a:tcPr>
+                </a:tc>
+                <a:tc>
+                  <a:txBody>
+                    <a:bodyPr wrap="square"/>
+                    <a:lstStyle/>
+                    <a:p>
+                      <a:r>
+                        <a:rPr sz="1100" b="0">
+                          <a:solidFill>
+                            <a:srgbClr val="1A1A1A"/>
+                          </a:solidFill>
+                          <a:latin typeface="Arial"/>
+                        </a:rPr>
+                        <a:t>______</a:t>
+                      </a:r>
+                    </a:p>
+                  </a:txBody>
+                  <a:tcPr>
+                    <a:solidFill>
+                      <a:srgbClr val="F4F6FA"/>
+                    </a:solidFill>
+                  </a:tcPr>
+                </a:tc>
+              </a:tr>
+              <a:tr h="314325">
+                <a:tc>
+                  <a:txBody>
+                    <a:bodyPr wrap="square"/>
+                    <a:lstStyle/>
+                    <a:p>
+                      <a:r>
+                        <a:rPr sz="1100" b="0">
+                          <a:solidFill>
+                            <a:srgbClr val="1A1A1A"/>
+                          </a:solidFill>
+                          <a:latin typeface="Arial"/>
+                        </a:rPr>
+                        <a:t>QL4</a:t>
+                      </a:r>
+                    </a:p>
+                  </a:txBody>
+                  <a:tcPr>
+                    <a:solidFill>
+                      <a:srgbClr val="FFFFFF"/>
+                    </a:solidFill>
+                  </a:tcPr>
+                </a:tc>
+                <a:tc>
+                  <a:txBody>
+                    <a:bodyPr wrap="square"/>
+                    <a:lstStyle/>
+                    <a:p>
+                      <a:r>
+                        <a:rPr sz="1100" b="0">
+                          <a:solidFill>
+                            <a:srgbClr val="1A1A1A"/>
+                          </a:solidFill>
+                          <a:latin typeface="Arial"/>
+                        </a:rPr>
+                        <a:t>Marktposition</a:t>
+                      </a:r>
+                    </a:p>
+                  </a:txBody>
+                  <a:tcPr>
+                    <a:solidFill>
+                      <a:srgbClr val="FFFFFF"/>
+                    </a:solidFill>
+                  </a:tcPr>
+                </a:tc>
+                <a:tc>
+                  <a:txBody>
+                    <a:bodyPr wrap="square"/>
+                    <a:lstStyle/>
+                    <a:p>
+                      <a:r>
+                        <a:rPr sz="1100" b="0">
+                          <a:solidFill>
+                            <a:srgbClr val="1A1A1A"/>
+                          </a:solidFill>
+                          <a:latin typeface="Arial"/>
+                        </a:rPr>
+                        <a:t>Stabil / wachsend</a:t>
+                      </a:r>
+                    </a:p>
+                  </a:txBody>
+                  <a:tcPr>
+                    <a:solidFill>
+                      <a:srgbClr val="FFFFFF"/>
+                    </a:solidFill>
+                  </a:tcPr>
+                </a:tc>
+                <a:tc>
+                  <a:txBody>
+                    <a:bodyPr wrap="square"/>
+                    <a:lstStyle/>
+                    <a:p>
+                      <a:r>
+                        <a:rPr sz="1100" b="0">
+                          <a:solidFill>
+                            <a:srgbClr val="1A1A1A"/>
+                          </a:solidFill>
+                          <a:latin typeface="Arial"/>
+                        </a:rPr>
+                        <a:t>Stagnierend</a:t>
+                      </a:r>
+                    </a:p>
+                  </a:txBody>
+                  <a:tcPr>
+                    <a:solidFill>
+                      <a:srgbClr val="FFFFFF"/>
+                    </a:solidFill>
+                  </a:tcPr>
+                </a:tc>
+                <a:tc>
+                  <a:txBody>
+                    <a:bodyPr wrap="square"/>
+                    <a:lstStyle/>
+                    <a:p>
+                      <a:r>
+                        <a:rPr sz="1100" b="0">
+                          <a:solidFill>
+                            <a:srgbClr val="1A1A1A"/>
+                          </a:solidFill>
+                          <a:latin typeface="Arial"/>
+                        </a:rPr>
+                        <a:t>Klare Verluste / Kundenabgang</a:t>
+                      </a:r>
+                    </a:p>
+                  </a:txBody>
+                  <a:tcPr>
+                    <a:solidFill>
+                      <a:srgbClr val="FFFFFF"/>
+                    </a:solidFill>
+                  </a:tcPr>
+                </a:tc>
+                <a:tc>
+                  <a:txBody>
+                    <a:bodyPr wrap="square"/>
+                    <a:lstStyle/>
+                    <a:p>
+                      <a:r>
+                        <a:rPr sz="1100" b="0">
+                          <a:solidFill>
+                            <a:srgbClr val="1A1A1A"/>
+                          </a:solidFill>
+                          <a:latin typeface="Arial"/>
+                        </a:rPr>
+                        <a:t>______</a:t>
+                      </a:r>
+                    </a:p>
+                  </a:txBody>
+                  <a:tcPr>
+                    <a:solidFill>
+                      <a:srgbClr val="FFFFFF"/>
+                    </a:solidFill>
+                  </a:tcPr>
+                </a:tc>
+              </a:tr>
+              <a:tr h="314325">
+                <a:tc>
+                  <a:txBody>
+                    <a:bodyPr wrap="square"/>
+                    <a:lstStyle/>
+                    <a:p>
+                      <a:r>
+                        <a:rPr sz="1100" b="0">
+                          <a:solidFill>
+                            <a:srgbClr val="1A1A1A"/>
+                          </a:solidFill>
+                          <a:latin typeface="Arial"/>
+                        </a:rPr>
+                        <a:t>QL5</a:t>
+                      </a:r>
+                    </a:p>
+                  </a:txBody>
+                  <a:tcPr>
+                    <a:solidFill>
+                      <a:srgbClr val="F4F6FA"/>
+                    </a:solidFill>
+                  </a:tcPr>
+                </a:tc>
+                <a:tc>
+                  <a:txBody>
+                    <a:bodyPr wrap="square"/>
+                    <a:lstStyle/>
+                    <a:p>
+                      <a:r>
+                        <a:rPr sz="1100" b="0">
+                          <a:solidFill>
+                            <a:srgbClr val="1A1A1A"/>
+                          </a:solidFill>
+                          <a:latin typeface="Arial"/>
+                        </a:rPr>
+                        <a:t>Kontoverhalten</a:t>
+                      </a:r>
+                    </a:p>
+                  </a:txBody>
+                  <a:tcPr>
+                    <a:solidFill>
+                      <a:srgbClr val="F4F6FA"/>
+                    </a:solidFill>
+                  </a:tcPr>
+                </a:tc>
+                <a:tc>
+                  <a:txBody>
+                    <a:bodyPr wrap="square"/>
+                    <a:lstStyle/>
+                    <a:p>
+                      <a:r>
+                        <a:rPr sz="1100" b="0">
+                          <a:solidFill>
+                            <a:srgbClr val="1A1A1A"/>
+                          </a:solidFill>
+                          <a:latin typeface="Arial"/>
+                        </a:rPr>
+                        <a:t>Unauffällig</a:t>
+                      </a:r>
+                    </a:p>
+                  </a:txBody>
+                  <a:tcPr>
+                    <a:solidFill>
+                      <a:srgbClr val="F4F6FA"/>
+                    </a:solidFill>
+                  </a:tcPr>
+                </a:tc>
+                <a:tc>
+                  <a:txBody>
+                    <a:bodyPr wrap="square"/>
+                    <a:lstStyle/>
+                    <a:p>
+                      <a:r>
+                        <a:rPr sz="1100" b="0">
+                          <a:solidFill>
+                            <a:srgbClr val="1A1A1A"/>
+                          </a:solidFill>
+                          <a:latin typeface="Arial"/>
+                        </a:rPr>
+                        <a:t>Gelegentl. Überschreitung</a:t>
+                      </a:r>
+                    </a:p>
+                  </a:txBody>
+                  <a:tcPr>
+                    <a:solidFill>
+                      <a:srgbClr val="F4F6FA"/>
+                    </a:solidFill>
+                  </a:tcPr>
+                </a:tc>
+                <a:tc>
+                  <a:txBody>
+                    <a:bodyPr wrap="square"/>
+                    <a:lstStyle/>
+                    <a:p>
+                      <a:r>
+                        <a:rPr sz="1100" b="0">
+                          <a:solidFill>
+                            <a:srgbClr val="1A1A1A"/>
+                          </a:solidFill>
+                          <a:latin typeface="Arial"/>
+                        </a:rPr>
+                        <a:t>Systematische Überschreitung</a:t>
+                      </a:r>
+                    </a:p>
+                  </a:txBody>
+                  <a:tcPr>
+                    <a:solidFill>
+                      <a:srgbClr val="F4F6FA"/>
+                    </a:solidFill>
+                  </a:tcPr>
+                </a:tc>
+                <a:tc>
+                  <a:txBody>
+                    <a:bodyPr wrap="square"/>
+                    <a:lstStyle/>
+                    <a:p>
+                      <a:r>
+                        <a:rPr sz="1100" b="0">
+                          <a:solidFill>
+                            <a:srgbClr val="1A1A1A"/>
+                          </a:solidFill>
+                          <a:latin typeface="Arial"/>
+                        </a:rPr>
+                        <a:t>______</a:t>
+                      </a:r>
+                    </a:p>
+                  </a:txBody>
+                  <a:tcPr>
+                    <a:solidFill>
+                      <a:srgbClr val="F4F6FA"/>
+                    </a:solidFill>
+                  </a:tcPr>
+                </a:tc>
+              </a:tr>
+              <a:tr h="314325">
+                <a:tc>
+                  <a:txBody>
+                    <a:bodyPr wrap="square"/>
+                    <a:lstStyle/>
+                    <a:p>
+                      <a:r>
+                        <a:rPr sz="1100" b="0">
+                          <a:solidFill>
+                            <a:srgbClr val="1A1A1A"/>
+                          </a:solidFill>
+                          <a:latin typeface="Arial"/>
+                        </a:rPr>
+                        <a:t/>
+                      </a:r>
+                    </a:p>
+                  </a:txBody>
+                  <a:tcPr>
+                    <a:solidFill>
+                      <a:srgbClr val="FFFFFF"/>
+                    </a:solidFill>
+                  </a:tcPr>
+                </a:tc>
+                <a:tc>
+                  <a:txBody>
+                    <a:bodyPr wrap="square"/>
+                    <a:lstStyle/>
+                    <a:p>
+                      <a:r>
+                        <a:rPr sz="1100" b="0">
+                          <a:solidFill>
+                            <a:srgbClr val="1A1A1A"/>
+                          </a:solidFill>
+                          <a:latin typeface="Arial"/>
+                        </a:rPr>
+                        <a:t>GESAMTPUNKTE</a:t>
+                      </a:r>
+                    </a:p>
+                  </a:txBody>
+                  <a:tcPr>
+                    <a:solidFill>
+                      <a:srgbClr val="FFFFFF"/>
+                    </a:solidFill>
+                  </a:tcPr>
+                </a:tc>
+                <a:tc>
+                  <a:txBody>
+                    <a:bodyPr wrap="square"/>
+                    <a:lstStyle/>
+                    <a:p>
+                      <a:r>
+                        <a:rPr sz="1100" b="0">
+                          <a:solidFill>
+                            <a:srgbClr val="1A1A1A"/>
+                          </a:solidFill>
+                          <a:latin typeface="Arial"/>
+                        </a:rPr>
+                        <a:t/>
+                      </a:r>
+                    </a:p>
+                  </a:txBody>
+                  <a:tcPr>
+                    <a:solidFill>
+                      <a:srgbClr val="FFFFFF"/>
+                    </a:solidFill>
+                  </a:tcPr>
+                </a:tc>
+                <a:tc>
+                  <a:txBody>
+                    <a:bodyPr wrap="square"/>
+                    <a:lstStyle/>
+                    <a:p>
+                      <a:r>
+                        <a:rPr sz="1100" b="0">
+                          <a:solidFill>
+                            <a:srgbClr val="1A1A1A"/>
+                          </a:solidFill>
+                          <a:latin typeface="Arial"/>
+                        </a:rPr>
+                        <a:t/>
+                      </a:r>
+                    </a:p>
+                  </a:txBody>
+                  <a:tcPr>
+                    <a:solidFill>
+                      <a:srgbClr val="FFFFFF"/>
+                    </a:solidFill>
+                  </a:tcPr>
+                </a:tc>
+                <a:tc>
+                  <a:txBody>
+                    <a:bodyPr wrap="square"/>
+                    <a:lstStyle/>
+                    <a:p>
+                      <a:r>
+                        <a:rPr sz="1100" b="0">
+                          <a:solidFill>
+                            <a:srgbClr val="1A1A1A"/>
+                          </a:solidFill>
+                          <a:latin typeface="Arial"/>
+                        </a:rPr>
+                        <a:t/>
+                      </a:r>
+                    </a:p>
+                  </a:txBody>
+                  <a:tcPr>
+                    <a:solidFill>
+                      <a:srgbClr val="FFFFFF"/>
+                    </a:solidFill>
+                  </a:tcPr>
+                </a:tc>
+                <a:tc>
+                  <a:txBody>
+                    <a:bodyPr wrap="square"/>
+                    <a:lstStyle/>
+                    <a:p>
+                      <a:r>
+                        <a:rPr sz="1100" b="0">
+                          <a:solidFill>
+                            <a:srgbClr val="1A1A1A"/>
+                          </a:solidFill>
+                          <a:latin typeface="Arial"/>
+                        </a:rPr>
+                        <a:t>______ / 20</a:t>
+                      </a:r>
+                    </a:p>
+                  </a:txBody>
+                  <a:tcPr>
+                    <a:solidFill>
+                      <a:srgbClr val="FFFFFF"/>
+                    </a:solidFill>
+                  </a:tcPr>
+                </a:tc>
+              </a:tr>
+              <a:tr h="314325">
+                <a:tc>
+                  <a:txBody>
+                    <a:bodyPr wrap="square"/>
+                    <a:lstStyle/>
+                    <a:p>
+                      <a:r>
+                        <a:rPr sz="1100" b="0">
+                          <a:solidFill>
+                            <a:srgbClr val="1A1A1A"/>
+                          </a:solidFill>
+                          <a:latin typeface="Arial"/>
+                        </a:rPr>
+                        <a:t>Gesamtpunkte</a:t>
+                      </a:r>
+                    </a:p>
+                  </a:txBody>
+                  <a:tcPr>
+                    <a:solidFill>
+                      <a:srgbClr val="F4F6FA"/>
+                    </a:solidFill>
+                  </a:tcPr>
+                </a:tc>
+                <a:tc>
+                  <a:txBody>
+                    <a:bodyPr wrap="square"/>
+                    <a:lstStyle/>
+                    <a:p>
+                      <a:r>
+                        <a:rPr sz="1100" b="0">
+                          <a:solidFill>
+                            <a:srgbClr val="1A1A1A"/>
+                          </a:solidFill>
+                          <a:latin typeface="Arial"/>
+                        </a:rPr>
+                        <a:t>Ampel</a:t>
+                      </a:r>
+                    </a:p>
+                  </a:txBody>
+                  <a:tcPr>
+                    <a:solidFill>
+                      <a:srgbClr val="F4F6FA"/>
+                    </a:solidFill>
+                  </a:tcPr>
+                </a:tc>
+                <a:tc>
+                  <a:txBody>
+                    <a:bodyPr wrap="square"/>
+                    <a:lstStyle/>
+                    <a:p>
+                      <a:r>
+                        <a:rPr sz="1100" b="0">
+                          <a:solidFill>
+                            <a:srgbClr val="1A1A1A"/>
+                          </a:solidFill>
+                          <a:latin typeface="Arial"/>
+                        </a:rPr>
+                        <a:t>Nächster Schritt</a:t>
+                      </a:r>
+                    </a:p>
+                  </a:txBody>
+                  <a:tcPr>
+                    <a:solidFill>
+                      <a:srgbClr val="F4F6FA"/>
+                    </a:solidFill>
+                  </a:tcPr>
+                </a:tc>
+                <a:tc>
+                  <a:txBody>
+                    <a:bodyPr wrap="square"/>
+                    <a:lstStyle/>
+                    <a:p>
+                      <a:r>
+                        <a:rPr sz="1100" b="0">
+                          <a:solidFill>
+                            <a:srgbClr val="1A1A1A"/>
+                          </a:solidFill>
+                          <a:latin typeface="Arial"/>
+                        </a:rPr>
+                        <a:t/>
+                      </a:r>
+                    </a:p>
+                  </a:txBody>
+                  <a:tcPr>
+                    <a:solidFill>
+                      <a:srgbClr val="F4F6FA"/>
+                    </a:solidFill>
+                  </a:tcPr>
+                </a:tc>
+                <a:tc>
+                  <a:txBody>
+                    <a:bodyPr wrap="square"/>
+                    <a:lstStyle/>
+                    <a:p>
+                      <a:r>
+                        <a:rPr sz="1100" b="0">
+                          <a:solidFill>
+                            <a:srgbClr val="1A1A1A"/>
+                          </a:solidFill>
+                          <a:latin typeface="Arial"/>
+                        </a:rPr>
+                        <a:t/>
+                      </a:r>
+                    </a:p>
+                  </a:txBody>
+                  <a:tcPr>
+                    <a:solidFill>
+                      <a:srgbClr val="F4F6FA"/>
+                    </a:solidFill>
+                  </a:tcPr>
+                </a:tc>
+                <a:tc>
+                  <a:txBody>
+                    <a:bodyPr wrap="square"/>
+                    <a:lstStyle/>
+                    <a:p>
+                      <a:r>
+                        <a:rPr sz="1100" b="0">
+                          <a:solidFill>
+                            <a:srgbClr val="1A1A1A"/>
+                          </a:solidFill>
+                          <a:latin typeface="Arial"/>
+                        </a:rPr>
+                        <a:t/>
+                      </a:r>
+                    </a:p>
+                  </a:txBody>
+                  <a:tcPr>
+                    <a:solidFill>
+                      <a:srgbClr val="F4F6FA"/>
+                    </a:solidFill>
+                  </a:tcPr>
+                </a:tc>
+              </a:tr>
+              <a:tr h="314325">
+                <a:tc>
+                  <a:txBody>
+                    <a:bodyPr wrap="square"/>
+                    <a:lstStyle/>
+                    <a:p>
+                      <a:r>
+                        <a:rPr sz="1100" b="0">
+                          <a:solidFill>
+                            <a:srgbClr val="1A1A1A"/>
+                          </a:solidFill>
+                          <a:latin typeface="Arial"/>
+                        </a:rPr>
+                        <a:t>0–5</a:t>
+                      </a:r>
+                    </a:p>
+                  </a:txBody>
+                  <a:tcPr>
+                    <a:solidFill>
+                      <a:srgbClr val="FFFFFF"/>
+                    </a:solidFill>
+                  </a:tcPr>
+                </a:tc>
+                <a:tc>
+                  <a:txBody>
+                    <a:bodyPr wrap="square"/>
+                    <a:lstStyle/>
+                    <a:p>
+                      <a:r>
+                        <a:rPr sz="1100" b="0">
+                          <a:solidFill>
+                            <a:srgbClr val="1A1A1A"/>
+                          </a:solidFill>
+                          <a:latin typeface="Arial"/>
+                        </a:rPr>
+                        <a:t>Grün</a:t>
+                      </a:r>
+                    </a:p>
+                  </a:txBody>
+                  <a:tcPr>
+                    <a:solidFill>
+                      <a:srgbClr val="FFFFFF"/>
+                    </a:solidFill>
+                  </a:tcPr>
+                </a:tc>
+                <a:tc>
+                  <a:txBody>
+                    <a:bodyPr wrap="square"/>
+                    <a:lstStyle/>
+                    <a:p>
+                      <a:r>
+                        <a:rPr sz="1100" b="0">
+                          <a:solidFill>
+                            <a:srgbClr val="1A1A1A"/>
+                          </a:solidFill>
+                          <a:latin typeface="Arial"/>
+                        </a:rPr>
+                        <a:t>Reguläre Jahresbetrachtung</a:t>
+                      </a:r>
+                    </a:p>
+                  </a:txBody>
+                  <a:tcPr>
+                    <a:solidFill>
+                      <a:srgbClr val="FFFFFF"/>
+                    </a:solidFill>
+                  </a:tcPr>
+                </a:tc>
+                <a:tc>
+                  <a:txBody>
+                    <a:bodyPr wrap="square"/>
+                    <a:lstStyle/>
+                    <a:p>
+                      <a:r>
+                        <a:rPr sz="1100" b="0">
+                          <a:solidFill>
+                            <a:srgbClr val="1A1A1A"/>
+                          </a:solidFill>
+                          <a:latin typeface="Arial"/>
+                        </a:rPr>
+                        <a:t/>
+                      </a:r>
+                    </a:p>
+                  </a:txBody>
+                  <a:tcPr>
+                    <a:solidFill>
+                      <a:srgbClr val="FFFFFF"/>
+                    </a:solidFill>
+                  </a:tcPr>
+                </a:tc>
+                <a:tc>
+                  <a:txBody>
+                    <a:bodyPr wrap="square"/>
+                    <a:lstStyle/>
+                    <a:p>
+                      <a:r>
+                        <a:rPr sz="1100" b="0">
+                          <a:solidFill>
+                            <a:srgbClr val="1A1A1A"/>
+                          </a:solidFill>
+                          <a:latin typeface="Arial"/>
+                        </a:rPr>
+                        <a:t/>
+                      </a:r>
+                    </a:p>
+                  </a:txBody>
+                  <a:tcPr>
+                    <a:solidFill>
+                      <a:srgbClr val="FFFFFF"/>
+                    </a:solidFill>
+                  </a:tcPr>
+                </a:tc>
+                <a:tc>
+                  <a:txBody>
+                    <a:bodyPr wrap="square"/>
+                    <a:lstStyle/>
+                    <a:p>
+                      <a:r>
+                        <a:rPr sz="1100" b="0">
+                          <a:solidFill>
+                            <a:srgbClr val="1A1A1A"/>
+                          </a:solidFill>
+                          <a:latin typeface="Arial"/>
+                        </a:rPr>
+                        <a:t/>
+                      </a:r>
+                    </a:p>
+                  </a:txBody>
+                  <a:tcPr>
+                    <a:solidFill>
+                      <a:srgbClr val="FFFFFF"/>
+                    </a:solidFill>
+                  </a:tcPr>
+                </a:tc>
+              </a:tr>
+              <a:tr h="314325">
+                <a:tc>
+                  <a:txBody>
+                    <a:bodyPr wrap="square"/>
+                    <a:lstStyle/>
+                    <a:p>
+                      <a:r>
+                        <a:rPr sz="1100" b="0">
+                          <a:solidFill>
+                            <a:srgbClr val="1A1A1A"/>
+                          </a:solidFill>
+                          <a:latin typeface="Arial"/>
+                        </a:rPr>
+                        <a:t>6–10</a:t>
+                      </a:r>
+                    </a:p>
+                  </a:txBody>
+                  <a:tcPr>
+                    <a:solidFill>
+                      <a:srgbClr val="F4F6FA"/>
+                    </a:solidFill>
+                  </a:tcPr>
+                </a:tc>
+                <a:tc>
+                  <a:txBody>
+                    <a:bodyPr wrap="square"/>
+                    <a:lstStyle/>
+                    <a:p>
+                      <a:r>
+                        <a:rPr sz="1100" b="0">
+                          <a:solidFill>
+                            <a:srgbClr val="1A1A1A"/>
+                          </a:solidFill>
+                          <a:latin typeface="Arial"/>
+                        </a:rPr>
+                        <a:t>Gelb</a:t>
+                      </a:r>
+                    </a:p>
+                  </a:txBody>
+                  <a:tcPr>
+                    <a:solidFill>
+                      <a:srgbClr val="F4F6FA"/>
+                    </a:solidFill>
+                  </a:tcPr>
+                </a:tc>
+                <a:tc>
+                  <a:txBody>
+                    <a:bodyPr wrap="square"/>
+                    <a:lstStyle/>
+                    <a:p>
+                      <a:r>
+                        <a:rPr sz="1100" b="0">
+                          <a:solidFill>
+                            <a:srgbClr val="1A1A1A"/>
+                          </a:solidFill>
+                          <a:latin typeface="Arial"/>
+                        </a:rPr>
+                        <a:t>Kundengespräch, Dokumentation, Meldung an Teamleiter</a:t>
+                      </a:r>
+                    </a:p>
+                  </a:txBody>
+                  <a:tcPr>
+                    <a:solidFill>
+                      <a:srgbClr val="F4F6FA"/>
+                    </a:solidFill>
+                  </a:tcPr>
+                </a:tc>
+                <a:tc>
+                  <a:txBody>
+                    <a:bodyPr wrap="square"/>
+                    <a:lstStyle/>
+                    <a:p>
+                      <a:r>
+                        <a:rPr sz="1100" b="0">
+                          <a:solidFill>
+                            <a:srgbClr val="1A1A1A"/>
+                          </a:solidFill>
+                          <a:latin typeface="Arial"/>
+                        </a:rPr>
+                        <a:t/>
+                      </a:r>
+                    </a:p>
+                  </a:txBody>
+                  <a:tcPr>
+                    <a:solidFill>
+                      <a:srgbClr val="F4F6FA"/>
+                    </a:solidFill>
+                  </a:tcPr>
+                </a:tc>
+                <a:tc>
+                  <a:txBody>
+                    <a:bodyPr wrap="square"/>
+                    <a:lstStyle/>
+                    <a:p>
+                      <a:r>
+                        <a:rPr sz="1100" b="0">
+                          <a:solidFill>
+                            <a:srgbClr val="1A1A1A"/>
+                          </a:solidFill>
+                          <a:latin typeface="Arial"/>
+                        </a:rPr>
+                        <a:t/>
+                      </a:r>
+                    </a:p>
+                  </a:txBody>
+                  <a:tcPr>
+                    <a:solidFill>
+                      <a:srgbClr val="F4F6FA"/>
+                    </a:solidFill>
+                  </a:tcPr>
+                </a:tc>
+                <a:tc>
+                  <a:txBody>
+                    <a:bodyPr wrap="square"/>
+                    <a:lstStyle/>
+                    <a:p>
+                      <a:r>
+                        <a:rPr sz="1100" b="0">
+                          <a:solidFill>
+                            <a:srgbClr val="1A1A1A"/>
+                          </a:solidFill>
+                          <a:latin typeface="Arial"/>
+                        </a:rPr>
+                        <a:t/>
+                      </a:r>
+                    </a:p>
+                  </a:txBody>
+                  <a:tcPr>
+                    <a:solidFill>
+                      <a:srgbClr val="F4F6FA"/>
+                    </a:solidFill>
+                  </a:tcPr>
+                </a:tc>
+              </a:tr>
+              <a:tr h="314325">
+                <a:tc>
+                  <a:txBody>
+                    <a:bodyPr wrap="square"/>
+                    <a:lstStyle/>
+                    <a:p>
+                      <a:r>
+                        <a:rPr sz="1100" b="0">
+                          <a:solidFill>
+                            <a:srgbClr val="1A1A1A"/>
+                          </a:solidFill>
+                          <a:latin typeface="Arial"/>
+                        </a:rPr>
+                        <a:t>11–20</a:t>
+                      </a:r>
+                    </a:p>
+                  </a:txBody>
+                  <a:tcPr>
+                    <a:solidFill>
+                      <a:srgbClr val="FFFFFF"/>
+                    </a:solidFill>
+                  </a:tcPr>
+                </a:tc>
+                <a:tc>
+                  <a:txBody>
+                    <a:bodyPr wrap="square"/>
+                    <a:lstStyle/>
+                    <a:p>
+                      <a:r>
+                        <a:rPr sz="1100" b="0">
+                          <a:solidFill>
+                            <a:srgbClr val="1A1A1A"/>
+                          </a:solidFill>
+                          <a:latin typeface="Arial"/>
+                        </a:rPr>
+                        <a:t>Rot</a:t>
+                      </a:r>
+                    </a:p>
+                  </a:txBody>
+                  <a:tcPr>
+                    <a:solidFill>
+                      <a:srgbClr val="FFFFFF"/>
+                    </a:solidFill>
+                  </a:tcPr>
+                </a:tc>
+                <a:tc>
+                  <a:txBody>
+                    <a:bodyPr wrap="square"/>
+                    <a:lstStyle/>
+                    <a:p>
+                      <a:r>
+                        <a:rPr sz="1100" b="0">
+                          <a:solidFill>
+                            <a:srgbClr val="1A1A1A"/>
+                          </a:solidFill>
+                          <a:latin typeface="Arial"/>
+                        </a:rPr>
+                        <a:t>Sofortige Eskalation, Intensivbetreuung prüfen</a:t>
+                      </a:r>
+                    </a:p>
+                  </a:txBody>
+                  <a:tcPr>
+                    <a:solidFill>
+                      <a:srgbClr val="FFFFFF"/>
+                    </a:solidFill>
+                  </a:tcPr>
+                </a:tc>
+                <a:tc>
+                  <a:txBody>
+                    <a:bodyPr wrap="square"/>
+                    <a:lstStyle/>
+                    <a:p>
+                      <a:r>
+                        <a:rPr sz="1100" b="0">
+                          <a:solidFill>
+                            <a:srgbClr val="1A1A1A"/>
+                          </a:solidFill>
+                          <a:latin typeface="Arial"/>
+                        </a:rPr>
+                        <a:t/>
+                      </a:r>
+                    </a:p>
+                  </a:txBody>
+                  <a:tcPr>
+                    <a:solidFill>
+                      <a:srgbClr val="FFFFFF"/>
+                    </a:solidFill>
+                  </a:tcPr>
+                </a:tc>
+                <a:tc>
+                  <a:txBody>
+                    <a:bodyPr wrap="square"/>
+                    <a:lstStyle/>
+                    <a:p>
+                      <a:r>
+                        <a:rPr sz="1100" b="0">
+                          <a:solidFill>
+                            <a:srgbClr val="1A1A1A"/>
+                          </a:solidFill>
+                          <a:latin typeface="Arial"/>
+                        </a:rPr>
+                        <a:t/>
+                      </a:r>
+                    </a:p>
+                  </a:txBody>
+                  <a:tcPr>
+                    <a:solidFill>
+                      <a:srgbClr val="FFFFFF"/>
+                    </a:solidFill>
+                  </a:tcPr>
+                </a:tc>
+                <a:tc>
+                  <a:txBody>
+                    <a:bodyPr wrap="square"/>
+                    <a:lstStyle/>
+                    <a:p>
+                      <a:r>
+                        <a:rPr sz="1100" b="0">
+                          <a:solidFill>
+                            <a:srgbClr val="1A1A1A"/>
+                          </a:solidFill>
+                          <a:latin typeface="Arial"/>
+                        </a:rPr>
+                        <a:t/>
+                      </a:r>
+                    </a:p>
+                  </a:txBody>
+                  <a:tcPr>
+                    <a:solidFill>
+                      <a:srgbClr val="FFFFFF"/>
+                    </a:solidFill>
+                  </a:tcPr>
+                </a:tc>
+              </a:tr>
+            </a:tbl>
+          </a:graphicData>
+        </a:graphic>
+      </p:graphicFrame>
+    </p:spTree>
+  </p:cSld>
+  <p:clrMapOvr>
+    <a:masterClrMapping/>
+  </p:clrMapOvr>
+</p:sld>
+</file>
+
+<file path=ppt/slides/slide11.xml><?xml version="1.0" encoding="utf-8"?>
+<p:sld xmlns:a="http://schemas.openxmlformats.org/drawingml/2006/main" xmlns:p="http://schemas.openxmlformats.org/presentationml/2006/main" xmlns:r="http://schemas.openxmlformats.org/officeDocument/2006/relationships">
+  <p:cSld>
+    <p:bg>
+      <p:bgPr>
+        <a:solidFill>
+          <a:srgbClr val="1A1A1A"/>
         </a:solidFill>
         <a:effectLst/>
       </p:bgPr>
@@ -3408,8 +5768,8 @@
         </p:nvSpPr>
         <p:spPr>
           <a:xfrm>
-            <a:off x="365760" y="365760"/>
-            <a:ext cx="5486400" cy="365760"/>
+            <a:off x="365760" y="2011680"/>
+            <a:ext cx="11430000" cy="2011680"/>
           </a:xfrm>
           <a:prstGeom prst="rect">
             <a:avLst/>
@@ -3424,199 +5784,13 @@
           <a:p>
             <a:pPr algn="l"/>
             <a:r>
-              <a:rPr sz="1000" b="1">
-                <a:solidFill>
-                  <a:srgbClr val="CCD6F0"/>
-                </a:solidFill>
-                <a:latin typeface="Arial"/>
-              </a:rPr>
-              <a:t>PRAXISTRANSFER</a:t>
-            </a:r>
-          </a:p>
-        </p:txBody>
-      </p:sp>
-      <p:sp>
-        <p:nvSpPr>
-          <p:cNvPr id="4" name="TextBox 3"/>
-          <p:cNvSpPr txBox="1"/>
-          <p:nvPr/>
-        </p:nvSpPr>
-        <p:spPr>
-          <a:xfrm>
-            <a:off x="365760" y="640080"/>
-            <a:ext cx="9144000" cy="914400"/>
-          </a:xfrm>
-          <a:prstGeom prst="rect">
-            <a:avLst/>
-          </a:prstGeom>
-          <a:noFill/>
-        </p:spPr>
-        <p:txBody>
-          <a:bodyPr wrap="square">
-            <a:spAutoFit/>
-          </a:bodyPr>
-          <a:lstStyle/>
-          <a:p>
-            <a:pPr algn="l"/>
-            <a:r>
-              <a:rPr sz="2800" b="1">
+              <a:rPr sz="3600" b="1" i="0">
                 <a:solidFill>
                   <a:srgbClr val="FFFFFF"/>
                 </a:solidFill>
                 <a:latin typeface="Arial"/>
               </a:rPr>
-              <a:t>Was nehmen Sie mit?</a:t>
-            </a:r>
-          </a:p>
-        </p:txBody>
-      </p:sp>
-      <p:sp>
-        <p:nvSpPr>
-          <p:cNvPr id="5" name="Rectangle 4"/>
-          <p:cNvSpPr/>
-          <p:nvPr/>
-        </p:nvSpPr>
-        <p:spPr>
-          <a:xfrm>
-            <a:off x="365760" y="1463040"/>
-            <a:ext cx="7315200" cy="27432"/>
-          </a:xfrm>
-          <a:prstGeom prst="rect">
-            <a:avLst/>
-          </a:prstGeom>
-          <a:solidFill>
-            <a:srgbClr val="335CC0"/>
-          </a:solidFill>
-          <a:ln>
-            <a:noFill/>
-          </a:ln>
-        </p:spPr>
-        <p:style>
-          <a:lnRef idx="1">
-            <a:schemeClr val="accent1"/>
-          </a:lnRef>
-          <a:fillRef idx="3">
-            <a:schemeClr val="accent1"/>
-          </a:fillRef>
-          <a:effectRef idx="2">
-            <a:schemeClr val="accent1"/>
-          </a:effectRef>
-          <a:fontRef idx="minor">
-            <a:schemeClr val="lt1"/>
-          </a:fontRef>
-        </p:style>
-        <p:txBody>
-          <a:bodyPr rtlCol="0" anchor="ctr"/>
-          <a:lstStyle/>
-          <a:p>
-            <a:pPr algn="ctr"/>
-          </a:p>
-        </p:txBody>
-      </p:sp>
-      <p:sp>
-        <p:nvSpPr>
-          <p:cNvPr id="6" name="TextBox 5"/>
-          <p:cNvSpPr txBox="1"/>
-          <p:nvPr/>
-        </p:nvSpPr>
-        <p:spPr>
-          <a:xfrm>
-            <a:off x="365760" y="1645920"/>
-            <a:ext cx="11430000" cy="4114800"/>
-          </a:xfrm>
-          <a:prstGeom prst="rect">
-            <a:avLst/>
-          </a:prstGeom>
-          <a:noFill/>
-        </p:spPr>
-        <p:txBody>
-          <a:bodyPr wrap="square">
-            <a:spAutoFit/>
-          </a:bodyPr>
-          <a:lstStyle/>
-          <a:p>
-            <a:pPr>
-              <a:spcBef>
-                <a:spcPts val="400"/>
-              </a:spcBef>
-            </a:pPr>
-            <a:r>
-              <a:rPr sz="1600">
-                <a:solidFill>
-                  <a:srgbClr val="E05B00"/>
-                </a:solidFill>
-                <a:latin typeface="Arial"/>
-              </a:rPr>
-              <a:t>▪  </a:t>
-            </a:r>
-            <a:r>
-              <a:rPr sz="1800">
-                <a:solidFill>
-                  <a:srgbClr val="FFFFFF"/>
-                </a:solidFill>
-                <a:latin typeface="Arial"/>
-              </a:rPr>
-              <a:t>Transferaufgabe: Wenden Sie das Gelernte in den nächsten 14 Tagen bei einem konkreten Kunden an.</a:t>
-            </a:r>
-          </a:p>
-          <a:p>
-            <a:pPr>
-              <a:spcBef>
-                <a:spcPts val="400"/>
-              </a:spcBef>
-            </a:pPr>
-            <a:r>
-              <a:rPr sz="1600">
-                <a:solidFill>
-                  <a:srgbClr val="E05B00"/>
-                </a:solidFill>
-                <a:latin typeface="Arial"/>
-              </a:rPr>
-              <a:t>▪  </a:t>
-            </a:r>
-            <a:r>
-              <a:rPr sz="1800">
-                <a:solidFill>
-                  <a:srgbClr val="FFFFFF"/>
-                </a:solidFill>
-                <a:latin typeface="Arial"/>
-              </a:rPr>
-              <a:t>Selbstcheck nach 4 Wochen: Was hat sich verändert?</a:t>
-            </a:r>
-          </a:p>
-        </p:txBody>
-      </p:sp>
-      <p:sp>
-        <p:nvSpPr>
-          <p:cNvPr id="7" name="TextBox 6"/>
-          <p:cNvSpPr txBox="1"/>
-          <p:nvPr/>
-        </p:nvSpPr>
-        <p:spPr>
-          <a:xfrm>
-            <a:off x="365760" y="6309360"/>
-            <a:ext cx="11430000" cy="365760"/>
-          </a:xfrm>
-          <a:prstGeom prst="rect">
-            <a:avLst/>
-          </a:prstGeom>
-          <a:noFill/>
-        </p:spPr>
-        <p:txBody>
-          <a:bodyPr wrap="square">
-            <a:spAutoFit/>
-          </a:bodyPr>
-          <a:lstStyle/>
-          <a:p>
-            <a:pPr algn="l"/>
-            <a:r>
-              <a:rPr sz="900" b="0">
-                <a:solidFill>
-                  <a:srgbClr val="99AACC"/>
-                </a:solidFill>
-                <a:latin typeface="Arial"/>
-              </a:rPr>
-              <a:t>M04 · Kreditrisikofrüherkennung  ·  v1.2  ·  Benedikt Zoller Coaching</a:t>
+              <a:t>Eskalationspfade – Wer handelt wann?</a:t>
             </a:r>
           </a:p>
         </p:txBody>
@@ -3629,13 +5803,13 @@
 </p:sld>
 </file>
 
-<file path=ppt/slides/slide2.xml><?xml version="1.0" encoding="utf-8"?>
+<file path=ppt/slides/slide12.xml><?xml version="1.0" encoding="utf-8"?>
 <p:sld xmlns:a="http://schemas.openxmlformats.org/drawingml/2006/main" xmlns:p="http://schemas.openxmlformats.org/presentationml/2006/main" xmlns:r="http://schemas.openxmlformats.org/officeDocument/2006/relationships">
   <p:cSld>
     <p:bg>
       <p:bgPr>
         <a:solidFill>
-          <a:srgbClr val="F5F7FA"/>
+          <a:srgbClr val="FFFFFF"/>
         </a:solidFill>
         <a:effectLst/>
       </p:bgPr>
@@ -3692,20 +5866,90 @@
       </p:sp>
       <p:sp>
         <p:nvSpPr>
-          <p:cNvPr id="3" name="Rectangle 2"/>
+          <p:cNvPr id="3" name="TextBox 2"/>
+          <p:cNvSpPr txBox="1"/>
+          <p:nvPr/>
+        </p:nvSpPr>
+        <p:spPr>
+          <a:xfrm>
+            <a:off x="228600" y="182880"/>
+            <a:ext cx="11430000" cy="320040"/>
+          </a:xfrm>
+          <a:prstGeom prst="rect">
+            <a:avLst/>
+          </a:prstGeom>
+          <a:noFill/>
+        </p:spPr>
+        <p:txBody>
+          <a:bodyPr wrap="square">
+            <a:spAutoFit/>
+          </a:bodyPr>
+          <a:lstStyle/>
+          <a:p>
+            <a:pPr algn="l"/>
+            <a:r>
+              <a:rPr sz="900" b="0" i="0">
+                <a:solidFill>
+                  <a:srgbClr val="556575"/>
+                </a:solidFill>
+                <a:latin typeface="Arial"/>
+              </a:rPr>
+              <a:t>M04 · Modulinhalte</a:t>
+            </a:r>
+          </a:p>
+        </p:txBody>
+      </p:sp>
+      <p:sp>
+        <p:nvSpPr>
+          <p:cNvPr id="4" name="TextBox 3"/>
+          <p:cNvSpPr txBox="1"/>
+          <p:nvPr/>
+        </p:nvSpPr>
+        <p:spPr>
+          <a:xfrm>
+            <a:off x="365760" y="274320"/>
+            <a:ext cx="11430000" cy="777240"/>
+          </a:xfrm>
+          <a:prstGeom prst="rect">
+            <a:avLst/>
+          </a:prstGeom>
+          <a:noFill/>
+        </p:spPr>
+        <p:txBody>
+          <a:bodyPr wrap="square">
+            <a:spAutoFit/>
+          </a:bodyPr>
+          <a:lstStyle/>
+          <a:p>
+            <a:pPr algn="l"/>
+            <a:r>
+              <a:rPr sz="2200" b="1" i="0">
+                <a:solidFill>
+                  <a:srgbClr val="003DA5"/>
+                </a:solidFill>
+                <a:latin typeface="Arial"/>
+              </a:rPr>
+              <a:t>Eskalationspfade – Wer handelt wann?</a:t>
+            </a:r>
+          </a:p>
+        </p:txBody>
+      </p:sp>
+      <p:sp>
+        <p:nvSpPr>
+          <p:cNvPr id="5" name="Rectangle 4"/>
           <p:cNvSpPr/>
           <p:nvPr/>
         </p:nvSpPr>
         <p:spPr>
           <a:xfrm>
-            <a:off x="365760" y="868680"/>
-            <a:ext cx="7315200" cy="27432"/>
+            <a:off x="365760" y="1005840"/>
+            <a:ext cx="11430000" cy="27432"/>
           </a:xfrm>
           <a:prstGeom prst="rect">
             <a:avLst/>
           </a:prstGeom>
           <a:solidFill>
-            <a:srgbClr val="E5E7EB"/>
+            <a:srgbClr val="D1D5DB"/>
           </a:solidFill>
           <a:ln>
             <a:noFill/>
@@ -3733,199 +5977,394 @@
           </a:p>
         </p:txBody>
       </p:sp>
-      <p:sp>
-        <p:nvSpPr>
-          <p:cNvPr id="4" name="TextBox 3"/>
-          <p:cNvSpPr txBox="1"/>
+      <p:graphicFrame>
+        <p:nvGraphicFramePr>
+          <p:cNvPr id="6" name="Table 5"/>
+          <p:cNvGraphicFramePr>
+            <a:graphicFrameLocks noGrp="1"/>
+          </p:cNvGraphicFramePr>
           <p:nvPr/>
-        </p:nvSpPr>
-        <p:spPr>
-          <a:xfrm>
-            <a:off x="365760" y="320040"/>
-            <a:ext cx="3657600" cy="365760"/>
-          </a:xfrm>
-          <a:prstGeom prst="rect">
-            <a:avLst/>
-          </a:prstGeom>
-          <a:noFill/>
-        </p:spPr>
-        <p:txBody>
-          <a:bodyPr wrap="square">
-            <a:spAutoFit/>
-          </a:bodyPr>
-          <a:lstStyle/>
-          <a:p>
-            <a:pPr algn="l"/>
-            <a:r>
-              <a:rPr sz="1000" b="1">
-                <a:solidFill>
-                  <a:srgbClr val="003DA5"/>
-                </a:solidFill>
-                <a:latin typeface="Arial"/>
-              </a:rPr>
-              <a:t>LERNZIELE</a:t>
-            </a:r>
-          </a:p>
-        </p:txBody>
-      </p:sp>
-      <p:sp>
-        <p:nvSpPr>
-          <p:cNvPr id="5" name="TextBox 4"/>
-          <p:cNvSpPr txBox="1"/>
-          <p:nvPr/>
-        </p:nvSpPr>
-        <p:spPr>
-          <a:xfrm>
-            <a:off x="365760" y="502920"/>
-            <a:ext cx="9144000" cy="548640"/>
-          </a:xfrm>
-          <a:prstGeom prst="rect">
-            <a:avLst/>
-          </a:prstGeom>
-          <a:noFill/>
-        </p:spPr>
-        <p:txBody>
-          <a:bodyPr wrap="square">
-            <a:spAutoFit/>
-          </a:bodyPr>
-          <a:lstStyle/>
-          <a:p>
-            <a:pPr algn="l"/>
-            <a:r>
-              <a:rPr sz="2200" b="1">
-                <a:solidFill>
-                  <a:srgbClr val="1A1A1A"/>
-                </a:solidFill>
-                <a:latin typeface="Arial"/>
-              </a:rPr>
-              <a:t>Was Sie nach diesem Modul können.</a:t>
-            </a:r>
-          </a:p>
-        </p:txBody>
-      </p:sp>
-      <p:sp>
-        <p:nvSpPr>
-          <p:cNvPr id="6" name="TextBox 5"/>
-          <p:cNvSpPr txBox="1"/>
-          <p:nvPr/>
-        </p:nvSpPr>
-        <p:spPr>
-          <a:xfrm>
-            <a:off x="365760" y="1188720"/>
-            <a:ext cx="11430000" cy="5303520"/>
-          </a:xfrm>
-          <a:prstGeom prst="rect">
-            <a:avLst/>
-          </a:prstGeom>
-          <a:noFill/>
-        </p:spPr>
-        <p:txBody>
-          <a:bodyPr wrap="square">
-            <a:spAutoFit/>
-          </a:bodyPr>
-          <a:lstStyle/>
-          <a:p>
-            <a:pPr>
-              <a:spcBef>
-                <a:spcPts val="400"/>
-              </a:spcBef>
-            </a:pPr>
-            <a:r>
-              <a:rPr sz="1400">
-                <a:solidFill>
-                  <a:srgbClr val="003DA5"/>
-                </a:solidFill>
-                <a:latin typeface="Arial"/>
-              </a:rPr>
-              <a:t>▪  </a:t>
-            </a:r>
-            <a:r>
-              <a:rPr sz="1600">
-                <a:solidFill>
-                  <a:srgbClr val="1A1A1A"/>
-                </a:solidFill>
-                <a:latin typeface="Arial"/>
-              </a:rPr>
-              <a:t>Drei Kreditrisikoarten (Ausfall-, Migrations-, Konzentrationsrisiko) benennen und praxisrelevante Beispiele nennen</a:t>
-            </a:r>
-          </a:p>
-          <a:p>
-            <a:pPr>
-              <a:spcBef>
-                <a:spcPts val="400"/>
-              </a:spcBef>
-            </a:pPr>
-            <a:r>
-              <a:rPr sz="1400">
-                <a:solidFill>
-                  <a:srgbClr val="003DA5"/>
-                </a:solidFill>
-                <a:latin typeface="Arial"/>
-              </a:rPr>
-              <a:t>▪  </a:t>
-            </a:r>
-            <a:r>
-              <a:rPr sz="1600">
-                <a:solidFill>
-                  <a:srgbClr val="1A1A1A"/>
-                </a:solidFill>
-                <a:latin typeface="Arial"/>
-              </a:rPr>
-              <a:t>Unterschied zwischen qualitativen und quantitativen Frühwarnindikatoren erklären und Signale zuordnen</a:t>
-            </a:r>
-          </a:p>
-          <a:p>
-            <a:pPr>
-              <a:spcBef>
-                <a:spcPts val="400"/>
-              </a:spcBef>
-            </a:pPr>
-            <a:r>
-              <a:rPr sz="1400">
-                <a:solidFill>
-                  <a:srgbClr val="003DA5"/>
-                </a:solidFill>
-                <a:latin typeface="Arial"/>
-              </a:rPr>
-              <a:t>▪  </a:t>
-            </a:r>
-            <a:r>
-              <a:rPr sz="1600">
-                <a:solidFill>
-                  <a:srgbClr val="1A1A1A"/>
-                </a:solidFill>
-                <a:latin typeface="Arial"/>
-              </a:rPr>
-              <a:t>Ampelcheckliste auf einen Fallstudienfall anwenden und Kunden in Risikoklasse klassifizieren</a:t>
-            </a:r>
-          </a:p>
-          <a:p>
-            <a:pPr>
-              <a:spcBef>
-                <a:spcPts val="400"/>
-              </a:spcBef>
-            </a:pPr>
-            <a:r>
-              <a:rPr sz="1400">
-                <a:solidFill>
-                  <a:srgbClr val="003DA5"/>
-                </a:solidFill>
-                <a:latin typeface="Arial"/>
-              </a:rPr>
-              <a:t>▪  </a:t>
-            </a:r>
-            <a:r>
-              <a:rPr sz="1600">
-                <a:solidFill>
-                  <a:srgbClr val="1A1A1A"/>
-                </a:solidFill>
-                <a:latin typeface="Arial"/>
-              </a:rPr>
-              <a:t>Kontokorrentbewegungen und Kennzahlenentwicklungen analysieren und geeigneten Eskalationspfad identifizieren</a:t>
-            </a:r>
-          </a:p>
-        </p:txBody>
-      </p:sp>
+        </p:nvGraphicFramePr>
+        <p:xfrm>
+          <a:off x="365760" y="1143000"/>
+          <a:ext cx="11430000" cy="1901952"/>
+        </p:xfrm>
+        <a:graphic>
+          <a:graphicData uri="http://schemas.openxmlformats.org/drawingml/2006/table">
+            <a:tbl>
+              <a:tblPr firstRow="1" bandRow="1">
+                <a:tableStyleId>{5C22544A-7EE6-4342-B048-85BDC9FD1C3A}</a:tableStyleId>
+              </a:tblPr>
+              <a:tblGrid>
+                <a:gridCol w="2857500"/>
+                <a:gridCol w="2857500"/>
+                <a:gridCol w="2857500"/>
+                <a:gridCol w="2857500"/>
+              </a:tblGrid>
+              <a:tr h="475488">
+                <a:tc>
+                  <a:txBody>
+                    <a:bodyPr wrap="square"/>
+                    <a:lstStyle/>
+                    <a:p>
+                      <a:r>
+                        <a:rPr sz="1100" b="1">
+                          <a:solidFill>
+                            <a:srgbClr val="FFFFFF"/>
+                          </a:solidFill>
+                          <a:latin typeface="Arial"/>
+                        </a:rPr>
+                        <a:t>Ampel</a:t>
+                      </a:r>
+                    </a:p>
+                  </a:txBody>
+                  <a:tcPr>
+                    <a:solidFill>
+                      <a:srgbClr val="003DA5"/>
+                    </a:solidFill>
+                  </a:tcPr>
+                </a:tc>
+                <a:tc>
+                  <a:txBody>
+                    <a:bodyPr wrap="square"/>
+                    <a:lstStyle/>
+                    <a:p>
+                      <a:r>
+                        <a:rPr sz="1100" b="1">
+                          <a:solidFill>
+                            <a:srgbClr val="FFFFFF"/>
+                          </a:solidFill>
+                          <a:latin typeface="Arial"/>
+                        </a:rPr>
+                        <a:t>Verantwortung Berater</a:t>
+                      </a:r>
+                    </a:p>
+                  </a:txBody>
+                  <a:tcPr>
+                    <a:solidFill>
+                      <a:srgbClr val="003DA5"/>
+                    </a:solidFill>
+                  </a:tcPr>
+                </a:tc>
+                <a:tc>
+                  <a:txBody>
+                    <a:bodyPr wrap="square"/>
+                    <a:lstStyle/>
+                    <a:p>
+                      <a:r>
+                        <a:rPr sz="1100" b="1">
+                          <a:solidFill>
+                            <a:srgbClr val="FFFFFF"/>
+                          </a:solidFill>
+                          <a:latin typeface="Arial"/>
+                        </a:rPr>
+                        <a:t>Eskalation an</a:t>
+                      </a:r>
+                    </a:p>
+                  </a:txBody>
+                  <a:tcPr>
+                    <a:solidFill>
+                      <a:srgbClr val="003DA5"/>
+                    </a:solidFill>
+                  </a:tcPr>
+                </a:tc>
+                <a:tc>
+                  <a:txBody>
+                    <a:bodyPr wrap="square"/>
+                    <a:lstStyle/>
+                    <a:p>
+                      <a:r>
+                        <a:rPr sz="1100" b="1">
+                          <a:solidFill>
+                            <a:srgbClr val="FFFFFF"/>
+                          </a:solidFill>
+                          <a:latin typeface="Arial"/>
+                        </a:rPr>
+                        <a:t>Zeitrahmen</a:t>
+                      </a:r>
+                    </a:p>
+                  </a:txBody>
+                  <a:tcPr>
+                    <a:solidFill>
+                      <a:srgbClr val="003DA5"/>
+                    </a:solidFill>
+                  </a:tcPr>
+                </a:tc>
+              </a:tr>
+              <a:tr h="475488">
+                <a:tc>
+                  <a:txBody>
+                    <a:bodyPr wrap="square"/>
+                    <a:lstStyle/>
+                    <a:p>
+                      <a:r>
+                        <a:rPr sz="1100" b="0">
+                          <a:solidFill>
+                            <a:srgbClr val="1A1A1A"/>
+                          </a:solidFill>
+                          <a:latin typeface="Arial"/>
+                        </a:rPr>
+                        <a:t>Grün</a:t>
+                      </a:r>
+                    </a:p>
+                  </a:txBody>
+                  <a:tcPr>
+                    <a:solidFill>
+                      <a:srgbClr val="FFFFFF"/>
+                    </a:solidFill>
+                  </a:tcPr>
+                </a:tc>
+                <a:tc>
+                  <a:txBody>
+                    <a:bodyPr wrap="square"/>
+                    <a:lstStyle/>
+                    <a:p>
+                      <a:r>
+                        <a:rPr sz="1100" b="0">
+                          <a:solidFill>
+                            <a:srgbClr val="1A1A1A"/>
+                          </a:solidFill>
+                          <a:latin typeface="Arial"/>
+                        </a:rPr>
+                        <a:t>Reguläre Betreuung, Jahresabschluss einfordern</a:t>
+                      </a:r>
+                    </a:p>
+                  </a:txBody>
+                  <a:tcPr>
+                    <a:solidFill>
+                      <a:srgbClr val="FFFFFF"/>
+                    </a:solidFill>
+                  </a:tcPr>
+                </a:tc>
+                <a:tc>
+                  <a:txBody>
+                    <a:bodyPr wrap="square"/>
+                    <a:lstStyle/>
+                    <a:p>
+                      <a:r>
+                        <a:rPr sz="1100" b="0">
+                          <a:solidFill>
+                            <a:srgbClr val="1A1A1A"/>
+                          </a:solidFill>
+                          <a:latin typeface="Arial"/>
+                        </a:rPr>
+                        <a:t>Keine</a:t>
+                      </a:r>
+                    </a:p>
+                  </a:txBody>
+                  <a:tcPr>
+                    <a:solidFill>
+                      <a:srgbClr val="FFFFFF"/>
+                    </a:solidFill>
+                  </a:tcPr>
+                </a:tc>
+                <a:tc>
+                  <a:txBody>
+                    <a:bodyPr wrap="square"/>
+                    <a:lstStyle/>
+                    <a:p>
+                      <a:r>
+                        <a:rPr sz="1100" b="0">
+                          <a:solidFill>
+                            <a:srgbClr val="1A1A1A"/>
+                          </a:solidFill>
+                          <a:latin typeface="Arial"/>
+                        </a:rPr>
+                        <a:t>Jährlich</a:t>
+                      </a:r>
+                    </a:p>
+                  </a:txBody>
+                  <a:tcPr>
+                    <a:solidFill>
+                      <a:srgbClr val="FFFFFF"/>
+                    </a:solidFill>
+                  </a:tcPr>
+                </a:tc>
+              </a:tr>
+              <a:tr h="475488">
+                <a:tc>
+                  <a:txBody>
+                    <a:bodyPr wrap="square"/>
+                    <a:lstStyle/>
+                    <a:p>
+                      <a:r>
+                        <a:rPr sz="1100" b="0">
+                          <a:solidFill>
+                            <a:srgbClr val="1A1A1A"/>
+                          </a:solidFill>
+                          <a:latin typeface="Arial"/>
+                        </a:rPr>
+                        <a:t>Gelb</a:t>
+                      </a:r>
+                    </a:p>
+                  </a:txBody>
+                  <a:tcPr>
+                    <a:solidFill>
+                      <a:srgbClr val="F4F6FA"/>
+                    </a:solidFill>
+                  </a:tcPr>
+                </a:tc>
+                <a:tc>
+                  <a:txBody>
+                    <a:bodyPr wrap="square"/>
+                    <a:lstStyle/>
+                    <a:p>
+                      <a:r>
+                        <a:rPr sz="1100" b="0">
+                          <a:solidFill>
+                            <a:srgbClr val="1A1A1A"/>
+                          </a:solidFill>
+                          <a:latin typeface="Arial"/>
+                        </a:rPr>
+                        <a:t>Kundengespräch führen, Checkliste in agree dokumentieren</a:t>
+                      </a:r>
+                    </a:p>
+                  </a:txBody>
+                  <a:tcPr>
+                    <a:solidFill>
+                      <a:srgbClr val="F4F6FA"/>
+                    </a:solidFill>
+                  </a:tcPr>
+                </a:tc>
+                <a:tc>
+                  <a:txBody>
+                    <a:bodyPr wrap="square"/>
+                    <a:lstStyle/>
+                    <a:p>
+                      <a:r>
+                        <a:rPr sz="1100" b="0">
+                          <a:solidFill>
+                            <a:srgbClr val="1A1A1A"/>
+                          </a:solidFill>
+                          <a:latin typeface="Arial"/>
+                        </a:rPr>
+                        <a:t>Teamleiter informieren, Watchlist prüfen</a:t>
+                      </a:r>
+                    </a:p>
+                  </a:txBody>
+                  <a:tcPr>
+                    <a:solidFill>
+                      <a:srgbClr val="F4F6FA"/>
+                    </a:solidFill>
+                  </a:tcPr>
+                </a:tc>
+                <a:tc>
+                  <a:txBody>
+                    <a:bodyPr wrap="square"/>
+                    <a:lstStyle/>
+                    <a:p>
+                      <a:r>
+                        <a:rPr sz="1100" b="0">
+                          <a:solidFill>
+                            <a:srgbClr val="1A1A1A"/>
+                          </a:solidFill>
+                          <a:latin typeface="Arial"/>
+                        </a:rPr>
+                        <a:t>Innerhalb 4 Wochen</a:t>
+                      </a:r>
+                    </a:p>
+                  </a:txBody>
+                  <a:tcPr>
+                    <a:solidFill>
+                      <a:srgbClr val="F4F6FA"/>
+                    </a:solidFill>
+                  </a:tcPr>
+                </a:tc>
+              </a:tr>
+              <a:tr h="475488">
+                <a:tc>
+                  <a:txBody>
+                    <a:bodyPr wrap="square"/>
+                    <a:lstStyle/>
+                    <a:p>
+                      <a:r>
+                        <a:rPr sz="1100" b="0">
+                          <a:solidFill>
+                            <a:srgbClr val="1A1A1A"/>
+                          </a:solidFill>
+                          <a:latin typeface="Arial"/>
+                        </a:rPr>
+                        <a:t>Rot</a:t>
+                      </a:r>
+                    </a:p>
+                  </a:txBody>
+                  <a:tcPr>
+                    <a:solidFill>
+                      <a:srgbClr val="FFFFFF"/>
+                    </a:solidFill>
+                  </a:tcPr>
+                </a:tc>
+                <a:tc>
+                  <a:txBody>
+                    <a:bodyPr wrap="square"/>
+                    <a:lstStyle/>
+                    <a:p>
+                      <a:r>
+                        <a:rPr sz="1100" b="0">
+                          <a:solidFill>
+                            <a:srgbClr val="1A1A1A"/>
+                          </a:solidFill>
+                          <a:latin typeface="Arial"/>
+                        </a:rPr>
+                        <a:t>Sofortige Meldung, keine eigenständigen Zusagen</a:t>
+                      </a:r>
+                    </a:p>
+                  </a:txBody>
+                  <a:tcPr>
+                    <a:solidFill>
+                      <a:srgbClr val="FFFFFF"/>
+                    </a:solidFill>
+                  </a:tcPr>
+                </a:tc>
+                <a:tc>
+                  <a:txBody>
+                    <a:bodyPr wrap="square"/>
+                    <a:lstStyle/>
+                    <a:p>
+                      <a:r>
+                        <a:rPr sz="1100" b="0">
+                          <a:solidFill>
+                            <a:srgbClr val="1A1A1A"/>
+                          </a:solidFill>
+                          <a:latin typeface="Arial"/>
+                        </a:rPr>
+                        <a:t>Teamleiter + Marktfolge, ggf. Problemkreditabteilung</a:t>
+                      </a:r>
+                    </a:p>
+                  </a:txBody>
+                  <a:tcPr>
+                    <a:solidFill>
+                      <a:srgbClr val="FFFFFF"/>
+                    </a:solidFill>
+                  </a:tcPr>
+                </a:tc>
+                <a:tc>
+                  <a:txBody>
+                    <a:bodyPr wrap="square"/>
+                    <a:lstStyle/>
+                    <a:p>
+                      <a:r>
+                        <a:rPr sz="1100" b="0">
+                          <a:solidFill>
+                            <a:srgbClr val="1A1A1A"/>
+                          </a:solidFill>
+                          <a:latin typeface="Arial"/>
+                        </a:rPr>
+                        <a:t>Innerhalb 48 Stunden</a:t>
+                      </a:r>
+                    </a:p>
+                  </a:txBody>
+                  <a:tcPr>
+                    <a:solidFill>
+                      <a:srgbClr val="FFFFFF"/>
+                    </a:solidFill>
+                  </a:tcPr>
+                </a:tc>
+              </a:tr>
+            </a:tbl>
+          </a:graphicData>
+        </a:graphic>
+      </p:graphicFrame>
     </p:spTree>
   </p:cSld>
   <p:clrMapOvr>
@@ -3934,7 +6373,7 @@
 </p:sld>
 </file>
 
-<file path=ppt/slides/slide3.xml><?xml version="1.0" encoding="utf-8"?>
+<file path=ppt/slides/slide13.xml><?xml version="1.0" encoding="utf-8"?>
 <p:sld xmlns:a="http://schemas.openxmlformats.org/drawingml/2006/main" xmlns:p="http://schemas.openxmlformats.org/presentationml/2006/main" xmlns:r="http://schemas.openxmlformats.org/officeDocument/2006/relationships">
   <p:cSld>
     <p:bg>
@@ -4003,8 +6442,8 @@
         </p:nvSpPr>
         <p:spPr>
           <a:xfrm>
-            <a:off x="365760" y="2286000"/>
-            <a:ext cx="11430000" cy="1828800"/>
+            <a:off x="365760" y="2011680"/>
+            <a:ext cx="11430000" cy="2011680"/>
           </a:xfrm>
           <a:prstGeom prst="rect">
             <a:avLst/>
@@ -4019,13 +6458,13 @@
           <a:p>
             <a:pPr algn="l"/>
             <a:r>
-              <a:rPr sz="3600" b="1">
+              <a:rPr sz="3600" b="1" i="0">
                 <a:solidFill>
                   <a:srgbClr val="FFFFFF"/>
                 </a:solidFill>
                 <a:latin typeface="Arial"/>
               </a:rPr>
-              <a:t>Kreditrisiko – Grundbegriffe und Bedeutung für den Berater</a:t>
+              <a:t>Praxiscase: Renner Metallverarbeitung GmbH</a:t>
             </a:r>
           </a:p>
         </p:txBody>
@@ -4038,13 +6477,13 @@
 </p:sld>
 </file>
 
-<file path=ppt/slides/slide4.xml><?xml version="1.0" encoding="utf-8"?>
+<file path=ppt/slides/slide14.xml><?xml version="1.0" encoding="utf-8"?>
 <p:sld xmlns:a="http://schemas.openxmlformats.org/drawingml/2006/main" xmlns:p="http://schemas.openxmlformats.org/presentationml/2006/main" xmlns:r="http://schemas.openxmlformats.org/officeDocument/2006/relationships">
   <p:cSld>
     <p:bg>
       <p:bgPr>
         <a:solidFill>
-          <a:srgbClr val="1A1A1A"/>
+          <a:srgbClr val="003DA5"/>
         </a:solidFill>
         <a:effectLst/>
       </p:bgPr>
@@ -4107,8 +6546,8 @@
         </p:nvSpPr>
         <p:spPr>
           <a:xfrm>
-            <a:off x="365760" y="2286000"/>
-            <a:ext cx="11430000" cy="1828800"/>
+            <a:off x="365760" y="347472"/>
+            <a:ext cx="7315200" cy="384048"/>
           </a:xfrm>
           <a:prstGeom prst="rect">
             <a:avLst/>
@@ -4123,13 +6562,224 @@
           <a:p>
             <a:pPr algn="l"/>
             <a:r>
-              <a:rPr sz="3600" b="1">
+              <a:rPr sz="900" b="1" i="0">
+                <a:solidFill>
+                  <a:srgbClr val="CCD6F0"/>
+                </a:solidFill>
+                <a:latin typeface="Arial"/>
+              </a:rPr>
+              <a:t>PRAXISTRANSFER &amp; NÄCHSTE SCHRITTE</a:t>
+            </a:r>
+          </a:p>
+        </p:txBody>
+      </p:sp>
+      <p:sp>
+        <p:nvSpPr>
+          <p:cNvPr id="4" name="Rectangle 3"/>
+          <p:cNvSpPr/>
+          <p:nvPr/>
+        </p:nvSpPr>
+        <p:spPr>
+          <a:xfrm>
+            <a:off x="365760" y="804672"/>
+            <a:ext cx="8229600" cy="22860"/>
+          </a:xfrm>
+          <a:prstGeom prst="rect">
+            <a:avLst/>
+          </a:prstGeom>
+          <a:solidFill>
+            <a:srgbClr val="335CC0"/>
+          </a:solidFill>
+          <a:ln>
+            <a:noFill/>
+          </a:ln>
+        </p:spPr>
+        <p:style>
+          <a:lnRef idx="1">
+            <a:schemeClr val="accent1"/>
+          </a:lnRef>
+          <a:fillRef idx="3">
+            <a:schemeClr val="accent1"/>
+          </a:fillRef>
+          <a:effectRef idx="2">
+            <a:schemeClr val="accent1"/>
+          </a:effectRef>
+          <a:fontRef idx="minor">
+            <a:schemeClr val="lt1"/>
+          </a:fontRef>
+        </p:style>
+        <p:txBody>
+          <a:bodyPr rtlCol="0" anchor="ctr"/>
+          <a:lstStyle/>
+          <a:p>
+            <a:pPr algn="ctr"/>
+          </a:p>
+        </p:txBody>
+      </p:sp>
+      <p:sp>
+        <p:nvSpPr>
+          <p:cNvPr id="5" name="TextBox 4"/>
+          <p:cNvSpPr txBox="1"/>
+          <p:nvPr/>
+        </p:nvSpPr>
+        <p:spPr>
+          <a:xfrm>
+            <a:off x="365760" y="960120"/>
+            <a:ext cx="9144000" cy="914400"/>
+          </a:xfrm>
+          <a:prstGeom prst="rect">
+            <a:avLst/>
+          </a:prstGeom>
+          <a:noFill/>
+        </p:spPr>
+        <p:txBody>
+          <a:bodyPr wrap="square">
+            <a:spAutoFit/>
+          </a:bodyPr>
+          <a:lstStyle/>
+          <a:p>
+            <a:pPr algn="l"/>
+            <a:r>
+              <a:rPr sz="3000" b="1" i="0">
                 <a:solidFill>
                   <a:srgbClr val="FFFFFF"/>
                 </a:solidFill>
                 <a:latin typeface="Arial"/>
               </a:rPr>
-              <a:t>Die vier Krisenphasen</a:t>
+              <a:t>Was nehmen Sie mit?</a:t>
+            </a:r>
+          </a:p>
+        </p:txBody>
+      </p:sp>
+      <p:sp>
+        <p:nvSpPr>
+          <p:cNvPr id="6" name="TextBox 5"/>
+          <p:cNvSpPr txBox="1"/>
+          <p:nvPr/>
+        </p:nvSpPr>
+        <p:spPr>
+          <a:xfrm>
+            <a:off x="365760" y="2103120"/>
+            <a:ext cx="11430000" cy="4114800"/>
+          </a:xfrm>
+          <a:prstGeom prst="rect">
+            <a:avLst/>
+          </a:prstGeom>
+          <a:noFill/>
+        </p:spPr>
+        <p:txBody>
+          <a:bodyPr wrap="square">
+            <a:spAutoFit/>
+          </a:bodyPr>
+          <a:lstStyle/>
+          <a:p>
+            <a:pPr>
+              <a:spcBef>
+                <a:spcPts val="500"/>
+              </a:spcBef>
+            </a:pPr>
+            <a:r>
+              <a:rPr sz="1600">
+                <a:solidFill>
+                  <a:srgbClr val="E05B00"/>
+                </a:solidFill>
+                <a:latin typeface="Arial"/>
+              </a:rPr>
+              <a:t>▪  </a:t>
+            </a:r>
+            <a:r>
+              <a:rPr sz="1800">
+                <a:solidFill>
+                  <a:srgbClr val="FFFFFF"/>
+                </a:solidFill>
+                <a:latin typeface="Arial"/>
+              </a:rPr>
+              <a:t>Transferaufgabe: Wenden Sie das Gelernte in den nächsten 14 Tagen bei einem konkreten Kunden an.</a:t>
+            </a:r>
+          </a:p>
+          <a:p>
+            <a:pPr>
+              <a:spcBef>
+                <a:spcPts val="500"/>
+              </a:spcBef>
+            </a:pPr>
+            <a:r>
+              <a:rPr sz="1600">
+                <a:solidFill>
+                  <a:srgbClr val="E05B00"/>
+                </a:solidFill>
+                <a:latin typeface="Arial"/>
+              </a:rPr>
+              <a:t>▪  </a:t>
+            </a:r>
+            <a:r>
+              <a:rPr sz="1800">
+                <a:solidFill>
+                  <a:srgbClr val="FFFFFF"/>
+                </a:solidFill>
+                <a:latin typeface="Arial"/>
+              </a:rPr>
+              <a:t>Selbstcheck nach 4 Wochen: Bewerten Sie Ihre Fortschritte ehrlich.</a:t>
+            </a:r>
+          </a:p>
+          <a:p>
+            <a:pPr>
+              <a:spcBef>
+                <a:spcPts val="500"/>
+              </a:spcBef>
+            </a:pPr>
+            <a:r>
+              <a:rPr sz="1600">
+                <a:solidFill>
+                  <a:srgbClr val="E05B00"/>
+                </a:solidFill>
+                <a:latin typeface="Arial"/>
+              </a:rPr>
+              <a:t>▪  </a:t>
+            </a:r>
+            <a:r>
+              <a:rPr sz="1800">
+                <a:solidFill>
+                  <a:srgbClr val="FFFFFF"/>
+                </a:solidFill>
+                <a:latin typeface="Arial"/>
+              </a:rPr>
+              <a:t>Nächste Module: M02, M21</a:t>
+            </a:r>
+          </a:p>
+        </p:txBody>
+      </p:sp>
+      <p:sp>
+        <p:nvSpPr>
+          <p:cNvPr id="7" name="TextBox 6"/>
+          <p:cNvSpPr txBox="1"/>
+          <p:nvPr/>
+        </p:nvSpPr>
+        <p:spPr>
+          <a:xfrm>
+            <a:off x="365760" y="6309360"/>
+            <a:ext cx="11430000" cy="365760"/>
+          </a:xfrm>
+          <a:prstGeom prst="rect">
+            <a:avLst/>
+          </a:prstGeom>
+          <a:noFill/>
+        </p:spPr>
+        <p:txBody>
+          <a:bodyPr wrap="square">
+            <a:spAutoFit/>
+          </a:bodyPr>
+          <a:lstStyle/>
+          <a:p>
+            <a:pPr algn="l"/>
+            <a:r>
+              <a:rPr sz="900" b="0" i="0">
+                <a:solidFill>
+                  <a:srgbClr val="889ACC"/>
+                </a:solidFill>
+                <a:latin typeface="Arial"/>
+              </a:rPr>
+              <a:t>M04 · Kreditrisikofrüherkennung  ·  v1.2  ·  Benedikt Zoller Coaching</a:t>
             </a:r>
           </a:p>
         </p:txBody>
@@ -4142,7 +6792,312 @@
 </p:sld>
 </file>
 
-<file path=ppt/slides/slide5.xml><?xml version="1.0" encoding="utf-8"?>
+<file path=ppt/slides/slide2.xml><?xml version="1.0" encoding="utf-8"?>
+<p:sld xmlns:a="http://schemas.openxmlformats.org/drawingml/2006/main" xmlns:p="http://schemas.openxmlformats.org/presentationml/2006/main" xmlns:r="http://schemas.openxmlformats.org/officeDocument/2006/relationships">
+  <p:cSld>
+    <p:bg>
+      <p:bgPr>
+        <a:solidFill>
+          <a:srgbClr val="F4F6FA"/>
+        </a:solidFill>
+        <a:effectLst/>
+      </p:bgPr>
+    </p:bg>
+    <p:spTree>
+      <p:nvGrpSpPr>
+        <p:cNvPr id="1" name=""/>
+        <p:cNvGrpSpPr/>
+        <p:nvPr/>
+      </p:nvGrpSpPr>
+      <p:grpSpPr/>
+      <p:sp>
+        <p:nvSpPr>
+          <p:cNvPr id="2" name="Rectangle 1"/>
+          <p:cNvSpPr/>
+          <p:nvPr/>
+        </p:nvSpPr>
+        <p:spPr>
+          <a:xfrm>
+            <a:off x="0" y="0"/>
+            <a:ext cx="73152" cy="6858000"/>
+          </a:xfrm>
+          <a:prstGeom prst="rect">
+            <a:avLst/>
+          </a:prstGeom>
+          <a:solidFill>
+            <a:srgbClr val="003DA5"/>
+          </a:solidFill>
+          <a:ln>
+            <a:noFill/>
+          </a:ln>
+        </p:spPr>
+        <p:style>
+          <a:lnRef idx="1">
+            <a:schemeClr val="accent1"/>
+          </a:lnRef>
+          <a:fillRef idx="3">
+            <a:schemeClr val="accent1"/>
+          </a:fillRef>
+          <a:effectRef idx="2">
+            <a:schemeClr val="accent1"/>
+          </a:effectRef>
+          <a:fontRef idx="minor">
+            <a:schemeClr val="lt1"/>
+          </a:fontRef>
+        </p:style>
+        <p:txBody>
+          <a:bodyPr rtlCol="0" anchor="ctr"/>
+          <a:lstStyle/>
+          <a:p>
+            <a:pPr algn="ctr"/>
+          </a:p>
+        </p:txBody>
+      </p:sp>
+      <p:sp>
+        <p:nvSpPr>
+          <p:cNvPr id="3" name="Rectangle 2"/>
+          <p:cNvSpPr/>
+          <p:nvPr/>
+        </p:nvSpPr>
+        <p:spPr>
+          <a:xfrm>
+            <a:off x="228600" y="804672"/>
+            <a:ext cx="11612880" cy="22860"/>
+          </a:xfrm>
+          <a:prstGeom prst="rect">
+            <a:avLst/>
+          </a:prstGeom>
+          <a:solidFill>
+            <a:srgbClr val="D1D5DB"/>
+          </a:solidFill>
+          <a:ln>
+            <a:noFill/>
+          </a:ln>
+        </p:spPr>
+        <p:style>
+          <a:lnRef idx="1">
+            <a:schemeClr val="accent1"/>
+          </a:lnRef>
+          <a:fillRef idx="3">
+            <a:schemeClr val="accent1"/>
+          </a:fillRef>
+          <a:effectRef idx="2">
+            <a:schemeClr val="accent1"/>
+          </a:effectRef>
+          <a:fontRef idx="minor">
+            <a:schemeClr val="lt1"/>
+          </a:fontRef>
+        </p:style>
+        <p:txBody>
+          <a:bodyPr rtlCol="0" anchor="ctr"/>
+          <a:lstStyle/>
+          <a:p>
+            <a:pPr algn="ctr"/>
+          </a:p>
+        </p:txBody>
+      </p:sp>
+      <p:sp>
+        <p:nvSpPr>
+          <p:cNvPr id="4" name="TextBox 3"/>
+          <p:cNvSpPr txBox="1"/>
+          <p:nvPr/>
+        </p:nvSpPr>
+        <p:spPr>
+          <a:xfrm>
+            <a:off x="365760" y="320040"/>
+            <a:ext cx="4572000" cy="347472"/>
+          </a:xfrm>
+          <a:prstGeom prst="rect">
+            <a:avLst/>
+          </a:prstGeom>
+          <a:noFill/>
+        </p:spPr>
+        <p:txBody>
+          <a:bodyPr wrap="square">
+            <a:spAutoFit/>
+          </a:bodyPr>
+          <a:lstStyle/>
+          <a:p>
+            <a:pPr algn="l"/>
+            <a:r>
+              <a:rPr sz="900" b="1" i="0">
+                <a:solidFill>
+                  <a:srgbClr val="003DA5"/>
+                </a:solidFill>
+                <a:latin typeface="Arial"/>
+              </a:rPr>
+              <a:t>LERNZIELE</a:t>
+            </a:r>
+          </a:p>
+        </p:txBody>
+      </p:sp>
+      <p:sp>
+        <p:nvSpPr>
+          <p:cNvPr id="5" name="TextBox 4"/>
+          <p:cNvSpPr txBox="1"/>
+          <p:nvPr/>
+        </p:nvSpPr>
+        <p:spPr>
+          <a:xfrm>
+            <a:off x="365760" y="502920"/>
+            <a:ext cx="10058400" cy="640080"/>
+          </a:xfrm>
+          <a:prstGeom prst="rect">
+            <a:avLst/>
+          </a:prstGeom>
+          <a:noFill/>
+        </p:spPr>
+        <p:txBody>
+          <a:bodyPr wrap="square">
+            <a:spAutoFit/>
+          </a:bodyPr>
+          <a:lstStyle/>
+          <a:p>
+            <a:pPr algn="l"/>
+            <a:r>
+              <a:rPr sz="2400" b="1" i="0">
+                <a:solidFill>
+                  <a:srgbClr val="1A1A1A"/>
+                </a:solidFill>
+                <a:latin typeface="Arial"/>
+              </a:rPr>
+              <a:t>Was Sie nach diesem Modul können.</a:t>
+            </a:r>
+          </a:p>
+        </p:txBody>
+      </p:sp>
+      <p:sp>
+        <p:nvSpPr>
+          <p:cNvPr id="6" name="TextBox 5"/>
+          <p:cNvSpPr txBox="1"/>
+          <p:nvPr/>
+        </p:nvSpPr>
+        <p:spPr>
+          <a:xfrm>
+            <a:off x="365760" y="1234440"/>
+            <a:ext cx="11430000" cy="5303520"/>
+          </a:xfrm>
+          <a:prstGeom prst="rect">
+            <a:avLst/>
+          </a:prstGeom>
+          <a:noFill/>
+        </p:spPr>
+        <p:txBody>
+          <a:bodyPr wrap="square">
+            <a:spAutoFit/>
+          </a:bodyPr>
+          <a:lstStyle/>
+          <a:p>
+            <a:pPr>
+              <a:spcBef>
+                <a:spcPts val="500"/>
+              </a:spcBef>
+            </a:pPr>
+            <a:r>
+              <a:rPr sz="1500">
+                <a:solidFill>
+                  <a:srgbClr val="003DA5"/>
+                </a:solidFill>
+                <a:latin typeface="Arial"/>
+              </a:rPr>
+              <a:t>▪  </a:t>
+            </a:r>
+            <a:r>
+              <a:rPr sz="1700">
+                <a:solidFill>
+                  <a:srgbClr val="1A1A1A"/>
+                </a:solidFill>
+                <a:latin typeface="Arial"/>
+              </a:rPr>
+              <a:t>Drei Kreditrisikoarten (Ausfall-, Migrations-, Konzentrationsrisiko) benennen und praxisrelevante Beispiele nennen</a:t>
+            </a:r>
+          </a:p>
+          <a:p>
+            <a:pPr>
+              <a:spcBef>
+                <a:spcPts val="500"/>
+              </a:spcBef>
+            </a:pPr>
+            <a:r>
+              <a:rPr sz="1500">
+                <a:solidFill>
+                  <a:srgbClr val="003DA5"/>
+                </a:solidFill>
+                <a:latin typeface="Arial"/>
+              </a:rPr>
+              <a:t>▪  </a:t>
+            </a:r>
+            <a:r>
+              <a:rPr sz="1700">
+                <a:solidFill>
+                  <a:srgbClr val="1A1A1A"/>
+                </a:solidFill>
+                <a:latin typeface="Arial"/>
+              </a:rPr>
+              <a:t>Unterschied zwischen qualitativen und quantitativen Frühwarnindikatoren erklären und Signale zuordnen</a:t>
+            </a:r>
+          </a:p>
+          <a:p>
+            <a:pPr>
+              <a:spcBef>
+                <a:spcPts val="500"/>
+              </a:spcBef>
+            </a:pPr>
+            <a:r>
+              <a:rPr sz="1500">
+                <a:solidFill>
+                  <a:srgbClr val="003DA5"/>
+                </a:solidFill>
+                <a:latin typeface="Arial"/>
+              </a:rPr>
+              <a:t>▪  </a:t>
+            </a:r>
+            <a:r>
+              <a:rPr sz="1700">
+                <a:solidFill>
+                  <a:srgbClr val="1A1A1A"/>
+                </a:solidFill>
+                <a:latin typeface="Arial"/>
+              </a:rPr>
+              <a:t>Ampelcheckliste auf einen Fallstudienfall anwenden und Kunden in Risikoklasse klassifizieren</a:t>
+            </a:r>
+          </a:p>
+          <a:p>
+            <a:pPr>
+              <a:spcBef>
+                <a:spcPts val="500"/>
+              </a:spcBef>
+            </a:pPr>
+            <a:r>
+              <a:rPr sz="1500">
+                <a:solidFill>
+                  <a:srgbClr val="003DA5"/>
+                </a:solidFill>
+                <a:latin typeface="Arial"/>
+              </a:rPr>
+              <a:t>▪  </a:t>
+            </a:r>
+            <a:r>
+              <a:rPr sz="1700">
+                <a:solidFill>
+                  <a:srgbClr val="1A1A1A"/>
+                </a:solidFill>
+                <a:latin typeface="Arial"/>
+              </a:rPr>
+              <a:t>Kontokorrentbewegungen und Kennzahlenentwicklungen analysieren und geeigneten Eskalationspfad identifizieren</a:t>
+            </a:r>
+          </a:p>
+        </p:txBody>
+      </p:sp>
+    </p:spTree>
+  </p:cSld>
+  <p:clrMapOvr>
+    <a:masterClrMapping/>
+  </p:clrMapOvr>
+</p:sld>
+</file>
+
+<file path=ppt/slides/slide3.xml><?xml version="1.0" encoding="utf-8"?>
 <p:sld xmlns:a="http://schemas.openxmlformats.org/drawingml/2006/main" xmlns:p="http://schemas.openxmlformats.org/presentationml/2006/main" xmlns:r="http://schemas.openxmlformats.org/officeDocument/2006/relationships">
   <p:cSld>
     <p:bg>
@@ -4211,8 +7166,8 @@
         </p:nvSpPr>
         <p:spPr>
           <a:xfrm>
-            <a:off x="365760" y="2286000"/>
-            <a:ext cx="11430000" cy="1828800"/>
+            <a:off x="365760" y="2011680"/>
+            <a:ext cx="11430000" cy="2011680"/>
           </a:xfrm>
           <a:prstGeom prst="rect">
             <a:avLst/>
@@ -4227,13 +7182,13 @@
           <a:p>
             <a:pPr algn="l"/>
             <a:r>
-              <a:rPr sz="3600" b="1">
+              <a:rPr sz="3600" b="1" i="0">
                 <a:solidFill>
                   <a:srgbClr val="FFFFFF"/>
                 </a:solidFill>
                 <a:latin typeface="Arial"/>
               </a:rPr>
-              <a:t>Frühwarnindikatoren – Quantitativ und Qualitativ</a:t>
+              <a:t>Kreditrisiko – Grundbegriffe und Bedeutung für den Berater</a:t>
             </a:r>
           </a:p>
         </p:txBody>
@@ -4246,7 +7201,488 @@
 </p:sld>
 </file>
 
-<file path=ppt/slides/slide6.xml><?xml version="1.0" encoding="utf-8"?>
+<file path=ppt/slides/slide4.xml><?xml version="1.0" encoding="utf-8"?>
+<p:sld xmlns:a="http://schemas.openxmlformats.org/drawingml/2006/main" xmlns:p="http://schemas.openxmlformats.org/presentationml/2006/main" xmlns:r="http://schemas.openxmlformats.org/officeDocument/2006/relationships">
+  <p:cSld>
+    <p:bg>
+      <p:bgPr>
+        <a:solidFill>
+          <a:srgbClr val="FFFFFF"/>
+        </a:solidFill>
+        <a:effectLst/>
+      </p:bgPr>
+    </p:bg>
+    <p:spTree>
+      <p:nvGrpSpPr>
+        <p:cNvPr id="1" name=""/>
+        <p:cNvGrpSpPr/>
+        <p:nvPr/>
+      </p:nvGrpSpPr>
+      <p:grpSpPr/>
+      <p:sp>
+        <p:nvSpPr>
+          <p:cNvPr id="2" name="Rectangle 1"/>
+          <p:cNvSpPr/>
+          <p:nvPr/>
+        </p:nvSpPr>
+        <p:spPr>
+          <a:xfrm>
+            <a:off x="0" y="0"/>
+            <a:ext cx="73152" cy="6858000"/>
+          </a:xfrm>
+          <a:prstGeom prst="rect">
+            <a:avLst/>
+          </a:prstGeom>
+          <a:solidFill>
+            <a:srgbClr val="003DA5"/>
+          </a:solidFill>
+          <a:ln>
+            <a:noFill/>
+          </a:ln>
+        </p:spPr>
+        <p:style>
+          <a:lnRef idx="1">
+            <a:schemeClr val="accent1"/>
+          </a:lnRef>
+          <a:fillRef idx="3">
+            <a:schemeClr val="accent1"/>
+          </a:fillRef>
+          <a:effectRef idx="2">
+            <a:schemeClr val="accent1"/>
+          </a:effectRef>
+          <a:fontRef idx="minor">
+            <a:schemeClr val="lt1"/>
+          </a:fontRef>
+        </p:style>
+        <p:txBody>
+          <a:bodyPr rtlCol="0" anchor="ctr"/>
+          <a:lstStyle/>
+          <a:p>
+            <a:pPr algn="ctr"/>
+          </a:p>
+        </p:txBody>
+      </p:sp>
+      <p:sp>
+        <p:nvSpPr>
+          <p:cNvPr id="3" name="TextBox 2"/>
+          <p:cNvSpPr txBox="1"/>
+          <p:nvPr/>
+        </p:nvSpPr>
+        <p:spPr>
+          <a:xfrm>
+            <a:off x="228600" y="182880"/>
+            <a:ext cx="11430000" cy="320040"/>
+          </a:xfrm>
+          <a:prstGeom prst="rect">
+            <a:avLst/>
+          </a:prstGeom>
+          <a:noFill/>
+        </p:spPr>
+        <p:txBody>
+          <a:bodyPr wrap="square">
+            <a:spAutoFit/>
+          </a:bodyPr>
+          <a:lstStyle/>
+          <a:p>
+            <a:pPr algn="l"/>
+            <a:r>
+              <a:rPr sz="900" b="0" i="0">
+                <a:solidFill>
+                  <a:srgbClr val="556575"/>
+                </a:solidFill>
+                <a:latin typeface="Arial"/>
+              </a:rPr>
+              <a:t>M04 · Modulinhalte</a:t>
+            </a:r>
+          </a:p>
+        </p:txBody>
+      </p:sp>
+      <p:sp>
+        <p:nvSpPr>
+          <p:cNvPr id="4" name="TextBox 3"/>
+          <p:cNvSpPr txBox="1"/>
+          <p:nvPr/>
+        </p:nvSpPr>
+        <p:spPr>
+          <a:xfrm>
+            <a:off x="365760" y="274320"/>
+            <a:ext cx="11430000" cy="777240"/>
+          </a:xfrm>
+          <a:prstGeom prst="rect">
+            <a:avLst/>
+          </a:prstGeom>
+          <a:noFill/>
+        </p:spPr>
+        <p:txBody>
+          <a:bodyPr wrap="square">
+            <a:spAutoFit/>
+          </a:bodyPr>
+          <a:lstStyle/>
+          <a:p>
+            <a:pPr algn="l"/>
+            <a:r>
+              <a:rPr sz="2200" b="1" i="0">
+                <a:solidFill>
+                  <a:srgbClr val="003DA5"/>
+                </a:solidFill>
+                <a:latin typeface="Arial"/>
+              </a:rPr>
+              <a:t>Kreditrisiko – Grundbegriffe und Bedeutung für den Berater</a:t>
+            </a:r>
+          </a:p>
+        </p:txBody>
+      </p:sp>
+      <p:sp>
+        <p:nvSpPr>
+          <p:cNvPr id="5" name="Rectangle 4"/>
+          <p:cNvSpPr/>
+          <p:nvPr/>
+        </p:nvSpPr>
+        <p:spPr>
+          <a:xfrm>
+            <a:off x="365760" y="1005840"/>
+            <a:ext cx="11430000" cy="27432"/>
+          </a:xfrm>
+          <a:prstGeom prst="rect">
+            <a:avLst/>
+          </a:prstGeom>
+          <a:solidFill>
+            <a:srgbClr val="D1D5DB"/>
+          </a:solidFill>
+          <a:ln>
+            <a:noFill/>
+          </a:ln>
+        </p:spPr>
+        <p:style>
+          <a:lnRef idx="1">
+            <a:schemeClr val="accent1"/>
+          </a:lnRef>
+          <a:fillRef idx="3">
+            <a:schemeClr val="accent1"/>
+          </a:fillRef>
+          <a:effectRef idx="2">
+            <a:schemeClr val="accent1"/>
+          </a:effectRef>
+          <a:fontRef idx="minor">
+            <a:schemeClr val="lt1"/>
+          </a:fontRef>
+        </p:style>
+        <p:txBody>
+          <a:bodyPr rtlCol="0" anchor="ctr"/>
+          <a:lstStyle/>
+          <a:p>
+            <a:pPr algn="ctr"/>
+          </a:p>
+        </p:txBody>
+      </p:sp>
+      <p:graphicFrame>
+        <p:nvGraphicFramePr>
+          <p:cNvPr id="6" name="Table 5"/>
+          <p:cNvGraphicFramePr>
+            <a:graphicFrameLocks noGrp="1"/>
+          </p:cNvGraphicFramePr>
+          <p:nvPr/>
+        </p:nvGraphicFramePr>
+        <p:xfrm>
+          <a:off x="365760" y="1143000"/>
+          <a:ext cx="11430000" cy="1901952"/>
+        </p:xfrm>
+        <a:graphic>
+          <a:graphicData uri="http://schemas.openxmlformats.org/drawingml/2006/table">
+            <a:tbl>
+              <a:tblPr firstRow="1" bandRow="1">
+                <a:tableStyleId>{5C22544A-7EE6-4342-B048-85BDC9FD1C3A}</a:tableStyleId>
+              </a:tblPr>
+              <a:tblGrid>
+                <a:gridCol w="3810000"/>
+                <a:gridCol w="3810000"/>
+                <a:gridCol w="3810000"/>
+              </a:tblGrid>
+              <a:tr h="475488">
+                <a:tc>
+                  <a:txBody>
+                    <a:bodyPr wrap="square"/>
+                    <a:lstStyle/>
+                    <a:p>
+                      <a:r>
+                        <a:rPr sz="1100" b="1">
+                          <a:solidFill>
+                            <a:srgbClr val="FFFFFF"/>
+                          </a:solidFill>
+                          <a:latin typeface="Arial"/>
+                        </a:rPr>
+                        <a:t>Risikoart</a:t>
+                      </a:r>
+                    </a:p>
+                  </a:txBody>
+                  <a:tcPr>
+                    <a:solidFill>
+                      <a:srgbClr val="003DA5"/>
+                    </a:solidFill>
+                  </a:tcPr>
+                </a:tc>
+                <a:tc>
+                  <a:txBody>
+                    <a:bodyPr wrap="square"/>
+                    <a:lstStyle/>
+                    <a:p>
+                      <a:r>
+                        <a:rPr sz="1100" b="1">
+                          <a:solidFill>
+                            <a:srgbClr val="FFFFFF"/>
+                          </a:solidFill>
+                          <a:latin typeface="Arial"/>
+                        </a:rPr>
+                        <a:t>Definition</a:t>
+                      </a:r>
+                    </a:p>
+                  </a:txBody>
+                  <a:tcPr>
+                    <a:solidFill>
+                      <a:srgbClr val="003DA5"/>
+                    </a:solidFill>
+                  </a:tcPr>
+                </a:tc>
+                <a:tc>
+                  <a:txBody>
+                    <a:bodyPr wrap="square"/>
+                    <a:lstStyle/>
+                    <a:p>
+                      <a:r>
+                        <a:rPr sz="1100" b="1">
+                          <a:solidFill>
+                            <a:srgbClr val="FFFFFF"/>
+                          </a:solidFill>
+                          <a:latin typeface="Arial"/>
+                        </a:rPr>
+                        <a:t>Praxisbeispiel VR-Bank</a:t>
+                      </a:r>
+                    </a:p>
+                  </a:txBody>
+                  <a:tcPr>
+                    <a:solidFill>
+                      <a:srgbClr val="003DA5"/>
+                    </a:solidFill>
+                  </a:tcPr>
+                </a:tc>
+              </a:tr>
+              <a:tr h="475488">
+                <a:tc>
+                  <a:txBody>
+                    <a:bodyPr wrap="square"/>
+                    <a:lstStyle/>
+                    <a:p>
+                      <a:r>
+                        <a:rPr sz="1100" b="0">
+                          <a:solidFill>
+                            <a:srgbClr val="1A1A1A"/>
+                          </a:solidFill>
+                          <a:latin typeface="Arial"/>
+                        </a:rPr>
+                        <a:t>Ausfallrisiko</a:t>
+                      </a:r>
+                    </a:p>
+                  </a:txBody>
+                  <a:tcPr>
+                    <a:solidFill>
+                      <a:srgbClr val="FFFFFF"/>
+                    </a:solidFill>
+                  </a:tcPr>
+                </a:tc>
+                <a:tc>
+                  <a:txBody>
+                    <a:bodyPr wrap="square"/>
+                    <a:lstStyle/>
+                    <a:p>
+                      <a:r>
+                        <a:rPr sz="1100" b="0">
+                          <a:solidFill>
+                            <a:srgbClr val="1A1A1A"/>
+                          </a:solidFill>
+                          <a:latin typeface="Arial"/>
+                        </a:rPr>
+                        <a:t>Kreditnehmer kann Zins und Tilgung dauerhaft nicht leisten</a:t>
+                      </a:r>
+                    </a:p>
+                  </a:txBody>
+                  <a:tcPr>
+                    <a:solidFill>
+                      <a:srgbClr val="FFFFFF"/>
+                    </a:solidFill>
+                  </a:tcPr>
+                </a:tc>
+                <a:tc>
+                  <a:txBody>
+                    <a:bodyPr wrap="square"/>
+                    <a:lstStyle/>
+                    <a:p>
+                      <a:r>
+                        <a:rPr sz="1100" b="0">
+                          <a:solidFill>
+                            <a:srgbClr val="1A1A1A"/>
+                          </a:solidFill>
+                          <a:latin typeface="Arial"/>
+                        </a:rPr>
+                        <a:t>Handwerksbetrieb stellt Insolvenzantrag nach Auftragswegbruch</a:t>
+                      </a:r>
+                    </a:p>
+                  </a:txBody>
+                  <a:tcPr>
+                    <a:solidFill>
+                      <a:srgbClr val="FFFFFF"/>
+                    </a:solidFill>
+                  </a:tcPr>
+                </a:tc>
+              </a:tr>
+              <a:tr h="475488">
+                <a:tc>
+                  <a:txBody>
+                    <a:bodyPr wrap="square"/>
+                    <a:lstStyle/>
+                    <a:p>
+                      <a:r>
+                        <a:rPr sz="1100" b="0">
+                          <a:solidFill>
+                            <a:srgbClr val="1A1A1A"/>
+                          </a:solidFill>
+                          <a:latin typeface="Arial"/>
+                        </a:rPr>
+                        <a:t>Migrationsrisiko</a:t>
+                      </a:r>
+                    </a:p>
+                  </a:txBody>
+                  <a:tcPr>
+                    <a:solidFill>
+                      <a:srgbClr val="F4F6FA"/>
+                    </a:solidFill>
+                  </a:tcPr>
+                </a:tc>
+                <a:tc>
+                  <a:txBody>
+                    <a:bodyPr wrap="square"/>
+                    <a:lstStyle/>
+                    <a:p>
+                      <a:r>
+                        <a:rPr sz="1100" b="0">
+                          <a:solidFill>
+                            <a:srgbClr val="1A1A1A"/>
+                          </a:solidFill>
+                          <a:latin typeface="Arial"/>
+                        </a:rPr>
+                        <a:t>Bonität verschlechtert sich ohne sofortigen Ausfall</a:t>
+                      </a:r>
+                    </a:p>
+                  </a:txBody>
+                  <a:tcPr>
+                    <a:solidFill>
+                      <a:srgbClr val="F4F6FA"/>
+                    </a:solidFill>
+                  </a:tcPr>
+                </a:tc>
+                <a:tc>
+                  <a:txBody>
+                    <a:bodyPr wrap="square"/>
+                    <a:lstStyle/>
+                    <a:p>
+                      <a:r>
+                        <a:rPr sz="1100" b="0">
+                          <a:solidFill>
+                            <a:srgbClr val="1A1A1A"/>
+                          </a:solidFill>
+                          <a:latin typeface="Arial"/>
+                        </a:rPr>
+                        <a:t>Mittelständler rutscht von Rating B nach C — Risikogewicht steigt, EK-Bedarf der Bank erhöht sich</a:t>
+                      </a:r>
+                    </a:p>
+                  </a:txBody>
+                  <a:tcPr>
+                    <a:solidFill>
+                      <a:srgbClr val="F4F6FA"/>
+                    </a:solidFill>
+                  </a:tcPr>
+                </a:tc>
+              </a:tr>
+              <a:tr h="475488">
+                <a:tc>
+                  <a:txBody>
+                    <a:bodyPr wrap="square"/>
+                    <a:lstStyle/>
+                    <a:p>
+                      <a:r>
+                        <a:rPr sz="1100" b="0">
+                          <a:solidFill>
+                            <a:srgbClr val="1A1A1A"/>
+                          </a:solidFill>
+                          <a:latin typeface="Arial"/>
+                        </a:rPr>
+                        <a:t>Konzentrationsrisiko</a:t>
+                      </a:r>
+                    </a:p>
+                  </a:txBody>
+                  <a:tcPr>
+                    <a:solidFill>
+                      <a:srgbClr val="FFFFFF"/>
+                    </a:solidFill>
+                  </a:tcPr>
+                </a:tc>
+                <a:tc>
+                  <a:txBody>
+                    <a:bodyPr wrap="square"/>
+                    <a:lstStyle/>
+                    <a:p>
+                      <a:r>
+                        <a:rPr sz="1100" b="0">
+                          <a:solidFill>
+                            <a:srgbClr val="1A1A1A"/>
+                          </a:solidFill>
+                          <a:latin typeface="Arial"/>
+                        </a:rPr>
+                        <a:t>Übergewicht einzelner Branchen, Regionen oder Kreditnehmer im Portfolio</a:t>
+                      </a:r>
+                    </a:p>
+                  </a:txBody>
+                  <a:tcPr>
+                    <a:solidFill>
+                      <a:srgbClr val="FFFFFF"/>
+                    </a:solidFill>
+                  </a:tcPr>
+                </a:tc>
+                <a:tc>
+                  <a:txBody>
+                    <a:bodyPr wrap="square"/>
+                    <a:lstStyle/>
+                    <a:p>
+                      <a:r>
+                        <a:rPr sz="1100" b="0">
+                          <a:solidFill>
+                            <a:srgbClr val="1A1A1A"/>
+                          </a:solidFill>
+                          <a:latin typeface="Arial"/>
+                        </a:rPr>
+                        <a:t>35 % Kreditvolumen in der Automobilzulieferer-Branche — systemisches Risiko bei Branchenkrise</a:t>
+                      </a:r>
+                    </a:p>
+                  </a:txBody>
+                  <a:tcPr>
+                    <a:solidFill>
+                      <a:srgbClr val="FFFFFF"/>
+                    </a:solidFill>
+                  </a:tcPr>
+                </a:tc>
+              </a:tr>
+            </a:tbl>
+          </a:graphicData>
+        </a:graphic>
+      </p:graphicFrame>
+    </p:spTree>
+  </p:cSld>
+  <p:clrMapOvr>
+    <a:masterClrMapping/>
+  </p:clrMapOvr>
+</p:sld>
+</file>
+
+<file path=ppt/slides/slide5.xml><?xml version="1.0" encoding="utf-8"?>
 <p:sld xmlns:a="http://schemas.openxmlformats.org/drawingml/2006/main" xmlns:p="http://schemas.openxmlformats.org/presentationml/2006/main" xmlns:r="http://schemas.openxmlformats.org/officeDocument/2006/relationships">
   <p:cSld>
     <p:bg>
@@ -4315,8 +7751,8 @@
         </p:nvSpPr>
         <p:spPr>
           <a:xfrm>
-            <a:off x="365760" y="2286000"/>
-            <a:ext cx="11430000" cy="1828800"/>
+            <a:off x="365760" y="2011680"/>
+            <a:ext cx="11430000" cy="2011680"/>
           </a:xfrm>
           <a:prstGeom prst="rect">
             <a:avLst/>
@@ -4331,17 +7767,788 @@
           <a:p>
             <a:pPr algn="l"/>
             <a:r>
-              <a:rPr sz="3600" b="1">
+              <a:rPr sz="3600" b="1" i="0">
                 <a:solidFill>
                   <a:srgbClr val="FFFFFF"/>
                 </a:solidFill>
                 <a:latin typeface="Arial"/>
               </a:rPr>
-              <a:t>Ampel-Checkliste: Gesamtbewertung Kreditrisiko</a:t>
+              <a:t>Die vier Krisenphasen</a:t>
             </a:r>
           </a:p>
         </p:txBody>
       </p:sp>
+    </p:spTree>
+  </p:cSld>
+  <p:clrMapOvr>
+    <a:masterClrMapping/>
+  </p:clrMapOvr>
+</p:sld>
+</file>
+
+<file path=ppt/slides/slide6.xml><?xml version="1.0" encoding="utf-8"?>
+<p:sld xmlns:a="http://schemas.openxmlformats.org/drawingml/2006/main" xmlns:p="http://schemas.openxmlformats.org/presentationml/2006/main" xmlns:r="http://schemas.openxmlformats.org/officeDocument/2006/relationships">
+  <p:cSld>
+    <p:bg>
+      <p:bgPr>
+        <a:solidFill>
+          <a:srgbClr val="FFFFFF"/>
+        </a:solidFill>
+        <a:effectLst/>
+      </p:bgPr>
+    </p:bg>
+    <p:spTree>
+      <p:nvGrpSpPr>
+        <p:cNvPr id="1" name=""/>
+        <p:cNvGrpSpPr/>
+        <p:nvPr/>
+      </p:nvGrpSpPr>
+      <p:grpSpPr/>
+      <p:sp>
+        <p:nvSpPr>
+          <p:cNvPr id="2" name="Rectangle 1"/>
+          <p:cNvSpPr/>
+          <p:nvPr/>
+        </p:nvSpPr>
+        <p:spPr>
+          <a:xfrm>
+            <a:off x="0" y="0"/>
+            <a:ext cx="73152" cy="6858000"/>
+          </a:xfrm>
+          <a:prstGeom prst="rect">
+            <a:avLst/>
+          </a:prstGeom>
+          <a:solidFill>
+            <a:srgbClr val="003DA5"/>
+          </a:solidFill>
+          <a:ln>
+            <a:noFill/>
+          </a:ln>
+        </p:spPr>
+        <p:style>
+          <a:lnRef idx="1">
+            <a:schemeClr val="accent1"/>
+          </a:lnRef>
+          <a:fillRef idx="3">
+            <a:schemeClr val="accent1"/>
+          </a:fillRef>
+          <a:effectRef idx="2">
+            <a:schemeClr val="accent1"/>
+          </a:effectRef>
+          <a:fontRef idx="minor">
+            <a:schemeClr val="lt1"/>
+          </a:fontRef>
+        </p:style>
+        <p:txBody>
+          <a:bodyPr rtlCol="0" anchor="ctr"/>
+          <a:lstStyle/>
+          <a:p>
+            <a:pPr algn="ctr"/>
+          </a:p>
+        </p:txBody>
+      </p:sp>
+      <p:sp>
+        <p:nvSpPr>
+          <p:cNvPr id="3" name="TextBox 2"/>
+          <p:cNvSpPr txBox="1"/>
+          <p:nvPr/>
+        </p:nvSpPr>
+        <p:spPr>
+          <a:xfrm>
+            <a:off x="228600" y="182880"/>
+            <a:ext cx="11430000" cy="320040"/>
+          </a:xfrm>
+          <a:prstGeom prst="rect">
+            <a:avLst/>
+          </a:prstGeom>
+          <a:noFill/>
+        </p:spPr>
+        <p:txBody>
+          <a:bodyPr wrap="square">
+            <a:spAutoFit/>
+          </a:bodyPr>
+          <a:lstStyle/>
+          <a:p>
+            <a:pPr algn="l"/>
+            <a:r>
+              <a:rPr sz="900" b="0" i="0">
+                <a:solidFill>
+                  <a:srgbClr val="556575"/>
+                </a:solidFill>
+                <a:latin typeface="Arial"/>
+              </a:rPr>
+              <a:t>M04 · Modulinhalte</a:t>
+            </a:r>
+          </a:p>
+        </p:txBody>
+      </p:sp>
+      <p:sp>
+        <p:nvSpPr>
+          <p:cNvPr id="4" name="TextBox 3"/>
+          <p:cNvSpPr txBox="1"/>
+          <p:nvPr/>
+        </p:nvSpPr>
+        <p:spPr>
+          <a:xfrm>
+            <a:off x="365760" y="274320"/>
+            <a:ext cx="11430000" cy="777240"/>
+          </a:xfrm>
+          <a:prstGeom prst="rect">
+            <a:avLst/>
+          </a:prstGeom>
+          <a:noFill/>
+        </p:spPr>
+        <p:txBody>
+          <a:bodyPr wrap="square">
+            <a:spAutoFit/>
+          </a:bodyPr>
+          <a:lstStyle/>
+          <a:p>
+            <a:pPr algn="l"/>
+            <a:r>
+              <a:rPr sz="2200" b="1" i="0">
+                <a:solidFill>
+                  <a:srgbClr val="003DA5"/>
+                </a:solidFill>
+                <a:latin typeface="Arial"/>
+              </a:rPr>
+              <a:t>Die vier Krisenphasen</a:t>
+            </a:r>
+          </a:p>
+        </p:txBody>
+      </p:sp>
+      <p:sp>
+        <p:nvSpPr>
+          <p:cNvPr id="5" name="Rectangle 4"/>
+          <p:cNvSpPr/>
+          <p:nvPr/>
+        </p:nvSpPr>
+        <p:spPr>
+          <a:xfrm>
+            <a:off x="365760" y="1005840"/>
+            <a:ext cx="11430000" cy="27432"/>
+          </a:xfrm>
+          <a:prstGeom prst="rect">
+            <a:avLst/>
+          </a:prstGeom>
+          <a:solidFill>
+            <a:srgbClr val="D1D5DB"/>
+          </a:solidFill>
+          <a:ln>
+            <a:noFill/>
+          </a:ln>
+        </p:spPr>
+        <p:style>
+          <a:lnRef idx="1">
+            <a:schemeClr val="accent1"/>
+          </a:lnRef>
+          <a:fillRef idx="3">
+            <a:schemeClr val="accent1"/>
+          </a:fillRef>
+          <a:effectRef idx="2">
+            <a:schemeClr val="accent1"/>
+          </a:effectRef>
+          <a:fontRef idx="minor">
+            <a:schemeClr val="lt1"/>
+          </a:fontRef>
+        </p:style>
+        <p:txBody>
+          <a:bodyPr rtlCol="0" anchor="ctr"/>
+          <a:lstStyle/>
+          <a:p>
+            <a:pPr algn="ctr"/>
+          </a:p>
+        </p:txBody>
+      </p:sp>
+      <p:graphicFrame>
+        <p:nvGraphicFramePr>
+          <p:cNvPr id="6" name="Table 5"/>
+          <p:cNvGraphicFramePr>
+            <a:graphicFrameLocks noGrp="1"/>
+          </p:cNvGraphicFramePr>
+          <p:nvPr/>
+        </p:nvGraphicFramePr>
+        <p:xfrm>
+          <a:off x="365760" y="1143000"/>
+          <a:ext cx="11430000" cy="2377440"/>
+        </p:xfrm>
+        <a:graphic>
+          <a:graphicData uri="http://schemas.openxmlformats.org/drawingml/2006/table">
+            <a:tbl>
+              <a:tblPr firstRow="1" bandRow="1">
+                <a:tableStyleId>{5C22544A-7EE6-4342-B048-85BDC9FD1C3A}</a:tableStyleId>
+              </a:tblPr>
+              <a:tblGrid>
+                <a:gridCol w="2286000"/>
+                <a:gridCol w="2286000"/>
+                <a:gridCol w="2286000"/>
+                <a:gridCol w="2286000"/>
+                <a:gridCol w="2286000"/>
+              </a:tblGrid>
+              <a:tr h="475488">
+                <a:tc>
+                  <a:txBody>
+                    <a:bodyPr wrap="square"/>
+                    <a:lstStyle/>
+                    <a:p>
+                      <a:r>
+                        <a:rPr sz="1100" b="1">
+                          <a:solidFill>
+                            <a:srgbClr val="FFFFFF"/>
+                          </a:solidFill>
+                          <a:latin typeface="Arial"/>
+                        </a:rPr>
+                        <a:t>Phase</a:t>
+                      </a:r>
+                    </a:p>
+                  </a:txBody>
+                  <a:tcPr>
+                    <a:solidFill>
+                      <a:srgbClr val="003DA5"/>
+                    </a:solidFill>
+                  </a:tcPr>
+                </a:tc>
+                <a:tc>
+                  <a:txBody>
+                    <a:bodyPr wrap="square"/>
+                    <a:lstStyle/>
+                    <a:p>
+                      <a:r>
+                        <a:rPr sz="1100" b="1">
+                          <a:solidFill>
+                            <a:srgbClr val="FFFFFF"/>
+                          </a:solidFill>
+                          <a:latin typeface="Arial"/>
+                        </a:rPr>
+                        <a:t>Bezeichnung</a:t>
+                      </a:r>
+                    </a:p>
+                  </a:txBody>
+                  <a:tcPr>
+                    <a:solidFill>
+                      <a:srgbClr val="003DA5"/>
+                    </a:solidFill>
+                  </a:tcPr>
+                </a:tc>
+                <a:tc>
+                  <a:txBody>
+                    <a:bodyPr wrap="square"/>
+                    <a:lstStyle/>
+                    <a:p>
+                      <a:r>
+                        <a:rPr sz="1100" b="1">
+                          <a:solidFill>
+                            <a:srgbClr val="FFFFFF"/>
+                          </a:solidFill>
+                          <a:latin typeface="Arial"/>
+                        </a:rPr>
+                        <a:t>Typische Signale</a:t>
+                      </a:r>
+                    </a:p>
+                  </a:txBody>
+                  <a:tcPr>
+                    <a:solidFill>
+                      <a:srgbClr val="003DA5"/>
+                    </a:solidFill>
+                  </a:tcPr>
+                </a:tc>
+                <a:tc>
+                  <a:txBody>
+                    <a:bodyPr wrap="square"/>
+                    <a:lstStyle/>
+                    <a:p>
+                      <a:r>
+                        <a:rPr sz="1100" b="1">
+                          <a:solidFill>
+                            <a:srgbClr val="FFFFFF"/>
+                          </a:solidFill>
+                          <a:latin typeface="Arial"/>
+                        </a:rPr>
+                        <a:t>Ampel</a:t>
+                      </a:r>
+                    </a:p>
+                  </a:txBody>
+                  <a:tcPr>
+                    <a:solidFill>
+                      <a:srgbClr val="003DA5"/>
+                    </a:solidFill>
+                  </a:tcPr>
+                </a:tc>
+                <a:tc>
+                  <a:txBody>
+                    <a:bodyPr wrap="square"/>
+                    <a:lstStyle/>
+                    <a:p>
+                      <a:r>
+                        <a:rPr sz="1100" b="1">
+                          <a:solidFill>
+                            <a:srgbClr val="FFFFFF"/>
+                          </a:solidFill>
+                          <a:latin typeface="Arial"/>
+                        </a:rPr>
+                        <a:t>Ihr Handlungsfenster</a:t>
+                      </a:r>
+                    </a:p>
+                  </a:txBody>
+                  <a:tcPr>
+                    <a:solidFill>
+                      <a:srgbClr val="003DA5"/>
+                    </a:solidFill>
+                  </a:tcPr>
+                </a:tc>
+              </a:tr>
+              <a:tr h="475488">
+                <a:tc>
+                  <a:txBody>
+                    <a:bodyPr wrap="square"/>
+                    <a:lstStyle/>
+                    <a:p>
+                      <a:r>
+                        <a:rPr sz="1100" b="0">
+                          <a:solidFill>
+                            <a:srgbClr val="1A1A1A"/>
+                          </a:solidFill>
+                          <a:latin typeface="Arial"/>
+                        </a:rPr>
+                        <a:t>1</a:t>
+                      </a:r>
+                    </a:p>
+                  </a:txBody>
+                  <a:tcPr>
+                    <a:solidFill>
+                      <a:srgbClr val="FFFFFF"/>
+                    </a:solidFill>
+                  </a:tcPr>
+                </a:tc>
+                <a:tc>
+                  <a:txBody>
+                    <a:bodyPr wrap="square"/>
+                    <a:lstStyle/>
+                    <a:p>
+                      <a:r>
+                        <a:rPr sz="1100" b="0">
+                          <a:solidFill>
+                            <a:srgbClr val="1A1A1A"/>
+                          </a:solidFill>
+                          <a:latin typeface="Arial"/>
+                        </a:rPr>
+                        <a:t>Potenzielle Krise</a:t>
+                      </a:r>
+                    </a:p>
+                  </a:txBody>
+                  <a:tcPr>
+                    <a:solidFill>
+                      <a:srgbClr val="FFFFFF"/>
+                    </a:solidFill>
+                  </a:tcPr>
+                </a:tc>
+                <a:tc>
+                  <a:txBody>
+                    <a:bodyPr wrap="square"/>
+                    <a:lstStyle/>
+                    <a:p>
+                      <a:r>
+                        <a:rPr sz="1100" b="0">
+                          <a:solidFill>
+                            <a:srgbClr val="1A1A1A"/>
+                          </a:solidFill>
+                          <a:latin typeface="Arial"/>
+                        </a:rPr>
+                        <a:t>Umsatzstagnation, Marktanteilsverlust, Abhängigkeit von wenigen Kunden</a:t>
+                      </a:r>
+                    </a:p>
+                  </a:txBody>
+                  <a:tcPr>
+                    <a:solidFill>
+                      <a:srgbClr val="FFFFFF"/>
+                    </a:solidFill>
+                  </a:tcPr>
+                </a:tc>
+                <a:tc>
+                  <a:txBody>
+                    <a:bodyPr wrap="square"/>
+                    <a:lstStyle/>
+                    <a:p>
+                      <a:r>
+                        <a:rPr sz="1100" b="0">
+                          <a:solidFill>
+                            <a:srgbClr val="1A1A1A"/>
+                          </a:solidFill>
+                          <a:latin typeface="Arial"/>
+                        </a:rPr>
+                        <a:t>Gelb</a:t>
+                      </a:r>
+                    </a:p>
+                  </a:txBody>
+                  <a:tcPr>
+                    <a:solidFill>
+                      <a:srgbClr val="FFFFFF"/>
+                    </a:solidFill>
+                  </a:tcPr>
+                </a:tc>
+                <a:tc>
+                  <a:txBody>
+                    <a:bodyPr wrap="square"/>
+                    <a:lstStyle/>
+                    <a:p>
+                      <a:r>
+                        <a:rPr sz="1100" b="0">
+                          <a:solidFill>
+                            <a:srgbClr val="1A1A1A"/>
+                          </a:solidFill>
+                          <a:latin typeface="Arial"/>
+                        </a:rPr>
+                        <a:t>Präventiv ansprechen, Beratung anbieten</a:t>
+                      </a:r>
+                    </a:p>
+                  </a:txBody>
+                  <a:tcPr>
+                    <a:solidFill>
+                      <a:srgbClr val="FFFFFF"/>
+                    </a:solidFill>
+                  </a:tcPr>
+                </a:tc>
+              </a:tr>
+              <a:tr h="475488">
+                <a:tc>
+                  <a:txBody>
+                    <a:bodyPr wrap="square"/>
+                    <a:lstStyle/>
+                    <a:p>
+                      <a:r>
+                        <a:rPr sz="1100" b="0">
+                          <a:solidFill>
+                            <a:srgbClr val="1A1A1A"/>
+                          </a:solidFill>
+                          <a:latin typeface="Arial"/>
+                        </a:rPr>
+                        <a:t>2</a:t>
+                      </a:r>
+                    </a:p>
+                  </a:txBody>
+                  <a:tcPr>
+                    <a:solidFill>
+                      <a:srgbClr val="F4F6FA"/>
+                    </a:solidFill>
+                  </a:tcPr>
+                </a:tc>
+                <a:tc>
+                  <a:txBody>
+                    <a:bodyPr wrap="square"/>
+                    <a:lstStyle/>
+                    <a:p>
+                      <a:r>
+                        <a:rPr sz="1100" b="0">
+                          <a:solidFill>
+                            <a:srgbClr val="1A1A1A"/>
+                          </a:solidFill>
+                          <a:latin typeface="Arial"/>
+                        </a:rPr>
+                        <a:t>Latente Krise</a:t>
+                      </a:r>
+                    </a:p>
+                  </a:txBody>
+                  <a:tcPr>
+                    <a:solidFill>
+                      <a:srgbClr val="F4F6FA"/>
+                    </a:solidFill>
+                  </a:tcPr>
+                </a:tc>
+                <a:tc>
+                  <a:txBody>
+                    <a:bodyPr wrap="square"/>
+                    <a:lstStyle/>
+                    <a:p>
+                      <a:r>
+                        <a:rPr sz="1100" b="0">
+                          <a:solidFill>
+                            <a:srgbClr val="1A1A1A"/>
+                          </a:solidFill>
+                          <a:latin typeface="Arial"/>
+                        </a:rPr>
+                        <a:t>Margenrückgang, EBIT sinkt, EK-Erosion, BWA angefordert</a:t>
+                      </a:r>
+                    </a:p>
+                  </a:txBody>
+                  <a:tcPr>
+                    <a:solidFill>
+                      <a:srgbClr val="F4F6FA"/>
+                    </a:solidFill>
+                  </a:tcPr>
+                </a:tc>
+                <a:tc>
+                  <a:txBody>
+                    <a:bodyPr wrap="square"/>
+                    <a:lstStyle/>
+                    <a:p>
+                      <a:r>
+                        <a:rPr sz="1100" b="0">
+                          <a:solidFill>
+                            <a:srgbClr val="1A1A1A"/>
+                          </a:solidFill>
+                          <a:latin typeface="Arial"/>
+                        </a:rPr>
+                        <a:t>Gelb–Rot</a:t>
+                      </a:r>
+                    </a:p>
+                  </a:txBody>
+                  <a:tcPr>
+                    <a:solidFill>
+                      <a:srgbClr val="F4F6FA"/>
+                    </a:solidFill>
+                  </a:tcPr>
+                </a:tc>
+                <a:tc>
+                  <a:txBody>
+                    <a:bodyPr wrap="square"/>
+                    <a:lstStyle/>
+                    <a:p>
+                      <a:r>
+                        <a:rPr sz="1100" b="0">
+                          <a:solidFill>
+                            <a:srgbClr val="1A1A1A"/>
+                          </a:solidFill>
+                          <a:latin typeface="Arial"/>
+                        </a:rPr>
+                        <a:t>Haupthandlungsfenster — engmaschige Betreuung</a:t>
+                      </a:r>
+                    </a:p>
+                  </a:txBody>
+                  <a:tcPr>
+                    <a:solidFill>
+                      <a:srgbClr val="F4F6FA"/>
+                    </a:solidFill>
+                  </a:tcPr>
+                </a:tc>
+              </a:tr>
+              <a:tr h="475488">
+                <a:tc>
+                  <a:txBody>
+                    <a:bodyPr wrap="square"/>
+                    <a:lstStyle/>
+                    <a:p>
+                      <a:r>
+                        <a:rPr sz="1100" b="0">
+                          <a:solidFill>
+                            <a:srgbClr val="1A1A1A"/>
+                          </a:solidFill>
+                          <a:latin typeface="Arial"/>
+                        </a:rPr>
+                        <a:t>3</a:t>
+                      </a:r>
+                    </a:p>
+                  </a:txBody>
+                  <a:tcPr>
+                    <a:solidFill>
+                      <a:srgbClr val="FFFFFF"/>
+                    </a:solidFill>
+                  </a:tcPr>
+                </a:tc>
+                <a:tc>
+                  <a:txBody>
+                    <a:bodyPr wrap="square"/>
+                    <a:lstStyle/>
+                    <a:p>
+                      <a:r>
+                        <a:rPr sz="1100" b="0">
+                          <a:solidFill>
+                            <a:srgbClr val="1A1A1A"/>
+                          </a:solidFill>
+                          <a:latin typeface="Arial"/>
+                        </a:rPr>
+                        <a:t>Akute/beherrschbar</a:t>
+                      </a:r>
+                    </a:p>
+                  </a:txBody>
+                  <a:tcPr>
+                    <a:solidFill>
+                      <a:srgbClr val="FFFFFF"/>
+                    </a:solidFill>
+                  </a:tcPr>
+                </a:tc>
+                <a:tc>
+                  <a:txBody>
+                    <a:bodyPr wrap="square"/>
+                    <a:lstStyle/>
+                    <a:p>
+                      <a:r>
+                        <a:rPr sz="1100" b="0">
+                          <a:solidFill>
+                            <a:srgbClr val="1A1A1A"/>
+                          </a:solidFill>
+                          <a:latin typeface="Arial"/>
+                        </a:rPr>
+                        <a:t>KK dauerhaft ausgeschöpft, Zinsverzug, Rücklastschriften</a:t>
+                      </a:r>
+                    </a:p>
+                  </a:txBody>
+                  <a:tcPr>
+                    <a:solidFill>
+                      <a:srgbClr val="FFFFFF"/>
+                    </a:solidFill>
+                  </a:tcPr>
+                </a:tc>
+                <a:tc>
+                  <a:txBody>
+                    <a:bodyPr wrap="square"/>
+                    <a:lstStyle/>
+                    <a:p>
+                      <a:r>
+                        <a:rPr sz="1100" b="0">
+                          <a:solidFill>
+                            <a:srgbClr val="1A1A1A"/>
+                          </a:solidFill>
+                          <a:latin typeface="Arial"/>
+                        </a:rPr>
+                        <a:t>Rot</a:t>
+                      </a:r>
+                    </a:p>
+                  </a:txBody>
+                  <a:tcPr>
+                    <a:solidFill>
+                      <a:srgbClr val="FFFFFF"/>
+                    </a:solidFill>
+                  </a:tcPr>
+                </a:tc>
+                <a:tc>
+                  <a:txBody>
+                    <a:bodyPr wrap="square"/>
+                    <a:lstStyle/>
+                    <a:p>
+                      <a:r>
+                        <a:rPr sz="1100" b="0">
+                          <a:solidFill>
+                            <a:srgbClr val="1A1A1A"/>
+                          </a:solidFill>
+                          <a:latin typeface="Arial"/>
+                        </a:rPr>
+                        <a:t>Sofort eskalieren</a:t>
+                      </a:r>
+                    </a:p>
+                  </a:txBody>
+                  <a:tcPr>
+                    <a:solidFill>
+                      <a:srgbClr val="FFFFFF"/>
+                    </a:solidFill>
+                  </a:tcPr>
+                </a:tc>
+              </a:tr>
+              <a:tr h="475488">
+                <a:tc>
+                  <a:txBody>
+                    <a:bodyPr wrap="square"/>
+                    <a:lstStyle/>
+                    <a:p>
+                      <a:r>
+                        <a:rPr sz="1100" b="0">
+                          <a:solidFill>
+                            <a:srgbClr val="1A1A1A"/>
+                          </a:solidFill>
+                          <a:latin typeface="Arial"/>
+                        </a:rPr>
+                        <a:t>4</a:t>
+                      </a:r>
+                    </a:p>
+                  </a:txBody>
+                  <a:tcPr>
+                    <a:solidFill>
+                      <a:srgbClr val="F4F6FA"/>
+                    </a:solidFill>
+                  </a:tcPr>
+                </a:tc>
+                <a:tc>
+                  <a:txBody>
+                    <a:bodyPr wrap="square"/>
+                    <a:lstStyle/>
+                    <a:p>
+                      <a:r>
+                        <a:rPr sz="1100" b="0">
+                          <a:solidFill>
+                            <a:srgbClr val="1A1A1A"/>
+                          </a:solidFill>
+                          <a:latin typeface="Arial"/>
+                        </a:rPr>
+                        <a:t>Insolvenz</a:t>
+                      </a:r>
+                    </a:p>
+                  </a:txBody>
+                  <a:tcPr>
+                    <a:solidFill>
+                      <a:srgbClr val="F4F6FA"/>
+                    </a:solidFill>
+                  </a:tcPr>
+                </a:tc>
+                <a:tc>
+                  <a:txBody>
+                    <a:bodyPr wrap="square"/>
+                    <a:lstStyle/>
+                    <a:p>
+                      <a:r>
+                        <a:rPr sz="1100" b="0">
+                          <a:solidFill>
+                            <a:srgbClr val="1A1A1A"/>
+                          </a:solidFill>
+                          <a:latin typeface="Arial"/>
+                        </a:rPr>
+                        <a:t>Zahlungsunfähigkeit, Insolvenzantrag gestellt</a:t>
+                      </a:r>
+                    </a:p>
+                  </a:txBody>
+                  <a:tcPr>
+                    <a:solidFill>
+                      <a:srgbClr val="F4F6FA"/>
+                    </a:solidFill>
+                  </a:tcPr>
+                </a:tc>
+                <a:tc>
+                  <a:txBody>
+                    <a:bodyPr wrap="square"/>
+                    <a:lstStyle/>
+                    <a:p>
+                      <a:r>
+                        <a:rPr sz="1100" b="0">
+                          <a:solidFill>
+                            <a:srgbClr val="1A1A1A"/>
+                          </a:solidFill>
+                          <a:latin typeface="Arial"/>
+                        </a:rPr>
+                        <a:t>Rot (Sofort)</a:t>
+                      </a:r>
+                    </a:p>
+                  </a:txBody>
+                  <a:tcPr>
+                    <a:solidFill>
+                      <a:srgbClr val="F4F6FA"/>
+                    </a:solidFill>
+                  </a:tcPr>
+                </a:tc>
+                <a:tc>
+                  <a:txBody>
+                    <a:bodyPr wrap="square"/>
+                    <a:lstStyle/>
+                    <a:p>
+                      <a:r>
+                        <a:rPr sz="1100" b="0">
+                          <a:solidFill>
+                            <a:srgbClr val="1A1A1A"/>
+                          </a:solidFill>
+                          <a:latin typeface="Arial"/>
+                        </a:rPr>
+                        <a:t>Problemkreditabteilung übernimmt</a:t>
+                      </a:r>
+                    </a:p>
+                  </a:txBody>
+                  <a:tcPr>
+                    <a:solidFill>
+                      <a:srgbClr val="F4F6FA"/>
+                    </a:solidFill>
+                  </a:tcPr>
+                </a:tc>
+              </a:tr>
+            </a:tbl>
+          </a:graphicData>
+        </a:graphic>
+      </p:graphicFrame>
     </p:spTree>
   </p:cSld>
   <p:clrMapOvr>
@@ -4419,8 +8626,8 @@
         </p:nvSpPr>
         <p:spPr>
           <a:xfrm>
-            <a:off x="365760" y="2286000"/>
-            <a:ext cx="11430000" cy="1828800"/>
+            <a:off x="365760" y="2011680"/>
+            <a:ext cx="11430000" cy="2011680"/>
           </a:xfrm>
           <a:prstGeom prst="rect">
             <a:avLst/>
@@ -4435,13 +8642,13 @@
           <a:p>
             <a:pPr algn="l"/>
             <a:r>
-              <a:rPr sz="3600" b="1">
+              <a:rPr sz="3600" b="1" i="0">
                 <a:solidFill>
                   <a:srgbClr val="FFFFFF"/>
                 </a:solidFill>
                 <a:latin typeface="Arial"/>
               </a:rPr>
-              <a:t>Eskalationspfade – Wer handelt wann?</a:t>
+              <a:t>Frühwarnindikatoren – Quantitativ und Qualitativ</a:t>
             </a:r>
           </a:p>
         </p:txBody>
@@ -4455,6 +8662,1673 @@
 </file>
 
 <file path=ppt/slides/slide8.xml><?xml version="1.0" encoding="utf-8"?>
+<p:sld xmlns:a="http://schemas.openxmlformats.org/drawingml/2006/main" xmlns:p="http://schemas.openxmlformats.org/presentationml/2006/main" xmlns:r="http://schemas.openxmlformats.org/officeDocument/2006/relationships">
+  <p:cSld>
+    <p:bg>
+      <p:bgPr>
+        <a:solidFill>
+          <a:srgbClr val="FFFFFF"/>
+        </a:solidFill>
+        <a:effectLst/>
+      </p:bgPr>
+    </p:bg>
+    <p:spTree>
+      <p:nvGrpSpPr>
+        <p:cNvPr id="1" name=""/>
+        <p:cNvGrpSpPr/>
+        <p:nvPr/>
+      </p:nvGrpSpPr>
+      <p:grpSpPr/>
+      <p:sp>
+        <p:nvSpPr>
+          <p:cNvPr id="2" name="Rectangle 1"/>
+          <p:cNvSpPr/>
+          <p:nvPr/>
+        </p:nvSpPr>
+        <p:spPr>
+          <a:xfrm>
+            <a:off x="0" y="0"/>
+            <a:ext cx="73152" cy="6858000"/>
+          </a:xfrm>
+          <a:prstGeom prst="rect">
+            <a:avLst/>
+          </a:prstGeom>
+          <a:solidFill>
+            <a:srgbClr val="003DA5"/>
+          </a:solidFill>
+          <a:ln>
+            <a:noFill/>
+          </a:ln>
+        </p:spPr>
+        <p:style>
+          <a:lnRef idx="1">
+            <a:schemeClr val="accent1"/>
+          </a:lnRef>
+          <a:fillRef idx="3">
+            <a:schemeClr val="accent1"/>
+          </a:fillRef>
+          <a:effectRef idx="2">
+            <a:schemeClr val="accent1"/>
+          </a:effectRef>
+          <a:fontRef idx="minor">
+            <a:schemeClr val="lt1"/>
+          </a:fontRef>
+        </p:style>
+        <p:txBody>
+          <a:bodyPr rtlCol="0" anchor="ctr"/>
+          <a:lstStyle/>
+          <a:p>
+            <a:pPr algn="ctr"/>
+          </a:p>
+        </p:txBody>
+      </p:sp>
+      <p:sp>
+        <p:nvSpPr>
+          <p:cNvPr id="3" name="TextBox 2"/>
+          <p:cNvSpPr txBox="1"/>
+          <p:nvPr/>
+        </p:nvSpPr>
+        <p:spPr>
+          <a:xfrm>
+            <a:off x="228600" y="182880"/>
+            <a:ext cx="11430000" cy="320040"/>
+          </a:xfrm>
+          <a:prstGeom prst="rect">
+            <a:avLst/>
+          </a:prstGeom>
+          <a:noFill/>
+        </p:spPr>
+        <p:txBody>
+          <a:bodyPr wrap="square">
+            <a:spAutoFit/>
+          </a:bodyPr>
+          <a:lstStyle/>
+          <a:p>
+            <a:pPr algn="l"/>
+            <a:r>
+              <a:rPr sz="900" b="0" i="0">
+                <a:solidFill>
+                  <a:srgbClr val="556575"/>
+                </a:solidFill>
+                <a:latin typeface="Arial"/>
+              </a:rPr>
+              <a:t>M04 · Modulinhalte</a:t>
+            </a:r>
+          </a:p>
+        </p:txBody>
+      </p:sp>
+      <p:sp>
+        <p:nvSpPr>
+          <p:cNvPr id="4" name="TextBox 3"/>
+          <p:cNvSpPr txBox="1"/>
+          <p:nvPr/>
+        </p:nvSpPr>
+        <p:spPr>
+          <a:xfrm>
+            <a:off x="365760" y="274320"/>
+            <a:ext cx="11430000" cy="777240"/>
+          </a:xfrm>
+          <a:prstGeom prst="rect">
+            <a:avLst/>
+          </a:prstGeom>
+          <a:noFill/>
+        </p:spPr>
+        <p:txBody>
+          <a:bodyPr wrap="square">
+            <a:spAutoFit/>
+          </a:bodyPr>
+          <a:lstStyle/>
+          <a:p>
+            <a:pPr algn="l"/>
+            <a:r>
+              <a:rPr sz="2200" b="1" i="0">
+                <a:solidFill>
+                  <a:srgbClr val="003DA5"/>
+                </a:solidFill>
+                <a:latin typeface="Arial"/>
+              </a:rPr>
+              <a:t>Frühwarnindikatoren – Quantitativ und Qualitativ</a:t>
+            </a:r>
+          </a:p>
+        </p:txBody>
+      </p:sp>
+      <p:sp>
+        <p:nvSpPr>
+          <p:cNvPr id="5" name="Rectangle 4"/>
+          <p:cNvSpPr/>
+          <p:nvPr/>
+        </p:nvSpPr>
+        <p:spPr>
+          <a:xfrm>
+            <a:off x="365760" y="1005840"/>
+            <a:ext cx="11430000" cy="27432"/>
+          </a:xfrm>
+          <a:prstGeom prst="rect">
+            <a:avLst/>
+          </a:prstGeom>
+          <a:solidFill>
+            <a:srgbClr val="D1D5DB"/>
+          </a:solidFill>
+          <a:ln>
+            <a:noFill/>
+          </a:ln>
+        </p:spPr>
+        <p:style>
+          <a:lnRef idx="1">
+            <a:schemeClr val="accent1"/>
+          </a:lnRef>
+          <a:fillRef idx="3">
+            <a:schemeClr val="accent1"/>
+          </a:fillRef>
+          <a:effectRef idx="2">
+            <a:schemeClr val="accent1"/>
+          </a:effectRef>
+          <a:fontRef idx="minor">
+            <a:schemeClr val="lt1"/>
+          </a:fontRef>
+        </p:style>
+        <p:txBody>
+          <a:bodyPr rtlCol="0" anchor="ctr"/>
+          <a:lstStyle/>
+          <a:p>
+            <a:pPr algn="ctr"/>
+          </a:p>
+        </p:txBody>
+      </p:sp>
+      <p:graphicFrame>
+        <p:nvGraphicFramePr>
+          <p:cNvPr id="6" name="Table 5"/>
+          <p:cNvGraphicFramePr>
+            <a:graphicFrameLocks noGrp="1"/>
+          </p:cNvGraphicFramePr>
+          <p:nvPr/>
+        </p:nvGraphicFramePr>
+        <p:xfrm>
+          <a:off x="365760" y="1143000"/>
+          <a:ext cx="11430000" cy="5029200"/>
+        </p:xfrm>
+        <a:graphic>
+          <a:graphicData uri="http://schemas.openxmlformats.org/drawingml/2006/table">
+            <a:tbl>
+              <a:tblPr firstRow="1" bandRow="1">
+                <a:tableStyleId>{5C22544A-7EE6-4342-B048-85BDC9FD1C3A}</a:tableStyleId>
+              </a:tblPr>
+              <a:tblGrid>
+                <a:gridCol w="2286000"/>
+                <a:gridCol w="2286000"/>
+                <a:gridCol w="2286000"/>
+                <a:gridCol w="2286000"/>
+                <a:gridCol w="2286000"/>
+              </a:tblGrid>
+              <a:tr h="386861">
+                <a:tc>
+                  <a:txBody>
+                    <a:bodyPr wrap="square"/>
+                    <a:lstStyle/>
+                    <a:p>
+                      <a:r>
+                        <a:rPr sz="1100" b="1">
+                          <a:solidFill>
+                            <a:srgbClr val="FFFFFF"/>
+                          </a:solidFill>
+                          <a:latin typeface="Arial"/>
+                        </a:rPr>
+                        <a:t>Indikator</a:t>
+                      </a:r>
+                    </a:p>
+                  </a:txBody>
+                  <a:tcPr>
+                    <a:solidFill>
+                      <a:srgbClr val="003DA5"/>
+                    </a:solidFill>
+                  </a:tcPr>
+                </a:tc>
+                <a:tc>
+                  <a:txBody>
+                    <a:bodyPr wrap="square"/>
+                    <a:lstStyle/>
+                    <a:p>
+                      <a:r>
+                        <a:rPr sz="1100" b="1">
+                          <a:solidFill>
+                            <a:srgbClr val="FFFFFF"/>
+                          </a:solidFill>
+                          <a:latin typeface="Arial"/>
+                        </a:rPr>
+                        <a:t>Formel</a:t>
+                      </a:r>
+                    </a:p>
+                  </a:txBody>
+                  <a:tcPr>
+                    <a:solidFill>
+                      <a:srgbClr val="003DA5"/>
+                    </a:solidFill>
+                  </a:tcPr>
+                </a:tc>
+                <a:tc>
+                  <a:txBody>
+                    <a:bodyPr wrap="square"/>
+                    <a:lstStyle/>
+                    <a:p>
+                      <a:r>
+                        <a:rPr sz="1100" b="1">
+                          <a:solidFill>
+                            <a:srgbClr val="FFFFFF"/>
+                          </a:solidFill>
+                          <a:latin typeface="Arial"/>
+                        </a:rPr>
+                        <a:t>Grün</a:t>
+                      </a:r>
+                    </a:p>
+                  </a:txBody>
+                  <a:tcPr>
+                    <a:solidFill>
+                      <a:srgbClr val="003DA5"/>
+                    </a:solidFill>
+                  </a:tcPr>
+                </a:tc>
+                <a:tc>
+                  <a:txBody>
+                    <a:bodyPr wrap="square"/>
+                    <a:lstStyle/>
+                    <a:p>
+                      <a:r>
+                        <a:rPr sz="1100" b="1">
+                          <a:solidFill>
+                            <a:srgbClr val="FFFFFF"/>
+                          </a:solidFill>
+                          <a:latin typeface="Arial"/>
+                        </a:rPr>
+                        <a:t>Gelb</a:t>
+                      </a:r>
+                    </a:p>
+                  </a:txBody>
+                  <a:tcPr>
+                    <a:solidFill>
+                      <a:srgbClr val="003DA5"/>
+                    </a:solidFill>
+                  </a:tcPr>
+                </a:tc>
+                <a:tc>
+                  <a:txBody>
+                    <a:bodyPr wrap="square"/>
+                    <a:lstStyle/>
+                    <a:p>
+                      <a:r>
+                        <a:rPr sz="1100" b="1">
+                          <a:solidFill>
+                            <a:srgbClr val="FFFFFF"/>
+                          </a:solidFill>
+                          <a:latin typeface="Arial"/>
+                        </a:rPr>
+                        <a:t>Rot</a:t>
+                      </a:r>
+                    </a:p>
+                  </a:txBody>
+                  <a:tcPr>
+                    <a:solidFill>
+                      <a:srgbClr val="003DA5"/>
+                    </a:solidFill>
+                  </a:tcPr>
+                </a:tc>
+              </a:tr>
+              <a:tr h="386861">
+                <a:tc>
+                  <a:txBody>
+                    <a:bodyPr wrap="square"/>
+                    <a:lstStyle/>
+                    <a:p>
+                      <a:r>
+                        <a:rPr sz="1100" b="0">
+                          <a:solidFill>
+                            <a:srgbClr val="1A1A1A"/>
+                          </a:solidFill>
+                          <a:latin typeface="Arial"/>
+                        </a:rPr>
+                        <a:t>EBITDA-Marge</a:t>
+                      </a:r>
+                    </a:p>
+                  </a:txBody>
+                  <a:tcPr>
+                    <a:solidFill>
+                      <a:srgbClr val="FFFFFF"/>
+                    </a:solidFill>
+                  </a:tcPr>
+                </a:tc>
+                <a:tc>
+                  <a:txBody>
+                    <a:bodyPr wrap="square"/>
+                    <a:lstStyle/>
+                    <a:p>
+                      <a:r>
+                        <a:rPr sz="1100" b="0">
+                          <a:solidFill>
+                            <a:srgbClr val="1A1A1A"/>
+                          </a:solidFill>
+                          <a:latin typeface="Arial"/>
+                        </a:rPr>
+                        <a:t>EBITDA / Umsatz × 100</a:t>
+                      </a:r>
+                    </a:p>
+                  </a:txBody>
+                  <a:tcPr>
+                    <a:solidFill>
+                      <a:srgbClr val="FFFFFF"/>
+                    </a:solidFill>
+                  </a:tcPr>
+                </a:tc>
+                <a:tc>
+                  <a:txBody>
+                    <a:bodyPr wrap="square"/>
+                    <a:lstStyle/>
+                    <a:p>
+                      <a:r>
+                        <a:rPr sz="1100" b="0">
+                          <a:solidFill>
+                            <a:srgbClr val="1A1A1A"/>
+                          </a:solidFill>
+                          <a:latin typeface="Arial"/>
+                        </a:rPr>
+                        <a:t>&gt; 8 %</a:t>
+                      </a:r>
+                    </a:p>
+                  </a:txBody>
+                  <a:tcPr>
+                    <a:solidFill>
+                      <a:srgbClr val="FFFFFF"/>
+                    </a:solidFill>
+                  </a:tcPr>
+                </a:tc>
+                <a:tc>
+                  <a:txBody>
+                    <a:bodyPr wrap="square"/>
+                    <a:lstStyle/>
+                    <a:p>
+                      <a:r>
+                        <a:rPr sz="1100" b="0">
+                          <a:solidFill>
+                            <a:srgbClr val="1A1A1A"/>
+                          </a:solidFill>
+                          <a:latin typeface="Arial"/>
+                        </a:rPr>
+                        <a:t>5–8 %</a:t>
+                      </a:r>
+                    </a:p>
+                  </a:txBody>
+                  <a:tcPr>
+                    <a:solidFill>
+                      <a:srgbClr val="FFFFFF"/>
+                    </a:solidFill>
+                  </a:tcPr>
+                </a:tc>
+                <a:tc>
+                  <a:txBody>
+                    <a:bodyPr wrap="square"/>
+                    <a:lstStyle/>
+                    <a:p>
+                      <a:r>
+                        <a:rPr sz="1100" b="0">
+                          <a:solidFill>
+                            <a:srgbClr val="1A1A1A"/>
+                          </a:solidFill>
+                          <a:latin typeface="Arial"/>
+                        </a:rPr>
+                        <a:t>&lt; 5 %</a:t>
+                      </a:r>
+                    </a:p>
+                  </a:txBody>
+                  <a:tcPr>
+                    <a:solidFill>
+                      <a:srgbClr val="FFFFFF"/>
+                    </a:solidFill>
+                  </a:tcPr>
+                </a:tc>
+              </a:tr>
+              <a:tr h="386861">
+                <a:tc>
+                  <a:txBody>
+                    <a:bodyPr wrap="square"/>
+                    <a:lstStyle/>
+                    <a:p>
+                      <a:r>
+                        <a:rPr sz="1100" b="0">
+                          <a:solidFill>
+                            <a:srgbClr val="1A1A1A"/>
+                          </a:solidFill>
+                          <a:latin typeface="Arial"/>
+                        </a:rPr>
+                        <a:t>Leverage (NFK/EBITDA)</a:t>
+                      </a:r>
+                    </a:p>
+                  </a:txBody>
+                  <a:tcPr>
+                    <a:solidFill>
+                      <a:srgbClr val="F4F6FA"/>
+                    </a:solidFill>
+                  </a:tcPr>
+                </a:tc>
+                <a:tc>
+                  <a:txBody>
+                    <a:bodyPr wrap="square"/>
+                    <a:lstStyle/>
+                    <a:p>
+                      <a:r>
+                        <a:rPr sz="1100" b="0">
+                          <a:solidFill>
+                            <a:srgbClr val="1A1A1A"/>
+                          </a:solidFill>
+                          <a:latin typeface="Arial"/>
+                        </a:rPr>
+                        <a:t>Netto-Finanzverbindlichkeiten / EBITDA</a:t>
+                      </a:r>
+                    </a:p>
+                  </a:txBody>
+                  <a:tcPr>
+                    <a:solidFill>
+                      <a:srgbClr val="F4F6FA"/>
+                    </a:solidFill>
+                  </a:tcPr>
+                </a:tc>
+                <a:tc>
+                  <a:txBody>
+                    <a:bodyPr wrap="square"/>
+                    <a:lstStyle/>
+                    <a:p>
+                      <a:r>
+                        <a:rPr sz="1100" b="0">
+                          <a:solidFill>
+                            <a:srgbClr val="1A1A1A"/>
+                          </a:solidFill>
+                          <a:latin typeface="Arial"/>
+                        </a:rPr>
+                        <a:t>&lt; 3,0x</a:t>
+                      </a:r>
+                    </a:p>
+                  </a:txBody>
+                  <a:tcPr>
+                    <a:solidFill>
+                      <a:srgbClr val="F4F6FA"/>
+                    </a:solidFill>
+                  </a:tcPr>
+                </a:tc>
+                <a:tc>
+                  <a:txBody>
+                    <a:bodyPr wrap="square"/>
+                    <a:lstStyle/>
+                    <a:p>
+                      <a:r>
+                        <a:rPr sz="1100" b="0">
+                          <a:solidFill>
+                            <a:srgbClr val="1A1A1A"/>
+                          </a:solidFill>
+                          <a:latin typeface="Arial"/>
+                        </a:rPr>
+                        <a:t>3,0–4,0x</a:t>
+                      </a:r>
+                    </a:p>
+                  </a:txBody>
+                  <a:tcPr>
+                    <a:solidFill>
+                      <a:srgbClr val="F4F6FA"/>
+                    </a:solidFill>
+                  </a:tcPr>
+                </a:tc>
+                <a:tc>
+                  <a:txBody>
+                    <a:bodyPr wrap="square"/>
+                    <a:lstStyle/>
+                    <a:p>
+                      <a:r>
+                        <a:rPr sz="1100" b="0">
+                          <a:solidFill>
+                            <a:srgbClr val="1A1A1A"/>
+                          </a:solidFill>
+                          <a:latin typeface="Arial"/>
+                        </a:rPr>
+                        <a:t>&gt; 4,0x</a:t>
+                      </a:r>
+                    </a:p>
+                  </a:txBody>
+                  <a:tcPr>
+                    <a:solidFill>
+                      <a:srgbClr val="F4F6FA"/>
+                    </a:solidFill>
+                  </a:tcPr>
+                </a:tc>
+              </a:tr>
+              <a:tr h="386861">
+                <a:tc>
+                  <a:txBody>
+                    <a:bodyPr wrap="square"/>
+                    <a:lstStyle/>
+                    <a:p>
+                      <a:r>
+                        <a:rPr sz="1100" b="0">
+                          <a:solidFill>
+                            <a:srgbClr val="1A1A1A"/>
+                          </a:solidFill>
+                          <a:latin typeface="Arial"/>
+                        </a:rPr>
+                        <a:t>Eigenkapitalquote</a:t>
+                      </a:r>
+                    </a:p>
+                  </a:txBody>
+                  <a:tcPr>
+                    <a:solidFill>
+                      <a:srgbClr val="FFFFFF"/>
+                    </a:solidFill>
+                  </a:tcPr>
+                </a:tc>
+                <a:tc>
+                  <a:txBody>
+                    <a:bodyPr wrap="square"/>
+                    <a:lstStyle/>
+                    <a:p>
+                      <a:r>
+                        <a:rPr sz="1100" b="0">
+                          <a:solidFill>
+                            <a:srgbClr val="1A1A1A"/>
+                          </a:solidFill>
+                          <a:latin typeface="Arial"/>
+                        </a:rPr>
+                        <a:t>EK / Bilanzsumme × 100</a:t>
+                      </a:r>
+                    </a:p>
+                  </a:txBody>
+                  <a:tcPr>
+                    <a:solidFill>
+                      <a:srgbClr val="FFFFFF"/>
+                    </a:solidFill>
+                  </a:tcPr>
+                </a:tc>
+                <a:tc>
+                  <a:txBody>
+                    <a:bodyPr wrap="square"/>
+                    <a:lstStyle/>
+                    <a:p>
+                      <a:r>
+                        <a:rPr sz="1100" b="0">
+                          <a:solidFill>
+                            <a:srgbClr val="1A1A1A"/>
+                          </a:solidFill>
+                          <a:latin typeface="Arial"/>
+                        </a:rPr>
+                        <a:t>&gt; 20 %</a:t>
+                      </a:r>
+                    </a:p>
+                  </a:txBody>
+                  <a:tcPr>
+                    <a:solidFill>
+                      <a:srgbClr val="FFFFFF"/>
+                    </a:solidFill>
+                  </a:tcPr>
+                </a:tc>
+                <a:tc>
+                  <a:txBody>
+                    <a:bodyPr wrap="square"/>
+                    <a:lstStyle/>
+                    <a:p>
+                      <a:r>
+                        <a:rPr sz="1100" b="0">
+                          <a:solidFill>
+                            <a:srgbClr val="1A1A1A"/>
+                          </a:solidFill>
+                          <a:latin typeface="Arial"/>
+                        </a:rPr>
+                        <a:t>10–20 %</a:t>
+                      </a:r>
+                    </a:p>
+                  </a:txBody>
+                  <a:tcPr>
+                    <a:solidFill>
+                      <a:srgbClr val="FFFFFF"/>
+                    </a:solidFill>
+                  </a:tcPr>
+                </a:tc>
+                <a:tc>
+                  <a:txBody>
+                    <a:bodyPr wrap="square"/>
+                    <a:lstStyle/>
+                    <a:p>
+                      <a:r>
+                        <a:rPr sz="1100" b="0">
+                          <a:solidFill>
+                            <a:srgbClr val="1A1A1A"/>
+                          </a:solidFill>
+                          <a:latin typeface="Arial"/>
+                        </a:rPr>
+                        <a:t>&lt; 10 %</a:t>
+                      </a:r>
+                    </a:p>
+                  </a:txBody>
+                  <a:tcPr>
+                    <a:solidFill>
+                      <a:srgbClr val="FFFFFF"/>
+                    </a:solidFill>
+                  </a:tcPr>
+                </a:tc>
+              </a:tr>
+              <a:tr h="386861">
+                <a:tc>
+                  <a:txBody>
+                    <a:bodyPr wrap="square"/>
+                    <a:lstStyle/>
+                    <a:p>
+                      <a:r>
+                        <a:rPr sz="1100" b="0">
+                          <a:solidFill>
+                            <a:srgbClr val="1A1A1A"/>
+                          </a:solidFill>
+                          <a:latin typeface="Arial"/>
+                        </a:rPr>
+                        <a:t>KK-Inanspruchnahme (Ø)</a:t>
+                      </a:r>
+                    </a:p>
+                  </a:txBody>
+                  <a:tcPr>
+                    <a:solidFill>
+                      <a:srgbClr val="F4F6FA"/>
+                    </a:solidFill>
+                  </a:tcPr>
+                </a:tc>
+                <a:tc>
+                  <a:txBody>
+                    <a:bodyPr wrap="square"/>
+                    <a:lstStyle/>
+                    <a:p>
+                      <a:r>
+                        <a:rPr sz="1100" b="0">
+                          <a:solidFill>
+                            <a:srgbClr val="1A1A1A"/>
+                          </a:solidFill>
+                          <a:latin typeface="Arial"/>
+                        </a:rPr>
+                        <a:t>Ø-Inanspruchnahme / Limit × 100</a:t>
+                      </a:r>
+                    </a:p>
+                  </a:txBody>
+                  <a:tcPr>
+                    <a:solidFill>
+                      <a:srgbClr val="F4F6FA"/>
+                    </a:solidFill>
+                  </a:tcPr>
+                </a:tc>
+                <a:tc>
+                  <a:txBody>
+                    <a:bodyPr wrap="square"/>
+                    <a:lstStyle/>
+                    <a:p>
+                      <a:r>
+                        <a:rPr sz="1100" b="0">
+                          <a:solidFill>
+                            <a:srgbClr val="1A1A1A"/>
+                          </a:solidFill>
+                          <a:latin typeface="Arial"/>
+                        </a:rPr>
+                        <a:t>&lt; 60 %</a:t>
+                      </a:r>
+                    </a:p>
+                  </a:txBody>
+                  <a:tcPr>
+                    <a:solidFill>
+                      <a:srgbClr val="F4F6FA"/>
+                    </a:solidFill>
+                  </a:tcPr>
+                </a:tc>
+                <a:tc>
+                  <a:txBody>
+                    <a:bodyPr wrap="square"/>
+                    <a:lstStyle/>
+                    <a:p>
+                      <a:r>
+                        <a:rPr sz="1100" b="0">
+                          <a:solidFill>
+                            <a:srgbClr val="1A1A1A"/>
+                          </a:solidFill>
+                          <a:latin typeface="Arial"/>
+                        </a:rPr>
+                        <a:t>60–85 %</a:t>
+                      </a:r>
+                    </a:p>
+                  </a:txBody>
+                  <a:tcPr>
+                    <a:solidFill>
+                      <a:srgbClr val="F4F6FA"/>
+                    </a:solidFill>
+                  </a:tcPr>
+                </a:tc>
+                <a:tc>
+                  <a:txBody>
+                    <a:bodyPr wrap="square"/>
+                    <a:lstStyle/>
+                    <a:p>
+                      <a:r>
+                        <a:rPr sz="1100" b="0">
+                          <a:solidFill>
+                            <a:srgbClr val="1A1A1A"/>
+                          </a:solidFill>
+                          <a:latin typeface="Arial"/>
+                        </a:rPr>
+                        <a:t>&gt; 85 %</a:t>
+                      </a:r>
+                    </a:p>
+                  </a:txBody>
+                  <a:tcPr>
+                    <a:solidFill>
+                      <a:srgbClr val="F4F6FA"/>
+                    </a:solidFill>
+                  </a:tcPr>
+                </a:tc>
+              </a:tr>
+              <a:tr h="386861">
+                <a:tc>
+                  <a:txBody>
+                    <a:bodyPr wrap="square"/>
+                    <a:lstStyle/>
+                    <a:p>
+                      <a:r>
+                        <a:rPr sz="1100" b="0">
+                          <a:solidFill>
+                            <a:srgbClr val="1A1A1A"/>
+                          </a:solidFill>
+                          <a:latin typeface="Arial"/>
+                        </a:rPr>
+                        <a:t>Jahresabschluss-Vorlage</a:t>
+                      </a:r>
+                    </a:p>
+                  </a:txBody>
+                  <a:tcPr>
+                    <a:solidFill>
+                      <a:srgbClr val="FFFFFF"/>
+                    </a:solidFill>
+                  </a:tcPr>
+                </a:tc>
+                <a:tc>
+                  <a:txBody>
+                    <a:bodyPr wrap="square"/>
+                    <a:lstStyle/>
+                    <a:p>
+                      <a:r>
+                        <a:rPr sz="1100" b="0">
+                          <a:solidFill>
+                            <a:srgbClr val="1A1A1A"/>
+                          </a:solidFill>
+                          <a:latin typeface="Arial"/>
+                        </a:rPr>
+                        <a:t>Monate nach Geschäftsjahresende</a:t>
+                      </a:r>
+                    </a:p>
+                  </a:txBody>
+                  <a:tcPr>
+                    <a:solidFill>
+                      <a:srgbClr val="FFFFFF"/>
+                    </a:solidFill>
+                  </a:tcPr>
+                </a:tc>
+                <a:tc>
+                  <a:txBody>
+                    <a:bodyPr wrap="square"/>
+                    <a:lstStyle/>
+                    <a:p>
+                      <a:r>
+                        <a:rPr sz="1100" b="0">
+                          <a:solidFill>
+                            <a:srgbClr val="1A1A1A"/>
+                          </a:solidFill>
+                          <a:latin typeface="Arial"/>
+                        </a:rPr>
+                        <a:t>&lt; 6</a:t>
+                      </a:r>
+                    </a:p>
+                  </a:txBody>
+                  <a:tcPr>
+                    <a:solidFill>
+                      <a:srgbClr val="FFFFFF"/>
+                    </a:solidFill>
+                  </a:tcPr>
+                </a:tc>
+                <a:tc>
+                  <a:txBody>
+                    <a:bodyPr wrap="square"/>
+                    <a:lstStyle/>
+                    <a:p>
+                      <a:r>
+                        <a:rPr sz="1100" b="0">
+                          <a:solidFill>
+                            <a:srgbClr val="1A1A1A"/>
+                          </a:solidFill>
+                          <a:latin typeface="Arial"/>
+                        </a:rPr>
+                        <a:t>6–9</a:t>
+                      </a:r>
+                    </a:p>
+                  </a:txBody>
+                  <a:tcPr>
+                    <a:solidFill>
+                      <a:srgbClr val="FFFFFF"/>
+                    </a:solidFill>
+                  </a:tcPr>
+                </a:tc>
+                <a:tc>
+                  <a:txBody>
+                    <a:bodyPr wrap="square"/>
+                    <a:lstStyle/>
+                    <a:p>
+                      <a:r>
+                        <a:rPr sz="1100" b="0">
+                          <a:solidFill>
+                            <a:srgbClr val="1A1A1A"/>
+                          </a:solidFill>
+                          <a:latin typeface="Arial"/>
+                        </a:rPr>
+                        <a:t>&gt; 9 / Verweigerung</a:t>
+                      </a:r>
+                    </a:p>
+                  </a:txBody>
+                  <a:tcPr>
+                    <a:solidFill>
+                      <a:srgbClr val="FFFFFF"/>
+                    </a:solidFill>
+                  </a:tcPr>
+                </a:tc>
+              </a:tr>
+              <a:tr h="386861">
+                <a:tc>
+                  <a:txBody>
+                    <a:bodyPr wrap="square"/>
+                    <a:lstStyle/>
+                    <a:p>
+                      <a:r>
+                        <a:rPr sz="1100" b="0">
+                          <a:solidFill>
+                            <a:srgbClr val="1A1A1A"/>
+                          </a:solidFill>
+                          <a:latin typeface="Arial"/>
+                        </a:rPr>
+                        <a:t>Kategorie</a:t>
+                      </a:r>
+                    </a:p>
+                  </a:txBody>
+                  <a:tcPr>
+                    <a:solidFill>
+                      <a:srgbClr val="F4F6FA"/>
+                    </a:solidFill>
+                  </a:tcPr>
+                </a:tc>
+                <a:tc>
+                  <a:txBody>
+                    <a:bodyPr wrap="square"/>
+                    <a:lstStyle/>
+                    <a:p>
+                      <a:r>
+                        <a:rPr sz="1100" b="0">
+                          <a:solidFill>
+                            <a:srgbClr val="1A1A1A"/>
+                          </a:solidFill>
+                          <a:latin typeface="Arial"/>
+                        </a:rPr>
+                        <a:t>Warnsignal</a:t>
+                      </a:r>
+                    </a:p>
+                  </a:txBody>
+                  <a:tcPr>
+                    <a:solidFill>
+                      <a:srgbClr val="F4F6FA"/>
+                    </a:solidFill>
+                  </a:tcPr>
+                </a:tc>
+                <a:tc>
+                  <a:txBody>
+                    <a:bodyPr wrap="square"/>
+                    <a:lstStyle/>
+                    <a:p>
+                      <a:r>
+                        <a:rPr sz="1100" b="0">
+                          <a:solidFill>
+                            <a:srgbClr val="1A1A1A"/>
+                          </a:solidFill>
+                          <a:latin typeface="Arial"/>
+                        </a:rPr>
+                        <a:t>Bewertung</a:t>
+                      </a:r>
+                    </a:p>
+                  </a:txBody>
+                  <a:tcPr>
+                    <a:solidFill>
+                      <a:srgbClr val="F4F6FA"/>
+                    </a:solidFill>
+                  </a:tcPr>
+                </a:tc>
+                <a:tc>
+                  <a:txBody>
+                    <a:bodyPr wrap="square"/>
+                    <a:lstStyle/>
+                    <a:p>
+                      <a:r>
+                        <a:rPr sz="1100" b="0">
+                          <a:solidFill>
+                            <a:srgbClr val="1A1A1A"/>
+                          </a:solidFill>
+                          <a:latin typeface="Arial"/>
+                        </a:rPr>
+                        <a:t/>
+                      </a:r>
+                    </a:p>
+                  </a:txBody>
+                  <a:tcPr>
+                    <a:solidFill>
+                      <a:srgbClr val="F4F6FA"/>
+                    </a:solidFill>
+                  </a:tcPr>
+                </a:tc>
+                <a:tc>
+                  <a:txBody>
+                    <a:bodyPr wrap="square"/>
+                    <a:lstStyle/>
+                    <a:p>
+                      <a:r>
+                        <a:rPr sz="1100" b="0">
+                          <a:solidFill>
+                            <a:srgbClr val="1A1A1A"/>
+                          </a:solidFill>
+                          <a:latin typeface="Arial"/>
+                        </a:rPr>
+                        <a:t/>
+                      </a:r>
+                    </a:p>
+                  </a:txBody>
+                  <a:tcPr>
+                    <a:solidFill>
+                      <a:srgbClr val="F4F6FA"/>
+                    </a:solidFill>
+                  </a:tcPr>
+                </a:tc>
+              </a:tr>
+              <a:tr h="386861">
+                <a:tc>
+                  <a:txBody>
+                    <a:bodyPr wrap="square"/>
+                    <a:lstStyle/>
+                    <a:p>
+                      <a:r>
+                        <a:rPr sz="1100" b="0">
+                          <a:solidFill>
+                            <a:srgbClr val="1A1A1A"/>
+                          </a:solidFill>
+                          <a:latin typeface="Arial"/>
+                        </a:rPr>
+                        <a:t>Transparenz</a:t>
+                      </a:r>
+                    </a:p>
+                  </a:txBody>
+                  <a:tcPr>
+                    <a:solidFill>
+                      <a:srgbClr val="FFFFFF"/>
+                    </a:solidFill>
+                  </a:tcPr>
+                </a:tc>
+                <a:tc>
+                  <a:txBody>
+                    <a:bodyPr wrap="square"/>
+                    <a:lstStyle/>
+                    <a:p>
+                      <a:r>
+                        <a:rPr sz="1100" b="0">
+                          <a:solidFill>
+                            <a:srgbClr val="1A1A1A"/>
+                          </a:solidFill>
+                          <a:latin typeface="Arial"/>
+                        </a:rPr>
+                        <a:t>Verweigerung oder Verzögerung von Jahresabschluss/BWA</a:t>
+                      </a:r>
+                    </a:p>
+                  </a:txBody>
+                  <a:tcPr>
+                    <a:solidFill>
+                      <a:srgbClr val="FFFFFF"/>
+                    </a:solidFill>
+                  </a:tcPr>
+                </a:tc>
+                <a:tc>
+                  <a:txBody>
+                    <a:bodyPr wrap="square"/>
+                    <a:lstStyle/>
+                    <a:p>
+                      <a:r>
+                        <a:rPr sz="1100" b="0">
+                          <a:solidFill>
+                            <a:srgbClr val="1A1A1A"/>
+                          </a:solidFill>
+                          <a:latin typeface="Arial"/>
+                        </a:rPr>
+                        <a:t>Hoch</a:t>
+                      </a:r>
+                    </a:p>
+                  </a:txBody>
+                  <a:tcPr>
+                    <a:solidFill>
+                      <a:srgbClr val="FFFFFF"/>
+                    </a:solidFill>
+                  </a:tcPr>
+                </a:tc>
+                <a:tc>
+                  <a:txBody>
+                    <a:bodyPr wrap="square"/>
+                    <a:lstStyle/>
+                    <a:p>
+                      <a:r>
+                        <a:rPr sz="1100" b="0">
+                          <a:solidFill>
+                            <a:srgbClr val="1A1A1A"/>
+                          </a:solidFill>
+                          <a:latin typeface="Arial"/>
+                        </a:rPr>
+                        <a:t/>
+                      </a:r>
+                    </a:p>
+                  </a:txBody>
+                  <a:tcPr>
+                    <a:solidFill>
+                      <a:srgbClr val="FFFFFF"/>
+                    </a:solidFill>
+                  </a:tcPr>
+                </a:tc>
+                <a:tc>
+                  <a:txBody>
+                    <a:bodyPr wrap="square"/>
+                    <a:lstStyle/>
+                    <a:p>
+                      <a:r>
+                        <a:rPr sz="1100" b="0">
+                          <a:solidFill>
+                            <a:srgbClr val="1A1A1A"/>
+                          </a:solidFill>
+                          <a:latin typeface="Arial"/>
+                        </a:rPr>
+                        <a:t/>
+                      </a:r>
+                    </a:p>
+                  </a:txBody>
+                  <a:tcPr>
+                    <a:solidFill>
+                      <a:srgbClr val="FFFFFF"/>
+                    </a:solidFill>
+                  </a:tcPr>
+                </a:tc>
+              </a:tr>
+              <a:tr h="386861">
+                <a:tc>
+                  <a:txBody>
+                    <a:bodyPr wrap="square"/>
+                    <a:lstStyle/>
+                    <a:p>
+                      <a:r>
+                        <a:rPr sz="1100" b="0">
+                          <a:solidFill>
+                            <a:srgbClr val="1A1A1A"/>
+                          </a:solidFill>
+                          <a:latin typeface="Arial"/>
+                        </a:rPr>
+                        <a:t>Gesprächsverhalten</a:t>
+                      </a:r>
+                    </a:p>
+                  </a:txBody>
+                  <a:tcPr>
+                    <a:solidFill>
+                      <a:srgbClr val="F4F6FA"/>
+                    </a:solidFill>
+                  </a:tcPr>
+                </a:tc>
+                <a:tc>
+                  <a:txBody>
+                    <a:bodyPr wrap="square"/>
+                    <a:lstStyle/>
+                    <a:p>
+                      <a:r>
+                        <a:rPr sz="1100" b="0">
+                          <a:solidFill>
+                            <a:srgbClr val="1A1A1A"/>
+                          </a:solidFill>
+                          <a:latin typeface="Arial"/>
+                        </a:rPr>
+                        <a:t>Ausweichen bei direkten Fragen zu Umsatz/Liquidität</a:t>
+                      </a:r>
+                    </a:p>
+                  </a:txBody>
+                  <a:tcPr>
+                    <a:solidFill>
+                      <a:srgbClr val="F4F6FA"/>
+                    </a:solidFill>
+                  </a:tcPr>
+                </a:tc>
+                <a:tc>
+                  <a:txBody>
+                    <a:bodyPr wrap="square"/>
+                    <a:lstStyle/>
+                    <a:p>
+                      <a:r>
+                        <a:rPr sz="1100" b="0">
+                          <a:solidFill>
+                            <a:srgbClr val="1A1A1A"/>
+                          </a:solidFill>
+                          <a:latin typeface="Arial"/>
+                        </a:rPr>
+                        <a:t>Hoch</a:t>
+                      </a:r>
+                    </a:p>
+                  </a:txBody>
+                  <a:tcPr>
+                    <a:solidFill>
+                      <a:srgbClr val="F4F6FA"/>
+                    </a:solidFill>
+                  </a:tcPr>
+                </a:tc>
+                <a:tc>
+                  <a:txBody>
+                    <a:bodyPr wrap="square"/>
+                    <a:lstStyle/>
+                    <a:p>
+                      <a:r>
+                        <a:rPr sz="1100" b="0">
+                          <a:solidFill>
+                            <a:srgbClr val="1A1A1A"/>
+                          </a:solidFill>
+                          <a:latin typeface="Arial"/>
+                        </a:rPr>
+                        <a:t/>
+                      </a:r>
+                    </a:p>
+                  </a:txBody>
+                  <a:tcPr>
+                    <a:solidFill>
+                      <a:srgbClr val="F4F6FA"/>
+                    </a:solidFill>
+                  </a:tcPr>
+                </a:tc>
+                <a:tc>
+                  <a:txBody>
+                    <a:bodyPr wrap="square"/>
+                    <a:lstStyle/>
+                    <a:p>
+                      <a:r>
+                        <a:rPr sz="1100" b="0">
+                          <a:solidFill>
+                            <a:srgbClr val="1A1A1A"/>
+                          </a:solidFill>
+                          <a:latin typeface="Arial"/>
+                        </a:rPr>
+                        <a:t/>
+                      </a:r>
+                    </a:p>
+                  </a:txBody>
+                  <a:tcPr>
+                    <a:solidFill>
+                      <a:srgbClr val="F4F6FA"/>
+                    </a:solidFill>
+                  </a:tcPr>
+                </a:tc>
+              </a:tr>
+              <a:tr h="386861">
+                <a:tc>
+                  <a:txBody>
+                    <a:bodyPr wrap="square"/>
+                    <a:lstStyle/>
+                    <a:p>
+                      <a:r>
+                        <a:rPr sz="1100" b="0">
+                          <a:solidFill>
+                            <a:srgbClr val="1A1A1A"/>
+                          </a:solidFill>
+                          <a:latin typeface="Arial"/>
+                        </a:rPr>
+                        <a:t>Management</a:t>
+                      </a:r>
+                    </a:p>
+                  </a:txBody>
+                  <a:tcPr>
+                    <a:solidFill>
+                      <a:srgbClr val="FFFFFF"/>
+                    </a:solidFill>
+                  </a:tcPr>
+                </a:tc>
+                <a:tc>
+                  <a:txBody>
+                    <a:bodyPr wrap="square"/>
+                    <a:lstStyle/>
+                    <a:p>
+                      <a:r>
+                        <a:rPr sz="1100" b="0">
+                          <a:solidFill>
+                            <a:srgbClr val="1A1A1A"/>
+                          </a:solidFill>
+                          <a:latin typeface="Arial"/>
+                        </a:rPr>
+                        <a:t>Häufiger Wechsel in Geschäftsführung oder Steuerberatung</a:t>
+                      </a:r>
+                    </a:p>
+                  </a:txBody>
+                  <a:tcPr>
+                    <a:solidFill>
+                      <a:srgbClr val="FFFFFF"/>
+                    </a:solidFill>
+                  </a:tcPr>
+                </a:tc>
+                <a:tc>
+                  <a:txBody>
+                    <a:bodyPr wrap="square"/>
+                    <a:lstStyle/>
+                    <a:p>
+                      <a:r>
+                        <a:rPr sz="1100" b="0">
+                          <a:solidFill>
+                            <a:srgbClr val="1A1A1A"/>
+                          </a:solidFill>
+                          <a:latin typeface="Arial"/>
+                        </a:rPr>
+                        <a:t>Mittel–Hoch</a:t>
+                      </a:r>
+                    </a:p>
+                  </a:txBody>
+                  <a:tcPr>
+                    <a:solidFill>
+                      <a:srgbClr val="FFFFFF"/>
+                    </a:solidFill>
+                  </a:tcPr>
+                </a:tc>
+                <a:tc>
+                  <a:txBody>
+                    <a:bodyPr wrap="square"/>
+                    <a:lstStyle/>
+                    <a:p>
+                      <a:r>
+                        <a:rPr sz="1100" b="0">
+                          <a:solidFill>
+                            <a:srgbClr val="1A1A1A"/>
+                          </a:solidFill>
+                          <a:latin typeface="Arial"/>
+                        </a:rPr>
+                        <a:t/>
+                      </a:r>
+                    </a:p>
+                  </a:txBody>
+                  <a:tcPr>
+                    <a:solidFill>
+                      <a:srgbClr val="FFFFFF"/>
+                    </a:solidFill>
+                  </a:tcPr>
+                </a:tc>
+                <a:tc>
+                  <a:txBody>
+                    <a:bodyPr wrap="square"/>
+                    <a:lstStyle/>
+                    <a:p>
+                      <a:r>
+                        <a:rPr sz="1100" b="0">
+                          <a:solidFill>
+                            <a:srgbClr val="1A1A1A"/>
+                          </a:solidFill>
+                          <a:latin typeface="Arial"/>
+                        </a:rPr>
+                        <a:t/>
+                      </a:r>
+                    </a:p>
+                  </a:txBody>
+                  <a:tcPr>
+                    <a:solidFill>
+                      <a:srgbClr val="FFFFFF"/>
+                    </a:solidFill>
+                  </a:tcPr>
+                </a:tc>
+              </a:tr>
+              <a:tr h="386861">
+                <a:tc>
+                  <a:txBody>
+                    <a:bodyPr wrap="square"/>
+                    <a:lstStyle/>
+                    <a:p>
+                      <a:r>
+                        <a:rPr sz="1100" b="0">
+                          <a:solidFill>
+                            <a:srgbClr val="1A1A1A"/>
+                          </a:solidFill>
+                          <a:latin typeface="Arial"/>
+                        </a:rPr>
+                        <a:t>Markt</a:t>
+                      </a:r>
+                    </a:p>
+                  </a:txBody>
+                  <a:tcPr>
+                    <a:solidFill>
+                      <a:srgbClr val="F4F6FA"/>
+                    </a:solidFill>
+                  </a:tcPr>
+                </a:tc>
+                <a:tc>
+                  <a:txBody>
+                    <a:bodyPr wrap="square"/>
+                    <a:lstStyle/>
+                    <a:p>
+                      <a:r>
+                        <a:rPr sz="1100" b="0">
+                          <a:solidFill>
+                            <a:srgbClr val="1A1A1A"/>
+                          </a:solidFill>
+                          <a:latin typeface="Arial"/>
+                        </a:rPr>
+                        <a:t>Verlust von Schlüsselkunden oder -lieferanten; Klumpenrisiko &gt; 30 %</a:t>
+                      </a:r>
+                    </a:p>
+                  </a:txBody>
+                  <a:tcPr>
+                    <a:solidFill>
+                      <a:srgbClr val="F4F6FA"/>
+                    </a:solidFill>
+                  </a:tcPr>
+                </a:tc>
+                <a:tc>
+                  <a:txBody>
+                    <a:bodyPr wrap="square"/>
+                    <a:lstStyle/>
+                    <a:p>
+                      <a:r>
+                        <a:rPr sz="1100" b="0">
+                          <a:solidFill>
+                            <a:srgbClr val="1A1A1A"/>
+                          </a:solidFill>
+                          <a:latin typeface="Arial"/>
+                        </a:rPr>
+                        <a:t>Mittel–Hoch</a:t>
+                      </a:r>
+                    </a:p>
+                  </a:txBody>
+                  <a:tcPr>
+                    <a:solidFill>
+                      <a:srgbClr val="F4F6FA"/>
+                    </a:solidFill>
+                  </a:tcPr>
+                </a:tc>
+                <a:tc>
+                  <a:txBody>
+                    <a:bodyPr wrap="square"/>
+                    <a:lstStyle/>
+                    <a:p>
+                      <a:r>
+                        <a:rPr sz="1100" b="0">
+                          <a:solidFill>
+                            <a:srgbClr val="1A1A1A"/>
+                          </a:solidFill>
+                          <a:latin typeface="Arial"/>
+                        </a:rPr>
+                        <a:t/>
+                      </a:r>
+                    </a:p>
+                  </a:txBody>
+                  <a:tcPr>
+                    <a:solidFill>
+                      <a:srgbClr val="F4F6FA"/>
+                    </a:solidFill>
+                  </a:tcPr>
+                </a:tc>
+                <a:tc>
+                  <a:txBody>
+                    <a:bodyPr wrap="square"/>
+                    <a:lstStyle/>
+                    <a:p>
+                      <a:r>
+                        <a:rPr sz="1100" b="0">
+                          <a:solidFill>
+                            <a:srgbClr val="1A1A1A"/>
+                          </a:solidFill>
+                          <a:latin typeface="Arial"/>
+                        </a:rPr>
+                        <a:t/>
+                      </a:r>
+                    </a:p>
+                  </a:txBody>
+                  <a:tcPr>
+                    <a:solidFill>
+                      <a:srgbClr val="F4F6FA"/>
+                    </a:solidFill>
+                  </a:tcPr>
+                </a:tc>
+              </a:tr>
+              <a:tr h="386861">
+                <a:tc>
+                  <a:txBody>
+                    <a:bodyPr wrap="square"/>
+                    <a:lstStyle/>
+                    <a:p>
+                      <a:r>
+                        <a:rPr sz="1100" b="0">
+                          <a:solidFill>
+                            <a:srgbClr val="1A1A1A"/>
+                          </a:solidFill>
+                          <a:latin typeface="Arial"/>
+                        </a:rPr>
+                        <a:t>Konto</a:t>
+                      </a:r>
+                    </a:p>
+                  </a:txBody>
+                  <a:tcPr>
+                    <a:solidFill>
+                      <a:srgbClr val="FFFFFF"/>
+                    </a:solidFill>
+                  </a:tcPr>
+                </a:tc>
+                <a:tc>
+                  <a:txBody>
+                    <a:bodyPr wrap="square"/>
+                    <a:lstStyle/>
+                    <a:p>
+                      <a:r>
+                        <a:rPr sz="1100" b="0">
+                          <a:solidFill>
+                            <a:srgbClr val="1A1A1A"/>
+                          </a:solidFill>
+                          <a:latin typeface="Arial"/>
+                        </a:rPr>
+                        <a:t>Systematische KK-Überschreitungen, Lastschriftrückläufer</a:t>
+                      </a:r>
+                    </a:p>
+                  </a:txBody>
+                  <a:tcPr>
+                    <a:solidFill>
+                      <a:srgbClr val="FFFFFF"/>
+                    </a:solidFill>
+                  </a:tcPr>
+                </a:tc>
+                <a:tc>
+                  <a:txBody>
+                    <a:bodyPr wrap="square"/>
+                    <a:lstStyle/>
+                    <a:p>
+                      <a:r>
+                        <a:rPr sz="1100" b="0">
+                          <a:solidFill>
+                            <a:srgbClr val="1A1A1A"/>
+                          </a:solidFill>
+                          <a:latin typeface="Arial"/>
+                        </a:rPr>
+                        <a:t>Hoch</a:t>
+                      </a:r>
+                    </a:p>
+                  </a:txBody>
+                  <a:tcPr>
+                    <a:solidFill>
+                      <a:srgbClr val="FFFFFF"/>
+                    </a:solidFill>
+                  </a:tcPr>
+                </a:tc>
+                <a:tc>
+                  <a:txBody>
+                    <a:bodyPr wrap="square"/>
+                    <a:lstStyle/>
+                    <a:p>
+                      <a:r>
+                        <a:rPr sz="1100" b="0">
+                          <a:solidFill>
+                            <a:srgbClr val="1A1A1A"/>
+                          </a:solidFill>
+                          <a:latin typeface="Arial"/>
+                        </a:rPr>
+                        <a:t/>
+                      </a:r>
+                    </a:p>
+                  </a:txBody>
+                  <a:tcPr>
+                    <a:solidFill>
+                      <a:srgbClr val="FFFFFF"/>
+                    </a:solidFill>
+                  </a:tcPr>
+                </a:tc>
+                <a:tc>
+                  <a:txBody>
+                    <a:bodyPr wrap="square"/>
+                    <a:lstStyle/>
+                    <a:p>
+                      <a:r>
+                        <a:rPr sz="1100" b="0">
+                          <a:solidFill>
+                            <a:srgbClr val="1A1A1A"/>
+                          </a:solidFill>
+                          <a:latin typeface="Arial"/>
+                        </a:rPr>
+                        <a:t/>
+                      </a:r>
+                    </a:p>
+                  </a:txBody>
+                  <a:tcPr>
+                    <a:solidFill>
+                      <a:srgbClr val="FFFFFF"/>
+                    </a:solidFill>
+                  </a:tcPr>
+                </a:tc>
+              </a:tr>
+              <a:tr h="386868">
+                <a:tc>
+                  <a:txBody>
+                    <a:bodyPr wrap="square"/>
+                    <a:lstStyle/>
+                    <a:p>
+                      <a:r>
+                        <a:rPr sz="1100" b="0">
+                          <a:solidFill>
+                            <a:srgbClr val="1A1A1A"/>
+                          </a:solidFill>
+                          <a:latin typeface="Arial"/>
+                        </a:rPr>
+                        <a:t>Nachfolge</a:t>
+                      </a:r>
+                    </a:p>
+                  </a:txBody>
+                  <a:tcPr>
+                    <a:solidFill>
+                      <a:srgbClr val="F4F6FA"/>
+                    </a:solidFill>
+                  </a:tcPr>
+                </a:tc>
+                <a:tc>
+                  <a:txBody>
+                    <a:bodyPr wrap="square"/>
+                    <a:lstStyle/>
+                    <a:p>
+                      <a:r>
+                        <a:rPr sz="1100" b="0">
+                          <a:solidFill>
+                            <a:srgbClr val="1A1A1A"/>
+                          </a:solidFill>
+                          <a:latin typeface="Arial"/>
+                        </a:rPr>
+                        <a:t>Keine geregelte Nachfolgeregelung bei Inhabergesellschaften</a:t>
+                      </a:r>
+                    </a:p>
+                  </a:txBody>
+                  <a:tcPr>
+                    <a:solidFill>
+                      <a:srgbClr val="F4F6FA"/>
+                    </a:solidFill>
+                  </a:tcPr>
+                </a:tc>
+                <a:tc>
+                  <a:txBody>
+                    <a:bodyPr wrap="square"/>
+                    <a:lstStyle/>
+                    <a:p>
+                      <a:r>
+                        <a:rPr sz="1100" b="0">
+                          <a:solidFill>
+                            <a:srgbClr val="1A1A1A"/>
+                          </a:solidFill>
+                          <a:latin typeface="Arial"/>
+                        </a:rPr>
+                        <a:t>Mittel</a:t>
+                      </a:r>
+                    </a:p>
+                  </a:txBody>
+                  <a:tcPr>
+                    <a:solidFill>
+                      <a:srgbClr val="F4F6FA"/>
+                    </a:solidFill>
+                  </a:tcPr>
+                </a:tc>
+                <a:tc>
+                  <a:txBody>
+                    <a:bodyPr wrap="square"/>
+                    <a:lstStyle/>
+                    <a:p>
+                      <a:r>
+                        <a:rPr sz="1100" b="0">
+                          <a:solidFill>
+                            <a:srgbClr val="1A1A1A"/>
+                          </a:solidFill>
+                          <a:latin typeface="Arial"/>
+                        </a:rPr>
+                        <a:t/>
+                      </a:r>
+                    </a:p>
+                  </a:txBody>
+                  <a:tcPr>
+                    <a:solidFill>
+                      <a:srgbClr val="F4F6FA"/>
+                    </a:solidFill>
+                  </a:tcPr>
+                </a:tc>
+                <a:tc>
+                  <a:txBody>
+                    <a:bodyPr wrap="square"/>
+                    <a:lstStyle/>
+                    <a:p>
+                      <a:r>
+                        <a:rPr sz="1100" b="0">
+                          <a:solidFill>
+                            <a:srgbClr val="1A1A1A"/>
+                          </a:solidFill>
+                          <a:latin typeface="Arial"/>
+                        </a:rPr>
+                        <a:t/>
+                      </a:r>
+                    </a:p>
+                  </a:txBody>
+                  <a:tcPr>
+                    <a:solidFill>
+                      <a:srgbClr val="F4F6FA"/>
+                    </a:solidFill>
+                  </a:tcPr>
+                </a:tc>
+              </a:tr>
+            </a:tbl>
+          </a:graphicData>
+        </a:graphic>
+      </p:graphicFrame>
+    </p:spTree>
+  </p:cSld>
+  <p:clrMapOvr>
+    <a:masterClrMapping/>
+  </p:clrMapOvr>
+</p:sld>
+</file>
+
+<file path=ppt/slides/slide9.xml><?xml version="1.0" encoding="utf-8"?>
 <p:sld xmlns:a="http://schemas.openxmlformats.org/drawingml/2006/main" xmlns:p="http://schemas.openxmlformats.org/presentationml/2006/main" xmlns:r="http://schemas.openxmlformats.org/officeDocument/2006/relationships">
   <p:cSld>
     <p:bg>
@@ -4523,8 +10397,8 @@
         </p:nvSpPr>
         <p:spPr>
           <a:xfrm>
-            <a:off x="365760" y="2286000"/>
-            <a:ext cx="11430000" cy="1828800"/>
+            <a:off x="365760" y="2011680"/>
+            <a:ext cx="11430000" cy="2011680"/>
           </a:xfrm>
           <a:prstGeom prst="rect">
             <a:avLst/>
@@ -4539,117 +10413,13 @@
           <a:p>
             <a:pPr algn="l"/>
             <a:r>
-              <a:rPr sz="3600" b="1">
+              <a:rPr sz="3600" b="1" i="0">
                 <a:solidFill>
                   <a:srgbClr val="FFFFFF"/>
                 </a:solidFill>
                 <a:latin typeface="Arial"/>
               </a:rPr>
-              <a:t>Transferaufgabe (4 Wochen nach Seminar)</a:t>
-            </a:r>
-          </a:p>
-        </p:txBody>
-      </p:sp>
-    </p:spTree>
-  </p:cSld>
-  <p:clrMapOvr>
-    <a:masterClrMapping/>
-  </p:clrMapOvr>
-</p:sld>
-</file>
-
-<file path=ppt/slides/slide9.xml><?xml version="1.0" encoding="utf-8"?>
-<p:sld xmlns:a="http://schemas.openxmlformats.org/drawingml/2006/main" xmlns:p="http://schemas.openxmlformats.org/presentationml/2006/main" xmlns:r="http://schemas.openxmlformats.org/officeDocument/2006/relationships">
-  <p:cSld>
-    <p:bg>
-      <p:bgPr>
-        <a:solidFill>
-          <a:srgbClr val="1A1A1A"/>
-        </a:solidFill>
-        <a:effectLst/>
-      </p:bgPr>
-    </p:bg>
-    <p:spTree>
-      <p:nvGrpSpPr>
-        <p:cNvPr id="1" name=""/>
-        <p:cNvGrpSpPr/>
-        <p:nvPr/>
-      </p:nvGrpSpPr>
-      <p:grpSpPr/>
-      <p:sp>
-        <p:nvSpPr>
-          <p:cNvPr id="2" name="Rectangle 1"/>
-          <p:cNvSpPr/>
-          <p:nvPr/>
-        </p:nvSpPr>
-        <p:spPr>
-          <a:xfrm>
-            <a:off x="0" y="0"/>
-            <a:ext cx="73152" cy="6858000"/>
-          </a:xfrm>
-          <a:prstGeom prst="rect">
-            <a:avLst/>
-          </a:prstGeom>
-          <a:solidFill>
-            <a:srgbClr val="E05B00"/>
-          </a:solidFill>
-          <a:ln>
-            <a:noFill/>
-          </a:ln>
-        </p:spPr>
-        <p:style>
-          <a:lnRef idx="1">
-            <a:schemeClr val="accent1"/>
-          </a:lnRef>
-          <a:fillRef idx="3">
-            <a:schemeClr val="accent1"/>
-          </a:fillRef>
-          <a:effectRef idx="2">
-            <a:schemeClr val="accent1"/>
-          </a:effectRef>
-          <a:fontRef idx="minor">
-            <a:schemeClr val="lt1"/>
-          </a:fontRef>
-        </p:style>
-        <p:txBody>
-          <a:bodyPr rtlCol="0" anchor="ctr"/>
-          <a:lstStyle/>
-          <a:p>
-            <a:pPr algn="ctr"/>
-          </a:p>
-        </p:txBody>
-      </p:sp>
-      <p:sp>
-        <p:nvSpPr>
-          <p:cNvPr id="3" name="TextBox 2"/>
-          <p:cNvSpPr txBox="1"/>
-          <p:nvPr/>
-        </p:nvSpPr>
-        <p:spPr>
-          <a:xfrm>
-            <a:off x="365760" y="2286000"/>
-            <a:ext cx="11430000" cy="1828800"/>
-          </a:xfrm>
-          <a:prstGeom prst="rect">
-            <a:avLst/>
-          </a:prstGeom>
-          <a:noFill/>
-        </p:spPr>
-        <p:txBody>
-          <a:bodyPr wrap="square">
-            <a:spAutoFit/>
-          </a:bodyPr>
-          <a:lstStyle/>
-          <a:p>
-            <a:pPr algn="l"/>
-            <a:r>
-              <a:rPr sz="3600" b="1">
-                <a:solidFill>
-                  <a:srgbClr val="FFFFFF"/>
-                </a:solidFill>
-                <a:latin typeface="Arial"/>
-              </a:rPr>
-              <a:t>Selbstcheck nach 4 Wochen</a:t>
+              <a:t>Ampel-Checkliste: Gesamtbewertung Kreditrisiko</a:t>
             </a:r>
           </a:p>
         </p:txBody>

--- a/public/downloads/praesentation/M04.pptx
+++ b/public/downloads/praesentation/M04.pptx
@@ -3128,13 +3128,13 @@
         </p:spPr>
         <p:txBody>
           <a:bodyPr wrap="square">
-            <a:spAutoFit/>
+            <a:normAutofit/>
           </a:bodyPr>
           <a:lstStyle/>
           <a:p>
             <a:pPr algn="l"/>
             <a:r>
-              <a:rPr sz="1600" b="1" i="0">
+              <a:rPr sz="1000" b="1" i="0">
                 <a:solidFill>
                   <a:srgbClr val="191D2E"/>
                 </a:solidFill>
@@ -3153,8 +3153,8 @@
         </p:nvSpPr>
         <p:spPr>
           <a:xfrm>
-            <a:off x="0" y="304800"/>
-            <a:ext cx="11582400" cy="279400"/>
+            <a:off x="609600" y="304800"/>
+            <a:ext cx="10972800" cy="279400"/>
           </a:xfrm>
           <a:prstGeom prst="rect">
             <a:avLst/>
@@ -3163,13 +3163,13 @@
         </p:spPr>
         <p:txBody>
           <a:bodyPr wrap="square">
-            <a:spAutoFit/>
+            <a:normAutofit/>
           </a:bodyPr>
           <a:lstStyle/>
           <a:p>
             <a:pPr algn="r"/>
             <a:r>
-              <a:rPr sz="1400" b="0" i="0">
+              <a:rPr sz="900" b="0" i="0">
                 <a:solidFill>
                   <a:srgbClr val="7B7FA0"/>
                 </a:solidFill>
@@ -3188,8 +3188,8 @@
         </p:nvSpPr>
         <p:spPr>
           <a:xfrm>
-            <a:off x="609600" y="3048000"/>
-            <a:ext cx="10972800" cy="2159000"/>
+            <a:off x="609600" y="2794000"/>
+            <a:ext cx="10972800" cy="2032000"/>
           </a:xfrm>
           <a:prstGeom prst="rect">
             <a:avLst/>
@@ -3198,13 +3198,13 @@
         </p:spPr>
         <p:txBody>
           <a:bodyPr wrap="square">
-            <a:spAutoFit/>
+            <a:normAutofit/>
           </a:bodyPr>
           <a:lstStyle/>
           <a:p>
             <a:pPr algn="l"/>
             <a:r>
-              <a:rPr sz="9600" b="0" i="0">
+              <a:rPr sz="6000" b="0" i="0">
                 <a:solidFill>
                   <a:srgbClr val="191D2E"/>
                 </a:solidFill>
@@ -3223,7 +3223,7 @@
         </p:nvSpPr>
         <p:spPr>
           <a:xfrm>
-            <a:off x="609600" y="5334000"/>
+            <a:off x="609600" y="4889500"/>
             <a:ext cx="10972800" cy="6350"/>
           </a:xfrm>
           <a:prstGeom prst="rect">
@@ -3266,8 +3266,8 @@
         </p:nvSpPr>
         <p:spPr>
           <a:xfrm>
-            <a:off x="609600" y="5461000"/>
-            <a:ext cx="5207000" cy="889000"/>
+            <a:off x="609600" y="5016500"/>
+            <a:ext cx="5207000" cy="1143000"/>
           </a:xfrm>
           <a:prstGeom prst="rect">
             <a:avLst/>
@@ -3276,13 +3276,13 @@
         </p:spPr>
         <p:txBody>
           <a:bodyPr wrap="square">
-            <a:spAutoFit/>
+            <a:normAutofit/>
           </a:bodyPr>
           <a:lstStyle/>
           <a:p>
             <a:pPr algn="l"/>
             <a:r>
-              <a:rPr sz="2200" b="0" i="1">
+              <a:rPr sz="1400" b="0" i="1">
                 <a:solidFill>
                   <a:srgbClr val="4D5270"/>
                 </a:solidFill>
@@ -3301,8 +3301,8 @@
         </p:nvSpPr>
         <p:spPr>
           <a:xfrm>
-            <a:off x="6032500" y="5461000"/>
-            <a:ext cx="2286000" cy="177800"/>
+            <a:off x="6032500" y="5016500"/>
+            <a:ext cx="2540000" cy="177800"/>
           </a:xfrm>
           <a:prstGeom prst="rect">
             <a:avLst/>
@@ -3311,13 +3311,13 @@
         </p:spPr>
         <p:txBody>
           <a:bodyPr wrap="square">
-            <a:spAutoFit/>
+            <a:normAutofit/>
           </a:bodyPr>
           <a:lstStyle/>
           <a:p>
             <a:pPr algn="l"/>
             <a:r>
-              <a:rPr sz="1200" b="0" i="0" spc="100">
+              <a:rPr sz="900" b="0" i="0">
                 <a:solidFill>
                   <a:srgbClr val="7B7FA0"/>
                 </a:solidFill>
@@ -3336,8 +3336,8 @@
         </p:nvSpPr>
         <p:spPr>
           <a:xfrm>
-            <a:off x="6032500" y="5664200"/>
-            <a:ext cx="2286000" cy="508000"/>
+            <a:off x="6032500" y="5207000"/>
+            <a:ext cx="2540000" cy="508000"/>
           </a:xfrm>
           <a:prstGeom prst="rect">
             <a:avLst/>
@@ -3346,13 +3346,13 @@
         </p:spPr>
         <p:txBody>
           <a:bodyPr wrap="square">
-            <a:spAutoFit/>
+            <a:normAutofit/>
           </a:bodyPr>
           <a:lstStyle/>
           <a:p>
             <a:pPr algn="l"/>
             <a:r>
-              <a:rPr sz="2200" b="0" i="0">
+              <a:rPr sz="1400" b="0" i="0">
                 <a:solidFill>
                   <a:srgbClr val="191D2E"/>
                 </a:solidFill>
@@ -3371,8 +3371,8 @@
         </p:nvSpPr>
         <p:spPr>
           <a:xfrm>
-            <a:off x="8763000" y="5461000"/>
-            <a:ext cx="2540000" cy="177800"/>
+            <a:off x="8890000" y="5016500"/>
+            <a:ext cx="2667000" cy="177800"/>
           </a:xfrm>
           <a:prstGeom prst="rect">
             <a:avLst/>
@@ -3381,13 +3381,13 @@
         </p:spPr>
         <p:txBody>
           <a:bodyPr wrap="square">
-            <a:spAutoFit/>
+            <a:normAutofit/>
           </a:bodyPr>
           <a:lstStyle/>
           <a:p>
             <a:pPr algn="l"/>
             <a:r>
-              <a:rPr sz="1200" b="0" i="0" spc="100">
+              <a:rPr sz="900" b="0" i="0">
                 <a:solidFill>
                   <a:srgbClr val="7B7FA0"/>
                 </a:solidFill>
@@ -3406,8 +3406,8 @@
         </p:nvSpPr>
         <p:spPr>
           <a:xfrm>
-            <a:off x="8763000" y="5664200"/>
-            <a:ext cx="2540000" cy="508000"/>
+            <a:off x="8890000" y="5207000"/>
+            <a:ext cx="2667000" cy="508000"/>
           </a:xfrm>
           <a:prstGeom prst="rect">
             <a:avLst/>
@@ -3416,13 +3416,13 @@
         </p:spPr>
         <p:txBody>
           <a:bodyPr wrap="square">
-            <a:spAutoFit/>
+            <a:normAutofit/>
           </a:bodyPr>
           <a:lstStyle/>
           <a:p>
             <a:pPr algn="l"/>
             <a:r>
-              <a:rPr sz="2200" b="0" i="0">
+              <a:rPr sz="1400" b="0" i="0">
                 <a:solidFill>
                   <a:srgbClr val="191D2E"/>
                 </a:solidFill>
@@ -3467,7 +3467,7 @@
         </p:nvSpPr>
         <p:spPr>
           <a:xfrm>
-            <a:off x="609600" y="304800"/>
+            <a:off x="609600" y="279400"/>
             <a:ext cx="2540000" cy="279400"/>
           </a:xfrm>
           <a:prstGeom prst="rect">
@@ -3477,13 +3477,13 @@
         </p:spPr>
         <p:txBody>
           <a:bodyPr wrap="square">
-            <a:spAutoFit/>
+            <a:normAutofit/>
           </a:bodyPr>
           <a:lstStyle/>
           <a:p>
             <a:pPr algn="l"/>
             <a:r>
-              <a:rPr sz="1600" b="1" i="0">
+              <a:rPr sz="1000" b="1" i="0">
                 <a:solidFill>
                   <a:srgbClr val="F8F8FA"/>
                 </a:solidFill>
@@ -3502,8 +3502,8 @@
         </p:nvSpPr>
         <p:spPr>
           <a:xfrm>
-            <a:off x="0" y="304800"/>
-            <a:ext cx="11582400" cy="279400"/>
+            <a:off x="609600" y="279400"/>
+            <a:ext cx="10972800" cy="279400"/>
           </a:xfrm>
           <a:prstGeom prst="rect">
             <a:avLst/>
@@ -3512,15 +3512,15 @@
         </p:spPr>
         <p:txBody>
           <a:bodyPr wrap="square">
-            <a:spAutoFit/>
+            <a:normAutofit/>
           </a:bodyPr>
           <a:lstStyle/>
           <a:p>
             <a:pPr algn="r"/>
             <a:r>
-              <a:rPr sz="1300" b="0" i="0" spc="100">
+              <a:rPr sz="900" b="0" i="0">
                 <a:solidFill>
-                  <a:srgbClr val="F8F8FA"/>
+                  <a:srgbClr val="7B7FA0"/>
                 </a:solidFill>
                 <a:latin typeface="Courier New"/>
               </a:rPr>
@@ -3537,8 +3537,8 @@
         </p:nvSpPr>
         <p:spPr>
           <a:xfrm>
-            <a:off x="0" y="6350000"/>
-            <a:ext cx="11582400" cy="228600"/>
+            <a:off x="609600" y="6426200"/>
+            <a:ext cx="10972800" cy="228600"/>
           </a:xfrm>
           <a:prstGeom prst="rect">
             <a:avLst/>
@@ -3547,19 +3547,19 @@
         </p:spPr>
         <p:txBody>
           <a:bodyPr wrap="square">
-            <a:spAutoFit/>
+            <a:normAutofit/>
           </a:bodyPr>
           <a:lstStyle/>
           <a:p>
             <a:pPr algn="r"/>
             <a:r>
-              <a:rPr sz="1300" b="0" i="0">
+              <a:rPr sz="900" b="0" i="0">
                 <a:solidFill>
-                  <a:srgbClr val="606070"/>
+                  <a:srgbClr val="7B7FA0"/>
                 </a:solidFill>
                 <a:latin typeface="Courier New"/>
               </a:rPr>
-              <a:t>10 / 12</a:t>
+              <a:t>10</a:t>
             </a:r>
           </a:p>
         </p:txBody>
@@ -3572,8 +3572,8 @@
         </p:nvSpPr>
         <p:spPr>
           <a:xfrm>
-            <a:off x="609600" y="825500"/>
-            <a:ext cx="5715000" cy="4953000"/>
+            <a:off x="609600" y="635000"/>
+            <a:ext cx="5461000" cy="5461000"/>
           </a:xfrm>
           <a:prstGeom prst="rect">
             <a:avLst/>
@@ -3582,13 +3582,13 @@
         </p:spPr>
         <p:txBody>
           <a:bodyPr wrap="square">
-            <a:spAutoFit/>
+            <a:normAutofit/>
           </a:bodyPr>
           <a:lstStyle/>
           <a:p>
             <a:pPr algn="l"/>
             <a:r>
-              <a:rPr sz="40000" b="0" i="1">
+              <a:rPr sz="28000" b="0" i="1">
                 <a:solidFill>
                   <a:srgbClr val="D9BF7A"/>
                 </a:solidFill>
@@ -3607,8 +3607,8 @@
         </p:nvSpPr>
         <p:spPr>
           <a:xfrm>
-            <a:off x="6985000" y="3683000"/>
-            <a:ext cx="4597400" cy="228600"/>
+            <a:off x="6731000" y="4064000"/>
+            <a:ext cx="4851400" cy="1778000"/>
           </a:xfrm>
           <a:prstGeom prst="rect">
             <a:avLst/>
@@ -3617,48 +3617,13 @@
         </p:spPr>
         <p:txBody>
           <a:bodyPr wrap="square">
-            <a:spAutoFit/>
+            <a:normAutofit/>
           </a:bodyPr>
           <a:lstStyle/>
           <a:p>
             <a:pPr algn="r"/>
             <a:r>
-              <a:rPr sz="1400" b="0" i="0">
-                <a:solidFill>
-                  <a:srgbClr val="7B7FA0"/>
-                </a:solidFill>
-                <a:latin typeface="Courier New"/>
-              </a:rPr>
-              <a:t>PRAXISTRANSFER</a:t>
-            </a:r>
-          </a:p>
-        </p:txBody>
-      </p:sp>
-      <p:sp>
-        <p:nvSpPr>
-          <p:cNvPr id="7" name="TextBox 6"/>
-          <p:cNvSpPr txBox="1"/>
-          <p:nvPr/>
-        </p:nvSpPr>
-        <p:spPr>
-          <a:xfrm>
-            <a:off x="6985000" y="4000500"/>
-            <a:ext cx="4597400" cy="1524000"/>
-          </a:xfrm>
-          <a:prstGeom prst="rect">
-            <a:avLst/>
-          </a:prstGeom>
-          <a:noFill/>
-        </p:spPr>
-        <p:txBody>
-          <a:bodyPr wrap="square">
-            <a:spAutoFit/>
-          </a:bodyPr>
-          <a:lstStyle/>
-          <a:p>
-            <a:pPr algn="r"/>
-            <a:r>
-              <a:rPr sz="7600" b="0" i="0">
+              <a:rPr sz="3800" b="0" i="0">
                 <a:solidFill>
                   <a:srgbClr val="F8F8FA"/>
                 </a:solidFill>
@@ -3671,14 +3636,14 @@
       </p:sp>
       <p:sp>
         <p:nvSpPr>
-          <p:cNvPr id="8" name="TextBox 7"/>
+          <p:cNvPr id="7" name="TextBox 6"/>
           <p:cNvSpPr txBox="1"/>
           <p:nvPr/>
         </p:nvSpPr>
         <p:spPr>
           <a:xfrm>
-            <a:off x="6985000" y="5524500"/>
-            <a:ext cx="4597400" cy="635000"/>
+            <a:off x="6731000" y="5842000"/>
+            <a:ext cx="4851400" cy="635000"/>
           </a:xfrm>
           <a:prstGeom prst="rect">
             <a:avLst/>
@@ -3687,13 +3652,13 @@
         </p:spPr>
         <p:txBody>
           <a:bodyPr wrap="square">
-            <a:spAutoFit/>
+            <a:normAutofit/>
           </a:bodyPr>
           <a:lstStyle/>
           <a:p>
             <a:pPr algn="r"/>
             <a:r>
-              <a:rPr sz="2000" b="0" i="1">
+              <a:rPr sz="1400" b="0" i="1">
                 <a:solidFill>
                   <a:srgbClr val="7B7FA0"/>
                 </a:solidFill>
@@ -3738,7 +3703,7 @@
         </p:nvSpPr>
         <p:spPr>
           <a:xfrm>
-            <a:off x="609600" y="304800"/>
+            <a:off x="609600" y="279400"/>
             <a:ext cx="2540000" cy="279400"/>
           </a:xfrm>
           <a:prstGeom prst="rect">
@@ -3748,13 +3713,13 @@
         </p:spPr>
         <p:txBody>
           <a:bodyPr wrap="square">
-            <a:spAutoFit/>
+            <a:normAutofit/>
           </a:bodyPr>
           <a:lstStyle/>
           <a:p>
             <a:pPr algn="l"/>
             <a:r>
-              <a:rPr sz="1600" b="1" i="0">
+              <a:rPr sz="1000" b="1" i="0">
                 <a:solidFill>
                   <a:srgbClr val="191D2E"/>
                 </a:solidFill>
@@ -3773,8 +3738,8 @@
         </p:nvSpPr>
         <p:spPr>
           <a:xfrm>
-            <a:off x="0" y="304800"/>
-            <a:ext cx="11582400" cy="279400"/>
+            <a:off x="609600" y="279400"/>
+            <a:ext cx="10972800" cy="279400"/>
           </a:xfrm>
           <a:prstGeom prst="rect">
             <a:avLst/>
@@ -3783,13 +3748,13 @@
         </p:spPr>
         <p:txBody>
           <a:bodyPr wrap="square">
-            <a:spAutoFit/>
+            <a:normAutofit/>
           </a:bodyPr>
           <a:lstStyle/>
           <a:p>
             <a:pPr algn="r"/>
             <a:r>
-              <a:rPr sz="1300" b="0" i="0" spc="100">
+              <a:rPr sz="900" b="0" i="0">
                 <a:solidFill>
                   <a:srgbClr val="7B7FA0"/>
                 </a:solidFill>
@@ -3808,8 +3773,8 @@
         </p:nvSpPr>
         <p:spPr>
           <a:xfrm>
-            <a:off x="0" y="6350000"/>
-            <a:ext cx="11582400" cy="228600"/>
+            <a:off x="609600" y="6426200"/>
+            <a:ext cx="10972800" cy="228600"/>
           </a:xfrm>
           <a:prstGeom prst="rect">
             <a:avLst/>
@@ -3818,33 +3783,76 @@
         </p:spPr>
         <p:txBody>
           <a:bodyPr wrap="square">
-            <a:spAutoFit/>
+            <a:normAutofit/>
           </a:bodyPr>
           <a:lstStyle/>
           <a:p>
             <a:pPr algn="r"/>
             <a:r>
-              <a:rPr sz="1300" b="0" i="0">
+              <a:rPr sz="900" b="0" i="0">
                 <a:solidFill>
                   <a:srgbClr val="7B7FA0"/>
                 </a:solidFill>
                 <a:latin typeface="Courier New"/>
               </a:rPr>
-              <a:t>11 / 12</a:t>
+              <a:t>11</a:t>
             </a:r>
           </a:p>
         </p:txBody>
       </p:sp>
       <p:sp>
         <p:nvSpPr>
-          <p:cNvPr id="5" name="TextBox 4"/>
+          <p:cNvPr id="5" name="Rectangle 4"/>
+          <p:cNvSpPr/>
+          <p:nvPr/>
+        </p:nvSpPr>
+        <p:spPr>
+          <a:xfrm>
+            <a:off x="609600" y="825500"/>
+            <a:ext cx="10972800" cy="6350"/>
+          </a:xfrm>
+          <a:prstGeom prst="rect">
+            <a:avLst/>
+          </a:prstGeom>
+          <a:solidFill>
+            <a:srgbClr val="191D2E"/>
+          </a:solidFill>
+          <a:ln>
+            <a:noFill/>
+          </a:ln>
+        </p:spPr>
+        <p:style>
+          <a:lnRef idx="1">
+            <a:schemeClr val="accent1"/>
+          </a:lnRef>
+          <a:fillRef idx="3">
+            <a:schemeClr val="accent1"/>
+          </a:fillRef>
+          <a:effectRef idx="2">
+            <a:schemeClr val="accent1"/>
+          </a:effectRef>
+          <a:fontRef idx="minor">
+            <a:schemeClr val="lt1"/>
+          </a:fontRef>
+        </p:style>
+        <p:txBody>
+          <a:bodyPr rtlCol="0" anchor="ctr"/>
+          <a:lstStyle/>
+          <a:p>
+            <a:pPr algn="ctr"/>
+          </a:p>
+        </p:txBody>
+      </p:sp>
+      <p:sp>
+        <p:nvSpPr>
+          <p:cNvPr id="6" name="TextBox 5"/>
           <p:cNvSpPr txBox="1"/>
           <p:nvPr/>
         </p:nvSpPr>
         <p:spPr>
           <a:xfrm>
-            <a:off x="609600" y="1016000"/>
-            <a:ext cx="4953000" cy="2032000"/>
+            <a:off x="609600" y="920750"/>
+            <a:ext cx="4826000" cy="1778000"/>
           </a:xfrm>
           <a:prstGeom prst="rect">
             <a:avLst/>
@@ -3853,13 +3861,13 @@
         </p:spPr>
         <p:txBody>
           <a:bodyPr wrap="square">
-            <a:spAutoFit/>
+            <a:normAutofit/>
           </a:bodyPr>
           <a:lstStyle/>
           <a:p>
             <a:pPr algn="l"/>
             <a:r>
-              <a:rPr sz="6000" b="0" i="0">
+              <a:rPr sz="3800" b="0" i="0">
                 <a:solidFill>
                   <a:srgbClr val="191D2E"/>
                 </a:solidFill>
@@ -3872,14 +3880,14 @@
       </p:sp>
       <p:sp>
         <p:nvSpPr>
-          <p:cNvPr id="6" name="TextBox 5"/>
+          <p:cNvPr id="7" name="TextBox 6"/>
           <p:cNvSpPr txBox="1"/>
           <p:nvPr/>
         </p:nvSpPr>
         <p:spPr>
           <a:xfrm>
-            <a:off x="609600" y="3175000"/>
-            <a:ext cx="4953000" cy="1270000"/>
+            <a:off x="609600" y="2825750"/>
+            <a:ext cx="4826000" cy="1016000"/>
           </a:xfrm>
           <a:prstGeom prst="rect">
             <a:avLst/>
@@ -3888,13 +3896,13 @@
         </p:spPr>
         <p:txBody>
           <a:bodyPr wrap="square">
-            <a:spAutoFit/>
+            <a:normAutofit/>
           </a:bodyPr>
           <a:lstStyle/>
           <a:p>
             <a:pPr algn="l"/>
             <a:r>
-              <a:rPr sz="2000" b="0" i="0">
+              <a:rPr sz="1400" b="0" i="0">
                 <a:solidFill>
                   <a:srgbClr val="4D5270"/>
                 </a:solidFill>
@@ -3907,15 +3915,15 @@
       </p:sp>
       <p:graphicFrame>
         <p:nvGraphicFramePr>
-          <p:cNvPr id="7" name="Table 6"/>
+          <p:cNvPr id="8" name="Table 7"/>
           <p:cNvGraphicFramePr>
             <a:graphicFrameLocks noGrp="1"/>
           </p:cNvGraphicFramePr>
           <p:nvPr/>
         </p:nvGraphicFramePr>
         <p:xfrm>
-          <a:off x="6096000" y="1016000"/>
-          <a:ext cx="6502400" cy="3556000"/>
+          <a:off x="5715000" y="920750"/>
+          <a:ext cx="5867400" cy="3048000"/>
         </p:xfrm>
         <a:graphic>
           <a:graphicData uri="http://schemas.openxmlformats.org/drawingml/2006/table">
@@ -3924,19 +3932,19 @@
                 <a:tableStyleId>{5C22544A-7EE6-4342-B048-85BDC9FD1C3A}</a:tableStyleId>
               </a:tblPr>
               <a:tblGrid>
-                <a:gridCol w="1625600"/>
-                <a:gridCol w="1625600"/>
-                <a:gridCol w="1625600"/>
-                <a:gridCol w="1625600"/>
+                <a:gridCol w="1466850"/>
+                <a:gridCol w="1466850"/>
+                <a:gridCol w="1466850"/>
+                <a:gridCol w="1466850"/>
               </a:tblGrid>
-              <a:tr h="444500">
-                <a:tc>
-                  <a:txBody>
-                    <a:bodyPr wrap="square"/>
-                    <a:lstStyle/>
-                    <a:p>
-                      <a:r>
-                        <a:rPr sz="1400" b="1">
+              <a:tr h="381000">
+                <a:tc>
+                  <a:txBody>
+                    <a:bodyPr wrap="square"/>
+                    <a:lstStyle/>
+                    <a:p>
+                      <a:r>
+                        <a:rPr sz="1000" b="1">
                           <a:solidFill>
                             <a:srgbClr val="F8F8FA"/>
                           </a:solidFill>
@@ -3958,7 +3966,7 @@
                     <a:lstStyle/>
                     <a:p>
                       <a:r>
-                        <a:rPr sz="1400" b="1">
+                        <a:rPr sz="1000" b="1">
                           <a:solidFill>
                             <a:srgbClr val="F8F8FA"/>
                           </a:solidFill>
@@ -3980,7 +3988,7 @@
                     <a:lstStyle/>
                     <a:p>
                       <a:r>
-                        <a:rPr sz="1400" b="1">
+                        <a:rPr sz="1000" b="1">
                           <a:solidFill>
                             <a:srgbClr val="F8F8FA"/>
                           </a:solidFill>
@@ -4002,7 +4010,7 @@
                     <a:lstStyle/>
                     <a:p>
                       <a:r>
-                        <a:rPr sz="1400" b="1">
+                        <a:rPr sz="1000" b="1">
                           <a:solidFill>
                             <a:srgbClr val="F8F8FA"/>
                           </a:solidFill>
@@ -4019,14 +4027,14 @@
                   </a:tcPr>
                 </a:tc>
               </a:tr>
-              <a:tr h="444500">
-                <a:tc>
-                  <a:txBody>
-                    <a:bodyPr wrap="square"/>
-                    <a:lstStyle/>
-                    <a:p>
-                      <a:r>
-                        <a:rPr sz="1600" b="0">
+              <a:tr h="381000">
+                <a:tc>
+                  <a:txBody>
+                    <a:bodyPr wrap="square"/>
+                    <a:lstStyle/>
+                    <a:p>
+                      <a:r>
+                        <a:rPr sz="1000" b="0">
                           <a:solidFill>
                             <a:srgbClr val="191D2E"/>
                           </a:solidFill>
@@ -4048,7 +4056,7 @@
                     <a:lstStyle/>
                     <a:p>
                       <a:r>
-                        <a:rPr sz="1600" b="0">
+                        <a:rPr sz="1000" b="0">
                           <a:solidFill>
                             <a:srgbClr val="191D2E"/>
                           </a:solidFill>
@@ -4070,7 +4078,7 @@
                     <a:lstStyle/>
                     <a:p>
                       <a:r>
-                        <a:rPr sz="1600" b="0">
+                        <a:rPr sz="1000" b="0">
                           <a:solidFill>
                             <a:srgbClr val="191D2E"/>
                           </a:solidFill>
@@ -4092,7 +4100,7 @@
                     <a:lstStyle/>
                     <a:p>
                       <a:r>
-                        <a:rPr sz="1600" b="0">
+                        <a:rPr sz="1000" b="0">
                           <a:solidFill>
                             <a:srgbClr val="191D2E"/>
                           </a:solidFill>
@@ -4109,14 +4117,14 @@
                   </a:tcPr>
                 </a:tc>
               </a:tr>
-              <a:tr h="444500">
-                <a:tc>
-                  <a:txBody>
-                    <a:bodyPr wrap="square"/>
-                    <a:lstStyle/>
-                    <a:p>
-                      <a:r>
-                        <a:rPr sz="1600" b="0">
+              <a:tr h="381000">
+                <a:tc>
+                  <a:txBody>
+                    <a:bodyPr wrap="square"/>
+                    <a:lstStyle/>
+                    <a:p>
+                      <a:r>
+                        <a:rPr sz="1000" b="0">
                           <a:solidFill>
                             <a:srgbClr val="191D2E"/>
                           </a:solidFill>
@@ -4138,7 +4146,7 @@
                     <a:lstStyle/>
                     <a:p>
                       <a:r>
-                        <a:rPr sz="1600" b="0">
+                        <a:rPr sz="1000" b="0">
                           <a:solidFill>
                             <a:srgbClr val="191D2E"/>
                           </a:solidFill>
@@ -4160,7 +4168,7 @@
                     <a:lstStyle/>
                     <a:p>
                       <a:r>
-                        <a:rPr sz="1600" b="0">
+                        <a:rPr sz="1000" b="0">
                           <a:solidFill>
                             <a:srgbClr val="191D2E"/>
                           </a:solidFill>
@@ -4182,7 +4190,7 @@
                     <a:lstStyle/>
                     <a:p>
                       <a:r>
-                        <a:rPr sz="1600" b="0">
+                        <a:rPr sz="1000" b="0">
                           <a:solidFill>
                             <a:srgbClr val="191D2E"/>
                           </a:solidFill>
@@ -4199,14 +4207,14 @@
                   </a:tcPr>
                 </a:tc>
               </a:tr>
-              <a:tr h="444500">
-                <a:tc>
-                  <a:txBody>
-                    <a:bodyPr wrap="square"/>
-                    <a:lstStyle/>
-                    <a:p>
-                      <a:r>
-                        <a:rPr sz="1600" b="0">
+              <a:tr h="381000">
+                <a:tc>
+                  <a:txBody>
+                    <a:bodyPr wrap="square"/>
+                    <a:lstStyle/>
+                    <a:p>
+                      <a:r>
+                        <a:rPr sz="1000" b="0">
                           <a:solidFill>
                             <a:srgbClr val="191D2E"/>
                           </a:solidFill>
@@ -4228,7 +4236,7 @@
                     <a:lstStyle/>
                     <a:p>
                       <a:r>
-                        <a:rPr sz="1600" b="0">
+                        <a:rPr sz="1000" b="0">
                           <a:solidFill>
                             <a:srgbClr val="191D2E"/>
                           </a:solidFill>
@@ -4250,7 +4258,7 @@
                     <a:lstStyle/>
                     <a:p>
                       <a:r>
-                        <a:rPr sz="1600" b="0">
+                        <a:rPr sz="1000" b="0">
                           <a:solidFill>
                             <a:srgbClr val="191D2E"/>
                           </a:solidFill>
@@ -4272,7 +4280,7 @@
                     <a:lstStyle/>
                     <a:p>
                       <a:r>
-                        <a:rPr sz="1600" b="0">
+                        <a:rPr sz="1000" b="0">
                           <a:solidFill>
                             <a:srgbClr val="191D2E"/>
                           </a:solidFill>
@@ -4289,14 +4297,14 @@
                   </a:tcPr>
                 </a:tc>
               </a:tr>
-              <a:tr h="444500">
-                <a:tc>
-                  <a:txBody>
-                    <a:bodyPr wrap="square"/>
-                    <a:lstStyle/>
-                    <a:p>
-                      <a:r>
-                        <a:rPr sz="1600" b="0">
+              <a:tr h="381000">
+                <a:tc>
+                  <a:txBody>
+                    <a:bodyPr wrap="square"/>
+                    <a:lstStyle/>
+                    <a:p>
+                      <a:r>
+                        <a:rPr sz="1000" b="0">
                           <a:solidFill>
                             <a:srgbClr val="191D2E"/>
                           </a:solidFill>
@@ -4318,7 +4326,7 @@
                     <a:lstStyle/>
                     <a:p>
                       <a:r>
-                        <a:rPr sz="1600" b="0">
+                        <a:rPr sz="1000" b="0">
                           <a:solidFill>
                             <a:srgbClr val="191D2E"/>
                           </a:solidFill>
@@ -4340,7 +4348,7 @@
                     <a:lstStyle/>
                     <a:p>
                       <a:r>
-                        <a:rPr sz="1600" b="0">
+                        <a:rPr sz="1000" b="0">
                           <a:solidFill>
                             <a:srgbClr val="191D2E"/>
                           </a:solidFill>
@@ -4362,7 +4370,7 @@
                     <a:lstStyle/>
                     <a:p>
                       <a:r>
-                        <a:rPr sz="1600" b="0">
+                        <a:rPr sz="1000" b="0">
                           <a:solidFill>
                             <a:srgbClr val="191D2E"/>
                           </a:solidFill>
@@ -4379,14 +4387,14 @@
                   </a:tcPr>
                 </a:tc>
               </a:tr>
-              <a:tr h="444500">
-                <a:tc>
-                  <a:txBody>
-                    <a:bodyPr wrap="square"/>
-                    <a:lstStyle/>
-                    <a:p>
-                      <a:r>
-                        <a:rPr sz="1600" b="0">
+              <a:tr h="381000">
+                <a:tc>
+                  <a:txBody>
+                    <a:bodyPr wrap="square"/>
+                    <a:lstStyle/>
+                    <a:p>
+                      <a:r>
+                        <a:rPr sz="1000" b="0">
                           <a:solidFill>
                             <a:srgbClr val="191D2E"/>
                           </a:solidFill>
@@ -4408,7 +4416,7 @@
                     <a:lstStyle/>
                     <a:p>
                       <a:r>
-                        <a:rPr sz="1600" b="0">
+                        <a:rPr sz="1000" b="0">
                           <a:solidFill>
                             <a:srgbClr val="191D2E"/>
                           </a:solidFill>
@@ -4430,7 +4438,7 @@
                     <a:lstStyle/>
                     <a:p>
                       <a:r>
-                        <a:rPr sz="1600" b="0">
+                        <a:rPr sz="1000" b="0">
                           <a:solidFill>
                             <a:srgbClr val="191D2E"/>
                           </a:solidFill>
@@ -4452,7 +4460,7 @@
                     <a:lstStyle/>
                     <a:p>
                       <a:r>
-                        <a:rPr sz="1600" b="0">
+                        <a:rPr sz="1000" b="0">
                           <a:solidFill>
                             <a:srgbClr val="191D2E"/>
                           </a:solidFill>
@@ -4469,14 +4477,14 @@
                   </a:tcPr>
                 </a:tc>
               </a:tr>
-              <a:tr h="444500">
-                <a:tc>
-                  <a:txBody>
-                    <a:bodyPr wrap="square"/>
-                    <a:lstStyle/>
-                    <a:p>
-                      <a:r>
-                        <a:rPr sz="1600" b="0">
+              <a:tr h="381000">
+                <a:tc>
+                  <a:txBody>
+                    <a:bodyPr wrap="square"/>
+                    <a:lstStyle/>
+                    <a:p>
+                      <a:r>
+                        <a:rPr sz="1000" b="0">
                           <a:solidFill>
                             <a:srgbClr val="191D2E"/>
                           </a:solidFill>
@@ -4498,7 +4506,7 @@
                     <a:lstStyle/>
                     <a:p>
                       <a:r>
-                        <a:rPr sz="1600" b="0">
+                        <a:rPr sz="1000" b="0">
                           <a:solidFill>
                             <a:srgbClr val="191D2E"/>
                           </a:solidFill>
@@ -4520,7 +4528,7 @@
                     <a:lstStyle/>
                     <a:p>
                       <a:r>
-                        <a:rPr sz="1600" b="0">
+                        <a:rPr sz="1000" b="0">
                           <a:solidFill>
                             <a:srgbClr val="191D2E"/>
                           </a:solidFill>
@@ -4542,7 +4550,7 @@
                     <a:lstStyle/>
                     <a:p>
                       <a:r>
-                        <a:rPr sz="1600" b="0">
+                        <a:rPr sz="1000" b="0">
                           <a:solidFill>
                             <a:srgbClr val="191D2E"/>
                           </a:solidFill>
@@ -4559,14 +4567,14 @@
                   </a:tcPr>
                 </a:tc>
               </a:tr>
-              <a:tr h="444500">
-                <a:tc>
-                  <a:txBody>
-                    <a:bodyPr wrap="square"/>
-                    <a:lstStyle/>
-                    <a:p>
-                      <a:r>
-                        <a:rPr sz="1600" b="0">
+              <a:tr h="381000">
+                <a:tc>
+                  <a:txBody>
+                    <a:bodyPr wrap="square"/>
+                    <a:lstStyle/>
+                    <a:p>
+                      <a:r>
+                        <a:rPr sz="1000" b="0">
                           <a:solidFill>
                             <a:srgbClr val="191D2E"/>
                           </a:solidFill>
@@ -4588,7 +4596,7 @@
                     <a:lstStyle/>
                     <a:p>
                       <a:r>
-                        <a:rPr sz="1600" b="0">
+                        <a:rPr sz="1000" b="0">
                           <a:solidFill>
                             <a:srgbClr val="191D2E"/>
                           </a:solidFill>
@@ -4610,7 +4618,7 @@
                     <a:lstStyle/>
                     <a:p>
                       <a:r>
-                        <a:rPr sz="1600" b="0">
+                        <a:rPr sz="1000" b="0">
                           <a:solidFill>
                             <a:srgbClr val="191D2E"/>
                           </a:solidFill>
@@ -4632,7 +4640,7 @@
                     <a:lstStyle/>
                     <a:p>
                       <a:r>
-                        <a:rPr sz="1600" b="0">
+                        <a:rPr sz="1000" b="0">
                           <a:solidFill>
                             <a:srgbClr val="191D2E"/>
                           </a:solidFill>
@@ -4687,7 +4695,7 @@
         </p:nvSpPr>
         <p:spPr>
           <a:xfrm>
-            <a:off x="609600" y="304800"/>
+            <a:off x="609600" y="279400"/>
             <a:ext cx="2540000" cy="279400"/>
           </a:xfrm>
           <a:prstGeom prst="rect">
@@ -4697,13 +4705,13 @@
         </p:spPr>
         <p:txBody>
           <a:bodyPr wrap="square">
-            <a:spAutoFit/>
+            <a:normAutofit/>
           </a:bodyPr>
           <a:lstStyle/>
           <a:p>
             <a:pPr algn="l"/>
             <a:r>
-              <a:rPr sz="1600" b="1" i="0">
+              <a:rPr sz="1000" b="1" i="0">
                 <a:solidFill>
                   <a:srgbClr val="191D2E"/>
                 </a:solidFill>
@@ -4722,8 +4730,8 @@
         </p:nvSpPr>
         <p:spPr>
           <a:xfrm>
-            <a:off x="0" y="304800"/>
-            <a:ext cx="11582400" cy="279400"/>
+            <a:off x="609600" y="279400"/>
+            <a:ext cx="10972800" cy="279400"/>
           </a:xfrm>
           <a:prstGeom prst="rect">
             <a:avLst/>
@@ -4732,13 +4740,13 @@
         </p:spPr>
         <p:txBody>
           <a:bodyPr wrap="square">
-            <a:spAutoFit/>
+            <a:normAutofit/>
           </a:bodyPr>
           <a:lstStyle/>
           <a:p>
             <a:pPr algn="r"/>
             <a:r>
-              <a:rPr sz="1300" b="0" i="0" spc="100">
+              <a:rPr sz="900" b="0" i="0">
                 <a:solidFill>
                   <a:srgbClr val="7B7FA0"/>
                 </a:solidFill>
@@ -4757,8 +4765,8 @@
         </p:nvSpPr>
         <p:spPr>
           <a:xfrm>
-            <a:off x="0" y="6350000"/>
-            <a:ext cx="11582400" cy="228600"/>
+            <a:off x="609600" y="6426200"/>
+            <a:ext cx="10972800" cy="228600"/>
           </a:xfrm>
           <a:prstGeom prst="rect">
             <a:avLst/>
@@ -4767,33 +4775,76 @@
         </p:spPr>
         <p:txBody>
           <a:bodyPr wrap="square">
-            <a:spAutoFit/>
+            <a:normAutofit/>
           </a:bodyPr>
           <a:lstStyle/>
           <a:p>
             <a:pPr algn="r"/>
             <a:r>
-              <a:rPr sz="1300" b="0" i="0">
+              <a:rPr sz="900" b="0" i="0">
                 <a:solidFill>
                   <a:srgbClr val="7B7FA0"/>
                 </a:solidFill>
                 <a:latin typeface="Courier New"/>
               </a:rPr>
-              <a:t>12 / 12</a:t>
+              <a:t>12</a:t>
             </a:r>
           </a:p>
         </p:txBody>
       </p:sp>
       <p:sp>
         <p:nvSpPr>
-          <p:cNvPr id="5" name="TextBox 4"/>
+          <p:cNvPr id="5" name="Rectangle 4"/>
+          <p:cNvSpPr/>
+          <p:nvPr/>
+        </p:nvSpPr>
+        <p:spPr>
+          <a:xfrm>
+            <a:off x="609600" y="825500"/>
+            <a:ext cx="10972800" cy="6350"/>
+          </a:xfrm>
+          <a:prstGeom prst="rect">
+            <a:avLst/>
+          </a:prstGeom>
+          <a:solidFill>
+            <a:srgbClr val="191D2E"/>
+          </a:solidFill>
+          <a:ln>
+            <a:noFill/>
+          </a:ln>
+        </p:spPr>
+        <p:style>
+          <a:lnRef idx="1">
+            <a:schemeClr val="accent1"/>
+          </a:lnRef>
+          <a:fillRef idx="3">
+            <a:schemeClr val="accent1"/>
+          </a:fillRef>
+          <a:effectRef idx="2">
+            <a:schemeClr val="accent1"/>
+          </a:effectRef>
+          <a:fontRef idx="minor">
+            <a:schemeClr val="lt1"/>
+          </a:fontRef>
+        </p:style>
+        <p:txBody>
+          <a:bodyPr rtlCol="0" anchor="ctr"/>
+          <a:lstStyle/>
+          <a:p>
+            <a:pPr algn="ctr"/>
+          </a:p>
+        </p:txBody>
+      </p:sp>
+      <p:sp>
+        <p:nvSpPr>
+          <p:cNvPr id="6" name="TextBox 5"/>
           <p:cNvSpPr txBox="1"/>
           <p:nvPr/>
         </p:nvSpPr>
         <p:spPr>
           <a:xfrm>
-            <a:off x="609600" y="1016000"/>
-            <a:ext cx="4953000" cy="2032000"/>
+            <a:off x="609600" y="920750"/>
+            <a:ext cx="10972800" cy="1778000"/>
           </a:xfrm>
           <a:prstGeom prst="rect">
             <a:avLst/>
@@ -4802,13 +4853,13 @@
         </p:spPr>
         <p:txBody>
           <a:bodyPr wrap="square">
-            <a:spAutoFit/>
+            <a:normAutofit/>
           </a:bodyPr>
           <a:lstStyle/>
           <a:p>
             <a:pPr algn="l"/>
             <a:r>
-              <a:rPr sz="6000" b="0" i="0">
+              <a:rPr sz="3800" b="0" i="0">
                 <a:solidFill>
                   <a:srgbClr val="191D2E"/>
                 </a:solidFill>
@@ -4821,14 +4872,57 @@
       </p:sp>
       <p:sp>
         <p:nvSpPr>
-          <p:cNvPr id="6" name="TextBox 5"/>
+          <p:cNvPr id="7" name="Rectangle 6"/>
+          <p:cNvSpPr/>
+          <p:nvPr/>
+        </p:nvSpPr>
+        <p:spPr>
+          <a:xfrm>
+            <a:off x="609600" y="2762250"/>
+            <a:ext cx="10972800" cy="6350"/>
+          </a:xfrm>
+          <a:prstGeom prst="rect">
+            <a:avLst/>
+          </a:prstGeom>
+          <a:solidFill>
+            <a:srgbClr val="E0E0E8"/>
+          </a:solidFill>
+          <a:ln>
+            <a:noFill/>
+          </a:ln>
+        </p:spPr>
+        <p:style>
+          <a:lnRef idx="1">
+            <a:schemeClr val="accent1"/>
+          </a:lnRef>
+          <a:fillRef idx="3">
+            <a:schemeClr val="accent1"/>
+          </a:fillRef>
+          <a:effectRef idx="2">
+            <a:schemeClr val="accent1"/>
+          </a:effectRef>
+          <a:fontRef idx="minor">
+            <a:schemeClr val="lt1"/>
+          </a:fontRef>
+        </p:style>
+        <p:txBody>
+          <a:bodyPr rtlCol="0" anchor="ctr"/>
+          <a:lstStyle/>
+          <a:p>
+            <a:pPr algn="ctr"/>
+          </a:p>
+        </p:txBody>
+      </p:sp>
+      <p:sp>
+        <p:nvSpPr>
+          <p:cNvPr id="8" name="TextBox 7"/>
           <p:cNvSpPr txBox="1"/>
           <p:nvPr/>
         </p:nvSpPr>
         <p:spPr>
           <a:xfrm>
-            <a:off x="609600" y="3175000"/>
-            <a:ext cx="4953000" cy="1270000"/>
+            <a:off x="609600" y="2876550"/>
+            <a:ext cx="254000" cy="355600"/>
           </a:xfrm>
           <a:prstGeom prst="rect">
             <a:avLst/>
@@ -4837,15 +4931,50 @@
         </p:spPr>
         <p:txBody>
           <a:bodyPr wrap="square">
-            <a:spAutoFit/>
+            <a:normAutofit/>
           </a:bodyPr>
           <a:lstStyle/>
           <a:p>
             <a:pPr algn="l"/>
             <a:r>
-              <a:rPr sz="2000" b="0" i="0">
+              <a:rPr sz="2200" b="0" i="0">
                 <a:solidFill>
-                  <a:srgbClr val="4D5270"/>
+                  <a:srgbClr val="1F2B56"/>
+                </a:solidFill>
+                <a:latin typeface="Georgia"/>
+              </a:rPr>
+              <a:t>–</a:t>
+            </a:r>
+          </a:p>
+        </p:txBody>
+      </p:sp>
+      <p:sp>
+        <p:nvSpPr>
+          <p:cNvPr id="9" name="TextBox 8"/>
+          <p:cNvSpPr txBox="1"/>
+          <p:nvPr/>
+        </p:nvSpPr>
+        <p:spPr>
+          <a:xfrm>
+            <a:off x="939799" y="2851150"/>
+            <a:ext cx="10642600" cy="508000"/>
+          </a:xfrm>
+          <a:prstGeom prst="rect">
+            <a:avLst/>
+          </a:prstGeom>
+          <a:noFill/>
+        </p:spPr>
+        <p:txBody>
+          <a:bodyPr wrap="square">
+            <a:normAutofit/>
+          </a:bodyPr>
+          <a:lstStyle/>
+          <a:p>
+            <a:pPr algn="l"/>
+            <a:r>
+              <a:rPr sz="1400" b="0" i="0">
+                <a:solidFill>
+                  <a:srgbClr val="191D2E"/>
                 </a:solidFill>
                 <a:latin typeface="Georgia"/>
               </a:rPr>
@@ -4854,707 +4983,49 @@
           </a:p>
         </p:txBody>
       </p:sp>
-      <p:graphicFrame>
-        <p:nvGraphicFramePr>
-          <p:cNvPr id="7" name="Table 6"/>
-          <p:cNvGraphicFramePr>
-            <a:graphicFrameLocks noGrp="1"/>
-          </p:cNvGraphicFramePr>
+      <p:sp>
+        <p:nvSpPr>
+          <p:cNvPr id="10" name="Rectangle 9"/>
+          <p:cNvSpPr/>
           <p:nvPr/>
-        </p:nvGraphicFramePr>
-        <p:xfrm>
-          <a:off x="6096000" y="1016000"/>
-          <a:ext cx="6502400" cy="2667000"/>
-        </p:xfrm>
-        <a:graphic>
-          <a:graphicData uri="http://schemas.openxmlformats.org/drawingml/2006/table">
-            <a:tbl>
-              <a:tblPr firstRow="1" bandRow="1">
-                <a:tableStyleId>{5C22544A-7EE6-4342-B048-85BDC9FD1C3A}</a:tableStyleId>
-              </a:tblPr>
-              <a:tblGrid>
-                <a:gridCol w="1300480"/>
-                <a:gridCol w="1300480"/>
-                <a:gridCol w="1300480"/>
-                <a:gridCol w="1300480"/>
-                <a:gridCol w="1300480"/>
-              </a:tblGrid>
-              <a:tr h="444500">
-                <a:tc>
-                  <a:txBody>
-                    <a:bodyPr wrap="square"/>
-                    <a:lstStyle/>
-                    <a:p>
-                      <a:r>
-                        <a:rPr sz="1400" b="1">
-                          <a:solidFill>
-                            <a:srgbClr val="F8F8FA"/>
-                          </a:solidFill>
-                          <a:latin typeface="Courier New"/>
-                        </a:rPr>
-                        <a:t>Aussage</a:t>
-                      </a:r>
-                    </a:p>
-                  </a:txBody>
-                  <a:tcPr>
-                    <a:solidFill>
-                      <a:srgbClr val="191D2E"/>
-                    </a:solidFill>
-                  </a:tcPr>
-                </a:tc>
-                <a:tc>
-                  <a:txBody>
-                    <a:bodyPr wrap="square"/>
-                    <a:lstStyle/>
-                    <a:p>
-                      <a:r>
-                        <a:rPr sz="1400" b="1">
-                          <a:solidFill>
-                            <a:srgbClr val="F8F8FA"/>
-                          </a:solidFill>
-                          <a:latin typeface="Courier New"/>
-                        </a:rPr>
-                        <a:t>4 – voll</a:t>
-                      </a:r>
-                    </a:p>
-                  </a:txBody>
-                  <a:tcPr>
-                    <a:solidFill>
-                      <a:srgbClr val="191D2E"/>
-                    </a:solidFill>
-                  </a:tcPr>
-                </a:tc>
-                <a:tc>
-                  <a:txBody>
-                    <a:bodyPr wrap="square"/>
-                    <a:lstStyle/>
-                    <a:p>
-                      <a:r>
-                        <a:rPr sz="1400" b="1">
-                          <a:solidFill>
-                            <a:srgbClr val="F8F8FA"/>
-                          </a:solidFill>
-                          <a:latin typeface="Courier New"/>
-                        </a:rPr>
-                        <a:t>3 – eher</a:t>
-                      </a:r>
-                    </a:p>
-                  </a:txBody>
-                  <a:tcPr>
-                    <a:solidFill>
-                      <a:srgbClr val="191D2E"/>
-                    </a:solidFill>
-                  </a:tcPr>
-                </a:tc>
-                <a:tc>
-                  <a:txBody>
-                    <a:bodyPr wrap="square"/>
-                    <a:lstStyle/>
-                    <a:p>
-                      <a:r>
-                        <a:rPr sz="1400" b="1">
-                          <a:solidFill>
-                            <a:srgbClr val="F8F8FA"/>
-                          </a:solidFill>
-                          <a:latin typeface="Courier New"/>
-                        </a:rPr>
-                        <a:t>2 – kaum</a:t>
-                      </a:r>
-                    </a:p>
-                  </a:txBody>
-                  <a:tcPr>
-                    <a:solidFill>
-                      <a:srgbClr val="191D2E"/>
-                    </a:solidFill>
-                  </a:tcPr>
-                </a:tc>
-                <a:tc>
-                  <a:txBody>
-                    <a:bodyPr wrap="square"/>
-                    <a:lstStyle/>
-                    <a:p>
-                      <a:r>
-                        <a:rPr sz="1400" b="1">
-                          <a:solidFill>
-                            <a:srgbClr val="F8F8FA"/>
-                          </a:solidFill>
-                          <a:latin typeface="Courier New"/>
-                        </a:rPr>
-                        <a:t>1 – nicht</a:t>
-                      </a:r>
-                    </a:p>
-                  </a:txBody>
-                  <a:tcPr>
-                    <a:solidFill>
-                      <a:srgbClr val="191D2E"/>
-                    </a:solidFill>
-                  </a:tcPr>
-                </a:tc>
-              </a:tr>
-              <a:tr h="444500">
-                <a:tc>
-                  <a:txBody>
-                    <a:bodyPr wrap="square"/>
-                    <a:lstStyle/>
-                    <a:p>
-                      <a:r>
-                        <a:rPr sz="1600" b="0">
-                          <a:solidFill>
-                            <a:srgbClr val="191D2E"/>
-                          </a:solidFill>
-                          <a:latin typeface="Courier New"/>
-                        </a:rPr>
-                        <a:t>Ich habe die Ampel-Checkliste bei mind. 3 Kunden selbstständig angewendet.</a:t>
-                      </a:r>
-                    </a:p>
-                  </a:txBody>
-                  <a:tcPr>
-                    <a:solidFill>
-                      <a:srgbClr val="F8F8FA"/>
-                    </a:solidFill>
-                  </a:tcPr>
-                </a:tc>
-                <a:tc>
-                  <a:txBody>
-                    <a:bodyPr wrap="square"/>
-                    <a:lstStyle/>
-                    <a:p>
-                      <a:r>
-                        <a:rPr sz="1600" b="0">
-                          <a:solidFill>
-                            <a:srgbClr val="191D2E"/>
-                          </a:solidFill>
-                          <a:latin typeface="Courier New"/>
-                        </a:rPr>
-                        <a:t>☐</a:t>
-                      </a:r>
-                    </a:p>
-                  </a:txBody>
-                  <a:tcPr>
-                    <a:solidFill>
-                      <a:srgbClr val="F8F8FA"/>
-                    </a:solidFill>
-                  </a:tcPr>
-                </a:tc>
-                <a:tc>
-                  <a:txBody>
-                    <a:bodyPr wrap="square"/>
-                    <a:lstStyle/>
-                    <a:p>
-                      <a:r>
-                        <a:rPr sz="1600" b="0">
-                          <a:solidFill>
-                            <a:srgbClr val="191D2E"/>
-                          </a:solidFill>
-                          <a:latin typeface="Courier New"/>
-                        </a:rPr>
-                        <a:t>☐</a:t>
-                      </a:r>
-                    </a:p>
-                  </a:txBody>
-                  <a:tcPr>
-                    <a:solidFill>
-                      <a:srgbClr val="F8F8FA"/>
-                    </a:solidFill>
-                  </a:tcPr>
-                </a:tc>
-                <a:tc>
-                  <a:txBody>
-                    <a:bodyPr wrap="square"/>
-                    <a:lstStyle/>
-                    <a:p>
-                      <a:r>
-                        <a:rPr sz="1600" b="0">
-                          <a:solidFill>
-                            <a:srgbClr val="191D2E"/>
-                          </a:solidFill>
-                          <a:latin typeface="Courier New"/>
-                        </a:rPr>
-                        <a:t>☐</a:t>
-                      </a:r>
-                    </a:p>
-                  </a:txBody>
-                  <a:tcPr>
-                    <a:solidFill>
-                      <a:srgbClr val="F8F8FA"/>
-                    </a:solidFill>
-                  </a:tcPr>
-                </a:tc>
-                <a:tc>
-                  <a:txBody>
-                    <a:bodyPr wrap="square"/>
-                    <a:lstStyle/>
-                    <a:p>
-                      <a:r>
-                        <a:rPr sz="1600" b="0">
-                          <a:solidFill>
-                            <a:srgbClr val="191D2E"/>
-                          </a:solidFill>
-                          <a:latin typeface="Courier New"/>
-                        </a:rPr>
-                        <a:t>☐</a:t>
-                      </a:r>
-                    </a:p>
-                  </a:txBody>
-                  <a:tcPr>
-                    <a:solidFill>
-                      <a:srgbClr val="F8F8FA"/>
-                    </a:solidFill>
-                  </a:tcPr>
-                </a:tc>
-              </a:tr>
-              <a:tr h="444500">
-                <a:tc>
-                  <a:txBody>
-                    <a:bodyPr wrap="square"/>
-                    <a:lstStyle/>
-                    <a:p>
-                      <a:r>
-                        <a:rPr sz="1600" b="0">
-                          <a:solidFill>
-                            <a:srgbClr val="191D2E"/>
-                          </a:solidFill>
-                          <a:latin typeface="Courier New"/>
-                        </a:rPr>
-                        <a:t>Ich kann quantitative und qualitative Signale klar voneinander abgrenzen.</a:t>
-                      </a:r>
-                    </a:p>
-                  </a:txBody>
-                  <a:tcPr>
-                    <a:solidFill>
-                      <a:srgbClr val="F0F0F5"/>
-                    </a:solidFill>
-                  </a:tcPr>
-                </a:tc>
-                <a:tc>
-                  <a:txBody>
-                    <a:bodyPr wrap="square"/>
-                    <a:lstStyle/>
-                    <a:p>
-                      <a:r>
-                        <a:rPr sz="1600" b="0">
-                          <a:solidFill>
-                            <a:srgbClr val="191D2E"/>
-                          </a:solidFill>
-                          <a:latin typeface="Courier New"/>
-                        </a:rPr>
-                        <a:t>☐</a:t>
-                      </a:r>
-                    </a:p>
-                  </a:txBody>
-                  <a:tcPr>
-                    <a:solidFill>
-                      <a:srgbClr val="F0F0F5"/>
-                    </a:solidFill>
-                  </a:tcPr>
-                </a:tc>
-                <a:tc>
-                  <a:txBody>
-                    <a:bodyPr wrap="square"/>
-                    <a:lstStyle/>
-                    <a:p>
-                      <a:r>
-                        <a:rPr sz="1600" b="0">
-                          <a:solidFill>
-                            <a:srgbClr val="191D2E"/>
-                          </a:solidFill>
-                          <a:latin typeface="Courier New"/>
-                        </a:rPr>
-                        <a:t>☐</a:t>
-                      </a:r>
-                    </a:p>
-                  </a:txBody>
-                  <a:tcPr>
-                    <a:solidFill>
-                      <a:srgbClr val="F0F0F5"/>
-                    </a:solidFill>
-                  </a:tcPr>
-                </a:tc>
-                <a:tc>
-                  <a:txBody>
-                    <a:bodyPr wrap="square"/>
-                    <a:lstStyle/>
-                    <a:p>
-                      <a:r>
-                        <a:rPr sz="1600" b="0">
-                          <a:solidFill>
-                            <a:srgbClr val="191D2E"/>
-                          </a:solidFill>
-                          <a:latin typeface="Courier New"/>
-                        </a:rPr>
-                        <a:t>☐</a:t>
-                      </a:r>
-                    </a:p>
-                  </a:txBody>
-                  <a:tcPr>
-                    <a:solidFill>
-                      <a:srgbClr val="F0F0F5"/>
-                    </a:solidFill>
-                  </a:tcPr>
-                </a:tc>
-                <a:tc>
-                  <a:txBody>
-                    <a:bodyPr wrap="square"/>
-                    <a:lstStyle/>
-                    <a:p>
-                      <a:r>
-                        <a:rPr sz="1600" b="0">
-                          <a:solidFill>
-                            <a:srgbClr val="191D2E"/>
-                          </a:solidFill>
-                          <a:latin typeface="Courier New"/>
-                        </a:rPr>
-                        <a:t>☐</a:t>
-                      </a:r>
-                    </a:p>
-                  </a:txBody>
-                  <a:tcPr>
-                    <a:solidFill>
-                      <a:srgbClr val="F0F0F5"/>
-                    </a:solidFill>
-                  </a:tcPr>
-                </a:tc>
-              </a:tr>
-              <a:tr h="444500">
-                <a:tc>
-                  <a:txBody>
-                    <a:bodyPr wrap="square"/>
-                    <a:lstStyle/>
-                    <a:p>
-                      <a:r>
-                        <a:rPr sz="1600" b="0">
-                          <a:solidFill>
-                            <a:srgbClr val="191D2E"/>
-                          </a:solidFill>
-                          <a:latin typeface="Courier New"/>
-                        </a:rPr>
-                        <a:t>Ich weiß, wann ich an Teamleiter / Problemkreditabteilung eskaliere.</a:t>
-                      </a:r>
-                    </a:p>
-                  </a:txBody>
-                  <a:tcPr>
-                    <a:solidFill>
-                      <a:srgbClr val="F8F8FA"/>
-                    </a:solidFill>
-                  </a:tcPr>
-                </a:tc>
-                <a:tc>
-                  <a:txBody>
-                    <a:bodyPr wrap="square"/>
-                    <a:lstStyle/>
-                    <a:p>
-                      <a:r>
-                        <a:rPr sz="1600" b="0">
-                          <a:solidFill>
-                            <a:srgbClr val="191D2E"/>
-                          </a:solidFill>
-                          <a:latin typeface="Courier New"/>
-                        </a:rPr>
-                        <a:t>☐</a:t>
-                      </a:r>
-                    </a:p>
-                  </a:txBody>
-                  <a:tcPr>
-                    <a:solidFill>
-                      <a:srgbClr val="F8F8FA"/>
-                    </a:solidFill>
-                  </a:tcPr>
-                </a:tc>
-                <a:tc>
-                  <a:txBody>
-                    <a:bodyPr wrap="square"/>
-                    <a:lstStyle/>
-                    <a:p>
-                      <a:r>
-                        <a:rPr sz="1600" b="0">
-                          <a:solidFill>
-                            <a:srgbClr val="191D2E"/>
-                          </a:solidFill>
-                          <a:latin typeface="Courier New"/>
-                        </a:rPr>
-                        <a:t>☐</a:t>
-                      </a:r>
-                    </a:p>
-                  </a:txBody>
-                  <a:tcPr>
-                    <a:solidFill>
-                      <a:srgbClr val="F8F8FA"/>
-                    </a:solidFill>
-                  </a:tcPr>
-                </a:tc>
-                <a:tc>
-                  <a:txBody>
-                    <a:bodyPr wrap="square"/>
-                    <a:lstStyle/>
-                    <a:p>
-                      <a:r>
-                        <a:rPr sz="1600" b="0">
-                          <a:solidFill>
-                            <a:srgbClr val="191D2E"/>
-                          </a:solidFill>
-                          <a:latin typeface="Courier New"/>
-                        </a:rPr>
-                        <a:t>☐</a:t>
-                      </a:r>
-                    </a:p>
-                  </a:txBody>
-                  <a:tcPr>
-                    <a:solidFill>
-                      <a:srgbClr val="F8F8FA"/>
-                    </a:solidFill>
-                  </a:tcPr>
-                </a:tc>
-                <a:tc>
-                  <a:txBody>
-                    <a:bodyPr wrap="square"/>
-                    <a:lstStyle/>
-                    <a:p>
-                      <a:r>
-                        <a:rPr sz="1600" b="0">
-                          <a:solidFill>
-                            <a:srgbClr val="191D2E"/>
-                          </a:solidFill>
-                          <a:latin typeface="Courier New"/>
-                        </a:rPr>
-                        <a:t>☐</a:t>
-                      </a:r>
-                    </a:p>
-                  </a:txBody>
-                  <a:tcPr>
-                    <a:solidFill>
-                      <a:srgbClr val="F8F8FA"/>
-                    </a:solidFill>
-                  </a:tcPr>
-                </a:tc>
-              </a:tr>
-              <a:tr h="444500">
-                <a:tc>
-                  <a:txBody>
-                    <a:bodyPr wrap="square"/>
-                    <a:lstStyle/>
-                    <a:p>
-                      <a:r>
-                        <a:rPr sz="1600" b="0">
-                          <a:solidFill>
-                            <a:srgbClr val="191D2E"/>
-                          </a:solidFill>
-                          <a:latin typeface="Courier New"/>
-                        </a:rPr>
-                        <a:t>Ich habe einen Gelb- oder Rot-Fall mit meiner Führungskraft besprochen.</a:t>
-                      </a:r>
-                    </a:p>
-                  </a:txBody>
-                  <a:tcPr>
-                    <a:solidFill>
-                      <a:srgbClr val="F0F0F5"/>
-                    </a:solidFill>
-                  </a:tcPr>
-                </a:tc>
-                <a:tc>
-                  <a:txBody>
-                    <a:bodyPr wrap="square"/>
-                    <a:lstStyle/>
-                    <a:p>
-                      <a:r>
-                        <a:rPr sz="1600" b="0">
-                          <a:solidFill>
-                            <a:srgbClr val="191D2E"/>
-                          </a:solidFill>
-                          <a:latin typeface="Courier New"/>
-                        </a:rPr>
-                        <a:t>☐</a:t>
-                      </a:r>
-                    </a:p>
-                  </a:txBody>
-                  <a:tcPr>
-                    <a:solidFill>
-                      <a:srgbClr val="F0F0F5"/>
-                    </a:solidFill>
-                  </a:tcPr>
-                </a:tc>
-                <a:tc>
-                  <a:txBody>
-                    <a:bodyPr wrap="square"/>
-                    <a:lstStyle/>
-                    <a:p>
-                      <a:r>
-                        <a:rPr sz="1600" b="0">
-                          <a:solidFill>
-                            <a:srgbClr val="191D2E"/>
-                          </a:solidFill>
-                          <a:latin typeface="Courier New"/>
-                        </a:rPr>
-                        <a:t>☐</a:t>
-                      </a:r>
-                    </a:p>
-                  </a:txBody>
-                  <a:tcPr>
-                    <a:solidFill>
-                      <a:srgbClr val="F0F0F5"/>
-                    </a:solidFill>
-                  </a:tcPr>
-                </a:tc>
-                <a:tc>
-                  <a:txBody>
-                    <a:bodyPr wrap="square"/>
-                    <a:lstStyle/>
-                    <a:p>
-                      <a:r>
-                        <a:rPr sz="1600" b="0">
-                          <a:solidFill>
-                            <a:srgbClr val="191D2E"/>
-                          </a:solidFill>
-                          <a:latin typeface="Courier New"/>
-                        </a:rPr>
-                        <a:t>☐</a:t>
-                      </a:r>
-                    </a:p>
-                  </a:txBody>
-                  <a:tcPr>
-                    <a:solidFill>
-                      <a:srgbClr val="F0F0F5"/>
-                    </a:solidFill>
-                  </a:tcPr>
-                </a:tc>
-                <a:tc>
-                  <a:txBody>
-                    <a:bodyPr wrap="square"/>
-                    <a:lstStyle/>
-                    <a:p>
-                      <a:r>
-                        <a:rPr sz="1600" b="0">
-                          <a:solidFill>
-                            <a:srgbClr val="191D2E"/>
-                          </a:solidFill>
-                          <a:latin typeface="Courier New"/>
-                        </a:rPr>
-                        <a:t>☐</a:t>
-                      </a:r>
-                    </a:p>
-                  </a:txBody>
-                  <a:tcPr>
-                    <a:solidFill>
-                      <a:srgbClr val="F0F0F5"/>
-                    </a:solidFill>
-                  </a:tcPr>
-                </a:tc>
-              </a:tr>
-              <a:tr h="444500">
-                <a:tc>
-                  <a:txBody>
-                    <a:bodyPr wrap="square"/>
-                    <a:lstStyle/>
-                    <a:p>
-                      <a:r>
-                        <a:rPr sz="1600" b="0">
-                          <a:solidFill>
-                            <a:srgbClr val="191D2E"/>
-                          </a:solidFill>
-                          <a:latin typeface="Courier New"/>
-                        </a:rPr>
-                        <a:t>Ich dokumentiere Risikoeinschätzungen revisionssicher in agree.</a:t>
-                      </a:r>
-                    </a:p>
-                  </a:txBody>
-                  <a:tcPr>
-                    <a:solidFill>
-                      <a:srgbClr val="F8F8FA"/>
-                    </a:solidFill>
-                  </a:tcPr>
-                </a:tc>
-                <a:tc>
-                  <a:txBody>
-                    <a:bodyPr wrap="square"/>
-                    <a:lstStyle/>
-                    <a:p>
-                      <a:r>
-                        <a:rPr sz="1600" b="0">
-                          <a:solidFill>
-                            <a:srgbClr val="191D2E"/>
-                          </a:solidFill>
-                          <a:latin typeface="Courier New"/>
-                        </a:rPr>
-                        <a:t>☐</a:t>
-                      </a:r>
-                    </a:p>
-                  </a:txBody>
-                  <a:tcPr>
-                    <a:solidFill>
-                      <a:srgbClr val="F8F8FA"/>
-                    </a:solidFill>
-                  </a:tcPr>
-                </a:tc>
-                <a:tc>
-                  <a:txBody>
-                    <a:bodyPr wrap="square"/>
-                    <a:lstStyle/>
-                    <a:p>
-                      <a:r>
-                        <a:rPr sz="1600" b="0">
-                          <a:solidFill>
-                            <a:srgbClr val="191D2E"/>
-                          </a:solidFill>
-                          <a:latin typeface="Courier New"/>
-                        </a:rPr>
-                        <a:t>☐</a:t>
-                      </a:r>
-                    </a:p>
-                  </a:txBody>
-                  <a:tcPr>
-                    <a:solidFill>
-                      <a:srgbClr val="F8F8FA"/>
-                    </a:solidFill>
-                  </a:tcPr>
-                </a:tc>
-                <a:tc>
-                  <a:txBody>
-                    <a:bodyPr wrap="square"/>
-                    <a:lstStyle/>
-                    <a:p>
-                      <a:r>
-                        <a:rPr sz="1600" b="0">
-                          <a:solidFill>
-                            <a:srgbClr val="191D2E"/>
-                          </a:solidFill>
-                          <a:latin typeface="Courier New"/>
-                        </a:rPr>
-                        <a:t>☐</a:t>
-                      </a:r>
-                    </a:p>
-                  </a:txBody>
-                  <a:tcPr>
-                    <a:solidFill>
-                      <a:srgbClr val="F8F8FA"/>
-                    </a:solidFill>
-                  </a:tcPr>
-                </a:tc>
-                <a:tc>
-                  <a:txBody>
-                    <a:bodyPr wrap="square"/>
-                    <a:lstStyle/>
-                    <a:p>
-                      <a:r>
-                        <a:rPr sz="1600" b="0">
-                          <a:solidFill>
-                            <a:srgbClr val="191D2E"/>
-                          </a:solidFill>
-                          <a:latin typeface="Courier New"/>
-                        </a:rPr>
-                        <a:t>☐</a:t>
-                      </a:r>
-                    </a:p>
-                  </a:txBody>
-                  <a:tcPr>
-                    <a:solidFill>
-                      <a:srgbClr val="F8F8FA"/>
-                    </a:solidFill>
-                  </a:tcPr>
-                </a:tc>
-              </a:tr>
-            </a:tbl>
-          </a:graphicData>
-        </a:graphic>
-      </p:graphicFrame>
+        </p:nvSpPr>
+        <p:spPr>
+          <a:xfrm>
+            <a:off x="939799" y="3333750"/>
+            <a:ext cx="10642600" cy="6350"/>
+          </a:xfrm>
+          <a:prstGeom prst="rect">
+            <a:avLst/>
+          </a:prstGeom>
+          <a:solidFill>
+            <a:srgbClr val="E0E0E8"/>
+          </a:solidFill>
+          <a:ln>
+            <a:noFill/>
+          </a:ln>
+        </p:spPr>
+        <p:style>
+          <a:lnRef idx="1">
+            <a:schemeClr val="accent1"/>
+          </a:lnRef>
+          <a:fillRef idx="3">
+            <a:schemeClr val="accent1"/>
+          </a:fillRef>
+          <a:effectRef idx="2">
+            <a:schemeClr val="accent1"/>
+          </a:effectRef>
+          <a:fontRef idx="minor">
+            <a:schemeClr val="lt1"/>
+          </a:fontRef>
+        </p:style>
+        <p:txBody>
+          <a:bodyPr rtlCol="0" anchor="ctr"/>
+          <a:lstStyle/>
+          <a:p>
+            <a:pPr algn="ctr"/>
+          </a:p>
+        </p:txBody>
+      </p:sp>
     </p:spTree>
   </p:cSld>
   <p:clrMapOvr>
@@ -5589,7 +5060,7 @@
         </p:nvSpPr>
         <p:spPr>
           <a:xfrm>
-            <a:off x="609600" y="304800"/>
+            <a:off x="609600" y="279400"/>
             <a:ext cx="2540000" cy="279400"/>
           </a:xfrm>
           <a:prstGeom prst="rect">
@@ -5599,13 +5070,13 @@
         </p:spPr>
         <p:txBody>
           <a:bodyPr wrap="square">
-            <a:spAutoFit/>
+            <a:normAutofit/>
           </a:bodyPr>
           <a:lstStyle/>
           <a:p>
             <a:pPr algn="l"/>
             <a:r>
-              <a:rPr sz="1600" b="1" i="0">
+              <a:rPr sz="1000" b="1" i="0">
                 <a:solidFill>
                   <a:srgbClr val="191D2E"/>
                 </a:solidFill>
@@ -5624,8 +5095,8 @@
         </p:nvSpPr>
         <p:spPr>
           <a:xfrm>
-            <a:off x="0" y="304800"/>
-            <a:ext cx="11582400" cy="279400"/>
+            <a:off x="609600" y="279400"/>
+            <a:ext cx="10972800" cy="279400"/>
           </a:xfrm>
           <a:prstGeom prst="rect">
             <a:avLst/>
@@ -5634,13 +5105,13 @@
         </p:spPr>
         <p:txBody>
           <a:bodyPr wrap="square">
-            <a:spAutoFit/>
+            <a:normAutofit/>
           </a:bodyPr>
           <a:lstStyle/>
           <a:p>
             <a:pPr algn="r"/>
             <a:r>
-              <a:rPr sz="1300" b="0" i="0" spc="100">
+              <a:rPr sz="900" b="0" i="0">
                 <a:solidFill>
                   <a:srgbClr val="7B7FA0"/>
                 </a:solidFill>
@@ -5659,8 +5130,8 @@
         </p:nvSpPr>
         <p:spPr>
           <a:xfrm>
-            <a:off x="0" y="6350000"/>
-            <a:ext cx="11582400" cy="228600"/>
+            <a:off x="609600" y="6426200"/>
+            <a:ext cx="10972800" cy="228600"/>
           </a:xfrm>
           <a:prstGeom prst="rect">
             <a:avLst/>
@@ -5669,67 +5140,32 @@
         </p:spPr>
         <p:txBody>
           <a:bodyPr wrap="square">
-            <a:spAutoFit/>
+            <a:normAutofit/>
           </a:bodyPr>
           <a:lstStyle/>
           <a:p>
             <a:pPr algn="r"/>
             <a:r>
-              <a:rPr sz="1300" b="0" i="0">
+              <a:rPr sz="900" b="0" i="0">
                 <a:solidFill>
                   <a:srgbClr val="7B7FA0"/>
                 </a:solidFill>
                 <a:latin typeface="Courier New"/>
               </a:rPr>
-              <a:t>13 / 12</a:t>
+              <a:t>13</a:t>
             </a:r>
           </a:p>
         </p:txBody>
       </p:sp>
       <p:sp>
         <p:nvSpPr>
-          <p:cNvPr id="5" name="TextBox 4"/>
-          <p:cNvSpPr txBox="1"/>
+          <p:cNvPr id="5" name="Rectangle 4"/>
+          <p:cNvSpPr/>
           <p:nvPr/>
         </p:nvSpPr>
         <p:spPr>
           <a:xfrm>
-            <a:off x="609600" y="889000"/>
-            <a:ext cx="10972800" cy="1270000"/>
-          </a:xfrm>
-          <a:prstGeom prst="rect">
-            <a:avLst/>
-          </a:prstGeom>
-          <a:noFill/>
-        </p:spPr>
-        <p:txBody>
-          <a:bodyPr wrap="square">
-            <a:spAutoFit/>
-          </a:bodyPr>
-          <a:lstStyle/>
-          <a:p>
-            <a:pPr algn="l"/>
-            <a:r>
-              <a:rPr sz="6400" b="0" i="0">
-                <a:solidFill>
-                  <a:srgbClr val="191D2E"/>
-                </a:solidFill>
-                <a:latin typeface="Georgia"/>
-              </a:rPr>
-              <a:t>Empfohlene Vertiefungsliteratur</a:t>
-            </a:r>
-          </a:p>
-        </p:txBody>
-      </p:sp>
-      <p:sp>
-        <p:nvSpPr>
-          <p:cNvPr id="6" name="Rectangle 5"/>
-          <p:cNvSpPr/>
-          <p:nvPr/>
-        </p:nvSpPr>
-        <p:spPr>
-          <a:xfrm>
-            <a:off x="609600" y="2159000"/>
+            <a:off x="609600" y="825500"/>
             <a:ext cx="10972800" cy="6350"/>
           </a:xfrm>
           <a:prstGeom prst="rect">
@@ -5766,14 +5202,14 @@
       </p:sp>
       <p:sp>
         <p:nvSpPr>
-          <p:cNvPr id="7" name="TextBox 6"/>
+          <p:cNvPr id="6" name="TextBox 5"/>
           <p:cNvSpPr txBox="1"/>
           <p:nvPr/>
         </p:nvSpPr>
         <p:spPr>
           <a:xfrm>
-            <a:off x="609600" y="2540000"/>
-            <a:ext cx="406400" cy="254000"/>
+            <a:off x="609600" y="920750"/>
+            <a:ext cx="10972800" cy="1270000"/>
           </a:xfrm>
           <a:prstGeom prst="rect">
             <a:avLst/>
@@ -5782,13 +5218,91 @@
         </p:spPr>
         <p:txBody>
           <a:bodyPr wrap="square">
-            <a:spAutoFit/>
+            <a:normAutofit/>
           </a:bodyPr>
           <a:lstStyle/>
           <a:p>
             <a:pPr algn="l"/>
             <a:r>
-              <a:rPr sz="1600" b="0" i="0">
+              <a:rPr sz="3800" b="0" i="0">
+                <a:solidFill>
+                  <a:srgbClr val="191D2E"/>
+                </a:solidFill>
+                <a:latin typeface="Georgia"/>
+              </a:rPr>
+              <a:t>Empfohlene Vertiefungsliteratur</a:t>
+            </a:r>
+          </a:p>
+        </p:txBody>
+      </p:sp>
+      <p:sp>
+        <p:nvSpPr>
+          <p:cNvPr id="7" name="Rectangle 6"/>
+          <p:cNvSpPr/>
+          <p:nvPr/>
+        </p:nvSpPr>
+        <p:spPr>
+          <a:xfrm>
+            <a:off x="609600" y="2254250"/>
+            <a:ext cx="10972800" cy="6350"/>
+          </a:xfrm>
+          <a:prstGeom prst="rect">
+            <a:avLst/>
+          </a:prstGeom>
+          <a:solidFill>
+            <a:srgbClr val="191D2E"/>
+          </a:solidFill>
+          <a:ln>
+            <a:noFill/>
+          </a:ln>
+        </p:spPr>
+        <p:style>
+          <a:lnRef idx="1">
+            <a:schemeClr val="accent1"/>
+          </a:lnRef>
+          <a:fillRef idx="3">
+            <a:schemeClr val="accent1"/>
+          </a:fillRef>
+          <a:effectRef idx="2">
+            <a:schemeClr val="accent1"/>
+          </a:effectRef>
+          <a:fontRef idx="minor">
+            <a:schemeClr val="lt1"/>
+          </a:fontRef>
+        </p:style>
+        <p:txBody>
+          <a:bodyPr rtlCol="0" anchor="ctr"/>
+          <a:lstStyle/>
+          <a:p>
+            <a:pPr algn="ctr"/>
+          </a:p>
+        </p:txBody>
+      </p:sp>
+      <p:sp>
+        <p:nvSpPr>
+          <p:cNvPr id="8" name="TextBox 7"/>
+          <p:cNvSpPr txBox="1"/>
+          <p:nvPr/>
+        </p:nvSpPr>
+        <p:spPr>
+          <a:xfrm>
+            <a:off x="609600" y="2343150"/>
+            <a:ext cx="304800" cy="254000"/>
+          </a:xfrm>
+          <a:prstGeom prst="rect">
+            <a:avLst/>
+          </a:prstGeom>
+          <a:noFill/>
+        </p:spPr>
+        <p:txBody>
+          <a:bodyPr wrap="square">
+            <a:normAutofit/>
+          </a:bodyPr>
+          <a:lstStyle/>
+          <a:p>
+            <a:pPr algn="l"/>
+            <a:r>
+              <a:rPr sz="1000" b="0" i="0">
                 <a:solidFill>
                   <a:srgbClr val="1F2B56"/>
                 </a:solidFill>
@@ -5801,14 +5315,14 @@
       </p:sp>
       <p:sp>
         <p:nvSpPr>
-          <p:cNvPr id="8" name="TextBox 7"/>
+          <p:cNvPr id="9" name="TextBox 8"/>
           <p:cNvSpPr txBox="1"/>
           <p:nvPr/>
         </p:nvSpPr>
         <p:spPr>
           <a:xfrm>
-            <a:off x="1117600" y="2540000"/>
-            <a:ext cx="4445000" cy="558800"/>
+            <a:off x="990599" y="2317750"/>
+            <a:ext cx="4699000" cy="558800"/>
           </a:xfrm>
           <a:prstGeom prst="rect">
             <a:avLst/>
@@ -5817,13 +5331,13 @@
         </p:spPr>
         <p:txBody>
           <a:bodyPr wrap="square">
-            <a:spAutoFit/>
+            <a:normAutofit/>
           </a:bodyPr>
           <a:lstStyle/>
           <a:p>
             <a:pPr algn="l"/>
             <a:r>
-              <a:rPr sz="2000" b="0" i="0">
+              <a:rPr sz="1400" b="0" i="0">
                 <a:solidFill>
                   <a:srgbClr val="191D2E"/>
                 </a:solidFill>
@@ -5836,13 +5350,13 @@
       </p:sp>
       <p:sp>
         <p:nvSpPr>
-          <p:cNvPr id="9" name="Rectangle 8"/>
+          <p:cNvPr id="10" name="Rectangle 9"/>
           <p:cNvSpPr/>
           <p:nvPr/>
         </p:nvSpPr>
         <p:spPr>
           <a:xfrm>
-            <a:off x="609600" y="3111500"/>
+            <a:off x="609600" y="2889250"/>
             <a:ext cx="5080000" cy="6350"/>
           </a:xfrm>
           <a:prstGeom prst="rect">
@@ -5879,14 +5393,14 @@
       </p:sp>
       <p:sp>
         <p:nvSpPr>
-          <p:cNvPr id="10" name="TextBox 9"/>
+          <p:cNvPr id="11" name="TextBox 10"/>
           <p:cNvSpPr txBox="1"/>
           <p:nvPr/>
         </p:nvSpPr>
         <p:spPr>
           <a:xfrm>
-            <a:off x="609600" y="3175000"/>
-            <a:ext cx="406400" cy="254000"/>
+            <a:off x="609600" y="2952750"/>
+            <a:ext cx="304800" cy="254000"/>
           </a:xfrm>
           <a:prstGeom prst="rect">
             <a:avLst/>
@@ -5895,13 +5409,13 @@
         </p:spPr>
         <p:txBody>
           <a:bodyPr wrap="square">
-            <a:spAutoFit/>
+            <a:normAutofit/>
           </a:bodyPr>
           <a:lstStyle/>
           <a:p>
             <a:pPr algn="l"/>
             <a:r>
-              <a:rPr sz="1600" b="0" i="0">
+              <a:rPr sz="1000" b="0" i="0">
                 <a:solidFill>
                   <a:srgbClr val="1F2B56"/>
                 </a:solidFill>
@@ -5914,14 +5428,14 @@
       </p:sp>
       <p:sp>
         <p:nvSpPr>
-          <p:cNvPr id="11" name="TextBox 10"/>
+          <p:cNvPr id="12" name="TextBox 11"/>
           <p:cNvSpPr txBox="1"/>
           <p:nvPr/>
         </p:nvSpPr>
         <p:spPr>
           <a:xfrm>
-            <a:off x="1117600" y="3175000"/>
-            <a:ext cx="4445000" cy="558800"/>
+            <a:off x="990599" y="2927350"/>
+            <a:ext cx="4699000" cy="558800"/>
           </a:xfrm>
           <a:prstGeom prst="rect">
             <a:avLst/>
@@ -5930,13 +5444,13 @@
         </p:spPr>
         <p:txBody>
           <a:bodyPr wrap="square">
-            <a:spAutoFit/>
+            <a:normAutofit/>
           </a:bodyPr>
           <a:lstStyle/>
           <a:p>
             <a:pPr algn="l"/>
             <a:r>
-              <a:rPr sz="2000" b="0" i="0">
+              <a:rPr sz="1400" b="0" i="0">
                 <a:solidFill>
                   <a:srgbClr val="191D2E"/>
                 </a:solidFill>
@@ -5949,13 +5463,13 @@
       </p:sp>
       <p:sp>
         <p:nvSpPr>
-          <p:cNvPr id="12" name="Rectangle 11"/>
+          <p:cNvPr id="13" name="Rectangle 12"/>
           <p:cNvSpPr/>
           <p:nvPr/>
         </p:nvSpPr>
         <p:spPr>
           <a:xfrm>
-            <a:off x="609600" y="3746500"/>
+            <a:off x="609600" y="3498850"/>
             <a:ext cx="5080000" cy="6350"/>
           </a:xfrm>
           <a:prstGeom prst="rect">
@@ -5992,14 +5506,14 @@
       </p:sp>
       <p:sp>
         <p:nvSpPr>
-          <p:cNvPr id="13" name="TextBox 12"/>
+          <p:cNvPr id="14" name="TextBox 13"/>
           <p:cNvSpPr txBox="1"/>
           <p:nvPr/>
         </p:nvSpPr>
         <p:spPr>
           <a:xfrm>
-            <a:off x="6502400" y="2540000"/>
-            <a:ext cx="406400" cy="254000"/>
+            <a:off x="6502400" y="2343150"/>
+            <a:ext cx="304800" cy="254000"/>
           </a:xfrm>
           <a:prstGeom prst="rect">
             <a:avLst/>
@@ -6008,13 +5522,13 @@
         </p:spPr>
         <p:txBody>
           <a:bodyPr wrap="square">
-            <a:spAutoFit/>
+            <a:normAutofit/>
           </a:bodyPr>
           <a:lstStyle/>
           <a:p>
             <a:pPr algn="l"/>
             <a:r>
-              <a:rPr sz="1600" b="0" i="0">
+              <a:rPr sz="1000" b="0" i="0">
                 <a:solidFill>
                   <a:srgbClr val="1F2B56"/>
                 </a:solidFill>
@@ -6027,14 +5541,14 @@
       </p:sp>
       <p:sp>
         <p:nvSpPr>
-          <p:cNvPr id="14" name="TextBox 13"/>
+          <p:cNvPr id="15" name="TextBox 14"/>
           <p:cNvSpPr txBox="1"/>
           <p:nvPr/>
         </p:nvSpPr>
         <p:spPr>
           <a:xfrm>
-            <a:off x="7010400" y="2540000"/>
-            <a:ext cx="4445000" cy="558800"/>
+            <a:off x="6883400" y="2317750"/>
+            <a:ext cx="4699000" cy="558800"/>
           </a:xfrm>
           <a:prstGeom prst="rect">
             <a:avLst/>
@@ -6043,13 +5557,13 @@
         </p:spPr>
         <p:txBody>
           <a:bodyPr wrap="square">
-            <a:spAutoFit/>
+            <a:normAutofit/>
           </a:bodyPr>
           <a:lstStyle/>
           <a:p>
             <a:pPr algn="l"/>
             <a:r>
-              <a:rPr sz="2000" b="0" i="0">
+              <a:rPr sz="1400" b="0" i="0">
                 <a:solidFill>
                   <a:srgbClr val="191D2E"/>
                 </a:solidFill>
@@ -6062,13 +5576,13 @@
       </p:sp>
       <p:sp>
         <p:nvSpPr>
-          <p:cNvPr id="15" name="Rectangle 14"/>
+          <p:cNvPr id="16" name="Rectangle 15"/>
           <p:cNvSpPr/>
           <p:nvPr/>
         </p:nvSpPr>
         <p:spPr>
           <a:xfrm>
-            <a:off x="6502400" y="3111500"/>
+            <a:off x="6502400" y="2889250"/>
             <a:ext cx="5080000" cy="6350"/>
           </a:xfrm>
           <a:prstGeom prst="rect">
@@ -6105,14 +5619,14 @@
       </p:sp>
       <p:sp>
         <p:nvSpPr>
-          <p:cNvPr id="16" name="TextBox 15"/>
+          <p:cNvPr id="17" name="TextBox 16"/>
           <p:cNvSpPr txBox="1"/>
           <p:nvPr/>
         </p:nvSpPr>
         <p:spPr>
           <a:xfrm>
-            <a:off x="6502400" y="3175000"/>
-            <a:ext cx="406400" cy="254000"/>
+            <a:off x="6502400" y="2952750"/>
+            <a:ext cx="304800" cy="254000"/>
           </a:xfrm>
           <a:prstGeom prst="rect">
             <a:avLst/>
@@ -6121,13 +5635,13 @@
         </p:spPr>
         <p:txBody>
           <a:bodyPr wrap="square">
-            <a:spAutoFit/>
+            <a:normAutofit/>
           </a:bodyPr>
           <a:lstStyle/>
           <a:p>
             <a:pPr algn="l"/>
             <a:r>
-              <a:rPr sz="1600" b="0" i="0">
+              <a:rPr sz="1000" b="0" i="0">
                 <a:solidFill>
                   <a:srgbClr val="1F2B56"/>
                 </a:solidFill>
@@ -6140,14 +5654,14 @@
       </p:sp>
       <p:sp>
         <p:nvSpPr>
-          <p:cNvPr id="17" name="TextBox 16"/>
+          <p:cNvPr id="18" name="TextBox 17"/>
           <p:cNvSpPr txBox="1"/>
           <p:nvPr/>
         </p:nvSpPr>
         <p:spPr>
           <a:xfrm>
-            <a:off x="7010400" y="3175000"/>
-            <a:ext cx="4445000" cy="558800"/>
+            <a:off x="6883400" y="2927350"/>
+            <a:ext cx="4699000" cy="558800"/>
           </a:xfrm>
           <a:prstGeom prst="rect">
             <a:avLst/>
@@ -6156,13 +5670,13 @@
         </p:spPr>
         <p:txBody>
           <a:bodyPr wrap="square">
-            <a:spAutoFit/>
+            <a:normAutofit/>
           </a:bodyPr>
           <a:lstStyle/>
           <a:p>
             <a:pPr algn="l"/>
             <a:r>
-              <a:rPr sz="2000" b="0" i="0">
+              <a:rPr sz="1400" b="0" i="0">
                 <a:solidFill>
                   <a:srgbClr val="191D2E"/>
                 </a:solidFill>
@@ -6175,13 +5689,13 @@
       </p:sp>
       <p:sp>
         <p:nvSpPr>
-          <p:cNvPr id="18" name="Rectangle 17"/>
+          <p:cNvPr id="19" name="Rectangle 18"/>
           <p:cNvSpPr/>
           <p:nvPr/>
         </p:nvSpPr>
         <p:spPr>
           <a:xfrm>
-            <a:off x="6502400" y="3746500"/>
+            <a:off x="6502400" y="3498850"/>
             <a:ext cx="5080000" cy="6350"/>
           </a:xfrm>
           <a:prstGeom prst="rect">
@@ -6250,7 +5764,7 @@
         </p:nvSpPr>
         <p:spPr>
           <a:xfrm>
-            <a:off x="609600" y="304800"/>
+            <a:off x="609600" y="279400"/>
             <a:ext cx="2540000" cy="279400"/>
           </a:xfrm>
           <a:prstGeom prst="rect">
@@ -6260,13 +5774,13 @@
         </p:spPr>
         <p:txBody>
           <a:bodyPr wrap="square">
-            <a:spAutoFit/>
+            <a:normAutofit/>
           </a:bodyPr>
           <a:lstStyle/>
           <a:p>
             <a:pPr algn="l"/>
             <a:r>
-              <a:rPr sz="1600" b="1" i="0">
+              <a:rPr sz="1000" b="1" i="0">
                 <a:solidFill>
                   <a:srgbClr val="F8F8FA"/>
                 </a:solidFill>
@@ -6285,8 +5799,8 @@
         </p:nvSpPr>
         <p:spPr>
           <a:xfrm>
-            <a:off x="0" y="304800"/>
-            <a:ext cx="11582400" cy="279400"/>
+            <a:off x="609600" y="279400"/>
+            <a:ext cx="10972800" cy="279400"/>
           </a:xfrm>
           <a:prstGeom prst="rect">
             <a:avLst/>
@@ -6295,19 +5809,19 @@
         </p:spPr>
         <p:txBody>
           <a:bodyPr wrap="square">
-            <a:spAutoFit/>
+            <a:normAutofit/>
           </a:bodyPr>
           <a:lstStyle/>
           <a:p>
             <a:pPr algn="r"/>
             <a:r>
-              <a:rPr sz="1300" b="0" i="0" spc="100">
+              <a:rPr sz="900" b="0" i="0">
                 <a:solidFill>
-                  <a:srgbClr val="F8F8FA"/>
+                  <a:srgbClr val="7B7FA0"/>
                 </a:solidFill>
                 <a:latin typeface="Courier New"/>
               </a:rPr>
-              <a:t>QUELLENAPPARAT</a:t>
+              <a:t>QUELLEN</a:t>
             </a:r>
           </a:p>
         </p:txBody>
@@ -6320,8 +5834,8 @@
         </p:nvSpPr>
         <p:spPr>
           <a:xfrm>
-            <a:off x="0" y="6350000"/>
-            <a:ext cx="11582400" cy="228600"/>
+            <a:off x="609600" y="6426200"/>
+            <a:ext cx="10972800" cy="228600"/>
           </a:xfrm>
           <a:prstGeom prst="rect">
             <a:avLst/>
@@ -6330,19 +5844,19 @@
         </p:spPr>
         <p:txBody>
           <a:bodyPr wrap="square">
-            <a:spAutoFit/>
+            <a:normAutofit/>
           </a:bodyPr>
           <a:lstStyle/>
           <a:p>
             <a:pPr algn="r"/>
             <a:r>
-              <a:rPr sz="1300" b="0" i="0">
+              <a:rPr sz="900" b="0" i="0">
                 <a:solidFill>
-                  <a:srgbClr val="606070"/>
+                  <a:srgbClr val="7B7FA0"/>
                 </a:solidFill>
                 <a:latin typeface="Courier New"/>
               </a:rPr>
-              <a:t>14 / 12</a:t>
+              <a:t>14</a:t>
             </a:r>
           </a:p>
         </p:txBody>
@@ -6355,8 +5869,8 @@
         </p:nvSpPr>
         <p:spPr>
           <a:xfrm>
-            <a:off x="609600" y="889000"/>
-            <a:ext cx="5080000" cy="228600"/>
+            <a:off x="609600" y="635000"/>
+            <a:ext cx="5461000" cy="5461000"/>
           </a:xfrm>
           <a:prstGeom prst="rect">
             <a:avLst/>
@@ -6365,19 +5879,19 @@
         </p:spPr>
         <p:txBody>
           <a:bodyPr wrap="square">
-            <a:spAutoFit/>
+            <a:normAutofit/>
           </a:bodyPr>
           <a:lstStyle/>
           <a:p>
             <a:pPr algn="l"/>
             <a:r>
-              <a:rPr sz="1400" b="0" i="0" spc="100">
+              <a:rPr sz="28000" b="0" i="1">
                 <a:solidFill>
-                  <a:srgbClr val="7B7FA0"/>
+                  <a:srgbClr val="D9BF7A"/>
                 </a:solidFill>
-                <a:latin typeface="Courier New"/>
+                <a:latin typeface="Georgia"/>
               </a:rPr>
-              <a:t>QUELLENAPPARAT</a:t>
+              <a:t>III.</a:t>
             </a:r>
           </a:p>
         </p:txBody>
@@ -6390,8 +5904,8 @@
         </p:nvSpPr>
         <p:spPr>
           <a:xfrm>
-            <a:off x="609600" y="1174750"/>
-            <a:ext cx="10972800" cy="1016000"/>
+            <a:off x="6731000" y="4064000"/>
+            <a:ext cx="4851400" cy="1778000"/>
           </a:xfrm>
           <a:prstGeom prst="rect">
             <a:avLst/>
@@ -6400,517 +5914,19 @@
         </p:spPr>
         <p:txBody>
           <a:bodyPr wrap="square">
-            <a:spAutoFit/>
+            <a:normAutofit/>
           </a:bodyPr>
           <a:lstStyle/>
           <a:p>
-            <a:pPr algn="l"/>
+            <a:pPr algn="r"/>
             <a:r>
-              <a:rPr sz="7200" b="0" i="0">
+              <a:rPr sz="3800" b="0" i="0">
                 <a:solidFill>
                   <a:srgbClr val="F8F8FA"/>
                 </a:solidFill>
                 <a:latin typeface="Georgia"/>
               </a:rPr>
-              <a:t>Quellen­apparat.</a:t>
-            </a:r>
-          </a:p>
-        </p:txBody>
-      </p:sp>
-      <p:sp>
-        <p:nvSpPr>
-          <p:cNvPr id="7" name="Rectangle 6"/>
-          <p:cNvSpPr/>
-          <p:nvPr/>
-        </p:nvSpPr>
-        <p:spPr>
-          <a:xfrm>
-            <a:off x="609600" y="2286000"/>
-            <a:ext cx="10972800" cy="6350"/>
-          </a:xfrm>
-          <a:prstGeom prst="rect">
-            <a:avLst/>
-          </a:prstGeom>
-          <a:solidFill>
-            <a:srgbClr val="404870"/>
-          </a:solidFill>
-          <a:ln>
-            <a:noFill/>
-          </a:ln>
-        </p:spPr>
-        <p:style>
-          <a:lnRef idx="1">
-            <a:schemeClr val="accent1"/>
-          </a:lnRef>
-          <a:fillRef idx="3">
-            <a:schemeClr val="accent1"/>
-          </a:fillRef>
-          <a:effectRef idx="2">
-            <a:schemeClr val="accent1"/>
-          </a:effectRef>
-          <a:fontRef idx="minor">
-            <a:schemeClr val="lt1"/>
-          </a:fontRef>
-        </p:style>
-        <p:txBody>
-          <a:bodyPr rtlCol="0" anchor="ctr"/>
-          <a:lstStyle/>
-          <a:p>
-            <a:pPr algn="ctr"/>
-          </a:p>
-        </p:txBody>
-      </p:sp>
-      <p:sp>
-        <p:nvSpPr>
-          <p:cNvPr id="8" name="TextBox 7"/>
-          <p:cNvSpPr txBox="1"/>
-          <p:nvPr/>
-        </p:nvSpPr>
-        <p:spPr>
-          <a:xfrm>
-            <a:off x="609600" y="2413000"/>
-            <a:ext cx="5080000" cy="457200"/>
-          </a:xfrm>
-          <a:prstGeom prst="rect">
-            <a:avLst/>
-          </a:prstGeom>
-          <a:noFill/>
-        </p:spPr>
-        <p:txBody>
-          <a:bodyPr wrap="square">
-            <a:spAutoFit/>
-          </a:bodyPr>
-          <a:lstStyle/>
-          <a:p>
-            <a:pPr algn="l"/>
-            <a:r>
-              <a:rPr sz="1400" b="0" i="0">
-                <a:solidFill>
-                  <a:srgbClr val="C0C4D8"/>
-                </a:solidFill>
-                <a:latin typeface="Courier New"/>
-              </a:rPr>
-              <a:t>Altman, E. I. (1968). Financial ratios, discriminant analysis and the prediction of corporate bankruptcy. The Journal of Finance, 23(4), 589–609. https://doi.org/10.1111/j.1540-6261.1968.tb00843.x</a:t>
-            </a:r>
-          </a:p>
-        </p:txBody>
-      </p:sp>
-      <p:sp>
-        <p:nvSpPr>
-          <p:cNvPr id="9" name="TextBox 8"/>
-          <p:cNvSpPr txBox="1"/>
-          <p:nvPr/>
-        </p:nvSpPr>
-        <p:spPr>
-          <a:xfrm>
-            <a:off x="609600" y="2921000"/>
-            <a:ext cx="5080000" cy="457200"/>
-          </a:xfrm>
-          <a:prstGeom prst="rect">
-            <a:avLst/>
-          </a:prstGeom>
-          <a:noFill/>
-        </p:spPr>
-        <p:txBody>
-          <a:bodyPr wrap="square">
-            <a:spAutoFit/>
-          </a:bodyPr>
-          <a:lstStyle/>
-          <a:p>
-            <a:pPr algn="l"/>
-            <a:r>
-              <a:rPr sz="1400" b="0" i="0">
-                <a:solidFill>
-                  <a:srgbClr val="C0C4D8"/>
-                </a:solidFill>
-                <a:latin typeface="Courier New"/>
-              </a:rPr>
-              <a:t>Anderson, L. W. &amp; Krathwohl, D. R. (Hrsg.). (2001). A taxonomy for learning, teaching, and assessing: A revision of Bloom's educational objectives. Longman.</a:t>
-            </a:r>
-          </a:p>
-        </p:txBody>
-      </p:sp>
-      <p:sp>
-        <p:nvSpPr>
-          <p:cNvPr id="10" name="TextBox 9"/>
-          <p:cNvSpPr txBox="1"/>
-          <p:nvPr/>
-        </p:nvSpPr>
-        <p:spPr>
-          <a:xfrm>
-            <a:off x="609600" y="3429000"/>
-            <a:ext cx="5080000" cy="457200"/>
-          </a:xfrm>
-          <a:prstGeom prst="rect">
-            <a:avLst/>
-          </a:prstGeom>
-          <a:noFill/>
-        </p:spPr>
-        <p:txBody>
-          <a:bodyPr wrap="square">
-            <a:spAutoFit/>
-          </a:bodyPr>
-          <a:lstStyle/>
-          <a:p>
-            <a:pPr algn="l"/>
-            <a:r>
-              <a:rPr sz="1400" b="0" i="0">
-                <a:solidFill>
-                  <a:srgbClr val="C0C4D8"/>
-                </a:solidFill>
-                <a:latin typeface="Courier New"/>
-              </a:rPr>
-              <a:t>Barrows, H. S. (1986). A taxonomy of problem-based learning methods. Medical Education, 20(6), 481–486. https://doi.org/10.1111/j.1365-2923.1986.tb01386.x</a:t>
-            </a:r>
-          </a:p>
-        </p:txBody>
-      </p:sp>
-      <p:sp>
-        <p:nvSpPr>
-          <p:cNvPr id="11" name="TextBox 10"/>
-          <p:cNvSpPr txBox="1"/>
-          <p:nvPr/>
-        </p:nvSpPr>
-        <p:spPr>
-          <a:xfrm>
-            <a:off x="609600" y="3937000"/>
-            <a:ext cx="5080000" cy="457200"/>
-          </a:xfrm>
-          <a:prstGeom prst="rect">
-            <a:avLst/>
-          </a:prstGeom>
-          <a:noFill/>
-        </p:spPr>
-        <p:txBody>
-          <a:bodyPr wrap="square">
-            <a:spAutoFit/>
-          </a:bodyPr>
-          <a:lstStyle/>
-          <a:p>
-            <a:pPr algn="l"/>
-            <a:r>
-              <a:rPr sz="1400" b="0" i="0">
-                <a:solidFill>
-                  <a:srgbClr val="C0C4D8"/>
-                </a:solidFill>
-                <a:latin typeface="Courier New"/>
-              </a:rPr>
-              <a:t>Bundesanstalt für Finanzdienstleistungsaufsicht. (2023). Mindestanforderungen an das Risikomanagement (MaRisk) (Rundschreiben 05/2023 (BA)). BaFin.</a:t>
-            </a:r>
-          </a:p>
-        </p:txBody>
-      </p:sp>
-      <p:sp>
-        <p:nvSpPr>
-          <p:cNvPr id="12" name="TextBox 11"/>
-          <p:cNvSpPr txBox="1"/>
-          <p:nvPr/>
-        </p:nvSpPr>
-        <p:spPr>
-          <a:xfrm>
-            <a:off x="609600" y="4445000"/>
-            <a:ext cx="5080000" cy="457200"/>
-          </a:xfrm>
-          <a:prstGeom prst="rect">
-            <a:avLst/>
-          </a:prstGeom>
-          <a:noFill/>
-        </p:spPr>
-        <p:txBody>
-          <a:bodyPr wrap="square">
-            <a:spAutoFit/>
-          </a:bodyPr>
-          <a:lstStyle/>
-          <a:p>
-            <a:pPr algn="l"/>
-            <a:r>
-              <a:rPr sz="1400" b="0" i="0">
-                <a:solidFill>
-                  <a:srgbClr val="C0C4D8"/>
-                </a:solidFill>
-                <a:latin typeface="Courier New"/>
-              </a:rPr>
-              <a:t>Deutsche Bundesbank. (2023). Unternehmensfinanzierung in Deutschland: Ergebnisse der Unternehmensabschluss-Statistik. Deutsche Bundesbank.</a:t>
-            </a:r>
-          </a:p>
-        </p:txBody>
-      </p:sp>
-      <p:sp>
-        <p:nvSpPr>
-          <p:cNvPr id="13" name="TextBox 12"/>
-          <p:cNvSpPr txBox="1"/>
-          <p:nvPr/>
-        </p:nvSpPr>
-        <p:spPr>
-          <a:xfrm>
-            <a:off x="609600" y="4953000"/>
-            <a:ext cx="5080000" cy="457200"/>
-          </a:xfrm>
-          <a:prstGeom prst="rect">
-            <a:avLst/>
-          </a:prstGeom>
-          <a:noFill/>
-        </p:spPr>
-        <p:txBody>
-          <a:bodyPr wrap="square">
-            <a:spAutoFit/>
-          </a:bodyPr>
-          <a:lstStyle/>
-          <a:p>
-            <a:pPr algn="l"/>
-            <a:r>
-              <a:rPr sz="1400" b="0" i="0">
-                <a:solidFill>
-                  <a:srgbClr val="C0C4D8"/>
-                </a:solidFill>
-                <a:latin typeface="Courier New"/>
-              </a:rPr>
-              <a:t>Dreyfus, S. E. &amp; Dreyfus, H. L. (1980). A five-stage model of the mental activities involved in directed skill acquisition (ORC 80-2). University of California, Berkeley, Operations Research Center.</a:t>
-            </a:r>
-          </a:p>
-        </p:txBody>
-      </p:sp>
-      <p:sp>
-        <p:nvSpPr>
-          <p:cNvPr id="14" name="TextBox 13"/>
-          <p:cNvSpPr txBox="1"/>
-          <p:nvPr/>
-        </p:nvSpPr>
-        <p:spPr>
-          <a:xfrm>
-            <a:off x="609600" y="5461000"/>
-            <a:ext cx="5080000" cy="457200"/>
-          </a:xfrm>
-          <a:prstGeom prst="rect">
-            <a:avLst/>
-          </a:prstGeom>
-          <a:noFill/>
-        </p:spPr>
-        <p:txBody>
-          <a:bodyPr wrap="square">
-            <a:spAutoFit/>
-          </a:bodyPr>
-          <a:lstStyle/>
-          <a:p>
-            <a:pPr algn="l"/>
-            <a:r>
-              <a:rPr sz="1400" b="0" i="0">
-                <a:solidFill>
-                  <a:srgbClr val="C0C4D8"/>
-                </a:solidFill>
-                <a:latin typeface="Courier New"/>
-              </a:rPr>
-              <a:t>Gleißner, W. (2022). Grundlagen des Risikomanagements: Mit fundierten Informationen zu besseren Entscheidungen (4. Aufl.). Vahlen.</a:t>
-            </a:r>
-          </a:p>
-        </p:txBody>
-      </p:sp>
-      <p:sp>
-        <p:nvSpPr>
-          <p:cNvPr id="15" name="TextBox 14"/>
-          <p:cNvSpPr txBox="1"/>
-          <p:nvPr/>
-        </p:nvSpPr>
-        <p:spPr>
-          <a:xfrm>
-            <a:off x="6096000" y="2413000"/>
-            <a:ext cx="5080000" cy="457200"/>
-          </a:xfrm>
-          <a:prstGeom prst="rect">
-            <a:avLst/>
-          </a:prstGeom>
-          <a:noFill/>
-        </p:spPr>
-        <p:txBody>
-          <a:bodyPr wrap="square">
-            <a:spAutoFit/>
-          </a:bodyPr>
-          <a:lstStyle/>
-          <a:p>
-            <a:pPr algn="l"/>
-            <a:r>
-              <a:rPr sz="1400" b="0" i="0">
-                <a:solidFill>
-                  <a:srgbClr val="C0C4D8"/>
-                </a:solidFill>
-                <a:latin typeface="Courier New"/>
-              </a:rPr>
-              <a:t>Kolb, D. A. (1984). Experiential learning: Experience as the source of learning and development. Prentice-Hall.</a:t>
-            </a:r>
-          </a:p>
-        </p:txBody>
-      </p:sp>
-      <p:sp>
-        <p:nvSpPr>
-          <p:cNvPr id="16" name="TextBox 15"/>
-          <p:cNvSpPr txBox="1"/>
-          <p:nvPr/>
-        </p:nvSpPr>
-        <p:spPr>
-          <a:xfrm>
-            <a:off x="6096000" y="2921000"/>
-            <a:ext cx="5080000" cy="457200"/>
-          </a:xfrm>
-          <a:prstGeom prst="rect">
-            <a:avLst/>
-          </a:prstGeom>
-          <a:noFill/>
-        </p:spPr>
-        <p:txBody>
-          <a:bodyPr wrap="square">
-            <a:spAutoFit/>
-          </a:bodyPr>
-          <a:lstStyle/>
-          <a:p>
-            <a:pPr algn="l"/>
-            <a:r>
-              <a:rPr sz="1400" b="0" i="0">
-                <a:solidFill>
-                  <a:srgbClr val="C0C4D8"/>
-                </a:solidFill>
-                <a:latin typeface="Courier New"/>
-              </a:rPr>
-              <a:t>Krystek, U. (1987). Unternehmungskrisen: Beschreibung, Vermeidung und Bewältigung überlebenskritischer Prozesse in Unternehmungen. Gabler.</a:t>
-            </a:r>
-          </a:p>
-        </p:txBody>
-      </p:sp>
-      <p:sp>
-        <p:nvSpPr>
-          <p:cNvPr id="17" name="TextBox 16"/>
-          <p:cNvSpPr txBox="1"/>
-          <p:nvPr/>
-        </p:nvSpPr>
-        <p:spPr>
-          <a:xfrm>
-            <a:off x="6096000" y="3429000"/>
-            <a:ext cx="5080000" cy="457200"/>
-          </a:xfrm>
-          <a:prstGeom prst="rect">
-            <a:avLst/>
-          </a:prstGeom>
-          <a:noFill/>
-        </p:spPr>
-        <p:txBody>
-          <a:bodyPr wrap="square">
-            <a:spAutoFit/>
-          </a:bodyPr>
-          <a:lstStyle/>
-          <a:p>
-            <a:pPr algn="l"/>
-            <a:r>
-              <a:rPr sz="1400" b="0" i="0">
-                <a:solidFill>
-                  <a:srgbClr val="C0C4D8"/>
-                </a:solidFill>
-                <a:latin typeface="Courier New"/>
-              </a:rPr>
-              <a:t>Merton, R. C. (1974). On the pricing of corporate debt: The risk structure of interest rates. The Journal of Finance, 29(2), 449–470. https://doi.org/10.1111/j.1540-6261.1974.tb03058.x</a:t>
-            </a:r>
-          </a:p>
-        </p:txBody>
-      </p:sp>
-      <p:sp>
-        <p:nvSpPr>
-          <p:cNvPr id="18" name="TextBox 17"/>
-          <p:cNvSpPr txBox="1"/>
-          <p:nvPr/>
-        </p:nvSpPr>
-        <p:spPr>
-          <a:xfrm>
-            <a:off x="6096000" y="3937000"/>
-            <a:ext cx="5080000" cy="457200"/>
-          </a:xfrm>
-          <a:prstGeom prst="rect">
-            <a:avLst/>
-          </a:prstGeom>
-          <a:noFill/>
-        </p:spPr>
-        <p:txBody>
-          <a:bodyPr wrap="square">
-            <a:spAutoFit/>
-          </a:bodyPr>
-          <a:lstStyle/>
-          <a:p>
-            <a:pPr algn="l"/>
-            <a:r>
-              <a:rPr sz="1400" b="0" i="0">
-                <a:solidFill>
-                  <a:srgbClr val="C0C4D8"/>
-                </a:solidFill>
-                <a:latin typeface="Courier New"/>
-              </a:rPr>
-              <a:t>Sweller, J. (1988). Cognitive load during problem solving: Effects on learning. Cognitive Science, 12(2), 257–285. https://doi.org/10.1207/s15516709cog1202_4</a:t>
-            </a:r>
-          </a:p>
-        </p:txBody>
-      </p:sp>
-      <p:sp>
-        <p:nvSpPr>
-          <p:cNvPr id="19" name="TextBox 18"/>
-          <p:cNvSpPr txBox="1"/>
-          <p:nvPr/>
-        </p:nvSpPr>
-        <p:spPr>
-          <a:xfrm>
-            <a:off x="6096000" y="4445000"/>
-            <a:ext cx="5080000" cy="457200"/>
-          </a:xfrm>
-          <a:prstGeom prst="rect">
-            <a:avLst/>
-          </a:prstGeom>
-          <a:noFill/>
-        </p:spPr>
-        <p:txBody>
-          <a:bodyPr wrap="square">
-            <a:spAutoFit/>
-          </a:bodyPr>
-          <a:lstStyle/>
-          <a:p>
-            <a:pPr algn="l"/>
-            <a:r>
-              <a:rPr sz="1400" b="0" i="0">
-                <a:solidFill>
-                  <a:srgbClr val="C0C4D8"/>
-                </a:solidFill>
-                <a:latin typeface="Courier New"/>
-              </a:rPr>
-              <a:t>Gesetz über den Stabilisierungs- und Restrukturierungsrahmen für Unternehmen (StaRUG) vom 22. Dezember 2020, BGBl. I S. 3256.</a:t>
-            </a:r>
-          </a:p>
-        </p:txBody>
-      </p:sp>
-      <p:sp>
-        <p:nvSpPr>
-          <p:cNvPr id="20" name="TextBox 19"/>
-          <p:cNvSpPr txBox="1"/>
-          <p:nvPr/>
-        </p:nvSpPr>
-        <p:spPr>
-          <a:xfrm>
-            <a:off x="6096000" y="4953000"/>
-            <a:ext cx="5080000" cy="457200"/>
-          </a:xfrm>
-          <a:prstGeom prst="rect">
-            <a:avLst/>
-          </a:prstGeom>
-          <a:noFill/>
-        </p:spPr>
-        <p:txBody>
-          <a:bodyPr wrap="square">
-            <a:spAutoFit/>
-          </a:bodyPr>
-          <a:lstStyle/>
-          <a:p>
-            <a:pPr algn="l"/>
-            <a:r>
-              <a:rPr sz="1400" b="0" i="0">
-                <a:solidFill>
-                  <a:srgbClr val="C0C4D8"/>
-                </a:solidFill>
-                <a:latin typeface="Courier New"/>
-              </a:rPr>
-              <a:t>Kreditwesengesetz (KWG) in der Fassung vom 9. September 1998, BGBl. I S. 2776. § 18 Kreditunterlagen.</a:t>
+              <a:t>Quellen</a:t>
             </a:r>
           </a:p>
         </p:txBody>
@@ -6949,8 +5965,8 @@
         </p:nvSpPr>
         <p:spPr>
           <a:xfrm>
-            <a:off x="609600" y="508000"/>
-            <a:ext cx="3175000" cy="304800"/>
+            <a:off x="609600" y="457200"/>
+            <a:ext cx="3175000" cy="279400"/>
           </a:xfrm>
           <a:prstGeom prst="rect">
             <a:avLst/>
@@ -6959,13 +5975,13 @@
         </p:spPr>
         <p:txBody>
           <a:bodyPr wrap="square">
-            <a:spAutoFit/>
+            <a:normAutofit/>
           </a:bodyPr>
           <a:lstStyle/>
           <a:p>
             <a:pPr algn="l"/>
             <a:r>
-              <a:rPr sz="1800" b="1" i="0">
+              <a:rPr sz="1000" b="1" i="0">
                 <a:solidFill>
                   <a:srgbClr val="191D2E"/>
                 </a:solidFill>
@@ -6984,8 +6000,8 @@
         </p:nvSpPr>
         <p:spPr>
           <a:xfrm>
-            <a:off x="0" y="546100"/>
-            <a:ext cx="11582400" cy="254000"/>
+            <a:off x="609600" y="457200"/>
+            <a:ext cx="10972800" cy="279400"/>
           </a:xfrm>
           <a:prstGeom prst="rect">
             <a:avLst/>
@@ -6994,13 +6010,13 @@
         </p:spPr>
         <p:txBody>
           <a:bodyPr wrap="square">
-            <a:spAutoFit/>
+            <a:normAutofit/>
           </a:bodyPr>
           <a:lstStyle/>
           <a:p>
             <a:pPr algn="r"/>
             <a:r>
-              <a:rPr sz="1400" b="0" i="0">
+              <a:rPr sz="900" b="0" i="0">
                 <a:solidFill>
                   <a:srgbClr val="7B7FA0"/>
                 </a:solidFill>
@@ -7020,7 +6036,7 @@
         <p:spPr>
           <a:xfrm>
             <a:off x="609600" y="1143000"/>
-            <a:ext cx="10972800" cy="3683000"/>
+            <a:ext cx="10972800" cy="3556000"/>
           </a:xfrm>
           <a:prstGeom prst="rect">
             <a:avLst/>
@@ -7029,13 +6045,13 @@
         </p:spPr>
         <p:txBody>
           <a:bodyPr wrap="square">
-            <a:spAutoFit/>
+            <a:normAutofit/>
           </a:bodyPr>
           <a:lstStyle/>
           <a:p>
             <a:pPr algn="l"/>
             <a:r>
-              <a:rPr sz="18000" b="0" i="0">
+              <a:rPr sz="9600" b="0" i="0">
                 <a:solidFill>
                   <a:srgbClr val="191D2E"/>
                 </a:solidFill>
@@ -7055,7 +6071,7 @@
         </p:nvSpPr>
         <p:spPr>
           <a:xfrm>
-            <a:off x="609600" y="5143500"/>
+            <a:off x="609600" y="4826000"/>
             <a:ext cx="10972800" cy="6350"/>
           </a:xfrm>
           <a:prstGeom prst="rect">
@@ -7098,8 +6114,8 @@
         </p:nvSpPr>
         <p:spPr>
           <a:xfrm>
-            <a:off x="609600" y="5270500"/>
-            <a:ext cx="5715000" cy="1016000"/>
+            <a:off x="609600" y="4953000"/>
+            <a:ext cx="5715000" cy="1143000"/>
           </a:xfrm>
           <a:prstGeom prst="rect">
             <a:avLst/>
@@ -7108,19 +6124,19 @@
         </p:spPr>
         <p:txBody>
           <a:bodyPr wrap="square">
-            <a:spAutoFit/>
+            <a:normAutofit/>
           </a:bodyPr>
           <a:lstStyle/>
           <a:p>
             <a:pPr algn="l"/>
             <a:r>
-              <a:rPr sz="2200" b="0" i="1">
+              <a:rPr sz="1400" b="0" i="1">
                 <a:solidFill>
                   <a:srgbClr val="191D2E"/>
                 </a:solidFill>
                 <a:latin typeface="Georgia"/>
               </a:rPr>
-              <a:t>Das vollständige Modul «Kreditrisikofrüherkennung» ist auf FKB Campus verfügbar — 4 Lernziele, Praxisfall und Quellenapparat.</a:t>
+              <a:t>Modul «Kreditrisikofrüherkennung» auf FKB Campus — 4 Lernziele, Praxisfall und Quellenapparat.</a:t>
             </a:r>
           </a:p>
         </p:txBody>
@@ -7133,8 +6149,8 @@
         </p:nvSpPr>
         <p:spPr>
           <a:xfrm>
-            <a:off x="6667500" y="5270500"/>
-            <a:ext cx="2413000" cy="203200"/>
+            <a:off x="6731000" y="4953000"/>
+            <a:ext cx="2413000" cy="177800"/>
           </a:xfrm>
           <a:prstGeom prst="rect">
             <a:avLst/>
@@ -7143,13 +6159,13 @@
         </p:spPr>
         <p:txBody>
           <a:bodyPr wrap="square">
-            <a:spAutoFit/>
+            <a:normAutofit/>
           </a:bodyPr>
           <a:lstStyle/>
           <a:p>
             <a:pPr algn="l"/>
             <a:r>
-              <a:rPr sz="1300" b="0" i="0" spc="100">
+              <a:rPr sz="900" b="0" i="0">
                 <a:solidFill>
                   <a:srgbClr val="7B7FA0"/>
                 </a:solidFill>
@@ -7168,7 +6184,7 @@
         </p:nvSpPr>
         <p:spPr>
           <a:xfrm>
-            <a:off x="6667500" y="5499100"/>
+            <a:off x="6731000" y="5156200"/>
             <a:ext cx="2413000" cy="381000"/>
           </a:xfrm>
           <a:prstGeom prst="rect">
@@ -7178,13 +6194,13 @@
         </p:spPr>
         <p:txBody>
           <a:bodyPr wrap="square">
-            <a:spAutoFit/>
+            <a:normAutofit/>
           </a:bodyPr>
           <a:lstStyle/>
           <a:p>
             <a:pPr algn="l"/>
             <a:r>
-              <a:rPr sz="2000" b="0" i="0">
+              <a:rPr sz="1400" b="0" i="0">
                 <a:solidFill>
                   <a:srgbClr val="191D2E"/>
                 </a:solidFill>
@@ -7203,8 +6219,8 @@
         </p:nvSpPr>
         <p:spPr>
           <a:xfrm>
-            <a:off x="9398000" y="5270500"/>
-            <a:ext cx="2184400" cy="203200"/>
+            <a:off x="9398000" y="4953000"/>
+            <a:ext cx="2184400" cy="177800"/>
           </a:xfrm>
           <a:prstGeom prst="rect">
             <a:avLst/>
@@ -7213,13 +6229,13 @@
         </p:spPr>
         <p:txBody>
           <a:bodyPr wrap="square">
-            <a:spAutoFit/>
+            <a:normAutofit/>
           </a:bodyPr>
           <a:lstStyle/>
           <a:p>
             <a:pPr algn="l"/>
             <a:r>
-              <a:rPr sz="1300" b="0" i="0" spc="100">
+              <a:rPr sz="900" b="0" i="0">
                 <a:solidFill>
                   <a:srgbClr val="7B7FA0"/>
                 </a:solidFill>
@@ -7238,7 +6254,7 @@
         </p:nvSpPr>
         <p:spPr>
           <a:xfrm>
-            <a:off x="9398000" y="5499100"/>
+            <a:off x="9398000" y="5156200"/>
             <a:ext cx="2184400" cy="381000"/>
           </a:xfrm>
           <a:prstGeom prst="rect">
@@ -7248,13 +6264,13 @@
         </p:spPr>
         <p:txBody>
           <a:bodyPr wrap="square">
-            <a:spAutoFit/>
+            <a:normAutofit/>
           </a:bodyPr>
           <a:lstStyle/>
           <a:p>
             <a:pPr algn="l"/>
             <a:r>
-              <a:rPr sz="2000" b="0" i="0">
+              <a:rPr sz="1400" b="0" i="0">
                 <a:solidFill>
                   <a:srgbClr val="191D2E"/>
                 </a:solidFill>
@@ -7299,7 +6315,7 @@
         </p:nvSpPr>
         <p:spPr>
           <a:xfrm>
-            <a:off x="609600" y="304800"/>
+            <a:off x="609600" y="279400"/>
             <a:ext cx="2540000" cy="279400"/>
           </a:xfrm>
           <a:prstGeom prst="rect">
@@ -7309,13 +6325,13 @@
         </p:spPr>
         <p:txBody>
           <a:bodyPr wrap="square">
-            <a:spAutoFit/>
+            <a:normAutofit/>
           </a:bodyPr>
           <a:lstStyle/>
           <a:p>
             <a:pPr algn="l"/>
             <a:r>
-              <a:rPr sz="1600" b="1" i="0">
+              <a:rPr sz="1000" b="1" i="0">
                 <a:solidFill>
                   <a:srgbClr val="191D2E"/>
                 </a:solidFill>
@@ -7334,8 +6350,8 @@
         </p:nvSpPr>
         <p:spPr>
           <a:xfrm>
-            <a:off x="0" y="304800"/>
-            <a:ext cx="11582400" cy="279400"/>
+            <a:off x="609600" y="279400"/>
+            <a:ext cx="10972800" cy="279400"/>
           </a:xfrm>
           <a:prstGeom prst="rect">
             <a:avLst/>
@@ -7344,13 +6360,13 @@
         </p:spPr>
         <p:txBody>
           <a:bodyPr wrap="square">
-            <a:spAutoFit/>
+            <a:normAutofit/>
           </a:bodyPr>
           <a:lstStyle/>
           <a:p>
             <a:pPr algn="r"/>
             <a:r>
-              <a:rPr sz="1300" b="0" i="0" spc="100">
+              <a:rPr sz="900" b="0" i="0">
                 <a:solidFill>
                   <a:srgbClr val="7B7FA0"/>
                 </a:solidFill>
@@ -7369,8 +6385,8 @@
         </p:nvSpPr>
         <p:spPr>
           <a:xfrm>
-            <a:off x="609600" y="6350000"/>
-            <a:ext cx="5080000" cy="228600"/>
+            <a:off x="609600" y="6426200"/>
+            <a:ext cx="10972800" cy="228600"/>
           </a:xfrm>
           <a:prstGeom prst="rect">
             <a:avLst/>
@@ -7379,102 +6395,32 @@
         </p:spPr>
         <p:txBody>
           <a:bodyPr wrap="square">
-            <a:spAutoFit/>
+            <a:normAutofit/>
           </a:bodyPr>
           <a:lstStyle/>
           <a:p>
-            <a:pPr algn="l"/>
+            <a:pPr algn="r"/>
             <a:r>
-              <a:rPr sz="1300" b="0" i="0">
+              <a:rPr sz="900" b="0" i="0">
                 <a:solidFill>
                   <a:srgbClr val="7B7FA0"/>
                 </a:solidFill>
                 <a:latin typeface="Courier New"/>
               </a:rPr>
-              <a:t>v1.2</a:t>
+              <a:t>02</a:t>
             </a:r>
           </a:p>
         </p:txBody>
       </p:sp>
       <p:sp>
         <p:nvSpPr>
-          <p:cNvPr id="5" name="TextBox 4"/>
-          <p:cNvSpPr txBox="1"/>
+          <p:cNvPr id="5" name="Rectangle 4"/>
+          <p:cNvSpPr/>
           <p:nvPr/>
         </p:nvSpPr>
         <p:spPr>
           <a:xfrm>
-            <a:off x="0" y="6350000"/>
-            <a:ext cx="11582400" cy="228600"/>
-          </a:xfrm>
-          <a:prstGeom prst="rect">
-            <a:avLst/>
-          </a:prstGeom>
-          <a:noFill/>
-        </p:spPr>
-        <p:txBody>
-          <a:bodyPr wrap="square">
-            <a:spAutoFit/>
-          </a:bodyPr>
-          <a:lstStyle/>
-          <a:p>
-            <a:pPr algn="r"/>
-            <a:r>
-              <a:rPr sz="1300" b="0" i="0">
-                <a:solidFill>
-                  <a:srgbClr val="7B7FA0"/>
-                </a:solidFill>
-                <a:latin typeface="Courier New"/>
-              </a:rPr>
-              <a:t>02 / 12</a:t>
-            </a:r>
-          </a:p>
-        </p:txBody>
-      </p:sp>
-      <p:sp>
-        <p:nvSpPr>
-          <p:cNvPr id="6" name="TextBox 5"/>
-          <p:cNvSpPr txBox="1"/>
-          <p:nvPr/>
-        </p:nvSpPr>
-        <p:spPr>
-          <a:xfrm>
-            <a:off x="609600" y="1270000"/>
-            <a:ext cx="3683000" cy="1270000"/>
-          </a:xfrm>
-          <a:prstGeom prst="rect">
-            <a:avLst/>
-          </a:prstGeom>
-          <a:noFill/>
-        </p:spPr>
-        <p:txBody>
-          <a:bodyPr wrap="square">
-            <a:spAutoFit/>
-          </a:bodyPr>
-          <a:lstStyle/>
-          <a:p>
-            <a:pPr algn="l"/>
-            <a:r>
-              <a:rPr sz="8800" b="0" i="1">
-                <a:solidFill>
-                  <a:srgbClr val="1F2B56"/>
-                </a:solidFill>
-                <a:latin typeface="Georgia"/>
-              </a:rPr>
-              <a:t>Inhalt.</a:t>
-            </a:r>
-          </a:p>
-        </p:txBody>
-      </p:sp>
-      <p:sp>
-        <p:nvSpPr>
-          <p:cNvPr id="7" name="Rectangle 6"/>
-          <p:cNvSpPr/>
-          <p:nvPr/>
-        </p:nvSpPr>
-        <p:spPr>
-          <a:xfrm>
-            <a:off x="609600" y="1333500"/>
+            <a:off x="609600" y="825500"/>
             <a:ext cx="10972800" cy="6350"/>
           </a:xfrm>
           <a:prstGeom prst="rect">
@@ -7511,14 +6457,49 @@
       </p:sp>
       <p:sp>
         <p:nvSpPr>
-          <p:cNvPr id="8" name="Rectangle 7"/>
+          <p:cNvPr id="6" name="TextBox 5"/>
+          <p:cNvSpPr txBox="1"/>
+          <p:nvPr/>
+        </p:nvSpPr>
+        <p:spPr>
+          <a:xfrm>
+            <a:off x="609600" y="920750"/>
+            <a:ext cx="3175000" cy="1651000"/>
+          </a:xfrm>
+          <a:prstGeom prst="rect">
+            <a:avLst/>
+          </a:prstGeom>
+          <a:noFill/>
+        </p:spPr>
+        <p:txBody>
+          <a:bodyPr wrap="square">
+            <a:normAutofit/>
+          </a:bodyPr>
+          <a:lstStyle/>
+          <a:p>
+            <a:pPr algn="l"/>
+            <a:r>
+              <a:rPr sz="4800" b="0" i="1">
+                <a:solidFill>
+                  <a:srgbClr val="1F2B56"/>
+                </a:solidFill>
+                <a:latin typeface="Georgia"/>
+              </a:rPr>
+              <a:t>Inhalt.</a:t>
+            </a:r>
+          </a:p>
+        </p:txBody>
+      </p:sp>
+      <p:sp>
+        <p:nvSpPr>
+          <p:cNvPr id="7" name="Rectangle 6"/>
           <p:cNvSpPr/>
           <p:nvPr/>
         </p:nvSpPr>
         <p:spPr>
           <a:xfrm>
-            <a:off x="4572000" y="1333500"/>
-            <a:ext cx="7010400" cy="6350"/>
+            <a:off x="4064000" y="889000"/>
+            <a:ext cx="7518399" cy="6350"/>
           </a:xfrm>
           <a:prstGeom prst="rect">
             <a:avLst/>
@@ -7554,14 +6535,14 @@
       </p:sp>
       <p:sp>
         <p:nvSpPr>
-          <p:cNvPr id="9" name="TextBox 8"/>
+          <p:cNvPr id="8" name="TextBox 7"/>
           <p:cNvSpPr txBox="1"/>
           <p:nvPr/>
         </p:nvSpPr>
         <p:spPr>
           <a:xfrm>
-            <a:off x="4572000" y="1384300"/>
-            <a:ext cx="571500" cy="711200"/>
+            <a:off x="4064000" y="927100"/>
+            <a:ext cx="508000" cy="647700"/>
           </a:xfrm>
           <a:prstGeom prst="rect">
             <a:avLst/>
@@ -7570,13 +6551,13 @@
         </p:spPr>
         <p:txBody>
           <a:bodyPr wrap="square">
-            <a:spAutoFit/>
+            <a:normAutofit/>
           </a:bodyPr>
           <a:lstStyle/>
           <a:p>
             <a:pPr algn="l"/>
             <a:r>
-              <a:rPr sz="4000" b="0" i="1">
+              <a:rPr sz="2600" b="0" i="1">
                 <a:solidFill>
                   <a:srgbClr val="1F2B56"/>
                 </a:solidFill>
@@ -7589,14 +6570,14 @@
       </p:sp>
       <p:sp>
         <p:nvSpPr>
-          <p:cNvPr id="10" name="TextBox 9"/>
+          <p:cNvPr id="9" name="TextBox 8"/>
           <p:cNvSpPr txBox="1"/>
           <p:nvPr/>
         </p:nvSpPr>
         <p:spPr>
           <a:xfrm>
-            <a:off x="5270500" y="1409700"/>
-            <a:ext cx="6223000" cy="711200"/>
+            <a:off x="4699000" y="952500"/>
+            <a:ext cx="6858000" cy="622300"/>
           </a:xfrm>
           <a:prstGeom prst="rect">
             <a:avLst/>
@@ -7605,13 +6586,13 @@
         </p:spPr>
         <p:txBody>
           <a:bodyPr wrap="square">
-            <a:spAutoFit/>
+            <a:normAutofit/>
           </a:bodyPr>
           <a:lstStyle/>
           <a:p>
             <a:pPr algn="l"/>
             <a:r>
-              <a:rPr sz="2200" b="0" i="0">
+              <a:rPr sz="1400" b="0" i="0">
                 <a:solidFill>
                   <a:srgbClr val="191D2E"/>
                 </a:solidFill>
@@ -7624,14 +6605,14 @@
       </p:sp>
       <p:sp>
         <p:nvSpPr>
-          <p:cNvPr id="11" name="Rectangle 10"/>
+          <p:cNvPr id="10" name="Rectangle 9"/>
           <p:cNvSpPr/>
           <p:nvPr/>
         </p:nvSpPr>
         <p:spPr>
           <a:xfrm>
-            <a:off x="4572000" y="2095499"/>
-            <a:ext cx="7010400" cy="6350"/>
+            <a:off x="4064000" y="1574800"/>
+            <a:ext cx="7518399" cy="6350"/>
           </a:xfrm>
           <a:prstGeom prst="rect">
             <a:avLst/>
@@ -7667,14 +6648,14 @@
       </p:sp>
       <p:sp>
         <p:nvSpPr>
-          <p:cNvPr id="12" name="TextBox 11"/>
+          <p:cNvPr id="11" name="TextBox 10"/>
           <p:cNvSpPr txBox="1"/>
           <p:nvPr/>
         </p:nvSpPr>
         <p:spPr>
           <a:xfrm>
-            <a:off x="4572000" y="2146300"/>
-            <a:ext cx="571500" cy="711200"/>
+            <a:off x="4064000" y="1612900"/>
+            <a:ext cx="508000" cy="647700"/>
           </a:xfrm>
           <a:prstGeom prst="rect">
             <a:avLst/>
@@ -7683,13 +6664,13 @@
         </p:spPr>
         <p:txBody>
           <a:bodyPr wrap="square">
-            <a:spAutoFit/>
+            <a:normAutofit/>
           </a:bodyPr>
           <a:lstStyle/>
           <a:p>
             <a:pPr algn="l"/>
             <a:r>
-              <a:rPr sz="4000" b="0" i="1">
+              <a:rPr sz="2600" b="0" i="1">
                 <a:solidFill>
                   <a:srgbClr val="1F2B56"/>
                 </a:solidFill>
@@ -7702,14 +6683,14 @@
       </p:sp>
       <p:sp>
         <p:nvSpPr>
-          <p:cNvPr id="13" name="TextBox 12"/>
+          <p:cNvPr id="12" name="TextBox 11"/>
           <p:cNvSpPr txBox="1"/>
           <p:nvPr/>
         </p:nvSpPr>
         <p:spPr>
           <a:xfrm>
-            <a:off x="5270500" y="2171700"/>
-            <a:ext cx="6223000" cy="711200"/>
+            <a:off x="4699000" y="1638300"/>
+            <a:ext cx="6858000" cy="622300"/>
           </a:xfrm>
           <a:prstGeom prst="rect">
             <a:avLst/>
@@ -7718,13 +6699,13 @@
         </p:spPr>
         <p:txBody>
           <a:bodyPr wrap="square">
-            <a:spAutoFit/>
+            <a:normAutofit/>
           </a:bodyPr>
           <a:lstStyle/>
           <a:p>
             <a:pPr algn="l"/>
             <a:r>
-              <a:rPr sz="2200" b="0" i="0">
+              <a:rPr sz="1400" b="0" i="0">
                 <a:solidFill>
                   <a:srgbClr val="191D2E"/>
                 </a:solidFill>
@@ -7737,14 +6718,14 @@
       </p:sp>
       <p:sp>
         <p:nvSpPr>
-          <p:cNvPr id="14" name="Rectangle 13"/>
+          <p:cNvPr id="13" name="Rectangle 12"/>
           <p:cNvSpPr/>
           <p:nvPr/>
         </p:nvSpPr>
         <p:spPr>
           <a:xfrm>
-            <a:off x="4572000" y="2857500"/>
-            <a:ext cx="7010400" cy="6350"/>
+            <a:off x="4064000" y="2260600"/>
+            <a:ext cx="7518399" cy="6350"/>
           </a:xfrm>
           <a:prstGeom prst="rect">
             <a:avLst/>
@@ -7780,14 +6761,14 @@
       </p:sp>
       <p:sp>
         <p:nvSpPr>
-          <p:cNvPr id="15" name="TextBox 14"/>
+          <p:cNvPr id="14" name="TextBox 13"/>
           <p:cNvSpPr txBox="1"/>
           <p:nvPr/>
         </p:nvSpPr>
         <p:spPr>
           <a:xfrm>
-            <a:off x="4572000" y="2908300"/>
-            <a:ext cx="571500" cy="711200"/>
+            <a:off x="4064000" y="2298700"/>
+            <a:ext cx="508000" cy="647700"/>
           </a:xfrm>
           <a:prstGeom prst="rect">
             <a:avLst/>
@@ -7796,13 +6777,13 @@
         </p:spPr>
         <p:txBody>
           <a:bodyPr wrap="square">
-            <a:spAutoFit/>
+            <a:normAutofit/>
           </a:bodyPr>
           <a:lstStyle/>
           <a:p>
             <a:pPr algn="l"/>
             <a:r>
-              <a:rPr sz="4000" b="0" i="1">
+              <a:rPr sz="2600" b="0" i="1">
                 <a:solidFill>
                   <a:srgbClr val="1F2B56"/>
                 </a:solidFill>
@@ -7815,14 +6796,14 @@
       </p:sp>
       <p:sp>
         <p:nvSpPr>
-          <p:cNvPr id="16" name="TextBox 15"/>
+          <p:cNvPr id="15" name="TextBox 14"/>
           <p:cNvSpPr txBox="1"/>
           <p:nvPr/>
         </p:nvSpPr>
         <p:spPr>
           <a:xfrm>
-            <a:off x="5270500" y="2933700"/>
-            <a:ext cx="6223000" cy="711200"/>
+            <a:off x="4699000" y="2324100"/>
+            <a:ext cx="6858000" cy="622300"/>
           </a:xfrm>
           <a:prstGeom prst="rect">
             <a:avLst/>
@@ -7831,13 +6812,13 @@
         </p:spPr>
         <p:txBody>
           <a:bodyPr wrap="square">
-            <a:spAutoFit/>
+            <a:normAutofit/>
           </a:bodyPr>
           <a:lstStyle/>
           <a:p>
             <a:pPr algn="l"/>
             <a:r>
-              <a:rPr sz="2200" b="0" i="0">
+              <a:rPr sz="1400" b="0" i="0">
                 <a:solidFill>
                   <a:srgbClr val="191D2E"/>
                 </a:solidFill>
@@ -7850,14 +6831,14 @@
       </p:sp>
       <p:sp>
         <p:nvSpPr>
-          <p:cNvPr id="17" name="Rectangle 16"/>
+          <p:cNvPr id="16" name="Rectangle 15"/>
           <p:cNvSpPr/>
           <p:nvPr/>
         </p:nvSpPr>
         <p:spPr>
           <a:xfrm>
-            <a:off x="4572000" y="3619500"/>
-            <a:ext cx="7010400" cy="6350"/>
+            <a:off x="4064000" y="2946400"/>
+            <a:ext cx="7518399" cy="6350"/>
           </a:xfrm>
           <a:prstGeom prst="rect">
             <a:avLst/>
@@ -7893,14 +6874,14 @@
       </p:sp>
       <p:sp>
         <p:nvSpPr>
-          <p:cNvPr id="18" name="TextBox 17"/>
+          <p:cNvPr id="17" name="TextBox 16"/>
           <p:cNvSpPr txBox="1"/>
           <p:nvPr/>
         </p:nvSpPr>
         <p:spPr>
           <a:xfrm>
-            <a:off x="4572000" y="3670300"/>
-            <a:ext cx="571500" cy="711200"/>
+            <a:off x="4064000" y="2984500"/>
+            <a:ext cx="508000" cy="647700"/>
           </a:xfrm>
           <a:prstGeom prst="rect">
             <a:avLst/>
@@ -7909,13 +6890,13 @@
         </p:spPr>
         <p:txBody>
           <a:bodyPr wrap="square">
-            <a:spAutoFit/>
+            <a:normAutofit/>
           </a:bodyPr>
           <a:lstStyle/>
           <a:p>
             <a:pPr algn="l"/>
             <a:r>
-              <a:rPr sz="4000" b="0" i="1">
+              <a:rPr sz="2600" b="0" i="1">
                 <a:solidFill>
                   <a:srgbClr val="1F2B56"/>
                 </a:solidFill>
@@ -7928,14 +6909,14 @@
       </p:sp>
       <p:sp>
         <p:nvSpPr>
-          <p:cNvPr id="19" name="TextBox 18"/>
+          <p:cNvPr id="18" name="TextBox 17"/>
           <p:cNvSpPr txBox="1"/>
           <p:nvPr/>
         </p:nvSpPr>
         <p:spPr>
           <a:xfrm>
-            <a:off x="5270500" y="3695700"/>
-            <a:ext cx="6223000" cy="711200"/>
+            <a:off x="4699000" y="3009900"/>
+            <a:ext cx="6858000" cy="622300"/>
           </a:xfrm>
           <a:prstGeom prst="rect">
             <a:avLst/>
@@ -7944,13 +6925,13 @@
         </p:spPr>
         <p:txBody>
           <a:bodyPr wrap="square">
-            <a:spAutoFit/>
+            <a:normAutofit/>
           </a:bodyPr>
           <a:lstStyle/>
           <a:p>
             <a:pPr algn="l"/>
             <a:r>
-              <a:rPr sz="2200" b="0" i="0">
+              <a:rPr sz="1400" b="0" i="0">
                 <a:solidFill>
                   <a:srgbClr val="191D2E"/>
                 </a:solidFill>
@@ -7995,7 +6976,7 @@
         </p:nvSpPr>
         <p:spPr>
           <a:xfrm>
-            <a:off x="609600" y="304800"/>
+            <a:off x="609600" y="279400"/>
             <a:ext cx="2540000" cy="279400"/>
           </a:xfrm>
           <a:prstGeom prst="rect">
@@ -8005,13 +6986,13 @@
         </p:spPr>
         <p:txBody>
           <a:bodyPr wrap="square">
-            <a:spAutoFit/>
+            <a:normAutofit/>
           </a:bodyPr>
           <a:lstStyle/>
           <a:p>
             <a:pPr algn="l"/>
             <a:r>
-              <a:rPr sz="1600" b="1" i="0">
+              <a:rPr sz="1000" b="1" i="0">
                 <a:solidFill>
                   <a:srgbClr val="F8F8FA"/>
                 </a:solidFill>
@@ -8030,8 +7011,8 @@
         </p:nvSpPr>
         <p:spPr>
           <a:xfrm>
-            <a:off x="0" y="304800"/>
-            <a:ext cx="11582400" cy="279400"/>
+            <a:off x="609600" y="279400"/>
+            <a:ext cx="10972800" cy="279400"/>
           </a:xfrm>
           <a:prstGeom prst="rect">
             <a:avLst/>
@@ -8040,15 +7021,15 @@
         </p:spPr>
         <p:txBody>
           <a:bodyPr wrap="square">
-            <a:spAutoFit/>
+            <a:normAutofit/>
           </a:bodyPr>
           <a:lstStyle/>
           <a:p>
             <a:pPr algn="r"/>
             <a:r>
-              <a:rPr sz="1300" b="0" i="0" spc="100">
+              <a:rPr sz="900" b="0" i="0">
                 <a:solidFill>
-                  <a:srgbClr val="F8F8FA"/>
+                  <a:srgbClr val="7B7FA0"/>
                 </a:solidFill>
                 <a:latin typeface="Courier New"/>
               </a:rPr>
@@ -8065,8 +7046,8 @@
         </p:nvSpPr>
         <p:spPr>
           <a:xfrm>
-            <a:off x="0" y="6350000"/>
-            <a:ext cx="11582400" cy="228600"/>
+            <a:off x="609600" y="6426200"/>
+            <a:ext cx="10972800" cy="228600"/>
           </a:xfrm>
           <a:prstGeom prst="rect">
             <a:avLst/>
@@ -8075,19 +7056,19 @@
         </p:spPr>
         <p:txBody>
           <a:bodyPr wrap="square">
-            <a:spAutoFit/>
+            <a:normAutofit/>
           </a:bodyPr>
           <a:lstStyle/>
           <a:p>
             <a:pPr algn="r"/>
             <a:r>
-              <a:rPr sz="1300" b="0" i="0">
+              <a:rPr sz="900" b="0" i="0">
                 <a:solidFill>
-                  <a:srgbClr val="606070"/>
+                  <a:srgbClr val="7B7FA0"/>
                 </a:solidFill>
                 <a:latin typeface="Courier New"/>
               </a:rPr>
-              <a:t>03 / 12</a:t>
+              <a:t>03</a:t>
             </a:r>
           </a:p>
         </p:txBody>
@@ -8100,8 +7081,8 @@
         </p:nvSpPr>
         <p:spPr>
           <a:xfrm>
-            <a:off x="609600" y="825500"/>
-            <a:ext cx="5715000" cy="4953000"/>
+            <a:off x="609600" y="635000"/>
+            <a:ext cx="5461000" cy="5461000"/>
           </a:xfrm>
           <a:prstGeom prst="rect">
             <a:avLst/>
@@ -8110,13 +7091,13 @@
         </p:spPr>
         <p:txBody>
           <a:bodyPr wrap="square">
-            <a:spAutoFit/>
+            <a:normAutofit/>
           </a:bodyPr>
           <a:lstStyle/>
           <a:p>
             <a:pPr algn="l"/>
             <a:r>
-              <a:rPr sz="40000" b="0" i="1">
+              <a:rPr sz="28000" b="0" i="1">
                 <a:solidFill>
                   <a:srgbClr val="D9BF7A"/>
                 </a:solidFill>
@@ -8135,8 +7116,8 @@
         </p:nvSpPr>
         <p:spPr>
           <a:xfrm>
-            <a:off x="6985000" y="3683000"/>
-            <a:ext cx="4597400" cy="228600"/>
+            <a:off x="6731000" y="4064000"/>
+            <a:ext cx="4851400" cy="1778000"/>
           </a:xfrm>
           <a:prstGeom prst="rect">
             <a:avLst/>
@@ -8145,48 +7126,13 @@
         </p:spPr>
         <p:txBody>
           <a:bodyPr wrap="square">
-            <a:spAutoFit/>
+            <a:normAutofit/>
           </a:bodyPr>
           <a:lstStyle/>
           <a:p>
             <a:pPr algn="r"/>
             <a:r>
-              <a:rPr sz="1400" b="0" i="0">
-                <a:solidFill>
-                  <a:srgbClr val="7B7FA0"/>
-                </a:solidFill>
-                <a:latin typeface="Courier New"/>
-              </a:rPr>
-              <a:t>MODULINHALTE</a:t>
-            </a:r>
-          </a:p>
-        </p:txBody>
-      </p:sp>
-      <p:sp>
-        <p:nvSpPr>
-          <p:cNvPr id="7" name="TextBox 6"/>
-          <p:cNvSpPr txBox="1"/>
-          <p:nvPr/>
-        </p:nvSpPr>
-        <p:spPr>
-          <a:xfrm>
-            <a:off x="6985000" y="4000500"/>
-            <a:ext cx="4597400" cy="1524000"/>
-          </a:xfrm>
-          <a:prstGeom prst="rect">
-            <a:avLst/>
-          </a:prstGeom>
-          <a:noFill/>
-        </p:spPr>
-        <p:txBody>
-          <a:bodyPr wrap="square">
-            <a:spAutoFit/>
-          </a:bodyPr>
-          <a:lstStyle/>
-          <a:p>
-            <a:pPr algn="r"/>
-            <a:r>
-              <a:rPr sz="7600" b="0" i="0">
+              <a:rPr sz="3800" b="0" i="0">
                 <a:solidFill>
                   <a:srgbClr val="F8F8FA"/>
                 </a:solidFill>
@@ -8199,14 +7145,14 @@
       </p:sp>
       <p:sp>
         <p:nvSpPr>
-          <p:cNvPr id="8" name="TextBox 7"/>
+          <p:cNvPr id="7" name="TextBox 6"/>
           <p:cNvSpPr txBox="1"/>
           <p:nvPr/>
         </p:nvSpPr>
         <p:spPr>
           <a:xfrm>
-            <a:off x="6985000" y="5524500"/>
-            <a:ext cx="4597400" cy="635000"/>
+            <a:off x="6731000" y="5842000"/>
+            <a:ext cx="4851400" cy="635000"/>
           </a:xfrm>
           <a:prstGeom prst="rect">
             <a:avLst/>
@@ -8215,13 +7161,13 @@
         </p:spPr>
         <p:txBody>
           <a:bodyPr wrap="square">
-            <a:spAutoFit/>
+            <a:normAutofit/>
           </a:bodyPr>
           <a:lstStyle/>
           <a:p>
             <a:pPr algn="r"/>
             <a:r>
-              <a:rPr sz="2000" b="0" i="1">
+              <a:rPr sz="1400" b="0" i="1">
                 <a:solidFill>
                   <a:srgbClr val="7B7FA0"/>
                 </a:solidFill>
@@ -8266,7 +7212,7 @@
         </p:nvSpPr>
         <p:spPr>
           <a:xfrm>
-            <a:off x="609600" y="304800"/>
+            <a:off x="609600" y="279400"/>
             <a:ext cx="2540000" cy="279400"/>
           </a:xfrm>
           <a:prstGeom prst="rect">
@@ -8276,13 +7222,13 @@
         </p:spPr>
         <p:txBody>
           <a:bodyPr wrap="square">
-            <a:spAutoFit/>
+            <a:normAutofit/>
           </a:bodyPr>
           <a:lstStyle/>
           <a:p>
             <a:pPr algn="l"/>
             <a:r>
-              <a:rPr sz="1600" b="1" i="0">
+              <a:rPr sz="1000" b="1" i="0">
                 <a:solidFill>
                   <a:srgbClr val="191D2E"/>
                 </a:solidFill>
@@ -8301,8 +7247,8 @@
         </p:nvSpPr>
         <p:spPr>
           <a:xfrm>
-            <a:off x="0" y="304800"/>
-            <a:ext cx="11582400" cy="279400"/>
+            <a:off x="609600" y="279400"/>
+            <a:ext cx="10972800" cy="279400"/>
           </a:xfrm>
           <a:prstGeom prst="rect">
             <a:avLst/>
@@ -8311,13 +7257,13 @@
         </p:spPr>
         <p:txBody>
           <a:bodyPr wrap="square">
-            <a:spAutoFit/>
+            <a:normAutofit/>
           </a:bodyPr>
           <a:lstStyle/>
           <a:p>
             <a:pPr algn="r"/>
             <a:r>
-              <a:rPr sz="1300" b="0" i="0" spc="100">
+              <a:rPr sz="900" b="0" i="0">
                 <a:solidFill>
                   <a:srgbClr val="7B7FA0"/>
                 </a:solidFill>
@@ -8336,8 +7282,8 @@
         </p:nvSpPr>
         <p:spPr>
           <a:xfrm>
-            <a:off x="0" y="6350000"/>
-            <a:ext cx="11582400" cy="228600"/>
+            <a:off x="609600" y="6426200"/>
+            <a:ext cx="10972800" cy="228600"/>
           </a:xfrm>
           <a:prstGeom prst="rect">
             <a:avLst/>
@@ -8346,33 +7292,76 @@
         </p:spPr>
         <p:txBody>
           <a:bodyPr wrap="square">
-            <a:spAutoFit/>
+            <a:normAutofit/>
           </a:bodyPr>
           <a:lstStyle/>
           <a:p>
             <a:pPr algn="r"/>
             <a:r>
-              <a:rPr sz="1300" b="0" i="0">
+              <a:rPr sz="900" b="0" i="0">
                 <a:solidFill>
                   <a:srgbClr val="7B7FA0"/>
                 </a:solidFill>
                 <a:latin typeface="Courier New"/>
               </a:rPr>
-              <a:t>04 / 12</a:t>
+              <a:t>04</a:t>
             </a:r>
           </a:p>
         </p:txBody>
       </p:sp>
       <p:sp>
         <p:nvSpPr>
-          <p:cNvPr id="5" name="TextBox 4"/>
+          <p:cNvPr id="5" name="Rectangle 4"/>
+          <p:cNvSpPr/>
+          <p:nvPr/>
+        </p:nvSpPr>
+        <p:spPr>
+          <a:xfrm>
+            <a:off x="609600" y="825500"/>
+            <a:ext cx="10972800" cy="6350"/>
+          </a:xfrm>
+          <a:prstGeom prst="rect">
+            <a:avLst/>
+          </a:prstGeom>
+          <a:solidFill>
+            <a:srgbClr val="191D2E"/>
+          </a:solidFill>
+          <a:ln>
+            <a:noFill/>
+          </a:ln>
+        </p:spPr>
+        <p:style>
+          <a:lnRef idx="1">
+            <a:schemeClr val="accent1"/>
+          </a:lnRef>
+          <a:fillRef idx="3">
+            <a:schemeClr val="accent1"/>
+          </a:fillRef>
+          <a:effectRef idx="2">
+            <a:schemeClr val="accent1"/>
+          </a:effectRef>
+          <a:fontRef idx="minor">
+            <a:schemeClr val="lt1"/>
+          </a:fontRef>
+        </p:style>
+        <p:txBody>
+          <a:bodyPr rtlCol="0" anchor="ctr"/>
+          <a:lstStyle/>
+          <a:p>
+            <a:pPr algn="ctr"/>
+          </a:p>
+        </p:txBody>
+      </p:sp>
+      <p:sp>
+        <p:nvSpPr>
+          <p:cNvPr id="6" name="TextBox 5"/>
           <p:cNvSpPr txBox="1"/>
           <p:nvPr/>
         </p:nvSpPr>
         <p:spPr>
           <a:xfrm>
-            <a:off x="609600" y="1016000"/>
-            <a:ext cx="4953000" cy="2032000"/>
+            <a:off x="609600" y="920750"/>
+            <a:ext cx="4826000" cy="1778000"/>
           </a:xfrm>
           <a:prstGeom prst="rect">
             <a:avLst/>
@@ -8381,13 +7370,13 @@
         </p:spPr>
         <p:txBody>
           <a:bodyPr wrap="square">
-            <a:spAutoFit/>
+            <a:normAutofit/>
           </a:bodyPr>
           <a:lstStyle/>
           <a:p>
             <a:pPr algn="l"/>
             <a:r>
-              <a:rPr sz="6000" b="0" i="0">
+              <a:rPr sz="3800" b="0" i="0">
                 <a:solidFill>
                   <a:srgbClr val="191D2E"/>
                 </a:solidFill>
@@ -8400,14 +7389,14 @@
       </p:sp>
       <p:sp>
         <p:nvSpPr>
-          <p:cNvPr id="6" name="TextBox 5"/>
+          <p:cNvPr id="7" name="TextBox 6"/>
           <p:cNvSpPr txBox="1"/>
           <p:nvPr/>
         </p:nvSpPr>
         <p:spPr>
           <a:xfrm>
-            <a:off x="609600" y="3175000"/>
-            <a:ext cx="4953000" cy="1270000"/>
+            <a:off x="609600" y="2825750"/>
+            <a:ext cx="4826000" cy="1016000"/>
           </a:xfrm>
           <a:prstGeom prst="rect">
             <a:avLst/>
@@ -8416,34 +7405,34 @@
         </p:spPr>
         <p:txBody>
           <a:bodyPr wrap="square">
-            <a:spAutoFit/>
+            <a:normAutofit/>
           </a:bodyPr>
           <a:lstStyle/>
           <a:p>
             <a:pPr algn="l"/>
             <a:r>
-              <a:rPr sz="2000" b="0" i="0">
+              <a:rPr sz="1400" b="0" i="0">
                 <a:solidFill>
                   <a:srgbClr val="4D5270"/>
                 </a:solidFill>
                 <a:latin typeface="Georgia"/>
               </a:rPr>
-              <a:t>Kreditrisiko bezeichnet die Gefahr, dass ein Kreditnehmer seinen vertraglichen Zahlungsverpflichtungen nicht vollständig oder nicht fristgerecht nachkommt. Für Volksbanken — mit einem Kreditbuch, das</a:t>
+              <a:t>Kreditrisiko bezeichnet die Gefahr, dass ein Kreditnehmer seinen vertraglichen Zahlungsverpflichtungen nicht vollständig oder nicht fristgerecht nachkommt. Für Volksbanken — mit ei</a:t>
             </a:r>
           </a:p>
         </p:txBody>
       </p:sp>
       <p:graphicFrame>
         <p:nvGraphicFramePr>
-          <p:cNvPr id="7" name="Table 6"/>
+          <p:cNvPr id="8" name="Table 7"/>
           <p:cNvGraphicFramePr>
             <a:graphicFrameLocks noGrp="1"/>
           </p:cNvGraphicFramePr>
           <p:nvPr/>
         </p:nvGraphicFramePr>
         <p:xfrm>
-          <a:off x="6096000" y="1016000"/>
-          <a:ext cx="6502400" cy="1778000"/>
+          <a:off x="5715000" y="920750"/>
+          <a:ext cx="5867400" cy="1524000"/>
         </p:xfrm>
         <a:graphic>
           <a:graphicData uri="http://schemas.openxmlformats.org/drawingml/2006/table">
@@ -8452,18 +7441,18 @@
                 <a:tableStyleId>{5C22544A-7EE6-4342-B048-85BDC9FD1C3A}</a:tableStyleId>
               </a:tblPr>
               <a:tblGrid>
-                <a:gridCol w="2167466"/>
-                <a:gridCol w="2167466"/>
-                <a:gridCol w="2167468"/>
+                <a:gridCol w="1955800"/>
+                <a:gridCol w="1955800"/>
+                <a:gridCol w="1955800"/>
               </a:tblGrid>
-              <a:tr h="444500">
-                <a:tc>
-                  <a:txBody>
-                    <a:bodyPr wrap="square"/>
-                    <a:lstStyle/>
-                    <a:p>
-                      <a:r>
-                        <a:rPr sz="1400" b="1">
+              <a:tr h="381000">
+                <a:tc>
+                  <a:txBody>
+                    <a:bodyPr wrap="square"/>
+                    <a:lstStyle/>
+                    <a:p>
+                      <a:r>
+                        <a:rPr sz="1000" b="1">
                           <a:solidFill>
                             <a:srgbClr val="F8F8FA"/>
                           </a:solidFill>
@@ -8485,7 +7474,7 @@
                     <a:lstStyle/>
                     <a:p>
                       <a:r>
-                        <a:rPr sz="1400" b="1">
+                        <a:rPr sz="1000" b="1">
                           <a:solidFill>
                             <a:srgbClr val="F8F8FA"/>
                           </a:solidFill>
@@ -8507,7 +7496,7 @@
                     <a:lstStyle/>
                     <a:p>
                       <a:r>
-                        <a:rPr sz="1400" b="1">
+                        <a:rPr sz="1000" b="1">
                           <a:solidFill>
                             <a:srgbClr val="F8F8FA"/>
                           </a:solidFill>
@@ -8524,14 +7513,14 @@
                   </a:tcPr>
                 </a:tc>
               </a:tr>
-              <a:tr h="444500">
-                <a:tc>
-                  <a:txBody>
-                    <a:bodyPr wrap="square"/>
-                    <a:lstStyle/>
-                    <a:p>
-                      <a:r>
-                        <a:rPr sz="1600" b="0">
+              <a:tr h="381000">
+                <a:tc>
+                  <a:txBody>
+                    <a:bodyPr wrap="square"/>
+                    <a:lstStyle/>
+                    <a:p>
+                      <a:r>
+                        <a:rPr sz="1000" b="0">
                           <a:solidFill>
                             <a:srgbClr val="191D2E"/>
                           </a:solidFill>
@@ -8553,7 +7542,7 @@
                     <a:lstStyle/>
                     <a:p>
                       <a:r>
-                        <a:rPr sz="1600" b="0">
+                        <a:rPr sz="1000" b="0">
                           <a:solidFill>
                             <a:srgbClr val="191D2E"/>
                           </a:solidFill>
@@ -8575,7 +7564,7 @@
                     <a:lstStyle/>
                     <a:p>
                       <a:r>
-                        <a:rPr sz="1600" b="0">
+                        <a:rPr sz="1000" b="0">
                           <a:solidFill>
                             <a:srgbClr val="191D2E"/>
                           </a:solidFill>
@@ -8592,14 +7581,14 @@
                   </a:tcPr>
                 </a:tc>
               </a:tr>
-              <a:tr h="444500">
-                <a:tc>
-                  <a:txBody>
-                    <a:bodyPr wrap="square"/>
-                    <a:lstStyle/>
-                    <a:p>
-                      <a:r>
-                        <a:rPr sz="1600" b="0">
+              <a:tr h="381000">
+                <a:tc>
+                  <a:txBody>
+                    <a:bodyPr wrap="square"/>
+                    <a:lstStyle/>
+                    <a:p>
+                      <a:r>
+                        <a:rPr sz="1000" b="0">
                           <a:solidFill>
                             <a:srgbClr val="191D2E"/>
                           </a:solidFill>
@@ -8621,7 +7610,7 @@
                     <a:lstStyle/>
                     <a:p>
                       <a:r>
-                        <a:rPr sz="1600" b="0">
+                        <a:rPr sz="1000" b="0">
                           <a:solidFill>
                             <a:srgbClr val="191D2E"/>
                           </a:solidFill>
@@ -8643,7 +7632,7 @@
                     <a:lstStyle/>
                     <a:p>
                       <a:r>
-                        <a:rPr sz="1600" b="0">
+                        <a:rPr sz="1000" b="0">
                           <a:solidFill>
                             <a:srgbClr val="191D2E"/>
                           </a:solidFill>
@@ -8660,14 +7649,14 @@
                   </a:tcPr>
                 </a:tc>
               </a:tr>
-              <a:tr h="444500">
-                <a:tc>
-                  <a:txBody>
-                    <a:bodyPr wrap="square"/>
-                    <a:lstStyle/>
-                    <a:p>
-                      <a:r>
-                        <a:rPr sz="1600" b="0">
+              <a:tr h="381000">
+                <a:tc>
+                  <a:txBody>
+                    <a:bodyPr wrap="square"/>
+                    <a:lstStyle/>
+                    <a:p>
+                      <a:r>
+                        <a:rPr sz="1000" b="0">
                           <a:solidFill>
                             <a:srgbClr val="191D2E"/>
                           </a:solidFill>
@@ -8689,7 +7678,7 @@
                     <a:lstStyle/>
                     <a:p>
                       <a:r>
-                        <a:rPr sz="1600" b="0">
+                        <a:rPr sz="1000" b="0">
                           <a:solidFill>
                             <a:srgbClr val="191D2E"/>
                           </a:solidFill>
@@ -8711,7 +7700,7 @@
                     <a:lstStyle/>
                     <a:p>
                       <a:r>
-                        <a:rPr sz="1600" b="0">
+                        <a:rPr sz="1000" b="0">
                           <a:solidFill>
                             <a:srgbClr val="191D2E"/>
                           </a:solidFill>
@@ -8766,7 +7755,7 @@
         </p:nvSpPr>
         <p:spPr>
           <a:xfrm>
-            <a:off x="609600" y="304800"/>
+            <a:off x="609600" y="279400"/>
             <a:ext cx="2540000" cy="279400"/>
           </a:xfrm>
           <a:prstGeom prst="rect">
@@ -8776,13 +7765,13 @@
         </p:spPr>
         <p:txBody>
           <a:bodyPr wrap="square">
-            <a:spAutoFit/>
+            <a:normAutofit/>
           </a:bodyPr>
           <a:lstStyle/>
           <a:p>
             <a:pPr algn="l"/>
             <a:r>
-              <a:rPr sz="1600" b="1" i="0">
+              <a:rPr sz="1000" b="1" i="0">
                 <a:solidFill>
                   <a:srgbClr val="191D2E"/>
                 </a:solidFill>
@@ -8801,8 +7790,8 @@
         </p:nvSpPr>
         <p:spPr>
           <a:xfrm>
-            <a:off x="0" y="304800"/>
-            <a:ext cx="11582400" cy="279400"/>
+            <a:off x="609600" y="279400"/>
+            <a:ext cx="10972800" cy="279400"/>
           </a:xfrm>
           <a:prstGeom prst="rect">
             <a:avLst/>
@@ -8811,13 +7800,13 @@
         </p:spPr>
         <p:txBody>
           <a:bodyPr wrap="square">
-            <a:spAutoFit/>
+            <a:normAutofit/>
           </a:bodyPr>
           <a:lstStyle/>
           <a:p>
             <a:pPr algn="r"/>
             <a:r>
-              <a:rPr sz="1300" b="0" i="0" spc="100">
+              <a:rPr sz="900" b="0" i="0">
                 <a:solidFill>
                   <a:srgbClr val="7B7FA0"/>
                 </a:solidFill>
@@ -8836,8 +7825,8 @@
         </p:nvSpPr>
         <p:spPr>
           <a:xfrm>
-            <a:off x="0" y="6350000"/>
-            <a:ext cx="11582400" cy="228600"/>
+            <a:off x="609600" y="6426200"/>
+            <a:ext cx="10972800" cy="228600"/>
           </a:xfrm>
           <a:prstGeom prst="rect">
             <a:avLst/>
@@ -8846,33 +7835,76 @@
         </p:spPr>
         <p:txBody>
           <a:bodyPr wrap="square">
-            <a:spAutoFit/>
+            <a:normAutofit/>
           </a:bodyPr>
           <a:lstStyle/>
           <a:p>
             <a:pPr algn="r"/>
             <a:r>
-              <a:rPr sz="1300" b="0" i="0">
+              <a:rPr sz="900" b="0" i="0">
                 <a:solidFill>
                   <a:srgbClr val="7B7FA0"/>
                 </a:solidFill>
                 <a:latin typeface="Courier New"/>
               </a:rPr>
-              <a:t>05 / 12</a:t>
+              <a:t>05</a:t>
             </a:r>
           </a:p>
         </p:txBody>
       </p:sp>
       <p:sp>
         <p:nvSpPr>
-          <p:cNvPr id="5" name="TextBox 4"/>
+          <p:cNvPr id="5" name="Rectangle 4"/>
+          <p:cNvSpPr/>
+          <p:nvPr/>
+        </p:nvSpPr>
+        <p:spPr>
+          <a:xfrm>
+            <a:off x="609600" y="825500"/>
+            <a:ext cx="10972800" cy="6350"/>
+          </a:xfrm>
+          <a:prstGeom prst="rect">
+            <a:avLst/>
+          </a:prstGeom>
+          <a:solidFill>
+            <a:srgbClr val="191D2E"/>
+          </a:solidFill>
+          <a:ln>
+            <a:noFill/>
+          </a:ln>
+        </p:spPr>
+        <p:style>
+          <a:lnRef idx="1">
+            <a:schemeClr val="accent1"/>
+          </a:lnRef>
+          <a:fillRef idx="3">
+            <a:schemeClr val="accent1"/>
+          </a:fillRef>
+          <a:effectRef idx="2">
+            <a:schemeClr val="accent1"/>
+          </a:effectRef>
+          <a:fontRef idx="minor">
+            <a:schemeClr val="lt1"/>
+          </a:fontRef>
+        </p:style>
+        <p:txBody>
+          <a:bodyPr rtlCol="0" anchor="ctr"/>
+          <a:lstStyle/>
+          <a:p>
+            <a:pPr algn="ctr"/>
+          </a:p>
+        </p:txBody>
+      </p:sp>
+      <p:sp>
+        <p:nvSpPr>
+          <p:cNvPr id="6" name="TextBox 5"/>
           <p:cNvSpPr txBox="1"/>
           <p:nvPr/>
         </p:nvSpPr>
         <p:spPr>
           <a:xfrm>
-            <a:off x="609600" y="1016000"/>
-            <a:ext cx="4953000" cy="2032000"/>
+            <a:off x="609600" y="920750"/>
+            <a:ext cx="4826000" cy="1778000"/>
           </a:xfrm>
           <a:prstGeom prst="rect">
             <a:avLst/>
@@ -8881,13 +7913,13 @@
         </p:spPr>
         <p:txBody>
           <a:bodyPr wrap="square">
-            <a:spAutoFit/>
+            <a:normAutofit/>
           </a:bodyPr>
           <a:lstStyle/>
           <a:p>
             <a:pPr algn="l"/>
             <a:r>
-              <a:rPr sz="6000" b="0" i="0">
+              <a:rPr sz="3800" b="0" i="0">
                 <a:solidFill>
                   <a:srgbClr val="191D2E"/>
                 </a:solidFill>
@@ -8900,14 +7932,14 @@
       </p:sp>
       <p:sp>
         <p:nvSpPr>
-          <p:cNvPr id="6" name="TextBox 5"/>
+          <p:cNvPr id="7" name="TextBox 6"/>
           <p:cNvSpPr txBox="1"/>
           <p:nvPr/>
         </p:nvSpPr>
         <p:spPr>
           <a:xfrm>
-            <a:off x="609600" y="3175000"/>
-            <a:ext cx="4953000" cy="1270000"/>
+            <a:off x="609600" y="2825750"/>
+            <a:ext cx="4826000" cy="1016000"/>
           </a:xfrm>
           <a:prstGeom prst="rect">
             <a:avLst/>
@@ -8916,13 +7948,13 @@
         </p:spPr>
         <p:txBody>
           <a:bodyPr wrap="square">
-            <a:spAutoFit/>
+            <a:normAutofit/>
           </a:bodyPr>
           <a:lstStyle/>
           <a:p>
             <a:pPr algn="l"/>
             <a:r>
-              <a:rPr sz="2000" b="0" i="0">
+              <a:rPr sz="1400" b="0" i="0">
                 <a:solidFill>
                   <a:srgbClr val="4D5270"/>
                 </a:solidFill>
@@ -8935,15 +7967,15 @@
       </p:sp>
       <p:graphicFrame>
         <p:nvGraphicFramePr>
-          <p:cNvPr id="7" name="Table 6"/>
+          <p:cNvPr id="8" name="Table 7"/>
           <p:cNvGraphicFramePr>
             <a:graphicFrameLocks noGrp="1"/>
           </p:cNvGraphicFramePr>
           <p:nvPr/>
         </p:nvGraphicFramePr>
         <p:xfrm>
-          <a:off x="6096000" y="1016000"/>
-          <a:ext cx="6502400" cy="2222500"/>
+          <a:off x="5715000" y="920750"/>
+          <a:ext cx="5867400" cy="1905000"/>
         </p:xfrm>
         <a:graphic>
           <a:graphicData uri="http://schemas.openxmlformats.org/drawingml/2006/table">
@@ -8952,20 +7984,20 @@
                 <a:tableStyleId>{5C22544A-7EE6-4342-B048-85BDC9FD1C3A}</a:tableStyleId>
               </a:tblPr>
               <a:tblGrid>
-                <a:gridCol w="1300480"/>
-                <a:gridCol w="1300480"/>
-                <a:gridCol w="1300480"/>
-                <a:gridCol w="1300480"/>
-                <a:gridCol w="1300480"/>
+                <a:gridCol w="1173480"/>
+                <a:gridCol w="1173480"/>
+                <a:gridCol w="1173480"/>
+                <a:gridCol w="1173480"/>
+                <a:gridCol w="1173480"/>
               </a:tblGrid>
-              <a:tr h="444500">
-                <a:tc>
-                  <a:txBody>
-                    <a:bodyPr wrap="square"/>
-                    <a:lstStyle/>
-                    <a:p>
-                      <a:r>
-                        <a:rPr sz="1400" b="1">
+              <a:tr h="381000">
+                <a:tc>
+                  <a:txBody>
+                    <a:bodyPr wrap="square"/>
+                    <a:lstStyle/>
+                    <a:p>
+                      <a:r>
+                        <a:rPr sz="1000" b="1">
                           <a:solidFill>
                             <a:srgbClr val="F8F8FA"/>
                           </a:solidFill>
@@ -8987,7 +8019,7 @@
                     <a:lstStyle/>
                     <a:p>
                       <a:r>
-                        <a:rPr sz="1400" b="1">
+                        <a:rPr sz="1000" b="1">
                           <a:solidFill>
                             <a:srgbClr val="F8F8FA"/>
                           </a:solidFill>
@@ -9009,7 +8041,7 @@
                     <a:lstStyle/>
                     <a:p>
                       <a:r>
-                        <a:rPr sz="1400" b="1">
+                        <a:rPr sz="1000" b="1">
                           <a:solidFill>
                             <a:srgbClr val="F8F8FA"/>
                           </a:solidFill>
@@ -9031,7 +8063,7 @@
                     <a:lstStyle/>
                     <a:p>
                       <a:r>
-                        <a:rPr sz="1400" b="1">
+                        <a:rPr sz="1000" b="1">
                           <a:solidFill>
                             <a:srgbClr val="F8F8FA"/>
                           </a:solidFill>
@@ -9053,7 +8085,7 @@
                     <a:lstStyle/>
                     <a:p>
                       <a:r>
-                        <a:rPr sz="1400" b="1">
+                        <a:rPr sz="1000" b="1">
                           <a:solidFill>
                             <a:srgbClr val="F8F8FA"/>
                           </a:solidFill>
@@ -9070,14 +8102,14 @@
                   </a:tcPr>
                 </a:tc>
               </a:tr>
-              <a:tr h="444500">
-                <a:tc>
-                  <a:txBody>
-                    <a:bodyPr wrap="square"/>
-                    <a:lstStyle/>
-                    <a:p>
-                      <a:r>
-                        <a:rPr sz="1600" b="0">
+              <a:tr h="381000">
+                <a:tc>
+                  <a:txBody>
+                    <a:bodyPr wrap="square"/>
+                    <a:lstStyle/>
+                    <a:p>
+                      <a:r>
+                        <a:rPr sz="1000" b="0">
                           <a:solidFill>
                             <a:srgbClr val="191D2E"/>
                           </a:solidFill>
@@ -9099,7 +8131,7 @@
                     <a:lstStyle/>
                     <a:p>
                       <a:r>
-                        <a:rPr sz="1600" b="0">
+                        <a:rPr sz="1000" b="0">
                           <a:solidFill>
                             <a:srgbClr val="191D2E"/>
                           </a:solidFill>
@@ -9121,7 +8153,7 @@
                     <a:lstStyle/>
                     <a:p>
                       <a:r>
-                        <a:rPr sz="1600" b="0">
+                        <a:rPr sz="1000" b="0">
                           <a:solidFill>
                             <a:srgbClr val="191D2E"/>
                           </a:solidFill>
@@ -9143,7 +8175,7 @@
                     <a:lstStyle/>
                     <a:p>
                       <a:r>
-                        <a:rPr sz="1600" b="0">
+                        <a:rPr sz="1000" b="0">
                           <a:solidFill>
                             <a:srgbClr val="191D2E"/>
                           </a:solidFill>
@@ -9165,7 +8197,7 @@
                     <a:lstStyle/>
                     <a:p>
                       <a:r>
-                        <a:rPr sz="1600" b="0">
+                        <a:rPr sz="1000" b="0">
                           <a:solidFill>
                             <a:srgbClr val="191D2E"/>
                           </a:solidFill>
@@ -9182,14 +8214,14 @@
                   </a:tcPr>
                 </a:tc>
               </a:tr>
-              <a:tr h="444500">
-                <a:tc>
-                  <a:txBody>
-                    <a:bodyPr wrap="square"/>
-                    <a:lstStyle/>
-                    <a:p>
-                      <a:r>
-                        <a:rPr sz="1600" b="0">
+              <a:tr h="381000">
+                <a:tc>
+                  <a:txBody>
+                    <a:bodyPr wrap="square"/>
+                    <a:lstStyle/>
+                    <a:p>
+                      <a:r>
+                        <a:rPr sz="1000" b="0">
                           <a:solidFill>
                             <a:srgbClr val="191D2E"/>
                           </a:solidFill>
@@ -9211,7 +8243,7 @@
                     <a:lstStyle/>
                     <a:p>
                       <a:r>
-                        <a:rPr sz="1600" b="0">
+                        <a:rPr sz="1000" b="0">
                           <a:solidFill>
                             <a:srgbClr val="191D2E"/>
                           </a:solidFill>
@@ -9233,7 +8265,7 @@
                     <a:lstStyle/>
                     <a:p>
                       <a:r>
-                        <a:rPr sz="1600" b="0">
+                        <a:rPr sz="1000" b="0">
                           <a:solidFill>
                             <a:srgbClr val="191D2E"/>
                           </a:solidFill>
@@ -9255,7 +8287,7 @@
                     <a:lstStyle/>
                     <a:p>
                       <a:r>
-                        <a:rPr sz="1600" b="0">
+                        <a:rPr sz="1000" b="0">
                           <a:solidFill>
                             <a:srgbClr val="191D2E"/>
                           </a:solidFill>
@@ -9277,7 +8309,7 @@
                     <a:lstStyle/>
                     <a:p>
                       <a:r>
-                        <a:rPr sz="1600" b="0">
+                        <a:rPr sz="1000" b="0">
                           <a:solidFill>
                             <a:srgbClr val="191D2E"/>
                           </a:solidFill>
@@ -9294,14 +8326,14 @@
                   </a:tcPr>
                 </a:tc>
               </a:tr>
-              <a:tr h="444500">
-                <a:tc>
-                  <a:txBody>
-                    <a:bodyPr wrap="square"/>
-                    <a:lstStyle/>
-                    <a:p>
-                      <a:r>
-                        <a:rPr sz="1600" b="0">
+              <a:tr h="381000">
+                <a:tc>
+                  <a:txBody>
+                    <a:bodyPr wrap="square"/>
+                    <a:lstStyle/>
+                    <a:p>
+                      <a:r>
+                        <a:rPr sz="1000" b="0">
                           <a:solidFill>
                             <a:srgbClr val="191D2E"/>
                           </a:solidFill>
@@ -9323,7 +8355,7 @@
                     <a:lstStyle/>
                     <a:p>
                       <a:r>
-                        <a:rPr sz="1600" b="0">
+                        <a:rPr sz="1000" b="0">
                           <a:solidFill>
                             <a:srgbClr val="191D2E"/>
                           </a:solidFill>
@@ -9345,7 +8377,7 @@
                     <a:lstStyle/>
                     <a:p>
                       <a:r>
-                        <a:rPr sz="1600" b="0">
+                        <a:rPr sz="1000" b="0">
                           <a:solidFill>
                             <a:srgbClr val="191D2E"/>
                           </a:solidFill>
@@ -9367,7 +8399,7 @@
                     <a:lstStyle/>
                     <a:p>
                       <a:r>
-                        <a:rPr sz="1600" b="0">
+                        <a:rPr sz="1000" b="0">
                           <a:solidFill>
                             <a:srgbClr val="191D2E"/>
                           </a:solidFill>
@@ -9389,7 +8421,7 @@
                     <a:lstStyle/>
                     <a:p>
                       <a:r>
-                        <a:rPr sz="1600" b="0">
+                        <a:rPr sz="1000" b="0">
                           <a:solidFill>
                             <a:srgbClr val="191D2E"/>
                           </a:solidFill>
@@ -9406,14 +8438,14 @@
                   </a:tcPr>
                 </a:tc>
               </a:tr>
-              <a:tr h="444500">
-                <a:tc>
-                  <a:txBody>
-                    <a:bodyPr wrap="square"/>
-                    <a:lstStyle/>
-                    <a:p>
-                      <a:r>
-                        <a:rPr sz="1600" b="0">
+              <a:tr h="381000">
+                <a:tc>
+                  <a:txBody>
+                    <a:bodyPr wrap="square"/>
+                    <a:lstStyle/>
+                    <a:p>
+                      <a:r>
+                        <a:rPr sz="1000" b="0">
                           <a:solidFill>
                             <a:srgbClr val="191D2E"/>
                           </a:solidFill>
@@ -9435,7 +8467,7 @@
                     <a:lstStyle/>
                     <a:p>
                       <a:r>
-                        <a:rPr sz="1600" b="0">
+                        <a:rPr sz="1000" b="0">
                           <a:solidFill>
                             <a:srgbClr val="191D2E"/>
                           </a:solidFill>
@@ -9457,7 +8489,7 @@
                     <a:lstStyle/>
                     <a:p>
                       <a:r>
-                        <a:rPr sz="1600" b="0">
+                        <a:rPr sz="1000" b="0">
                           <a:solidFill>
                             <a:srgbClr val="191D2E"/>
                           </a:solidFill>
@@ -9479,7 +8511,7 @@
                     <a:lstStyle/>
                     <a:p>
                       <a:r>
-                        <a:rPr sz="1600" b="0">
+                        <a:rPr sz="1000" b="0">
                           <a:solidFill>
                             <a:srgbClr val="191D2E"/>
                           </a:solidFill>
@@ -9501,7 +8533,7 @@
                     <a:lstStyle/>
                     <a:p>
                       <a:r>
-                        <a:rPr sz="1600" b="0">
+                        <a:rPr sz="1000" b="0">
                           <a:solidFill>
                             <a:srgbClr val="191D2E"/>
                           </a:solidFill>
@@ -9556,7 +8588,7 @@
         </p:nvSpPr>
         <p:spPr>
           <a:xfrm>
-            <a:off x="609600" y="304800"/>
+            <a:off x="609600" y="279400"/>
             <a:ext cx="2540000" cy="279400"/>
           </a:xfrm>
           <a:prstGeom prst="rect">
@@ -9566,13 +8598,13 @@
         </p:spPr>
         <p:txBody>
           <a:bodyPr wrap="square">
-            <a:spAutoFit/>
+            <a:normAutofit/>
           </a:bodyPr>
           <a:lstStyle/>
           <a:p>
             <a:pPr algn="l"/>
             <a:r>
-              <a:rPr sz="1600" b="1" i="0">
+              <a:rPr sz="1000" b="1" i="0">
                 <a:solidFill>
                   <a:srgbClr val="191D2E"/>
                 </a:solidFill>
@@ -9591,8 +8623,8 @@
         </p:nvSpPr>
         <p:spPr>
           <a:xfrm>
-            <a:off x="0" y="304800"/>
-            <a:ext cx="11582400" cy="279400"/>
+            <a:off x="609600" y="279400"/>
+            <a:ext cx="10972800" cy="279400"/>
           </a:xfrm>
           <a:prstGeom prst="rect">
             <a:avLst/>
@@ -9601,13 +8633,13 @@
         </p:spPr>
         <p:txBody>
           <a:bodyPr wrap="square">
-            <a:spAutoFit/>
+            <a:normAutofit/>
           </a:bodyPr>
           <a:lstStyle/>
           <a:p>
             <a:pPr algn="r"/>
             <a:r>
-              <a:rPr sz="1300" b="0" i="0" spc="100">
+              <a:rPr sz="900" b="0" i="0">
                 <a:solidFill>
                   <a:srgbClr val="7B7FA0"/>
                 </a:solidFill>
@@ -9626,8 +8658,8 @@
         </p:nvSpPr>
         <p:spPr>
           <a:xfrm>
-            <a:off x="0" y="6350000"/>
-            <a:ext cx="11582400" cy="228600"/>
+            <a:off x="609600" y="6426200"/>
+            <a:ext cx="10972800" cy="228600"/>
           </a:xfrm>
           <a:prstGeom prst="rect">
             <a:avLst/>
@@ -9636,33 +8668,76 @@
         </p:spPr>
         <p:txBody>
           <a:bodyPr wrap="square">
-            <a:spAutoFit/>
+            <a:normAutofit/>
           </a:bodyPr>
           <a:lstStyle/>
           <a:p>
             <a:pPr algn="r"/>
             <a:r>
-              <a:rPr sz="1300" b="0" i="0">
+              <a:rPr sz="900" b="0" i="0">
                 <a:solidFill>
                   <a:srgbClr val="7B7FA0"/>
                 </a:solidFill>
                 <a:latin typeface="Courier New"/>
               </a:rPr>
-              <a:t>06 / 12</a:t>
+              <a:t>06</a:t>
             </a:r>
           </a:p>
         </p:txBody>
       </p:sp>
       <p:sp>
         <p:nvSpPr>
-          <p:cNvPr id="5" name="TextBox 4"/>
+          <p:cNvPr id="5" name="Rectangle 4"/>
+          <p:cNvSpPr/>
+          <p:nvPr/>
+        </p:nvSpPr>
+        <p:spPr>
+          <a:xfrm>
+            <a:off x="609600" y="825500"/>
+            <a:ext cx="10972800" cy="6350"/>
+          </a:xfrm>
+          <a:prstGeom prst="rect">
+            <a:avLst/>
+          </a:prstGeom>
+          <a:solidFill>
+            <a:srgbClr val="191D2E"/>
+          </a:solidFill>
+          <a:ln>
+            <a:noFill/>
+          </a:ln>
+        </p:spPr>
+        <p:style>
+          <a:lnRef idx="1">
+            <a:schemeClr val="accent1"/>
+          </a:lnRef>
+          <a:fillRef idx="3">
+            <a:schemeClr val="accent1"/>
+          </a:fillRef>
+          <a:effectRef idx="2">
+            <a:schemeClr val="accent1"/>
+          </a:effectRef>
+          <a:fontRef idx="minor">
+            <a:schemeClr val="lt1"/>
+          </a:fontRef>
+        </p:style>
+        <p:txBody>
+          <a:bodyPr rtlCol="0" anchor="ctr"/>
+          <a:lstStyle/>
+          <a:p>
+            <a:pPr algn="ctr"/>
+          </a:p>
+        </p:txBody>
+      </p:sp>
+      <p:sp>
+        <p:nvSpPr>
+          <p:cNvPr id="6" name="TextBox 5"/>
           <p:cNvSpPr txBox="1"/>
           <p:nvPr/>
         </p:nvSpPr>
         <p:spPr>
           <a:xfrm>
-            <a:off x="609600" y="1016000"/>
-            <a:ext cx="4953000" cy="2032000"/>
+            <a:off x="609600" y="920750"/>
+            <a:ext cx="4826000" cy="1778000"/>
           </a:xfrm>
           <a:prstGeom prst="rect">
             <a:avLst/>
@@ -9671,13 +8746,13 @@
         </p:spPr>
         <p:txBody>
           <a:bodyPr wrap="square">
-            <a:spAutoFit/>
+            <a:normAutofit/>
           </a:bodyPr>
           <a:lstStyle/>
           <a:p>
             <a:pPr algn="l"/>
             <a:r>
-              <a:rPr sz="6000" b="0" i="0">
+              <a:rPr sz="3800" b="0" i="0">
                 <a:solidFill>
                   <a:srgbClr val="191D2E"/>
                 </a:solidFill>
@@ -9690,14 +8765,14 @@
       </p:sp>
       <p:sp>
         <p:nvSpPr>
-          <p:cNvPr id="6" name="TextBox 5"/>
+          <p:cNvPr id="7" name="TextBox 6"/>
           <p:cNvSpPr txBox="1"/>
           <p:nvPr/>
         </p:nvSpPr>
         <p:spPr>
           <a:xfrm>
-            <a:off x="609600" y="3175000"/>
-            <a:ext cx="4953000" cy="1270000"/>
+            <a:off x="609600" y="2825750"/>
+            <a:ext cx="4826000" cy="1016000"/>
           </a:xfrm>
           <a:prstGeom prst="rect">
             <a:avLst/>
@@ -9706,13 +8781,13 @@
         </p:spPr>
         <p:txBody>
           <a:bodyPr wrap="square">
-            <a:spAutoFit/>
+            <a:normAutofit/>
           </a:bodyPr>
           <a:lstStyle/>
           <a:p>
             <a:pPr algn="l"/>
             <a:r>
-              <a:rPr sz="2000" b="0" i="0">
+              <a:rPr sz="1400" b="0" i="0">
                 <a:solidFill>
                   <a:srgbClr val="4D5270"/>
                 </a:solidFill>
@@ -9725,15 +8800,15 @@
       </p:sp>
       <p:graphicFrame>
         <p:nvGraphicFramePr>
-          <p:cNvPr id="7" name="Table 6"/>
+          <p:cNvPr id="8" name="Table 7"/>
           <p:cNvGraphicFramePr>
             <a:graphicFrameLocks noGrp="1"/>
           </p:cNvGraphicFramePr>
           <p:nvPr/>
         </p:nvGraphicFramePr>
         <p:xfrm>
-          <a:off x="6096000" y="1016000"/>
-          <a:ext cx="6502400" cy="3810000"/>
+          <a:off x="5715000" y="920750"/>
+          <a:ext cx="5867400" cy="4953000"/>
         </p:xfrm>
         <a:graphic>
           <a:graphicData uri="http://schemas.openxmlformats.org/drawingml/2006/table">
@@ -9742,20 +8817,20 @@
                 <a:tableStyleId>{5C22544A-7EE6-4342-B048-85BDC9FD1C3A}</a:tableStyleId>
               </a:tblPr>
               <a:tblGrid>
-                <a:gridCol w="1300480"/>
-                <a:gridCol w="1300480"/>
-                <a:gridCol w="1300480"/>
-                <a:gridCol w="1300480"/>
-                <a:gridCol w="1300480"/>
+                <a:gridCol w="1173480"/>
+                <a:gridCol w="1173480"/>
+                <a:gridCol w="1173480"/>
+                <a:gridCol w="1173480"/>
+                <a:gridCol w="1173480"/>
               </a:tblGrid>
-              <a:tr h="293076">
-                <a:tc>
-                  <a:txBody>
-                    <a:bodyPr wrap="square"/>
-                    <a:lstStyle/>
-                    <a:p>
-                      <a:r>
-                        <a:rPr sz="1400" b="1">
+              <a:tr h="381000">
+                <a:tc>
+                  <a:txBody>
+                    <a:bodyPr wrap="square"/>
+                    <a:lstStyle/>
+                    <a:p>
+                      <a:r>
+                        <a:rPr sz="1000" b="1">
                           <a:solidFill>
                             <a:srgbClr val="F8F8FA"/>
                           </a:solidFill>
@@ -9777,7 +8852,7 @@
                     <a:lstStyle/>
                     <a:p>
                       <a:r>
-                        <a:rPr sz="1400" b="1">
+                        <a:rPr sz="1000" b="1">
                           <a:solidFill>
                             <a:srgbClr val="F8F8FA"/>
                           </a:solidFill>
@@ -9799,7 +8874,7 @@
                     <a:lstStyle/>
                     <a:p>
                       <a:r>
-                        <a:rPr sz="1400" b="1">
+                        <a:rPr sz="1000" b="1">
                           <a:solidFill>
                             <a:srgbClr val="F8F8FA"/>
                           </a:solidFill>
@@ -9821,7 +8896,7 @@
                     <a:lstStyle/>
                     <a:p>
                       <a:r>
-                        <a:rPr sz="1400" b="1">
+                        <a:rPr sz="1000" b="1">
                           <a:solidFill>
                             <a:srgbClr val="F8F8FA"/>
                           </a:solidFill>
@@ -9843,7 +8918,7 @@
                     <a:lstStyle/>
                     <a:p>
                       <a:r>
-                        <a:rPr sz="1400" b="1">
+                        <a:rPr sz="1000" b="1">
                           <a:solidFill>
                             <a:srgbClr val="F8F8FA"/>
                           </a:solidFill>
@@ -9860,14 +8935,14 @@
                   </a:tcPr>
                 </a:tc>
               </a:tr>
-              <a:tr h="293076">
-                <a:tc>
-                  <a:txBody>
-                    <a:bodyPr wrap="square"/>
-                    <a:lstStyle/>
-                    <a:p>
-                      <a:r>
-                        <a:rPr sz="1600" b="0">
+              <a:tr h="381000">
+                <a:tc>
+                  <a:txBody>
+                    <a:bodyPr wrap="square"/>
+                    <a:lstStyle/>
+                    <a:p>
+                      <a:r>
+                        <a:rPr sz="1000" b="0">
                           <a:solidFill>
                             <a:srgbClr val="191D2E"/>
                           </a:solidFill>
@@ -9889,7 +8964,7 @@
                     <a:lstStyle/>
                     <a:p>
                       <a:r>
-                        <a:rPr sz="1600" b="0">
+                        <a:rPr sz="1000" b="0">
                           <a:solidFill>
                             <a:srgbClr val="191D2E"/>
                           </a:solidFill>
@@ -9911,7 +8986,7 @@
                     <a:lstStyle/>
                     <a:p>
                       <a:r>
-                        <a:rPr sz="1600" b="0">
+                        <a:rPr sz="1000" b="0">
                           <a:solidFill>
                             <a:srgbClr val="191D2E"/>
                           </a:solidFill>
@@ -9933,7 +9008,7 @@
                     <a:lstStyle/>
                     <a:p>
                       <a:r>
-                        <a:rPr sz="1600" b="0">
+                        <a:rPr sz="1000" b="0">
                           <a:solidFill>
                             <a:srgbClr val="191D2E"/>
                           </a:solidFill>
@@ -9955,7 +9030,7 @@
                     <a:lstStyle/>
                     <a:p>
                       <a:r>
-                        <a:rPr sz="1600" b="0">
+                        <a:rPr sz="1000" b="0">
                           <a:solidFill>
                             <a:srgbClr val="191D2E"/>
                           </a:solidFill>
@@ -9972,14 +9047,14 @@
                   </a:tcPr>
                 </a:tc>
               </a:tr>
-              <a:tr h="293076">
-                <a:tc>
-                  <a:txBody>
-                    <a:bodyPr wrap="square"/>
-                    <a:lstStyle/>
-                    <a:p>
-                      <a:r>
-                        <a:rPr sz="1600" b="0">
+              <a:tr h="381000">
+                <a:tc>
+                  <a:txBody>
+                    <a:bodyPr wrap="square"/>
+                    <a:lstStyle/>
+                    <a:p>
+                      <a:r>
+                        <a:rPr sz="1000" b="0">
                           <a:solidFill>
                             <a:srgbClr val="191D2E"/>
                           </a:solidFill>
@@ -10001,7 +9076,7 @@
                     <a:lstStyle/>
                     <a:p>
                       <a:r>
-                        <a:rPr sz="1600" b="0">
+                        <a:rPr sz="1000" b="0">
                           <a:solidFill>
                             <a:srgbClr val="191D2E"/>
                           </a:solidFill>
@@ -10023,7 +9098,7 @@
                     <a:lstStyle/>
                     <a:p>
                       <a:r>
-                        <a:rPr sz="1600" b="0">
+                        <a:rPr sz="1000" b="0">
                           <a:solidFill>
                             <a:srgbClr val="191D2E"/>
                           </a:solidFill>
@@ -10045,7 +9120,7 @@
                     <a:lstStyle/>
                     <a:p>
                       <a:r>
-                        <a:rPr sz="1600" b="0">
+                        <a:rPr sz="1000" b="0">
                           <a:solidFill>
                             <a:srgbClr val="191D2E"/>
                           </a:solidFill>
@@ -10067,7 +9142,7 @@
                     <a:lstStyle/>
                     <a:p>
                       <a:r>
-                        <a:rPr sz="1600" b="0">
+                        <a:rPr sz="1000" b="0">
                           <a:solidFill>
                             <a:srgbClr val="191D2E"/>
                           </a:solidFill>
@@ -10084,14 +9159,14 @@
                   </a:tcPr>
                 </a:tc>
               </a:tr>
-              <a:tr h="293076">
-                <a:tc>
-                  <a:txBody>
-                    <a:bodyPr wrap="square"/>
-                    <a:lstStyle/>
-                    <a:p>
-                      <a:r>
-                        <a:rPr sz="1600" b="0">
+              <a:tr h="381000">
+                <a:tc>
+                  <a:txBody>
+                    <a:bodyPr wrap="square"/>
+                    <a:lstStyle/>
+                    <a:p>
+                      <a:r>
+                        <a:rPr sz="1000" b="0">
                           <a:solidFill>
                             <a:srgbClr val="191D2E"/>
                           </a:solidFill>
@@ -10113,7 +9188,7 @@
                     <a:lstStyle/>
                     <a:p>
                       <a:r>
-                        <a:rPr sz="1600" b="0">
+                        <a:rPr sz="1000" b="0">
                           <a:solidFill>
                             <a:srgbClr val="191D2E"/>
                           </a:solidFill>
@@ -10135,7 +9210,7 @@
                     <a:lstStyle/>
                     <a:p>
                       <a:r>
-                        <a:rPr sz="1600" b="0">
+                        <a:rPr sz="1000" b="0">
                           <a:solidFill>
                             <a:srgbClr val="191D2E"/>
                           </a:solidFill>
@@ -10157,7 +9232,7 @@
                     <a:lstStyle/>
                     <a:p>
                       <a:r>
-                        <a:rPr sz="1600" b="0">
+                        <a:rPr sz="1000" b="0">
                           <a:solidFill>
                             <a:srgbClr val="191D2E"/>
                           </a:solidFill>
@@ -10179,7 +9254,7 @@
                     <a:lstStyle/>
                     <a:p>
                       <a:r>
-                        <a:rPr sz="1600" b="0">
+                        <a:rPr sz="1000" b="0">
                           <a:solidFill>
                             <a:srgbClr val="191D2E"/>
                           </a:solidFill>
@@ -10196,14 +9271,14 @@
                   </a:tcPr>
                 </a:tc>
               </a:tr>
-              <a:tr h="293076">
-                <a:tc>
-                  <a:txBody>
-                    <a:bodyPr wrap="square"/>
-                    <a:lstStyle/>
-                    <a:p>
-                      <a:r>
-                        <a:rPr sz="1600" b="0">
+              <a:tr h="381000">
+                <a:tc>
+                  <a:txBody>
+                    <a:bodyPr wrap="square"/>
+                    <a:lstStyle/>
+                    <a:p>
+                      <a:r>
+                        <a:rPr sz="1000" b="0">
                           <a:solidFill>
                             <a:srgbClr val="191D2E"/>
                           </a:solidFill>
@@ -10225,7 +9300,7 @@
                     <a:lstStyle/>
                     <a:p>
                       <a:r>
-                        <a:rPr sz="1600" b="0">
+                        <a:rPr sz="1000" b="0">
                           <a:solidFill>
                             <a:srgbClr val="191D2E"/>
                           </a:solidFill>
@@ -10247,7 +9322,7 @@
                     <a:lstStyle/>
                     <a:p>
                       <a:r>
-                        <a:rPr sz="1600" b="0">
+                        <a:rPr sz="1000" b="0">
                           <a:solidFill>
                             <a:srgbClr val="191D2E"/>
                           </a:solidFill>
@@ -10269,7 +9344,7 @@
                     <a:lstStyle/>
                     <a:p>
                       <a:r>
-                        <a:rPr sz="1600" b="0">
+                        <a:rPr sz="1000" b="0">
                           <a:solidFill>
                             <a:srgbClr val="191D2E"/>
                           </a:solidFill>
@@ -10291,7 +9366,7 @@
                     <a:lstStyle/>
                     <a:p>
                       <a:r>
-                        <a:rPr sz="1600" b="0">
+                        <a:rPr sz="1000" b="0">
                           <a:solidFill>
                             <a:srgbClr val="191D2E"/>
                           </a:solidFill>
@@ -10308,14 +9383,14 @@
                   </a:tcPr>
                 </a:tc>
               </a:tr>
-              <a:tr h="293076">
-                <a:tc>
-                  <a:txBody>
-                    <a:bodyPr wrap="square"/>
-                    <a:lstStyle/>
-                    <a:p>
-                      <a:r>
-                        <a:rPr sz="1600" b="0">
+              <a:tr h="381000">
+                <a:tc>
+                  <a:txBody>
+                    <a:bodyPr wrap="square"/>
+                    <a:lstStyle/>
+                    <a:p>
+                      <a:r>
+                        <a:rPr sz="1000" b="0">
                           <a:solidFill>
                             <a:srgbClr val="191D2E"/>
                           </a:solidFill>
@@ -10337,7 +9412,7 @@
                     <a:lstStyle/>
                     <a:p>
                       <a:r>
-                        <a:rPr sz="1600" b="0">
+                        <a:rPr sz="1000" b="0">
                           <a:solidFill>
                             <a:srgbClr val="191D2E"/>
                           </a:solidFill>
@@ -10359,7 +9434,7 @@
                     <a:lstStyle/>
                     <a:p>
                       <a:r>
-                        <a:rPr sz="1600" b="0">
+                        <a:rPr sz="1000" b="0">
                           <a:solidFill>
                             <a:srgbClr val="191D2E"/>
                           </a:solidFill>
@@ -10381,7 +9456,7 @@
                     <a:lstStyle/>
                     <a:p>
                       <a:r>
-                        <a:rPr sz="1600" b="0">
+                        <a:rPr sz="1000" b="0">
                           <a:solidFill>
                             <a:srgbClr val="191D2E"/>
                           </a:solidFill>
@@ -10403,7 +9478,7 @@
                     <a:lstStyle/>
                     <a:p>
                       <a:r>
-                        <a:rPr sz="1600" b="0">
+                        <a:rPr sz="1000" b="0">
                           <a:solidFill>
                             <a:srgbClr val="191D2E"/>
                           </a:solidFill>
@@ -10420,14 +9495,14 @@
                   </a:tcPr>
                 </a:tc>
               </a:tr>
-              <a:tr h="293076">
-                <a:tc>
-                  <a:txBody>
-                    <a:bodyPr wrap="square"/>
-                    <a:lstStyle/>
-                    <a:p>
-                      <a:r>
-                        <a:rPr sz="1600" b="0">
+              <a:tr h="381000">
+                <a:tc>
+                  <a:txBody>
+                    <a:bodyPr wrap="square"/>
+                    <a:lstStyle/>
+                    <a:p>
+                      <a:r>
+                        <a:rPr sz="1000" b="0">
                           <a:solidFill>
                             <a:srgbClr val="191D2E"/>
                           </a:solidFill>
@@ -10449,7 +9524,7 @@
                     <a:lstStyle/>
                     <a:p>
                       <a:r>
-                        <a:rPr sz="1600" b="0">
+                        <a:rPr sz="1000" b="0">
                           <a:solidFill>
                             <a:srgbClr val="191D2E"/>
                           </a:solidFill>
@@ -10471,7 +9546,7 @@
                     <a:lstStyle/>
                     <a:p>
                       <a:r>
-                        <a:rPr sz="1600" b="0">
+                        <a:rPr sz="1000" b="0">
                           <a:solidFill>
                             <a:srgbClr val="191D2E"/>
                           </a:solidFill>
@@ -10493,7 +9568,7 @@
                     <a:lstStyle/>
                     <a:p>
                       <a:r>
-                        <a:rPr sz="1600" b="0">
+                        <a:rPr sz="1000" b="0">
                           <a:solidFill>
                             <a:srgbClr val="191D2E"/>
                           </a:solidFill>
@@ -10515,7 +9590,7 @@
                     <a:lstStyle/>
                     <a:p>
                       <a:r>
-                        <a:rPr sz="1600" b="0">
+                        <a:rPr sz="1000" b="0">
                           <a:solidFill>
                             <a:srgbClr val="191D2E"/>
                           </a:solidFill>
@@ -10532,14 +9607,14 @@
                   </a:tcPr>
                 </a:tc>
               </a:tr>
-              <a:tr h="293076">
-                <a:tc>
-                  <a:txBody>
-                    <a:bodyPr wrap="square"/>
-                    <a:lstStyle/>
-                    <a:p>
-                      <a:r>
-                        <a:rPr sz="1600" b="0">
+              <a:tr h="381000">
+                <a:tc>
+                  <a:txBody>
+                    <a:bodyPr wrap="square"/>
+                    <a:lstStyle/>
+                    <a:p>
+                      <a:r>
+                        <a:rPr sz="1000" b="0">
                           <a:solidFill>
                             <a:srgbClr val="191D2E"/>
                           </a:solidFill>
@@ -10561,7 +9636,7 @@
                     <a:lstStyle/>
                     <a:p>
                       <a:r>
-                        <a:rPr sz="1600" b="0">
+                        <a:rPr sz="1000" b="0">
                           <a:solidFill>
                             <a:srgbClr val="191D2E"/>
                           </a:solidFill>
@@ -10583,7 +9658,7 @@
                     <a:lstStyle/>
                     <a:p>
                       <a:r>
-                        <a:rPr sz="1600" b="0">
+                        <a:rPr sz="1000" b="0">
                           <a:solidFill>
                             <a:srgbClr val="191D2E"/>
                           </a:solidFill>
@@ -10605,7 +9680,7 @@
                     <a:lstStyle/>
                     <a:p>
                       <a:r>
-                        <a:rPr sz="1600" b="0">
+                        <a:rPr sz="1000" b="0">
                           <a:solidFill>
                             <a:srgbClr val="191D2E"/>
                           </a:solidFill>
@@ -10627,7 +9702,7 @@
                     <a:lstStyle/>
                     <a:p>
                       <a:r>
-                        <a:rPr sz="1600" b="0">
+                        <a:rPr sz="1000" b="0">
                           <a:solidFill>
                             <a:srgbClr val="191D2E"/>
                           </a:solidFill>
@@ -10644,14 +9719,14 @@
                   </a:tcPr>
                 </a:tc>
               </a:tr>
-              <a:tr h="293076">
-                <a:tc>
-                  <a:txBody>
-                    <a:bodyPr wrap="square"/>
-                    <a:lstStyle/>
-                    <a:p>
-                      <a:r>
-                        <a:rPr sz="1600" b="0">
+              <a:tr h="381000">
+                <a:tc>
+                  <a:txBody>
+                    <a:bodyPr wrap="square"/>
+                    <a:lstStyle/>
+                    <a:p>
+                      <a:r>
+                        <a:rPr sz="1000" b="0">
                           <a:solidFill>
                             <a:srgbClr val="191D2E"/>
                           </a:solidFill>
@@ -10673,7 +9748,7 @@
                     <a:lstStyle/>
                     <a:p>
                       <a:r>
-                        <a:rPr sz="1600" b="0">
+                        <a:rPr sz="1000" b="0">
                           <a:solidFill>
                             <a:srgbClr val="191D2E"/>
                           </a:solidFill>
@@ -10695,7 +9770,7 @@
                     <a:lstStyle/>
                     <a:p>
                       <a:r>
-                        <a:rPr sz="1600" b="0">
+                        <a:rPr sz="1000" b="0">
                           <a:solidFill>
                             <a:srgbClr val="191D2E"/>
                           </a:solidFill>
@@ -10717,7 +9792,7 @@
                     <a:lstStyle/>
                     <a:p>
                       <a:r>
-                        <a:rPr sz="1600" b="0">
+                        <a:rPr sz="1000" b="0">
                           <a:solidFill>
                             <a:srgbClr val="191D2E"/>
                           </a:solidFill>
@@ -10739,7 +9814,7 @@
                     <a:lstStyle/>
                     <a:p>
                       <a:r>
-                        <a:rPr sz="1600" b="0">
+                        <a:rPr sz="1000" b="0">
                           <a:solidFill>
                             <a:srgbClr val="191D2E"/>
                           </a:solidFill>
@@ -10756,14 +9831,14 @@
                   </a:tcPr>
                 </a:tc>
               </a:tr>
-              <a:tr h="293076">
-                <a:tc>
-                  <a:txBody>
-                    <a:bodyPr wrap="square"/>
-                    <a:lstStyle/>
-                    <a:p>
-                      <a:r>
-                        <a:rPr sz="1600" b="0">
+              <a:tr h="381000">
+                <a:tc>
+                  <a:txBody>
+                    <a:bodyPr wrap="square"/>
+                    <a:lstStyle/>
+                    <a:p>
+                      <a:r>
+                        <a:rPr sz="1000" b="0">
                           <a:solidFill>
                             <a:srgbClr val="191D2E"/>
                           </a:solidFill>
@@ -10785,7 +9860,7 @@
                     <a:lstStyle/>
                     <a:p>
                       <a:r>
-                        <a:rPr sz="1600" b="0">
+                        <a:rPr sz="1000" b="0">
                           <a:solidFill>
                             <a:srgbClr val="191D2E"/>
                           </a:solidFill>
@@ -10807,7 +9882,7 @@
                     <a:lstStyle/>
                     <a:p>
                       <a:r>
-                        <a:rPr sz="1600" b="0">
+                        <a:rPr sz="1000" b="0">
                           <a:solidFill>
                             <a:srgbClr val="191D2E"/>
                           </a:solidFill>
@@ -10829,7 +9904,7 @@
                     <a:lstStyle/>
                     <a:p>
                       <a:r>
-                        <a:rPr sz="1600" b="0">
+                        <a:rPr sz="1000" b="0">
                           <a:solidFill>
                             <a:srgbClr val="191D2E"/>
                           </a:solidFill>
@@ -10851,7 +9926,7 @@
                     <a:lstStyle/>
                     <a:p>
                       <a:r>
-                        <a:rPr sz="1600" b="0">
+                        <a:rPr sz="1000" b="0">
                           <a:solidFill>
                             <a:srgbClr val="191D2E"/>
                           </a:solidFill>
@@ -10868,14 +9943,14 @@
                   </a:tcPr>
                 </a:tc>
               </a:tr>
-              <a:tr h="293076">
-                <a:tc>
-                  <a:txBody>
-                    <a:bodyPr wrap="square"/>
-                    <a:lstStyle/>
-                    <a:p>
-                      <a:r>
-                        <a:rPr sz="1600" b="0">
+              <a:tr h="381000">
+                <a:tc>
+                  <a:txBody>
+                    <a:bodyPr wrap="square"/>
+                    <a:lstStyle/>
+                    <a:p>
+                      <a:r>
+                        <a:rPr sz="1000" b="0">
                           <a:solidFill>
                             <a:srgbClr val="191D2E"/>
                           </a:solidFill>
@@ -10897,7 +9972,7 @@
                     <a:lstStyle/>
                     <a:p>
                       <a:r>
-                        <a:rPr sz="1600" b="0">
+                        <a:rPr sz="1000" b="0">
                           <a:solidFill>
                             <a:srgbClr val="191D2E"/>
                           </a:solidFill>
@@ -10919,7 +9994,7 @@
                     <a:lstStyle/>
                     <a:p>
                       <a:r>
-                        <a:rPr sz="1600" b="0">
+                        <a:rPr sz="1000" b="0">
                           <a:solidFill>
                             <a:srgbClr val="191D2E"/>
                           </a:solidFill>
@@ -10941,7 +10016,7 @@
                     <a:lstStyle/>
                     <a:p>
                       <a:r>
-                        <a:rPr sz="1600" b="0">
+                        <a:rPr sz="1000" b="0">
                           <a:solidFill>
                             <a:srgbClr val="191D2E"/>
                           </a:solidFill>
@@ -10963,7 +10038,7 @@
                     <a:lstStyle/>
                     <a:p>
                       <a:r>
-                        <a:rPr sz="1600" b="0">
+                        <a:rPr sz="1000" b="0">
                           <a:solidFill>
                             <a:srgbClr val="191D2E"/>
                           </a:solidFill>
@@ -10980,14 +10055,14 @@
                   </a:tcPr>
                 </a:tc>
               </a:tr>
-              <a:tr h="293076">
-                <a:tc>
-                  <a:txBody>
-                    <a:bodyPr wrap="square"/>
-                    <a:lstStyle/>
-                    <a:p>
-                      <a:r>
-                        <a:rPr sz="1600" b="0">
+              <a:tr h="381000">
+                <a:tc>
+                  <a:txBody>
+                    <a:bodyPr wrap="square"/>
+                    <a:lstStyle/>
+                    <a:p>
+                      <a:r>
+                        <a:rPr sz="1000" b="0">
                           <a:solidFill>
                             <a:srgbClr val="191D2E"/>
                           </a:solidFill>
@@ -11009,7 +10084,7 @@
                     <a:lstStyle/>
                     <a:p>
                       <a:r>
-                        <a:rPr sz="1600" b="0">
+                        <a:rPr sz="1000" b="0">
                           <a:solidFill>
                             <a:srgbClr val="191D2E"/>
                           </a:solidFill>
@@ -11031,7 +10106,7 @@
                     <a:lstStyle/>
                     <a:p>
                       <a:r>
-                        <a:rPr sz="1600" b="0">
+                        <a:rPr sz="1000" b="0">
                           <a:solidFill>
                             <a:srgbClr val="191D2E"/>
                           </a:solidFill>
@@ -11053,7 +10128,7 @@
                     <a:lstStyle/>
                     <a:p>
                       <a:r>
-                        <a:rPr sz="1600" b="0">
+                        <a:rPr sz="1000" b="0">
                           <a:solidFill>
                             <a:srgbClr val="191D2E"/>
                           </a:solidFill>
@@ -11075,7 +10150,7 @@
                     <a:lstStyle/>
                     <a:p>
                       <a:r>
-                        <a:rPr sz="1600" b="0">
+                        <a:rPr sz="1000" b="0">
                           <a:solidFill>
                             <a:srgbClr val="191D2E"/>
                           </a:solidFill>
@@ -11092,14 +10167,14 @@
                   </a:tcPr>
                 </a:tc>
               </a:tr>
-              <a:tr h="293088">
-                <a:tc>
-                  <a:txBody>
-                    <a:bodyPr wrap="square"/>
-                    <a:lstStyle/>
-                    <a:p>
-                      <a:r>
-                        <a:rPr sz="1600" b="0">
+              <a:tr h="381000">
+                <a:tc>
+                  <a:txBody>
+                    <a:bodyPr wrap="square"/>
+                    <a:lstStyle/>
+                    <a:p>
+                      <a:r>
+                        <a:rPr sz="1000" b="0">
                           <a:solidFill>
                             <a:srgbClr val="191D2E"/>
                           </a:solidFill>
@@ -11121,7 +10196,7 @@
                     <a:lstStyle/>
                     <a:p>
                       <a:r>
-                        <a:rPr sz="1600" b="0">
+                        <a:rPr sz="1000" b="0">
                           <a:solidFill>
                             <a:srgbClr val="191D2E"/>
                           </a:solidFill>
@@ -11143,7 +10218,7 @@
                     <a:lstStyle/>
                     <a:p>
                       <a:r>
-                        <a:rPr sz="1600" b="0">
+                        <a:rPr sz="1000" b="0">
                           <a:solidFill>
                             <a:srgbClr val="191D2E"/>
                           </a:solidFill>
@@ -11165,7 +10240,7 @@
                     <a:lstStyle/>
                     <a:p>
                       <a:r>
-                        <a:rPr sz="1600" b="0">
+                        <a:rPr sz="1000" b="0">
                           <a:solidFill>
                             <a:srgbClr val="191D2E"/>
                           </a:solidFill>
@@ -11187,7 +10262,7 @@
                     <a:lstStyle/>
                     <a:p>
                       <a:r>
-                        <a:rPr sz="1600" b="0">
+                        <a:rPr sz="1000" b="0">
                           <a:solidFill>
                             <a:srgbClr val="191D2E"/>
                           </a:solidFill>
@@ -11242,7 +10317,7 @@
         </p:nvSpPr>
         <p:spPr>
           <a:xfrm>
-            <a:off x="609600" y="304800"/>
+            <a:off x="609600" y="279400"/>
             <a:ext cx="2540000" cy="279400"/>
           </a:xfrm>
           <a:prstGeom prst="rect">
@@ -11252,13 +10327,13 @@
         </p:spPr>
         <p:txBody>
           <a:bodyPr wrap="square">
-            <a:spAutoFit/>
+            <a:normAutofit/>
           </a:bodyPr>
           <a:lstStyle/>
           <a:p>
             <a:pPr algn="l"/>
             <a:r>
-              <a:rPr sz="1600" b="1" i="0">
+              <a:rPr sz="1000" b="1" i="0">
                 <a:solidFill>
                   <a:srgbClr val="191D2E"/>
                 </a:solidFill>
@@ -11277,8 +10352,8 @@
         </p:nvSpPr>
         <p:spPr>
           <a:xfrm>
-            <a:off x="0" y="304800"/>
-            <a:ext cx="11582400" cy="279400"/>
+            <a:off x="609600" y="279400"/>
+            <a:ext cx="10972800" cy="279400"/>
           </a:xfrm>
           <a:prstGeom prst="rect">
             <a:avLst/>
@@ -11287,13 +10362,13 @@
         </p:spPr>
         <p:txBody>
           <a:bodyPr wrap="square">
-            <a:spAutoFit/>
+            <a:normAutofit/>
           </a:bodyPr>
           <a:lstStyle/>
           <a:p>
             <a:pPr algn="r"/>
             <a:r>
-              <a:rPr sz="1300" b="0" i="0" spc="100">
+              <a:rPr sz="900" b="0" i="0">
                 <a:solidFill>
                   <a:srgbClr val="7B7FA0"/>
                 </a:solidFill>
@@ -11312,8 +10387,8 @@
         </p:nvSpPr>
         <p:spPr>
           <a:xfrm>
-            <a:off x="0" y="6350000"/>
-            <a:ext cx="11582400" cy="228600"/>
+            <a:off x="609600" y="6426200"/>
+            <a:ext cx="10972800" cy="228600"/>
           </a:xfrm>
           <a:prstGeom prst="rect">
             <a:avLst/>
@@ -11322,33 +10397,76 @@
         </p:spPr>
         <p:txBody>
           <a:bodyPr wrap="square">
-            <a:spAutoFit/>
+            <a:normAutofit/>
           </a:bodyPr>
           <a:lstStyle/>
           <a:p>
             <a:pPr algn="r"/>
             <a:r>
-              <a:rPr sz="1300" b="0" i="0">
+              <a:rPr sz="900" b="0" i="0">
                 <a:solidFill>
                   <a:srgbClr val="7B7FA0"/>
                 </a:solidFill>
                 <a:latin typeface="Courier New"/>
               </a:rPr>
-              <a:t>07 / 12</a:t>
+              <a:t>07</a:t>
             </a:r>
           </a:p>
         </p:txBody>
       </p:sp>
       <p:sp>
         <p:nvSpPr>
-          <p:cNvPr id="5" name="TextBox 4"/>
+          <p:cNvPr id="5" name="Rectangle 4"/>
+          <p:cNvSpPr/>
+          <p:nvPr/>
+        </p:nvSpPr>
+        <p:spPr>
+          <a:xfrm>
+            <a:off x="609600" y="825500"/>
+            <a:ext cx="10972800" cy="6350"/>
+          </a:xfrm>
+          <a:prstGeom prst="rect">
+            <a:avLst/>
+          </a:prstGeom>
+          <a:solidFill>
+            <a:srgbClr val="191D2E"/>
+          </a:solidFill>
+          <a:ln>
+            <a:noFill/>
+          </a:ln>
+        </p:spPr>
+        <p:style>
+          <a:lnRef idx="1">
+            <a:schemeClr val="accent1"/>
+          </a:lnRef>
+          <a:fillRef idx="3">
+            <a:schemeClr val="accent1"/>
+          </a:fillRef>
+          <a:effectRef idx="2">
+            <a:schemeClr val="accent1"/>
+          </a:effectRef>
+          <a:fontRef idx="minor">
+            <a:schemeClr val="lt1"/>
+          </a:fontRef>
+        </p:style>
+        <p:txBody>
+          <a:bodyPr rtlCol="0" anchor="ctr"/>
+          <a:lstStyle/>
+          <a:p>
+            <a:pPr algn="ctr"/>
+          </a:p>
+        </p:txBody>
+      </p:sp>
+      <p:sp>
+        <p:nvSpPr>
+          <p:cNvPr id="6" name="TextBox 5"/>
           <p:cNvSpPr txBox="1"/>
           <p:nvPr/>
         </p:nvSpPr>
         <p:spPr>
           <a:xfrm>
-            <a:off x="609600" y="1016000"/>
-            <a:ext cx="4953000" cy="2032000"/>
+            <a:off x="609600" y="920750"/>
+            <a:ext cx="4826000" cy="1778000"/>
           </a:xfrm>
           <a:prstGeom prst="rect">
             <a:avLst/>
@@ -11357,13 +10475,13 @@
         </p:spPr>
         <p:txBody>
           <a:bodyPr wrap="square">
-            <a:spAutoFit/>
+            <a:normAutofit/>
           </a:bodyPr>
           <a:lstStyle/>
           <a:p>
             <a:pPr algn="l"/>
             <a:r>
-              <a:rPr sz="6000" b="0" i="0">
+              <a:rPr sz="3800" b="0" i="0">
                 <a:solidFill>
                   <a:srgbClr val="191D2E"/>
                 </a:solidFill>
@@ -11376,14 +10494,14 @@
       </p:sp>
       <p:sp>
         <p:nvSpPr>
-          <p:cNvPr id="6" name="TextBox 5"/>
+          <p:cNvPr id="7" name="TextBox 6"/>
           <p:cNvSpPr txBox="1"/>
           <p:nvPr/>
         </p:nvSpPr>
         <p:spPr>
           <a:xfrm>
-            <a:off x="609600" y="3175000"/>
-            <a:ext cx="4953000" cy="1270000"/>
+            <a:off x="609600" y="2825750"/>
+            <a:ext cx="4826000" cy="1016000"/>
           </a:xfrm>
           <a:prstGeom prst="rect">
             <a:avLst/>
@@ -11392,34 +10510,34 @@
         </p:spPr>
         <p:txBody>
           <a:bodyPr wrap="square">
-            <a:spAutoFit/>
+            <a:normAutofit/>
           </a:bodyPr>
           <a:lstStyle/>
           <a:p>
             <a:pPr algn="l"/>
             <a:r>
-              <a:rPr sz="2000" b="0" i="0">
+              <a:rPr sz="1400" b="0" i="0">
                 <a:solidFill>
                   <a:srgbClr val="4D5270"/>
                 </a:solidFill>
                 <a:latin typeface="Georgia"/>
               </a:rPr>
-              <a:t>Die Ampel-Checkliste führt quantitative und qualitative Signale in einem Gesamturteil zusammen. Sie ist kein Ersatz für professionelles Urteil, sondern ein strukturierendes Werkzeug zur Reduktion kogn</a:t>
+              <a:t>Die Ampel-Checkliste führt quantitative und qualitative Signale in einem Gesamturteil zusammen. Sie ist kein Ersatz für professionelles Urteil, sondern ein strukturierendes Werkzeu</a:t>
             </a:r>
           </a:p>
         </p:txBody>
       </p:sp>
       <p:graphicFrame>
         <p:nvGraphicFramePr>
-          <p:cNvPr id="7" name="Table 6"/>
+          <p:cNvPr id="8" name="Table 7"/>
           <p:cNvGraphicFramePr>
             <a:graphicFrameLocks noGrp="1"/>
           </p:cNvGraphicFramePr>
           <p:nvPr/>
         </p:nvGraphicFramePr>
         <p:xfrm>
-          <a:off x="6096000" y="1016000"/>
-          <a:ext cx="6502400" cy="3810000"/>
+          <a:off x="5715000" y="920750"/>
+          <a:ext cx="5867400" cy="6096000"/>
         </p:xfrm>
         <a:graphic>
           <a:graphicData uri="http://schemas.openxmlformats.org/drawingml/2006/table">
@@ -11428,21 +10546,21 @@
                 <a:tableStyleId>{5C22544A-7EE6-4342-B048-85BDC9FD1C3A}</a:tableStyleId>
               </a:tblPr>
               <a:tblGrid>
-                <a:gridCol w="1083733"/>
-                <a:gridCol w="1083733"/>
-                <a:gridCol w="1083733"/>
-                <a:gridCol w="1083733"/>
-                <a:gridCol w="1083733"/>
-                <a:gridCol w="1083735"/>
+                <a:gridCol w="977900"/>
+                <a:gridCol w="977900"/>
+                <a:gridCol w="977900"/>
+                <a:gridCol w="977900"/>
+                <a:gridCol w="977900"/>
+                <a:gridCol w="977900"/>
               </a:tblGrid>
-              <a:tr h="238125">
-                <a:tc>
-                  <a:txBody>
-                    <a:bodyPr wrap="square"/>
-                    <a:lstStyle/>
-                    <a:p>
-                      <a:r>
-                        <a:rPr sz="1400" b="1">
+              <a:tr h="381000">
+                <a:tc>
+                  <a:txBody>
+                    <a:bodyPr wrap="square"/>
+                    <a:lstStyle/>
+                    <a:p>
+                      <a:r>
+                        <a:rPr sz="1000" b="1">
                           <a:solidFill>
                             <a:srgbClr val="F8F8FA"/>
                           </a:solidFill>
@@ -11464,7 +10582,7 @@
                     <a:lstStyle/>
                     <a:p>
                       <a:r>
-                        <a:rPr sz="1400" b="1">
+                        <a:rPr sz="1000" b="1">
                           <a:solidFill>
                             <a:srgbClr val="F8F8FA"/>
                           </a:solidFill>
@@ -11486,7 +10604,7 @@
                     <a:lstStyle/>
                     <a:p>
                       <a:r>
-                        <a:rPr sz="1400" b="1">
+                        <a:rPr sz="1000" b="1">
                           <a:solidFill>
                             <a:srgbClr val="F8F8FA"/>
                           </a:solidFill>
@@ -11508,7 +10626,7 @@
                     <a:lstStyle/>
                     <a:p>
                       <a:r>
-                        <a:rPr sz="1400" b="1">
+                        <a:rPr sz="1000" b="1">
                           <a:solidFill>
                             <a:srgbClr val="F8F8FA"/>
                           </a:solidFill>
@@ -11530,7 +10648,7 @@
                     <a:lstStyle/>
                     <a:p>
                       <a:r>
-                        <a:rPr sz="1400" b="1">
+                        <a:rPr sz="1000" b="1">
                           <a:solidFill>
                             <a:srgbClr val="F8F8FA"/>
                           </a:solidFill>
@@ -11552,7 +10670,7 @@
                     <a:lstStyle/>
                     <a:p>
                       <a:r>
-                        <a:rPr sz="1400" b="1">
+                        <a:rPr sz="1000" b="1">
                           <a:solidFill>
                             <a:srgbClr val="F8F8FA"/>
                           </a:solidFill>
@@ -11569,14 +10687,14 @@
                   </a:tcPr>
                 </a:tc>
               </a:tr>
-              <a:tr h="238125">
-                <a:tc>
-                  <a:txBody>
-                    <a:bodyPr wrap="square"/>
-                    <a:lstStyle/>
-                    <a:p>
-                      <a:r>
-                        <a:rPr sz="1600" b="0">
+              <a:tr h="381000">
+                <a:tc>
+                  <a:txBody>
+                    <a:bodyPr wrap="square"/>
+                    <a:lstStyle/>
+                    <a:p>
+                      <a:r>
+                        <a:rPr sz="1000" b="0">
                           <a:solidFill>
                             <a:srgbClr val="191D2E"/>
                           </a:solidFill>
@@ -11598,7 +10716,7 @@
                     <a:lstStyle/>
                     <a:p>
                       <a:r>
-                        <a:rPr sz="1600" b="0">
+                        <a:rPr sz="1000" b="0">
                           <a:solidFill>
                             <a:srgbClr val="191D2E"/>
                           </a:solidFill>
@@ -11620,7 +10738,7 @@
                     <a:lstStyle/>
                     <a:p>
                       <a:r>
-                        <a:rPr sz="1600" b="0">
+                        <a:rPr sz="1000" b="0">
                           <a:solidFill>
                             <a:srgbClr val="191D2E"/>
                           </a:solidFill>
@@ -11642,7 +10760,7 @@
                     <a:lstStyle/>
                     <a:p>
                       <a:r>
-                        <a:rPr sz="1600" b="0">
+                        <a:rPr sz="1000" b="0">
                           <a:solidFill>
                             <a:srgbClr val="191D2E"/>
                           </a:solidFill>
@@ -11664,7 +10782,7 @@
                     <a:lstStyle/>
                     <a:p>
                       <a:r>
-                        <a:rPr sz="1600" b="0">
+                        <a:rPr sz="1000" b="0">
                           <a:solidFill>
                             <a:srgbClr val="191D2E"/>
                           </a:solidFill>
@@ -11686,7 +10804,7 @@
                     <a:lstStyle/>
                     <a:p>
                       <a:r>
-                        <a:rPr sz="1600" b="0">
+                        <a:rPr sz="1000" b="0">
                           <a:solidFill>
                             <a:srgbClr val="191D2E"/>
                           </a:solidFill>
@@ -11703,14 +10821,14 @@
                   </a:tcPr>
                 </a:tc>
               </a:tr>
-              <a:tr h="238125">
-                <a:tc>
-                  <a:txBody>
-                    <a:bodyPr wrap="square"/>
-                    <a:lstStyle/>
-                    <a:p>
-                      <a:r>
-                        <a:rPr sz="1600" b="0">
+              <a:tr h="381000">
+                <a:tc>
+                  <a:txBody>
+                    <a:bodyPr wrap="square"/>
+                    <a:lstStyle/>
+                    <a:p>
+                      <a:r>
+                        <a:rPr sz="1000" b="0">
                           <a:solidFill>
                             <a:srgbClr val="191D2E"/>
                           </a:solidFill>
@@ -11732,7 +10850,7 @@
                     <a:lstStyle/>
                     <a:p>
                       <a:r>
-                        <a:rPr sz="1600" b="0">
+                        <a:rPr sz="1000" b="0">
                           <a:solidFill>
                             <a:srgbClr val="191D2E"/>
                           </a:solidFill>
@@ -11754,7 +10872,7 @@
                     <a:lstStyle/>
                     <a:p>
                       <a:r>
-                        <a:rPr sz="1600" b="0">
+                        <a:rPr sz="1000" b="0">
                           <a:solidFill>
                             <a:srgbClr val="191D2E"/>
                           </a:solidFill>
@@ -11776,7 +10894,7 @@
                     <a:lstStyle/>
                     <a:p>
                       <a:r>
-                        <a:rPr sz="1600" b="0">
+                        <a:rPr sz="1000" b="0">
                           <a:solidFill>
                             <a:srgbClr val="191D2E"/>
                           </a:solidFill>
@@ -11798,7 +10916,7 @@
                     <a:lstStyle/>
                     <a:p>
                       <a:r>
-                        <a:rPr sz="1600" b="0">
+                        <a:rPr sz="1000" b="0">
                           <a:solidFill>
                             <a:srgbClr val="191D2E"/>
                           </a:solidFill>
@@ -11820,7 +10938,7 @@
                     <a:lstStyle/>
                     <a:p>
                       <a:r>
-                        <a:rPr sz="1600" b="0">
+                        <a:rPr sz="1000" b="0">
                           <a:solidFill>
                             <a:srgbClr val="191D2E"/>
                           </a:solidFill>
@@ -11837,14 +10955,14 @@
                   </a:tcPr>
                 </a:tc>
               </a:tr>
-              <a:tr h="238125">
-                <a:tc>
-                  <a:txBody>
-                    <a:bodyPr wrap="square"/>
-                    <a:lstStyle/>
-                    <a:p>
-                      <a:r>
-                        <a:rPr sz="1600" b="0">
+              <a:tr h="381000">
+                <a:tc>
+                  <a:txBody>
+                    <a:bodyPr wrap="square"/>
+                    <a:lstStyle/>
+                    <a:p>
+                      <a:r>
+                        <a:rPr sz="1000" b="0">
                           <a:solidFill>
                             <a:srgbClr val="191D2E"/>
                           </a:solidFill>
@@ -11866,7 +10984,7 @@
                     <a:lstStyle/>
                     <a:p>
                       <a:r>
-                        <a:rPr sz="1600" b="0">
+                        <a:rPr sz="1000" b="0">
                           <a:solidFill>
                             <a:srgbClr val="191D2E"/>
                           </a:solidFill>
@@ -11888,7 +11006,7 @@
                     <a:lstStyle/>
                     <a:p>
                       <a:r>
-                        <a:rPr sz="1600" b="0">
+                        <a:rPr sz="1000" b="0">
                           <a:solidFill>
                             <a:srgbClr val="191D2E"/>
                           </a:solidFill>
@@ -11910,7 +11028,7 @@
                     <a:lstStyle/>
                     <a:p>
                       <a:r>
-                        <a:rPr sz="1600" b="0">
+                        <a:rPr sz="1000" b="0">
                           <a:solidFill>
                             <a:srgbClr val="191D2E"/>
                           </a:solidFill>
@@ -11932,7 +11050,7 @@
                     <a:lstStyle/>
                     <a:p>
                       <a:r>
-                        <a:rPr sz="1600" b="0">
+                        <a:rPr sz="1000" b="0">
                           <a:solidFill>
                             <a:srgbClr val="191D2E"/>
                           </a:solidFill>
@@ -11954,7 +11072,7 @@
                     <a:lstStyle/>
                     <a:p>
                       <a:r>
-                        <a:rPr sz="1600" b="0">
+                        <a:rPr sz="1000" b="0">
                           <a:solidFill>
                             <a:srgbClr val="191D2E"/>
                           </a:solidFill>
@@ -11971,14 +11089,14 @@
                   </a:tcPr>
                 </a:tc>
               </a:tr>
-              <a:tr h="238125">
-                <a:tc>
-                  <a:txBody>
-                    <a:bodyPr wrap="square"/>
-                    <a:lstStyle/>
-                    <a:p>
-                      <a:r>
-                        <a:rPr sz="1600" b="0">
+              <a:tr h="381000">
+                <a:tc>
+                  <a:txBody>
+                    <a:bodyPr wrap="square"/>
+                    <a:lstStyle/>
+                    <a:p>
+                      <a:r>
+                        <a:rPr sz="1000" b="0">
                           <a:solidFill>
                             <a:srgbClr val="191D2E"/>
                           </a:solidFill>
@@ -12000,7 +11118,7 @@
                     <a:lstStyle/>
                     <a:p>
                       <a:r>
-                        <a:rPr sz="1600" b="0">
+                        <a:rPr sz="1000" b="0">
                           <a:solidFill>
                             <a:srgbClr val="191D2E"/>
                           </a:solidFill>
@@ -12022,7 +11140,7 @@
                     <a:lstStyle/>
                     <a:p>
                       <a:r>
-                        <a:rPr sz="1600" b="0">
+                        <a:rPr sz="1000" b="0">
                           <a:solidFill>
                             <a:srgbClr val="191D2E"/>
                           </a:solidFill>
@@ -12044,7 +11162,7 @@
                     <a:lstStyle/>
                     <a:p>
                       <a:r>
-                        <a:rPr sz="1600" b="0">
+                        <a:rPr sz="1000" b="0">
                           <a:solidFill>
                             <a:srgbClr val="191D2E"/>
                           </a:solidFill>
@@ -12066,7 +11184,7 @@
                     <a:lstStyle/>
                     <a:p>
                       <a:r>
-                        <a:rPr sz="1600" b="0">
+                        <a:rPr sz="1000" b="0">
                           <a:solidFill>
                             <a:srgbClr val="191D2E"/>
                           </a:solidFill>
@@ -12088,7 +11206,7 @@
                     <a:lstStyle/>
                     <a:p>
                       <a:r>
-                        <a:rPr sz="1600" b="0">
+                        <a:rPr sz="1000" b="0">
                           <a:solidFill>
                             <a:srgbClr val="191D2E"/>
                           </a:solidFill>
@@ -12105,14 +11223,14 @@
                   </a:tcPr>
                 </a:tc>
               </a:tr>
-              <a:tr h="238125">
-                <a:tc>
-                  <a:txBody>
-                    <a:bodyPr wrap="square"/>
-                    <a:lstStyle/>
-                    <a:p>
-                      <a:r>
-                        <a:rPr sz="1600" b="0">
+              <a:tr h="381000">
+                <a:tc>
+                  <a:txBody>
+                    <a:bodyPr wrap="square"/>
+                    <a:lstStyle/>
+                    <a:p>
+                      <a:r>
+                        <a:rPr sz="1000" b="0">
                           <a:solidFill>
                             <a:srgbClr val="191D2E"/>
                           </a:solidFill>
@@ -12134,7 +11252,7 @@
                     <a:lstStyle/>
                     <a:p>
                       <a:r>
-                        <a:rPr sz="1600" b="0">
+                        <a:rPr sz="1000" b="0">
                           <a:solidFill>
                             <a:srgbClr val="191D2E"/>
                           </a:solidFill>
@@ -12156,7 +11274,7 @@
                     <a:lstStyle/>
                     <a:p>
                       <a:r>
-                        <a:rPr sz="1600" b="0">
+                        <a:rPr sz="1000" b="0">
                           <a:solidFill>
                             <a:srgbClr val="191D2E"/>
                           </a:solidFill>
@@ -12178,7 +11296,7 @@
                     <a:lstStyle/>
                     <a:p>
                       <a:r>
-                        <a:rPr sz="1600" b="0">
+                        <a:rPr sz="1000" b="0">
                           <a:solidFill>
                             <a:srgbClr val="191D2E"/>
                           </a:solidFill>
@@ -12200,7 +11318,7 @@
                     <a:lstStyle/>
                     <a:p>
                       <a:r>
-                        <a:rPr sz="1600" b="0">
+                        <a:rPr sz="1000" b="0">
                           <a:solidFill>
                             <a:srgbClr val="191D2E"/>
                           </a:solidFill>
@@ -12222,7 +11340,7 @@
                     <a:lstStyle/>
                     <a:p>
                       <a:r>
-                        <a:rPr sz="1600" b="0">
+                        <a:rPr sz="1000" b="0">
                           <a:solidFill>
                             <a:srgbClr val="191D2E"/>
                           </a:solidFill>
@@ -12239,14 +11357,14 @@
                   </a:tcPr>
                 </a:tc>
               </a:tr>
-              <a:tr h="238125">
-                <a:tc>
-                  <a:txBody>
-                    <a:bodyPr wrap="square"/>
-                    <a:lstStyle/>
-                    <a:p>
-                      <a:r>
-                        <a:rPr sz="1600" b="0">
+              <a:tr h="381000">
+                <a:tc>
+                  <a:txBody>
+                    <a:bodyPr wrap="square"/>
+                    <a:lstStyle/>
+                    <a:p>
+                      <a:r>
+                        <a:rPr sz="1000" b="0">
                           <a:solidFill>
                             <a:srgbClr val="191D2E"/>
                           </a:solidFill>
@@ -12268,7 +11386,7 @@
                     <a:lstStyle/>
                     <a:p>
                       <a:r>
-                        <a:rPr sz="1600" b="0">
+                        <a:rPr sz="1000" b="0">
                           <a:solidFill>
                             <a:srgbClr val="191D2E"/>
                           </a:solidFill>
@@ -12290,7 +11408,7 @@
                     <a:lstStyle/>
                     <a:p>
                       <a:r>
-                        <a:rPr sz="1600" b="0">
+                        <a:rPr sz="1000" b="0">
                           <a:solidFill>
                             <a:srgbClr val="191D2E"/>
                           </a:solidFill>
@@ -12312,7 +11430,7 @@
                     <a:lstStyle/>
                     <a:p>
                       <a:r>
-                        <a:rPr sz="1600" b="0">
+                        <a:rPr sz="1000" b="0">
                           <a:solidFill>
                             <a:srgbClr val="191D2E"/>
                           </a:solidFill>
@@ -12334,7 +11452,7 @@
                     <a:lstStyle/>
                     <a:p>
                       <a:r>
-                        <a:rPr sz="1600" b="0">
+                        <a:rPr sz="1000" b="0">
                           <a:solidFill>
                             <a:srgbClr val="191D2E"/>
                           </a:solidFill>
@@ -12356,7 +11474,7 @@
                     <a:lstStyle/>
                     <a:p>
                       <a:r>
-                        <a:rPr sz="1600" b="0">
+                        <a:rPr sz="1000" b="0">
                           <a:solidFill>
                             <a:srgbClr val="191D2E"/>
                           </a:solidFill>
@@ -12373,14 +11491,14 @@
                   </a:tcPr>
                 </a:tc>
               </a:tr>
-              <a:tr h="238125">
-                <a:tc>
-                  <a:txBody>
-                    <a:bodyPr wrap="square"/>
-                    <a:lstStyle/>
-                    <a:p>
-                      <a:r>
-                        <a:rPr sz="1600" b="0">
+              <a:tr h="381000">
+                <a:tc>
+                  <a:txBody>
+                    <a:bodyPr wrap="square"/>
+                    <a:lstStyle/>
+                    <a:p>
+                      <a:r>
+                        <a:rPr sz="1000" b="0">
                           <a:solidFill>
                             <a:srgbClr val="191D2E"/>
                           </a:solidFill>
@@ -12402,7 +11520,7 @@
                     <a:lstStyle/>
                     <a:p>
                       <a:r>
-                        <a:rPr sz="1600" b="0">
+                        <a:rPr sz="1000" b="0">
                           <a:solidFill>
                             <a:srgbClr val="191D2E"/>
                           </a:solidFill>
@@ -12424,7 +11542,7 @@
                     <a:lstStyle/>
                     <a:p>
                       <a:r>
-                        <a:rPr sz="1600" b="0">
+                        <a:rPr sz="1000" b="0">
                           <a:solidFill>
                             <a:srgbClr val="191D2E"/>
                           </a:solidFill>
@@ -12446,7 +11564,7 @@
                     <a:lstStyle/>
                     <a:p>
                       <a:r>
-                        <a:rPr sz="1600" b="0">
+                        <a:rPr sz="1000" b="0">
                           <a:solidFill>
                             <a:srgbClr val="191D2E"/>
                           </a:solidFill>
@@ -12468,7 +11586,7 @@
                     <a:lstStyle/>
                     <a:p>
                       <a:r>
-                        <a:rPr sz="1600" b="0">
+                        <a:rPr sz="1000" b="0">
                           <a:solidFill>
                             <a:srgbClr val="191D2E"/>
                           </a:solidFill>
@@ -12490,7 +11608,7 @@
                     <a:lstStyle/>
                     <a:p>
                       <a:r>
-                        <a:rPr sz="1600" b="0">
+                        <a:rPr sz="1000" b="0">
                           <a:solidFill>
                             <a:srgbClr val="191D2E"/>
                           </a:solidFill>
@@ -12507,14 +11625,14 @@
                   </a:tcPr>
                 </a:tc>
               </a:tr>
-              <a:tr h="238125">
-                <a:tc>
-                  <a:txBody>
-                    <a:bodyPr wrap="square"/>
-                    <a:lstStyle/>
-                    <a:p>
-                      <a:r>
-                        <a:rPr sz="1600" b="0">
+              <a:tr h="381000">
+                <a:tc>
+                  <a:txBody>
+                    <a:bodyPr wrap="square"/>
+                    <a:lstStyle/>
+                    <a:p>
+                      <a:r>
+                        <a:rPr sz="1000" b="0">
                           <a:solidFill>
                             <a:srgbClr val="191D2E"/>
                           </a:solidFill>
@@ -12536,7 +11654,7 @@
                     <a:lstStyle/>
                     <a:p>
                       <a:r>
-                        <a:rPr sz="1600" b="0">
+                        <a:rPr sz="1000" b="0">
                           <a:solidFill>
                             <a:srgbClr val="191D2E"/>
                           </a:solidFill>
@@ -12558,7 +11676,7 @@
                     <a:lstStyle/>
                     <a:p>
                       <a:r>
-                        <a:rPr sz="1600" b="0">
+                        <a:rPr sz="1000" b="0">
                           <a:solidFill>
                             <a:srgbClr val="191D2E"/>
                           </a:solidFill>
@@ -12580,7 +11698,7 @@
                     <a:lstStyle/>
                     <a:p>
                       <a:r>
-                        <a:rPr sz="1600" b="0">
+                        <a:rPr sz="1000" b="0">
                           <a:solidFill>
                             <a:srgbClr val="191D2E"/>
                           </a:solidFill>
@@ -12602,7 +11720,7 @@
                     <a:lstStyle/>
                     <a:p>
                       <a:r>
-                        <a:rPr sz="1600" b="0">
+                        <a:rPr sz="1000" b="0">
                           <a:solidFill>
                             <a:srgbClr val="191D2E"/>
                           </a:solidFill>
@@ -12624,7 +11742,7 @@
                     <a:lstStyle/>
                     <a:p>
                       <a:r>
-                        <a:rPr sz="1600" b="0">
+                        <a:rPr sz="1000" b="0">
                           <a:solidFill>
                             <a:srgbClr val="191D2E"/>
                           </a:solidFill>
@@ -12641,14 +11759,14 @@
                   </a:tcPr>
                 </a:tc>
               </a:tr>
-              <a:tr h="238125">
-                <a:tc>
-                  <a:txBody>
-                    <a:bodyPr wrap="square"/>
-                    <a:lstStyle/>
-                    <a:p>
-                      <a:r>
-                        <a:rPr sz="1600" b="0">
+              <a:tr h="381000">
+                <a:tc>
+                  <a:txBody>
+                    <a:bodyPr wrap="square"/>
+                    <a:lstStyle/>
+                    <a:p>
+                      <a:r>
+                        <a:rPr sz="1000" b="0">
                           <a:solidFill>
                             <a:srgbClr val="191D2E"/>
                           </a:solidFill>
@@ -12670,7 +11788,7 @@
                     <a:lstStyle/>
                     <a:p>
                       <a:r>
-                        <a:rPr sz="1600" b="0">
+                        <a:rPr sz="1000" b="0">
                           <a:solidFill>
                             <a:srgbClr val="191D2E"/>
                           </a:solidFill>
@@ -12692,7 +11810,7 @@
                     <a:lstStyle/>
                     <a:p>
                       <a:r>
-                        <a:rPr sz="1600" b="0">
+                        <a:rPr sz="1000" b="0">
                           <a:solidFill>
                             <a:srgbClr val="191D2E"/>
                           </a:solidFill>
@@ -12714,7 +11832,7 @@
                     <a:lstStyle/>
                     <a:p>
                       <a:r>
-                        <a:rPr sz="1600" b="0">
+                        <a:rPr sz="1000" b="0">
                           <a:solidFill>
                             <a:srgbClr val="191D2E"/>
                           </a:solidFill>
@@ -12736,7 +11854,7 @@
                     <a:lstStyle/>
                     <a:p>
                       <a:r>
-                        <a:rPr sz="1600" b="0">
+                        <a:rPr sz="1000" b="0">
                           <a:solidFill>
                             <a:srgbClr val="191D2E"/>
                           </a:solidFill>
@@ -12758,7 +11876,7 @@
                     <a:lstStyle/>
                     <a:p>
                       <a:r>
-                        <a:rPr sz="1600" b="0">
+                        <a:rPr sz="1000" b="0">
                           <a:solidFill>
                             <a:srgbClr val="191D2E"/>
                           </a:solidFill>
@@ -12775,14 +11893,14 @@
                   </a:tcPr>
                 </a:tc>
               </a:tr>
-              <a:tr h="238125">
-                <a:tc>
-                  <a:txBody>
-                    <a:bodyPr wrap="square"/>
-                    <a:lstStyle/>
-                    <a:p>
-                      <a:r>
-                        <a:rPr sz="1600" b="0">
+              <a:tr h="381000">
+                <a:tc>
+                  <a:txBody>
+                    <a:bodyPr wrap="square"/>
+                    <a:lstStyle/>
+                    <a:p>
+                      <a:r>
+                        <a:rPr sz="1000" b="0">
                           <a:solidFill>
                             <a:srgbClr val="191D2E"/>
                           </a:solidFill>
@@ -12804,7 +11922,7 @@
                     <a:lstStyle/>
                     <a:p>
                       <a:r>
-                        <a:rPr sz="1600" b="0">
+                        <a:rPr sz="1000" b="0">
                           <a:solidFill>
                             <a:srgbClr val="191D2E"/>
                           </a:solidFill>
@@ -12826,7 +11944,7 @@
                     <a:lstStyle/>
                     <a:p>
                       <a:r>
-                        <a:rPr sz="1600" b="0">
+                        <a:rPr sz="1000" b="0">
                           <a:solidFill>
                             <a:srgbClr val="191D2E"/>
                           </a:solidFill>
@@ -12848,7 +11966,7 @@
                     <a:lstStyle/>
                     <a:p>
                       <a:r>
-                        <a:rPr sz="1600" b="0">
+                        <a:rPr sz="1000" b="0">
                           <a:solidFill>
                             <a:srgbClr val="191D2E"/>
                           </a:solidFill>
@@ -12870,7 +11988,7 @@
                     <a:lstStyle/>
                     <a:p>
                       <a:r>
-                        <a:rPr sz="1600" b="0">
+                        <a:rPr sz="1000" b="0">
                           <a:solidFill>
                             <a:srgbClr val="191D2E"/>
                           </a:solidFill>
@@ -12892,7 +12010,7 @@
                     <a:lstStyle/>
                     <a:p>
                       <a:r>
-                        <a:rPr sz="1600" b="0">
+                        <a:rPr sz="1000" b="0">
                           <a:solidFill>
                             <a:srgbClr val="191D2E"/>
                           </a:solidFill>
@@ -12909,14 +12027,14 @@
                   </a:tcPr>
                 </a:tc>
               </a:tr>
-              <a:tr h="238125">
-                <a:tc>
-                  <a:txBody>
-                    <a:bodyPr wrap="square"/>
-                    <a:lstStyle/>
-                    <a:p>
-                      <a:r>
-                        <a:rPr sz="1600" b="0">
+              <a:tr h="381000">
+                <a:tc>
+                  <a:txBody>
+                    <a:bodyPr wrap="square"/>
+                    <a:lstStyle/>
+                    <a:p>
+                      <a:r>
+                        <a:rPr sz="1000" b="0">
                           <a:solidFill>
                             <a:srgbClr val="191D2E"/>
                           </a:solidFill>
@@ -12938,7 +12056,7 @@
                     <a:lstStyle/>
                     <a:p>
                       <a:r>
-                        <a:rPr sz="1600" b="0">
+                        <a:rPr sz="1000" b="0">
                           <a:solidFill>
                             <a:srgbClr val="191D2E"/>
                           </a:solidFill>
@@ -12960,7 +12078,7 @@
                     <a:lstStyle/>
                     <a:p>
                       <a:r>
-                        <a:rPr sz="1600" b="0">
+                        <a:rPr sz="1000" b="0">
                           <a:solidFill>
                             <a:srgbClr val="191D2E"/>
                           </a:solidFill>
@@ -12982,7 +12100,7 @@
                     <a:lstStyle/>
                     <a:p>
                       <a:r>
-                        <a:rPr sz="1600" b="0">
+                        <a:rPr sz="1000" b="0">
                           <a:solidFill>
                             <a:srgbClr val="191D2E"/>
                           </a:solidFill>
@@ -13004,7 +12122,7 @@
                     <a:lstStyle/>
                     <a:p>
                       <a:r>
-                        <a:rPr sz="1600" b="0">
+                        <a:rPr sz="1000" b="0">
                           <a:solidFill>
                             <a:srgbClr val="191D2E"/>
                           </a:solidFill>
@@ -13026,7 +12144,7 @@
                     <a:lstStyle/>
                     <a:p>
                       <a:r>
-                        <a:rPr sz="1600" b="0">
+                        <a:rPr sz="1000" b="0">
                           <a:solidFill>
                             <a:srgbClr val="191D2E"/>
                           </a:solidFill>
@@ -13043,14 +12161,14 @@
                   </a:tcPr>
                 </a:tc>
               </a:tr>
-              <a:tr h="238125">
-                <a:tc>
-                  <a:txBody>
-                    <a:bodyPr wrap="square"/>
-                    <a:lstStyle/>
-                    <a:p>
-                      <a:r>
-                        <a:rPr sz="1600" b="0">
+              <a:tr h="381000">
+                <a:tc>
+                  <a:txBody>
+                    <a:bodyPr wrap="square"/>
+                    <a:lstStyle/>
+                    <a:p>
+                      <a:r>
+                        <a:rPr sz="1000" b="0">
                           <a:solidFill>
                             <a:srgbClr val="191D2E"/>
                           </a:solidFill>
@@ -13072,7 +12190,7 @@
                     <a:lstStyle/>
                     <a:p>
                       <a:r>
-                        <a:rPr sz="1600" b="0">
+                        <a:rPr sz="1000" b="0">
                           <a:solidFill>
                             <a:srgbClr val="191D2E"/>
                           </a:solidFill>
@@ -13094,7 +12212,7 @@
                     <a:lstStyle/>
                     <a:p>
                       <a:r>
-                        <a:rPr sz="1600" b="0">
+                        <a:rPr sz="1000" b="0">
                           <a:solidFill>
                             <a:srgbClr val="191D2E"/>
                           </a:solidFill>
@@ -13116,7 +12234,7 @@
                     <a:lstStyle/>
                     <a:p>
                       <a:r>
-                        <a:rPr sz="1600" b="0">
+                        <a:rPr sz="1000" b="0">
                           <a:solidFill>
                             <a:srgbClr val="191D2E"/>
                           </a:solidFill>
@@ -13138,7 +12256,7 @@
                     <a:lstStyle/>
                     <a:p>
                       <a:r>
-                        <a:rPr sz="1600" b="0">
+                        <a:rPr sz="1000" b="0">
                           <a:solidFill>
                             <a:srgbClr val="191D2E"/>
                           </a:solidFill>
@@ -13160,7 +12278,7 @@
                     <a:lstStyle/>
                     <a:p>
                       <a:r>
-                        <a:rPr sz="1600" b="0">
+                        <a:rPr sz="1000" b="0">
                           <a:solidFill>
                             <a:srgbClr val="191D2E"/>
                           </a:solidFill>
@@ -13177,14 +12295,14 @@
                   </a:tcPr>
                 </a:tc>
               </a:tr>
-              <a:tr h="238125">
-                <a:tc>
-                  <a:txBody>
-                    <a:bodyPr wrap="square"/>
-                    <a:lstStyle/>
-                    <a:p>
-                      <a:r>
-                        <a:rPr sz="1600" b="0">
+              <a:tr h="381000">
+                <a:tc>
+                  <a:txBody>
+                    <a:bodyPr wrap="square"/>
+                    <a:lstStyle/>
+                    <a:p>
+                      <a:r>
+                        <a:rPr sz="1000" b="0">
                           <a:solidFill>
                             <a:srgbClr val="191D2E"/>
                           </a:solidFill>
@@ -13206,7 +12324,7 @@
                     <a:lstStyle/>
                     <a:p>
                       <a:r>
-                        <a:rPr sz="1600" b="0">
+                        <a:rPr sz="1000" b="0">
                           <a:solidFill>
                             <a:srgbClr val="191D2E"/>
                           </a:solidFill>
@@ -13228,7 +12346,7 @@
                     <a:lstStyle/>
                     <a:p>
                       <a:r>
-                        <a:rPr sz="1600" b="0">
+                        <a:rPr sz="1000" b="0">
                           <a:solidFill>
                             <a:srgbClr val="191D2E"/>
                           </a:solidFill>
@@ -13250,7 +12368,7 @@
                     <a:lstStyle/>
                     <a:p>
                       <a:r>
-                        <a:rPr sz="1600" b="0">
+                        <a:rPr sz="1000" b="0">
                           <a:solidFill>
                             <a:srgbClr val="191D2E"/>
                           </a:solidFill>
@@ -13272,7 +12390,7 @@
                     <a:lstStyle/>
                     <a:p>
                       <a:r>
-                        <a:rPr sz="1600" b="0">
+                        <a:rPr sz="1000" b="0">
                           <a:solidFill>
                             <a:srgbClr val="191D2E"/>
                           </a:solidFill>
@@ -13294,7 +12412,7 @@
                     <a:lstStyle/>
                     <a:p>
                       <a:r>
-                        <a:rPr sz="1600" b="0">
+                        <a:rPr sz="1000" b="0">
                           <a:solidFill>
                             <a:srgbClr val="191D2E"/>
                           </a:solidFill>
@@ -13311,14 +12429,14 @@
                   </a:tcPr>
                 </a:tc>
               </a:tr>
-              <a:tr h="238125">
-                <a:tc>
-                  <a:txBody>
-                    <a:bodyPr wrap="square"/>
-                    <a:lstStyle/>
-                    <a:p>
-                      <a:r>
-                        <a:rPr sz="1600" b="0">
+              <a:tr h="381000">
+                <a:tc>
+                  <a:txBody>
+                    <a:bodyPr wrap="square"/>
+                    <a:lstStyle/>
+                    <a:p>
+                      <a:r>
+                        <a:rPr sz="1000" b="0">
                           <a:solidFill>
                             <a:srgbClr val="191D2E"/>
                           </a:solidFill>
@@ -13340,7 +12458,7 @@
                     <a:lstStyle/>
                     <a:p>
                       <a:r>
-                        <a:rPr sz="1600" b="0">
+                        <a:rPr sz="1000" b="0">
                           <a:solidFill>
                             <a:srgbClr val="191D2E"/>
                           </a:solidFill>
@@ -13362,7 +12480,7 @@
                     <a:lstStyle/>
                     <a:p>
                       <a:r>
-                        <a:rPr sz="1600" b="0">
+                        <a:rPr sz="1000" b="0">
                           <a:solidFill>
                             <a:srgbClr val="191D2E"/>
                           </a:solidFill>
@@ -13384,7 +12502,7 @@
                     <a:lstStyle/>
                     <a:p>
                       <a:r>
-                        <a:rPr sz="1600" b="0">
+                        <a:rPr sz="1000" b="0">
                           <a:solidFill>
                             <a:srgbClr val="191D2E"/>
                           </a:solidFill>
@@ -13406,7 +12524,7 @@
                     <a:lstStyle/>
                     <a:p>
                       <a:r>
-                        <a:rPr sz="1600" b="0">
+                        <a:rPr sz="1000" b="0">
                           <a:solidFill>
                             <a:srgbClr val="191D2E"/>
                           </a:solidFill>
@@ -13428,7 +12546,7 @@
                     <a:lstStyle/>
                     <a:p>
                       <a:r>
-                        <a:rPr sz="1600" b="0">
+                        <a:rPr sz="1000" b="0">
                           <a:solidFill>
                             <a:srgbClr val="191D2E"/>
                           </a:solidFill>
@@ -13445,14 +12563,14 @@
                   </a:tcPr>
                 </a:tc>
               </a:tr>
-              <a:tr h="238125">
-                <a:tc>
-                  <a:txBody>
-                    <a:bodyPr wrap="square"/>
-                    <a:lstStyle/>
-                    <a:p>
-                      <a:r>
-                        <a:rPr sz="1600" b="0">
+              <a:tr h="381000">
+                <a:tc>
+                  <a:txBody>
+                    <a:bodyPr wrap="square"/>
+                    <a:lstStyle/>
+                    <a:p>
+                      <a:r>
+                        <a:rPr sz="1000" b="0">
                           <a:solidFill>
                             <a:srgbClr val="191D2E"/>
                           </a:solidFill>
@@ -13474,7 +12592,7 @@
                     <a:lstStyle/>
                     <a:p>
                       <a:r>
-                        <a:rPr sz="1600" b="0">
+                        <a:rPr sz="1000" b="0">
                           <a:solidFill>
                             <a:srgbClr val="191D2E"/>
                           </a:solidFill>
@@ -13496,7 +12614,7 @@
                     <a:lstStyle/>
                     <a:p>
                       <a:r>
-                        <a:rPr sz="1600" b="0">
+                        <a:rPr sz="1000" b="0">
                           <a:solidFill>
                             <a:srgbClr val="191D2E"/>
                           </a:solidFill>
@@ -13518,7 +12636,7 @@
                     <a:lstStyle/>
                     <a:p>
                       <a:r>
-                        <a:rPr sz="1600" b="0">
+                        <a:rPr sz="1000" b="0">
                           <a:solidFill>
                             <a:srgbClr val="191D2E"/>
                           </a:solidFill>
@@ -13540,7 +12658,7 @@
                     <a:lstStyle/>
                     <a:p>
                       <a:r>
-                        <a:rPr sz="1600" b="0">
+                        <a:rPr sz="1000" b="0">
                           <a:solidFill>
                             <a:srgbClr val="191D2E"/>
                           </a:solidFill>
@@ -13562,7 +12680,7 @@
                     <a:lstStyle/>
                     <a:p>
                       <a:r>
-                        <a:rPr sz="1600" b="0">
+                        <a:rPr sz="1000" b="0">
                           <a:solidFill>
                             <a:srgbClr val="191D2E"/>
                           </a:solidFill>
@@ -13617,7 +12735,7 @@
         </p:nvSpPr>
         <p:spPr>
           <a:xfrm>
-            <a:off x="609600" y="304800"/>
+            <a:off x="609600" y="279400"/>
             <a:ext cx="2540000" cy="279400"/>
           </a:xfrm>
           <a:prstGeom prst="rect">
@@ -13627,13 +12745,13 @@
         </p:spPr>
         <p:txBody>
           <a:bodyPr wrap="square">
-            <a:spAutoFit/>
+            <a:normAutofit/>
           </a:bodyPr>
           <a:lstStyle/>
           <a:p>
             <a:pPr algn="l"/>
             <a:r>
-              <a:rPr sz="1600" b="1" i="0">
+              <a:rPr sz="1000" b="1" i="0">
                 <a:solidFill>
                   <a:srgbClr val="191D2E"/>
                 </a:solidFill>
@@ -13652,8 +12770,8 @@
         </p:nvSpPr>
         <p:spPr>
           <a:xfrm>
-            <a:off x="0" y="304800"/>
-            <a:ext cx="11582400" cy="279400"/>
+            <a:off x="609600" y="279400"/>
+            <a:ext cx="10972800" cy="279400"/>
           </a:xfrm>
           <a:prstGeom prst="rect">
             <a:avLst/>
@@ -13662,13 +12780,13 @@
         </p:spPr>
         <p:txBody>
           <a:bodyPr wrap="square">
-            <a:spAutoFit/>
+            <a:normAutofit/>
           </a:bodyPr>
           <a:lstStyle/>
           <a:p>
             <a:pPr algn="r"/>
             <a:r>
-              <a:rPr sz="1300" b="0" i="0" spc="100">
+              <a:rPr sz="900" b="0" i="0">
                 <a:solidFill>
                   <a:srgbClr val="7B7FA0"/>
                 </a:solidFill>
@@ -13687,8 +12805,8 @@
         </p:nvSpPr>
         <p:spPr>
           <a:xfrm>
-            <a:off x="0" y="6350000"/>
-            <a:ext cx="11582400" cy="228600"/>
+            <a:off x="609600" y="6426200"/>
+            <a:ext cx="10972800" cy="228600"/>
           </a:xfrm>
           <a:prstGeom prst="rect">
             <a:avLst/>
@@ -13697,33 +12815,76 @@
         </p:spPr>
         <p:txBody>
           <a:bodyPr wrap="square">
-            <a:spAutoFit/>
+            <a:normAutofit/>
           </a:bodyPr>
           <a:lstStyle/>
           <a:p>
             <a:pPr algn="r"/>
             <a:r>
-              <a:rPr sz="1300" b="0" i="0">
+              <a:rPr sz="900" b="0" i="0">
                 <a:solidFill>
                   <a:srgbClr val="7B7FA0"/>
                 </a:solidFill>
                 <a:latin typeface="Courier New"/>
               </a:rPr>
-              <a:t>08 / 12</a:t>
+              <a:t>08</a:t>
             </a:r>
           </a:p>
         </p:txBody>
       </p:sp>
       <p:sp>
         <p:nvSpPr>
-          <p:cNvPr id="5" name="TextBox 4"/>
+          <p:cNvPr id="5" name="Rectangle 4"/>
+          <p:cNvSpPr/>
+          <p:nvPr/>
+        </p:nvSpPr>
+        <p:spPr>
+          <a:xfrm>
+            <a:off x="609600" y="825500"/>
+            <a:ext cx="10972800" cy="6350"/>
+          </a:xfrm>
+          <a:prstGeom prst="rect">
+            <a:avLst/>
+          </a:prstGeom>
+          <a:solidFill>
+            <a:srgbClr val="191D2E"/>
+          </a:solidFill>
+          <a:ln>
+            <a:noFill/>
+          </a:ln>
+        </p:spPr>
+        <p:style>
+          <a:lnRef idx="1">
+            <a:schemeClr val="accent1"/>
+          </a:lnRef>
+          <a:fillRef idx="3">
+            <a:schemeClr val="accent1"/>
+          </a:fillRef>
+          <a:effectRef idx="2">
+            <a:schemeClr val="accent1"/>
+          </a:effectRef>
+          <a:fontRef idx="minor">
+            <a:schemeClr val="lt1"/>
+          </a:fontRef>
+        </p:style>
+        <p:txBody>
+          <a:bodyPr rtlCol="0" anchor="ctr"/>
+          <a:lstStyle/>
+          <a:p>
+            <a:pPr algn="ctr"/>
+          </a:p>
+        </p:txBody>
+      </p:sp>
+      <p:sp>
+        <p:nvSpPr>
+          <p:cNvPr id="6" name="TextBox 5"/>
           <p:cNvSpPr txBox="1"/>
           <p:nvPr/>
         </p:nvSpPr>
         <p:spPr>
           <a:xfrm>
-            <a:off x="609600" y="1016000"/>
-            <a:ext cx="4953000" cy="2032000"/>
+            <a:off x="609600" y="920750"/>
+            <a:ext cx="4826000" cy="1778000"/>
           </a:xfrm>
           <a:prstGeom prst="rect">
             <a:avLst/>
@@ -13732,13 +12893,13 @@
         </p:spPr>
         <p:txBody>
           <a:bodyPr wrap="square">
-            <a:spAutoFit/>
+            <a:normAutofit/>
           </a:bodyPr>
           <a:lstStyle/>
           <a:p>
             <a:pPr algn="l"/>
             <a:r>
-              <a:rPr sz="6000" b="0" i="0">
+              <a:rPr sz="3800" b="0" i="0">
                 <a:solidFill>
                   <a:srgbClr val="191D2E"/>
                 </a:solidFill>
@@ -13751,14 +12912,14 @@
       </p:sp>
       <p:sp>
         <p:nvSpPr>
-          <p:cNvPr id="6" name="TextBox 5"/>
+          <p:cNvPr id="7" name="TextBox 6"/>
           <p:cNvSpPr txBox="1"/>
           <p:nvPr/>
         </p:nvSpPr>
         <p:spPr>
           <a:xfrm>
-            <a:off x="609600" y="3175000"/>
-            <a:ext cx="4953000" cy="1270000"/>
+            <a:off x="609600" y="2825750"/>
+            <a:ext cx="4826000" cy="1016000"/>
           </a:xfrm>
           <a:prstGeom prst="rect">
             <a:avLst/>
@@ -13767,13 +12928,13 @@
         </p:spPr>
         <p:txBody>
           <a:bodyPr wrap="square">
-            <a:spAutoFit/>
+            <a:normAutofit/>
           </a:bodyPr>
           <a:lstStyle/>
           <a:p>
             <a:pPr algn="l"/>
             <a:r>
-              <a:rPr sz="2000" b="0" i="0">
+              <a:rPr sz="1400" b="0" i="0">
                 <a:solidFill>
                   <a:srgbClr val="4D5270"/>
                 </a:solidFill>
@@ -13786,15 +12947,15 @@
       </p:sp>
       <p:graphicFrame>
         <p:nvGraphicFramePr>
-          <p:cNvPr id="7" name="Table 6"/>
+          <p:cNvPr id="8" name="Table 7"/>
           <p:cNvGraphicFramePr>
             <a:graphicFrameLocks noGrp="1"/>
           </p:cNvGraphicFramePr>
           <p:nvPr/>
         </p:nvGraphicFramePr>
         <p:xfrm>
-          <a:off x="6096000" y="1016000"/>
-          <a:ext cx="6502400" cy="1778000"/>
+          <a:off x="5715000" y="920750"/>
+          <a:ext cx="5867400" cy="1524000"/>
         </p:xfrm>
         <a:graphic>
           <a:graphicData uri="http://schemas.openxmlformats.org/drawingml/2006/table">
@@ -13803,19 +12964,19 @@
                 <a:tableStyleId>{5C22544A-7EE6-4342-B048-85BDC9FD1C3A}</a:tableStyleId>
               </a:tblPr>
               <a:tblGrid>
-                <a:gridCol w="1625600"/>
-                <a:gridCol w="1625600"/>
-                <a:gridCol w="1625600"/>
-                <a:gridCol w="1625600"/>
+                <a:gridCol w="1466850"/>
+                <a:gridCol w="1466850"/>
+                <a:gridCol w="1466850"/>
+                <a:gridCol w="1466850"/>
               </a:tblGrid>
-              <a:tr h="444500">
-                <a:tc>
-                  <a:txBody>
-                    <a:bodyPr wrap="square"/>
-                    <a:lstStyle/>
-                    <a:p>
-                      <a:r>
-                        <a:rPr sz="1400" b="1">
+              <a:tr h="381000">
+                <a:tc>
+                  <a:txBody>
+                    <a:bodyPr wrap="square"/>
+                    <a:lstStyle/>
+                    <a:p>
+                      <a:r>
+                        <a:rPr sz="1000" b="1">
                           <a:solidFill>
                             <a:srgbClr val="F8F8FA"/>
                           </a:solidFill>
@@ -13837,7 +12998,7 @@
                     <a:lstStyle/>
                     <a:p>
                       <a:r>
-                        <a:rPr sz="1400" b="1">
+                        <a:rPr sz="1000" b="1">
                           <a:solidFill>
                             <a:srgbClr val="F8F8FA"/>
                           </a:solidFill>
@@ -13859,7 +13020,7 @@
                     <a:lstStyle/>
                     <a:p>
                       <a:r>
-                        <a:rPr sz="1400" b="1">
+                        <a:rPr sz="1000" b="1">
                           <a:solidFill>
                             <a:srgbClr val="F8F8FA"/>
                           </a:solidFill>
@@ -13881,7 +13042,7 @@
                     <a:lstStyle/>
                     <a:p>
                       <a:r>
-                        <a:rPr sz="1400" b="1">
+                        <a:rPr sz="1000" b="1">
                           <a:solidFill>
                             <a:srgbClr val="F8F8FA"/>
                           </a:solidFill>
@@ -13898,14 +13059,14 @@
                   </a:tcPr>
                 </a:tc>
               </a:tr>
-              <a:tr h="444500">
-                <a:tc>
-                  <a:txBody>
-                    <a:bodyPr wrap="square"/>
-                    <a:lstStyle/>
-                    <a:p>
-                      <a:r>
-                        <a:rPr sz="1600" b="0">
+              <a:tr h="381000">
+                <a:tc>
+                  <a:txBody>
+                    <a:bodyPr wrap="square"/>
+                    <a:lstStyle/>
+                    <a:p>
+                      <a:r>
+                        <a:rPr sz="1000" b="0">
                           <a:solidFill>
                             <a:srgbClr val="191D2E"/>
                           </a:solidFill>
@@ -13927,7 +13088,7 @@
                     <a:lstStyle/>
                     <a:p>
                       <a:r>
-                        <a:rPr sz="1600" b="0">
+                        <a:rPr sz="1000" b="0">
                           <a:solidFill>
                             <a:srgbClr val="191D2E"/>
                           </a:solidFill>
@@ -13949,7 +13110,7 @@
                     <a:lstStyle/>
                     <a:p>
                       <a:r>
-                        <a:rPr sz="1600" b="0">
+                        <a:rPr sz="1000" b="0">
                           <a:solidFill>
                             <a:srgbClr val="191D2E"/>
                           </a:solidFill>
@@ -13971,7 +13132,7 @@
                     <a:lstStyle/>
                     <a:p>
                       <a:r>
-                        <a:rPr sz="1600" b="0">
+                        <a:rPr sz="1000" b="0">
                           <a:solidFill>
                             <a:srgbClr val="191D2E"/>
                           </a:solidFill>
@@ -13988,14 +13149,14 @@
                   </a:tcPr>
                 </a:tc>
               </a:tr>
-              <a:tr h="444500">
-                <a:tc>
-                  <a:txBody>
-                    <a:bodyPr wrap="square"/>
-                    <a:lstStyle/>
-                    <a:p>
-                      <a:r>
-                        <a:rPr sz="1600" b="0">
+              <a:tr h="381000">
+                <a:tc>
+                  <a:txBody>
+                    <a:bodyPr wrap="square"/>
+                    <a:lstStyle/>
+                    <a:p>
+                      <a:r>
+                        <a:rPr sz="1000" b="0">
                           <a:solidFill>
                             <a:srgbClr val="191D2E"/>
                           </a:solidFill>
@@ -14017,7 +13178,7 @@
                     <a:lstStyle/>
                     <a:p>
                       <a:r>
-                        <a:rPr sz="1600" b="0">
+                        <a:rPr sz="1000" b="0">
                           <a:solidFill>
                             <a:srgbClr val="191D2E"/>
                           </a:solidFill>
@@ -14039,7 +13200,7 @@
                     <a:lstStyle/>
                     <a:p>
                       <a:r>
-                        <a:rPr sz="1600" b="0">
+                        <a:rPr sz="1000" b="0">
                           <a:solidFill>
                             <a:srgbClr val="191D2E"/>
                           </a:solidFill>
@@ -14061,7 +13222,7 @@
                     <a:lstStyle/>
                     <a:p>
                       <a:r>
-                        <a:rPr sz="1600" b="0">
+                        <a:rPr sz="1000" b="0">
                           <a:solidFill>
                             <a:srgbClr val="191D2E"/>
                           </a:solidFill>
@@ -14078,14 +13239,14 @@
                   </a:tcPr>
                 </a:tc>
               </a:tr>
-              <a:tr h="444500">
-                <a:tc>
-                  <a:txBody>
-                    <a:bodyPr wrap="square"/>
-                    <a:lstStyle/>
-                    <a:p>
-                      <a:r>
-                        <a:rPr sz="1600" b="0">
+              <a:tr h="381000">
+                <a:tc>
+                  <a:txBody>
+                    <a:bodyPr wrap="square"/>
+                    <a:lstStyle/>
+                    <a:p>
+                      <a:r>
+                        <a:rPr sz="1000" b="0">
                           <a:solidFill>
                             <a:srgbClr val="191D2E"/>
                           </a:solidFill>
@@ -14107,7 +13268,7 @@
                     <a:lstStyle/>
                     <a:p>
                       <a:r>
-                        <a:rPr sz="1600" b="0">
+                        <a:rPr sz="1000" b="0">
                           <a:solidFill>
                             <a:srgbClr val="191D2E"/>
                           </a:solidFill>
@@ -14129,7 +13290,7 @@
                     <a:lstStyle/>
                     <a:p>
                       <a:r>
-                        <a:rPr sz="1600" b="0">
+                        <a:rPr sz="1000" b="0">
                           <a:solidFill>
                             <a:srgbClr val="191D2E"/>
                           </a:solidFill>
@@ -14151,7 +13312,7 @@
                     <a:lstStyle/>
                     <a:p>
                       <a:r>
-                        <a:rPr sz="1600" b="0">
+                        <a:rPr sz="1000" b="0">
                           <a:solidFill>
                             <a:srgbClr val="191D2E"/>
                           </a:solidFill>
@@ -14206,7 +13367,7 @@
         </p:nvSpPr>
         <p:spPr>
           <a:xfrm>
-            <a:off x="609600" y="304800"/>
+            <a:off x="609600" y="279400"/>
             <a:ext cx="2540000" cy="279400"/>
           </a:xfrm>
           <a:prstGeom prst="rect">
@@ -14216,13 +13377,13 @@
         </p:spPr>
         <p:txBody>
           <a:bodyPr wrap="square">
-            <a:spAutoFit/>
+            <a:normAutofit/>
           </a:bodyPr>
           <a:lstStyle/>
           <a:p>
             <a:pPr algn="l"/>
             <a:r>
-              <a:rPr sz="1600" b="1" i="0">
+              <a:rPr sz="1000" b="1" i="0">
                 <a:solidFill>
                   <a:srgbClr val="191D2E"/>
                 </a:solidFill>
@@ -14241,8 +13402,8 @@
         </p:nvSpPr>
         <p:spPr>
           <a:xfrm>
-            <a:off x="0" y="304800"/>
-            <a:ext cx="11582400" cy="279400"/>
+            <a:off x="609600" y="279400"/>
+            <a:ext cx="10972800" cy="279400"/>
           </a:xfrm>
           <a:prstGeom prst="rect">
             <a:avLst/>
@@ -14251,13 +13412,13 @@
         </p:spPr>
         <p:txBody>
           <a:bodyPr wrap="square">
-            <a:spAutoFit/>
+            <a:normAutofit/>
           </a:bodyPr>
           <a:lstStyle/>
           <a:p>
             <a:pPr algn="r"/>
             <a:r>
-              <a:rPr sz="1300" b="0" i="0" spc="100">
+              <a:rPr sz="900" b="0" i="0">
                 <a:solidFill>
                   <a:srgbClr val="7B7FA0"/>
                 </a:solidFill>
@@ -14276,8 +13437,8 @@
         </p:nvSpPr>
         <p:spPr>
           <a:xfrm>
-            <a:off x="0" y="6350000"/>
-            <a:ext cx="11582400" cy="228600"/>
+            <a:off x="609600" y="6426200"/>
+            <a:ext cx="10972800" cy="228600"/>
           </a:xfrm>
           <a:prstGeom prst="rect">
             <a:avLst/>
@@ -14286,33 +13447,76 @@
         </p:spPr>
         <p:txBody>
           <a:bodyPr wrap="square">
-            <a:spAutoFit/>
+            <a:normAutofit/>
           </a:bodyPr>
           <a:lstStyle/>
           <a:p>
             <a:pPr algn="r"/>
             <a:r>
-              <a:rPr sz="1300" b="0" i="0">
+              <a:rPr sz="900" b="0" i="0">
                 <a:solidFill>
                   <a:srgbClr val="7B7FA0"/>
                 </a:solidFill>
                 <a:latin typeface="Courier New"/>
               </a:rPr>
-              <a:t>09 / 12</a:t>
+              <a:t>09</a:t>
             </a:r>
           </a:p>
         </p:txBody>
       </p:sp>
       <p:sp>
         <p:nvSpPr>
-          <p:cNvPr id="5" name="TextBox 4"/>
+          <p:cNvPr id="5" name="Rectangle 4"/>
+          <p:cNvSpPr/>
+          <p:nvPr/>
+        </p:nvSpPr>
+        <p:spPr>
+          <a:xfrm>
+            <a:off x="609600" y="825500"/>
+            <a:ext cx="10972800" cy="6350"/>
+          </a:xfrm>
+          <a:prstGeom prst="rect">
+            <a:avLst/>
+          </a:prstGeom>
+          <a:solidFill>
+            <a:srgbClr val="191D2E"/>
+          </a:solidFill>
+          <a:ln>
+            <a:noFill/>
+          </a:ln>
+        </p:spPr>
+        <p:style>
+          <a:lnRef idx="1">
+            <a:schemeClr val="accent1"/>
+          </a:lnRef>
+          <a:fillRef idx="3">
+            <a:schemeClr val="accent1"/>
+          </a:fillRef>
+          <a:effectRef idx="2">
+            <a:schemeClr val="accent1"/>
+          </a:effectRef>
+          <a:fontRef idx="minor">
+            <a:schemeClr val="lt1"/>
+          </a:fontRef>
+        </p:style>
+        <p:txBody>
+          <a:bodyPr rtlCol="0" anchor="ctr"/>
+          <a:lstStyle/>
+          <a:p>
+            <a:pPr algn="ctr"/>
+          </a:p>
+        </p:txBody>
+      </p:sp>
+      <p:sp>
+        <p:nvSpPr>
+          <p:cNvPr id="6" name="TextBox 5"/>
           <p:cNvSpPr txBox="1"/>
           <p:nvPr/>
         </p:nvSpPr>
         <p:spPr>
           <a:xfrm>
-            <a:off x="609600" y="1016000"/>
-            <a:ext cx="4953000" cy="2032000"/>
+            <a:off x="609600" y="920750"/>
+            <a:ext cx="4826000" cy="1778000"/>
           </a:xfrm>
           <a:prstGeom prst="rect">
             <a:avLst/>
@@ -14321,13 +13525,13 @@
         </p:spPr>
         <p:txBody>
           <a:bodyPr wrap="square">
-            <a:spAutoFit/>
+            <a:normAutofit/>
           </a:bodyPr>
           <a:lstStyle/>
           <a:p>
             <a:pPr algn="l"/>
             <a:r>
-              <a:rPr sz="6000" b="0" i="0">
+              <a:rPr sz="3800" b="0" i="0">
                 <a:solidFill>
                   <a:srgbClr val="191D2E"/>
                 </a:solidFill>
@@ -14340,14 +13544,14 @@
       </p:sp>
       <p:sp>
         <p:nvSpPr>
-          <p:cNvPr id="6" name="TextBox 5"/>
+          <p:cNvPr id="7" name="TextBox 6"/>
           <p:cNvSpPr txBox="1"/>
           <p:nvPr/>
         </p:nvSpPr>
         <p:spPr>
           <a:xfrm>
-            <a:off x="609600" y="3175000"/>
-            <a:ext cx="4953000" cy="1270000"/>
+            <a:off x="609600" y="2825750"/>
+            <a:ext cx="4826000" cy="1016000"/>
           </a:xfrm>
           <a:prstGeom prst="rect">
             <a:avLst/>
@@ -14356,13 +13560,13 @@
         </p:spPr>
         <p:txBody>
           <a:bodyPr wrap="square">
-            <a:spAutoFit/>
+            <a:normAutofit/>
           </a:bodyPr>
           <a:lstStyle/>
           <a:p>
             <a:pPr algn="l"/>
             <a:r>
-              <a:rPr sz="2000" b="0" i="0">
+              <a:rPr sz="1400" b="0" i="0">
                 <a:solidFill>
                   <a:srgbClr val="4D5270"/>
                 </a:solidFill>
@@ -14375,15 +13579,15 @@
       </p:sp>
       <p:graphicFrame>
         <p:nvGraphicFramePr>
-          <p:cNvPr id="7" name="Table 6"/>
+          <p:cNvPr id="8" name="Table 7"/>
           <p:cNvGraphicFramePr>
             <a:graphicFrameLocks noGrp="1"/>
           </p:cNvGraphicFramePr>
           <p:nvPr/>
         </p:nvGraphicFramePr>
         <p:xfrm>
-          <a:off x="6096000" y="1016000"/>
-          <a:ext cx="6502400" cy="3810000"/>
+          <a:off x="5715000" y="920750"/>
+          <a:ext cx="5867400" cy="9906000"/>
         </p:xfrm>
         <a:graphic>
           <a:graphicData uri="http://schemas.openxmlformats.org/drawingml/2006/table">
@@ -14392,19 +13596,19 @@
                 <a:tableStyleId>{5C22544A-7EE6-4342-B048-85BDC9FD1C3A}</a:tableStyleId>
               </a:tblPr>
               <a:tblGrid>
-                <a:gridCol w="1625600"/>
-                <a:gridCol w="1625600"/>
-                <a:gridCol w="1625600"/>
-                <a:gridCol w="1625600"/>
+                <a:gridCol w="1466850"/>
+                <a:gridCol w="1466850"/>
+                <a:gridCol w="1466850"/>
+                <a:gridCol w="1466850"/>
               </a:tblGrid>
-              <a:tr h="146538">
-                <a:tc>
-                  <a:txBody>
-                    <a:bodyPr wrap="square"/>
-                    <a:lstStyle/>
-                    <a:p>
-                      <a:r>
-                        <a:rPr sz="1400" b="1">
+              <a:tr h="381000">
+                <a:tc>
+                  <a:txBody>
+                    <a:bodyPr wrap="square"/>
+                    <a:lstStyle/>
+                    <a:p>
+                      <a:r>
+                        <a:rPr sz="1000" b="1">
                           <a:solidFill>
                             <a:srgbClr val="F8F8FA"/>
                           </a:solidFill>
@@ -14426,7 +13630,7 @@
                     <a:lstStyle/>
                     <a:p>
                       <a:r>
-                        <a:rPr sz="1400" b="1">
+                        <a:rPr sz="1000" b="1">
                           <a:solidFill>
                             <a:srgbClr val="F8F8FA"/>
                           </a:solidFill>
@@ -14448,7 +13652,7 @@
                     <a:lstStyle/>
                     <a:p>
                       <a:r>
-                        <a:rPr sz="1400" b="1">
+                        <a:rPr sz="1000" b="1">
                           <a:solidFill>
                             <a:srgbClr val="F8F8FA"/>
                           </a:solidFill>
@@ -14470,7 +13674,7 @@
                     <a:lstStyle/>
                     <a:p>
                       <a:r>
-                        <a:rPr sz="1400" b="1">
+                        <a:rPr sz="1000" b="1">
                           <a:solidFill>
                             <a:srgbClr val="F8F8FA"/>
                           </a:solidFill>
@@ -14487,14 +13691,14 @@
                   </a:tcPr>
                 </a:tc>
               </a:tr>
-              <a:tr h="146538">
-                <a:tc>
-                  <a:txBody>
-                    <a:bodyPr wrap="square"/>
-                    <a:lstStyle/>
-                    <a:p>
-                      <a:r>
-                        <a:rPr sz="1600" b="0">
+              <a:tr h="381000">
+                <a:tc>
+                  <a:txBody>
+                    <a:bodyPr wrap="square"/>
+                    <a:lstStyle/>
+                    <a:p>
+                      <a:r>
+                        <a:rPr sz="1000" b="0">
                           <a:solidFill>
                             <a:srgbClr val="191D2E"/>
                           </a:solidFill>
@@ -14516,7 +13720,7 @@
                     <a:lstStyle/>
                     <a:p>
                       <a:r>
-                        <a:rPr sz="1600" b="0">
+                        <a:rPr sz="1000" b="0">
                           <a:solidFill>
                             <a:srgbClr val="191D2E"/>
                           </a:solidFill>
@@ -14538,7 +13742,7 @@
                     <a:lstStyle/>
                     <a:p>
                       <a:r>
-                        <a:rPr sz="1600" b="0">
+                        <a:rPr sz="1000" b="0">
                           <a:solidFill>
                             <a:srgbClr val="191D2E"/>
                           </a:solidFill>
@@ -14560,7 +13764,7 @@
                     <a:lstStyle/>
                     <a:p>
                       <a:r>
-                        <a:rPr sz="1600" b="0">
+                        <a:rPr sz="1000" b="0">
                           <a:solidFill>
                             <a:srgbClr val="191D2E"/>
                           </a:solidFill>
@@ -14577,14 +13781,14 @@
                   </a:tcPr>
                 </a:tc>
               </a:tr>
-              <a:tr h="146538">
-                <a:tc>
-                  <a:txBody>
-                    <a:bodyPr wrap="square"/>
-                    <a:lstStyle/>
-                    <a:p>
-                      <a:r>
-                        <a:rPr sz="1600" b="0">
+              <a:tr h="381000">
+                <a:tc>
+                  <a:txBody>
+                    <a:bodyPr wrap="square"/>
+                    <a:lstStyle/>
+                    <a:p>
+                      <a:r>
+                        <a:rPr sz="1000" b="0">
                           <a:solidFill>
                             <a:srgbClr val="191D2E"/>
                           </a:solidFill>
@@ -14606,7 +13810,7 @@
                     <a:lstStyle/>
                     <a:p>
                       <a:r>
-                        <a:rPr sz="1600" b="0">
+                        <a:rPr sz="1000" b="0">
                           <a:solidFill>
                             <a:srgbClr val="191D2E"/>
                           </a:solidFill>
@@ -14628,7 +13832,7 @@
                     <a:lstStyle/>
                     <a:p>
                       <a:r>
-                        <a:rPr sz="1600" b="0">
+                        <a:rPr sz="1000" b="0">
                           <a:solidFill>
                             <a:srgbClr val="191D2E"/>
                           </a:solidFill>
@@ -14650,7 +13854,7 @@
                     <a:lstStyle/>
                     <a:p>
                       <a:r>
-                        <a:rPr sz="1600" b="0">
+                        <a:rPr sz="1000" b="0">
                           <a:solidFill>
                             <a:srgbClr val="191D2E"/>
                           </a:solidFill>
@@ -14667,14 +13871,14 @@
                   </a:tcPr>
                 </a:tc>
               </a:tr>
-              <a:tr h="146538">
-                <a:tc>
-                  <a:txBody>
-                    <a:bodyPr wrap="square"/>
-                    <a:lstStyle/>
-                    <a:p>
-                      <a:r>
-                        <a:rPr sz="1600" b="0">
+              <a:tr h="381000">
+                <a:tc>
+                  <a:txBody>
+                    <a:bodyPr wrap="square"/>
+                    <a:lstStyle/>
+                    <a:p>
+                      <a:r>
+                        <a:rPr sz="1000" b="0">
                           <a:solidFill>
                             <a:srgbClr val="191D2E"/>
                           </a:solidFill>
@@ -14696,7 +13900,7 @@
                     <a:lstStyle/>
                     <a:p>
                       <a:r>
-                        <a:rPr sz="1600" b="0">
+                        <a:rPr sz="1000" b="0">
                           <a:solidFill>
                             <a:srgbClr val="191D2E"/>
                           </a:solidFill>
@@ -14718,7 +13922,7 @@
                     <a:lstStyle/>
                     <a:p>
                       <a:r>
-                        <a:rPr sz="1600" b="0">
+                        <a:rPr sz="1000" b="0">
                           <a:solidFill>
                             <a:srgbClr val="191D2E"/>
                           </a:solidFill>
@@ -14740,7 +13944,7 @@
                     <a:lstStyle/>
                     <a:p>
                       <a:r>
-                        <a:rPr sz="1600" b="0">
+                        <a:rPr sz="1000" b="0">
                           <a:solidFill>
                             <a:srgbClr val="191D2E"/>
                           </a:solidFill>
@@ -14757,14 +13961,14 @@
                   </a:tcPr>
                 </a:tc>
               </a:tr>
-              <a:tr h="146538">
-                <a:tc>
-                  <a:txBody>
-                    <a:bodyPr wrap="square"/>
-                    <a:lstStyle/>
-                    <a:p>
-                      <a:r>
-                        <a:rPr sz="1600" b="0">
+              <a:tr h="381000">
+                <a:tc>
+                  <a:txBody>
+                    <a:bodyPr wrap="square"/>
+                    <a:lstStyle/>
+                    <a:p>
+                      <a:r>
+                        <a:rPr sz="1000" b="0">
                           <a:solidFill>
                             <a:srgbClr val="191D2E"/>
                           </a:solidFill>
@@ -14786,7 +13990,7 @@
                     <a:lstStyle/>
                     <a:p>
                       <a:r>
-                        <a:rPr sz="1600" b="0">
+                        <a:rPr sz="1000" b="0">
                           <a:solidFill>
                             <a:srgbClr val="191D2E"/>
                           </a:solidFill>
@@ -14808,7 +14012,7 @@
                     <a:lstStyle/>
                     <a:p>
                       <a:r>
-                        <a:rPr sz="1600" b="0">
+                        <a:rPr sz="1000" b="0">
                           <a:solidFill>
                             <a:srgbClr val="191D2E"/>
                           </a:solidFill>
@@ -14830,7 +14034,7 @@
                     <a:lstStyle/>
                     <a:p>
                       <a:r>
-                        <a:rPr sz="1600" b="0">
+                        <a:rPr sz="1000" b="0">
                           <a:solidFill>
                             <a:srgbClr val="191D2E"/>
                           </a:solidFill>
@@ -14847,14 +14051,14 @@
                   </a:tcPr>
                 </a:tc>
               </a:tr>
-              <a:tr h="146538">
-                <a:tc>
-                  <a:txBody>
-                    <a:bodyPr wrap="square"/>
-                    <a:lstStyle/>
-                    <a:p>
-                      <a:r>
-                        <a:rPr sz="1600" b="0">
+              <a:tr h="381000">
+                <a:tc>
+                  <a:txBody>
+                    <a:bodyPr wrap="square"/>
+                    <a:lstStyle/>
+                    <a:p>
+                      <a:r>
+                        <a:rPr sz="1000" b="0">
                           <a:solidFill>
                             <a:srgbClr val="191D2E"/>
                           </a:solidFill>
@@ -14876,7 +14080,7 @@
                     <a:lstStyle/>
                     <a:p>
                       <a:r>
-                        <a:rPr sz="1600" b="0">
+                        <a:rPr sz="1000" b="0">
                           <a:solidFill>
                             <a:srgbClr val="191D2E"/>
                           </a:solidFill>
@@ -14898,7 +14102,7 @@
                     <a:lstStyle/>
                     <a:p>
                       <a:r>
-                        <a:rPr sz="1600" b="0">
+                        <a:rPr sz="1000" b="0">
                           <a:solidFill>
                             <a:srgbClr val="191D2E"/>
                           </a:solidFill>
@@ -14920,7 +14124,7 @@
                     <a:lstStyle/>
                     <a:p>
                       <a:r>
-                        <a:rPr sz="1600" b="0">
+                        <a:rPr sz="1000" b="0">
                           <a:solidFill>
                             <a:srgbClr val="191D2E"/>
                           </a:solidFill>
@@ -14937,14 +14141,14 @@
                   </a:tcPr>
                 </a:tc>
               </a:tr>
-              <a:tr h="146538">
-                <a:tc>
-                  <a:txBody>
-                    <a:bodyPr wrap="square"/>
-                    <a:lstStyle/>
-                    <a:p>
-                      <a:r>
-                        <a:rPr sz="1600" b="0">
+              <a:tr h="381000">
+                <a:tc>
+                  <a:txBody>
+                    <a:bodyPr wrap="square"/>
+                    <a:lstStyle/>
+                    <a:p>
+                      <a:r>
+                        <a:rPr sz="1000" b="0">
                           <a:solidFill>
                             <a:srgbClr val="191D2E"/>
                           </a:solidFill>
@@ -14966,7 +14170,7 @@
                     <a:lstStyle/>
                     <a:p>
                       <a:r>
-                        <a:rPr sz="1600" b="0">
+                        <a:rPr sz="1000" b="0">
                           <a:solidFill>
                             <a:srgbClr val="191D2E"/>
                           </a:solidFill>
@@ -14988,7 +14192,7 @@
                     <a:lstStyle/>
                     <a:p>
                       <a:r>
-                        <a:rPr sz="1600" b="0">
+                        <a:rPr sz="1000" b="0">
                           <a:solidFill>
                             <a:srgbClr val="191D2E"/>
                           </a:solidFill>
@@ -15010,7 +14214,7 @@
                     <a:lstStyle/>
                     <a:p>
                       <a:r>
-                        <a:rPr sz="1600" b="0">
+                        <a:rPr sz="1000" b="0">
                           <a:solidFill>
                             <a:srgbClr val="191D2E"/>
                           </a:solidFill>
@@ -15027,14 +14231,14 @@
                   </a:tcPr>
                 </a:tc>
               </a:tr>
-              <a:tr h="146538">
-                <a:tc>
-                  <a:txBody>
-                    <a:bodyPr wrap="square"/>
-                    <a:lstStyle/>
-                    <a:p>
-                      <a:r>
-                        <a:rPr sz="1600" b="0">
+              <a:tr h="381000">
+                <a:tc>
+                  <a:txBody>
+                    <a:bodyPr wrap="square"/>
+                    <a:lstStyle/>
+                    <a:p>
+                      <a:r>
+                        <a:rPr sz="1000" b="0">
                           <a:solidFill>
                             <a:srgbClr val="191D2E"/>
                           </a:solidFill>
@@ -15056,7 +14260,7 @@
                     <a:lstStyle/>
                     <a:p>
                       <a:r>
-                        <a:rPr sz="1600" b="0">
+                        <a:rPr sz="1000" b="0">
                           <a:solidFill>
                             <a:srgbClr val="191D2E"/>
                           </a:solidFill>
@@ -15078,7 +14282,7 @@
                     <a:lstStyle/>
                     <a:p>
                       <a:r>
-                        <a:rPr sz="1600" b="0">
+                        <a:rPr sz="1000" b="0">
                           <a:solidFill>
                             <a:srgbClr val="191D2E"/>
                           </a:solidFill>
@@ -15100,7 +14304,7 @@
                     <a:lstStyle/>
                     <a:p>
                       <a:r>
-                        <a:rPr sz="1600" b="0">
+                        <a:rPr sz="1000" b="0">
                           <a:solidFill>
                             <a:srgbClr val="191D2E"/>
                           </a:solidFill>
@@ -15117,14 +14321,14 @@
                   </a:tcPr>
                 </a:tc>
               </a:tr>
-              <a:tr h="146538">
-                <a:tc>
-                  <a:txBody>
-                    <a:bodyPr wrap="square"/>
-                    <a:lstStyle/>
-                    <a:p>
-                      <a:r>
-                        <a:rPr sz="1600" b="0">
+              <a:tr h="381000">
+                <a:tc>
+                  <a:txBody>
+                    <a:bodyPr wrap="square"/>
+                    <a:lstStyle/>
+                    <a:p>
+                      <a:r>
+                        <a:rPr sz="1000" b="0">
                           <a:solidFill>
                             <a:srgbClr val="191D2E"/>
                           </a:solidFill>
@@ -15146,7 +14350,7 @@
                     <a:lstStyle/>
                     <a:p>
                       <a:r>
-                        <a:rPr sz="1600" b="0">
+                        <a:rPr sz="1000" b="0">
                           <a:solidFill>
                             <a:srgbClr val="191D2E"/>
                           </a:solidFill>
@@ -15168,7 +14372,7 @@
                     <a:lstStyle/>
                     <a:p>
                       <a:r>
-                        <a:rPr sz="1600" b="0">
+                        <a:rPr sz="1000" b="0">
                           <a:solidFill>
                             <a:srgbClr val="191D2E"/>
                           </a:solidFill>
@@ -15190,7 +14394,7 @@
                     <a:lstStyle/>
                     <a:p>
                       <a:r>
-                        <a:rPr sz="1600" b="0">
+                        <a:rPr sz="1000" b="0">
                           <a:solidFill>
                             <a:srgbClr val="191D2E"/>
                           </a:solidFill>
@@ -15207,14 +14411,14 @@
                   </a:tcPr>
                 </a:tc>
               </a:tr>
-              <a:tr h="146538">
-                <a:tc>
-                  <a:txBody>
-                    <a:bodyPr wrap="square"/>
-                    <a:lstStyle/>
-                    <a:p>
-                      <a:r>
-                        <a:rPr sz="1600" b="0">
+              <a:tr h="381000">
+                <a:tc>
+                  <a:txBody>
+                    <a:bodyPr wrap="square"/>
+                    <a:lstStyle/>
+                    <a:p>
+                      <a:r>
+                        <a:rPr sz="1000" b="0">
                           <a:solidFill>
                             <a:srgbClr val="191D2E"/>
                           </a:solidFill>
@@ -15236,7 +14440,7 @@
                     <a:lstStyle/>
                     <a:p>
                       <a:r>
-                        <a:rPr sz="1600" b="0">
+                        <a:rPr sz="1000" b="0">
                           <a:solidFill>
                             <a:srgbClr val="191D2E"/>
                           </a:solidFill>
@@ -15258,7 +14462,7 @@
                     <a:lstStyle/>
                     <a:p>
                       <a:r>
-                        <a:rPr sz="1600" b="0">
+                        <a:rPr sz="1000" b="0">
                           <a:solidFill>
                             <a:srgbClr val="191D2E"/>
                           </a:solidFill>
@@ -15280,7 +14484,7 @@
                     <a:lstStyle/>
                     <a:p>
                       <a:r>
-                        <a:rPr sz="1600" b="0">
+                        <a:rPr sz="1000" b="0">
                           <a:solidFill>
                             <a:srgbClr val="191D2E"/>
                           </a:solidFill>
@@ -15297,14 +14501,14 @@
                   </a:tcPr>
                 </a:tc>
               </a:tr>
-              <a:tr h="146538">
-                <a:tc>
-                  <a:txBody>
-                    <a:bodyPr wrap="square"/>
-                    <a:lstStyle/>
-                    <a:p>
-                      <a:r>
-                        <a:rPr sz="1600" b="0">
+              <a:tr h="381000">
+                <a:tc>
+                  <a:txBody>
+                    <a:bodyPr wrap="square"/>
+                    <a:lstStyle/>
+                    <a:p>
+                      <a:r>
+                        <a:rPr sz="1000" b="0">
                           <a:solidFill>
                             <a:srgbClr val="191D2E"/>
                           </a:solidFill>
@@ -15326,7 +14530,7 @@
                     <a:lstStyle/>
                     <a:p>
                       <a:r>
-                        <a:rPr sz="1600" b="0">
+                        <a:rPr sz="1000" b="0">
                           <a:solidFill>
                             <a:srgbClr val="191D2E"/>
                           </a:solidFill>
@@ -15348,7 +14552,7 @@
                     <a:lstStyle/>
                     <a:p>
                       <a:r>
-                        <a:rPr sz="1600" b="0">
+                        <a:rPr sz="1000" b="0">
                           <a:solidFill>
                             <a:srgbClr val="191D2E"/>
                           </a:solidFill>
@@ -15370,7 +14574,7 @@
                     <a:lstStyle/>
                     <a:p>
                       <a:r>
-                        <a:rPr sz="1600" b="0">
+                        <a:rPr sz="1000" b="0">
                           <a:solidFill>
                             <a:srgbClr val="191D2E"/>
                           </a:solidFill>
@@ -15387,14 +14591,14 @@
                   </a:tcPr>
                 </a:tc>
               </a:tr>
-              <a:tr h="146538">
-                <a:tc>
-                  <a:txBody>
-                    <a:bodyPr wrap="square"/>
-                    <a:lstStyle/>
-                    <a:p>
-                      <a:r>
-                        <a:rPr sz="1600" b="0">
+              <a:tr h="381000">
+                <a:tc>
+                  <a:txBody>
+                    <a:bodyPr wrap="square"/>
+                    <a:lstStyle/>
+                    <a:p>
+                      <a:r>
+                        <a:rPr sz="1000" b="0">
                           <a:solidFill>
                             <a:srgbClr val="191D2E"/>
                           </a:solidFill>
@@ -15416,7 +14620,7 @@
                     <a:lstStyle/>
                     <a:p>
                       <a:r>
-                        <a:rPr sz="1600" b="0">
+                        <a:rPr sz="1000" b="0">
                           <a:solidFill>
                             <a:srgbClr val="191D2E"/>
                           </a:solidFill>
@@ -15438,7 +14642,7 @@
                     <a:lstStyle/>
                     <a:p>
                       <a:r>
-                        <a:rPr sz="1600" b="0">
+                        <a:rPr sz="1000" b="0">
                           <a:solidFill>
                             <a:srgbClr val="191D2E"/>
                           </a:solidFill>
@@ -15460,7 +14664,7 @@
                     <a:lstStyle/>
                     <a:p>
                       <a:r>
-                        <a:rPr sz="1600" b="0">
+                        <a:rPr sz="1000" b="0">
                           <a:solidFill>
                             <a:srgbClr val="191D2E"/>
                           </a:solidFill>
@@ -15477,14 +14681,14 @@
                   </a:tcPr>
                 </a:tc>
               </a:tr>
-              <a:tr h="146538">
-                <a:tc>
-                  <a:txBody>
-                    <a:bodyPr wrap="square"/>
-                    <a:lstStyle/>
-                    <a:p>
-                      <a:r>
-                        <a:rPr sz="1600" b="0">
+              <a:tr h="381000">
+                <a:tc>
+                  <a:txBody>
+                    <a:bodyPr wrap="square"/>
+                    <a:lstStyle/>
+                    <a:p>
+                      <a:r>
+                        <a:rPr sz="1000" b="0">
                           <a:solidFill>
                             <a:srgbClr val="191D2E"/>
                           </a:solidFill>
@@ -15506,7 +14710,7 @@
                     <a:lstStyle/>
                     <a:p>
                       <a:r>
-                        <a:rPr sz="1600" b="0">
+                        <a:rPr sz="1000" b="0">
                           <a:solidFill>
                             <a:srgbClr val="191D2E"/>
                           </a:solidFill>
@@ -15528,7 +14732,7 @@
                     <a:lstStyle/>
                     <a:p>
                       <a:r>
-                        <a:rPr sz="1600" b="0">
+                        <a:rPr sz="1000" b="0">
                           <a:solidFill>
                             <a:srgbClr val="191D2E"/>
                           </a:solidFill>
@@ -15550,7 +14754,7 @@
                     <a:lstStyle/>
                     <a:p>
                       <a:r>
-                        <a:rPr sz="1600" b="0">
+                        <a:rPr sz="1000" b="0">
                           <a:solidFill>
                             <a:srgbClr val="191D2E"/>
                           </a:solidFill>
@@ -15567,14 +14771,14 @@
                   </a:tcPr>
                 </a:tc>
               </a:tr>
-              <a:tr h="146538">
-                <a:tc>
-                  <a:txBody>
-                    <a:bodyPr wrap="square"/>
-                    <a:lstStyle/>
-                    <a:p>
-                      <a:r>
-                        <a:rPr sz="1600" b="0">
+              <a:tr h="381000">
+                <a:tc>
+                  <a:txBody>
+                    <a:bodyPr wrap="square"/>
+                    <a:lstStyle/>
+                    <a:p>
+                      <a:r>
+                        <a:rPr sz="1000" b="0">
                           <a:solidFill>
                             <a:srgbClr val="191D2E"/>
                           </a:solidFill>
@@ -15596,7 +14800,7 @@
                     <a:lstStyle/>
                     <a:p>
                       <a:r>
-                        <a:rPr sz="1600" b="0">
+                        <a:rPr sz="1000" b="0">
                           <a:solidFill>
                             <a:srgbClr val="191D2E"/>
                           </a:solidFill>
@@ -15618,7 +14822,7 @@
                     <a:lstStyle/>
                     <a:p>
                       <a:r>
-                        <a:rPr sz="1600" b="0">
+                        <a:rPr sz="1000" b="0">
                           <a:solidFill>
                             <a:srgbClr val="191D2E"/>
                           </a:solidFill>
@@ -15640,7 +14844,7 @@
                     <a:lstStyle/>
                     <a:p>
                       <a:r>
-                        <a:rPr sz="1600" b="0">
+                        <a:rPr sz="1000" b="0">
                           <a:solidFill>
                             <a:srgbClr val="191D2E"/>
                           </a:solidFill>
@@ -15657,14 +14861,14 @@
                   </a:tcPr>
                 </a:tc>
               </a:tr>
-              <a:tr h="146538">
-                <a:tc>
-                  <a:txBody>
-                    <a:bodyPr wrap="square"/>
-                    <a:lstStyle/>
-                    <a:p>
-                      <a:r>
-                        <a:rPr sz="1600" b="0">
+              <a:tr h="381000">
+                <a:tc>
+                  <a:txBody>
+                    <a:bodyPr wrap="square"/>
+                    <a:lstStyle/>
+                    <a:p>
+                      <a:r>
+                        <a:rPr sz="1000" b="0">
                           <a:solidFill>
                             <a:srgbClr val="191D2E"/>
                           </a:solidFill>
@@ -15686,7 +14890,7 @@
                     <a:lstStyle/>
                     <a:p>
                       <a:r>
-                        <a:rPr sz="1600" b="0">
+                        <a:rPr sz="1000" b="0">
                           <a:solidFill>
                             <a:srgbClr val="191D2E"/>
                           </a:solidFill>
@@ -15708,7 +14912,7 @@
                     <a:lstStyle/>
                     <a:p>
                       <a:r>
-                        <a:rPr sz="1600" b="0">
+                        <a:rPr sz="1000" b="0">
                           <a:solidFill>
                             <a:srgbClr val="191D2E"/>
                           </a:solidFill>
@@ -15730,7 +14934,7 @@
                     <a:lstStyle/>
                     <a:p>
                       <a:r>
-                        <a:rPr sz="1600" b="0">
+                        <a:rPr sz="1000" b="0">
                           <a:solidFill>
                             <a:srgbClr val="191D2E"/>
                           </a:solidFill>
@@ -15747,14 +14951,14 @@
                   </a:tcPr>
                 </a:tc>
               </a:tr>
-              <a:tr h="146538">
-                <a:tc>
-                  <a:txBody>
-                    <a:bodyPr wrap="square"/>
-                    <a:lstStyle/>
-                    <a:p>
-                      <a:r>
-                        <a:rPr sz="1600" b="0">
+              <a:tr h="381000">
+                <a:tc>
+                  <a:txBody>
+                    <a:bodyPr wrap="square"/>
+                    <a:lstStyle/>
+                    <a:p>
+                      <a:r>
+                        <a:rPr sz="1000" b="0">
                           <a:solidFill>
                             <a:srgbClr val="191D2E"/>
                           </a:solidFill>
@@ -15776,7 +14980,7 @@
                     <a:lstStyle/>
                     <a:p>
                       <a:r>
-                        <a:rPr sz="1600" b="0">
+                        <a:rPr sz="1000" b="0">
                           <a:solidFill>
                             <a:srgbClr val="191D2E"/>
                           </a:solidFill>
@@ -15798,7 +15002,7 @@
                     <a:lstStyle/>
                     <a:p>
                       <a:r>
-                        <a:rPr sz="1600" b="0">
+                        <a:rPr sz="1000" b="0">
                           <a:solidFill>
                             <a:srgbClr val="191D2E"/>
                           </a:solidFill>
@@ -15820,7 +15024,7 @@
                     <a:lstStyle/>
                     <a:p>
                       <a:r>
-                        <a:rPr sz="1600" b="0">
+                        <a:rPr sz="1000" b="0">
                           <a:solidFill>
                             <a:srgbClr val="191D2E"/>
                           </a:solidFill>
@@ -15837,14 +15041,14 @@
                   </a:tcPr>
                 </a:tc>
               </a:tr>
-              <a:tr h="146538">
-                <a:tc>
-                  <a:txBody>
-                    <a:bodyPr wrap="square"/>
-                    <a:lstStyle/>
-                    <a:p>
-                      <a:r>
-                        <a:rPr sz="1600" b="0">
+              <a:tr h="381000">
+                <a:tc>
+                  <a:txBody>
+                    <a:bodyPr wrap="square"/>
+                    <a:lstStyle/>
+                    <a:p>
+                      <a:r>
+                        <a:rPr sz="1000" b="0">
                           <a:solidFill>
                             <a:srgbClr val="191D2E"/>
                           </a:solidFill>
@@ -15866,7 +15070,7 @@
                     <a:lstStyle/>
                     <a:p>
                       <a:r>
-                        <a:rPr sz="1600" b="0">
+                        <a:rPr sz="1000" b="0">
                           <a:solidFill>
                             <a:srgbClr val="191D2E"/>
                           </a:solidFill>
@@ -15888,7 +15092,7 @@
                     <a:lstStyle/>
                     <a:p>
                       <a:r>
-                        <a:rPr sz="1600" b="0">
+                        <a:rPr sz="1000" b="0">
                           <a:solidFill>
                             <a:srgbClr val="191D2E"/>
                           </a:solidFill>
@@ -15910,7 +15114,7 @@
                     <a:lstStyle/>
                     <a:p>
                       <a:r>
-                        <a:rPr sz="1600" b="0">
+                        <a:rPr sz="1000" b="0">
                           <a:solidFill>
                             <a:srgbClr val="191D2E"/>
                           </a:solidFill>
@@ -15927,14 +15131,14 @@
                   </a:tcPr>
                 </a:tc>
               </a:tr>
-              <a:tr h="146538">
-                <a:tc>
-                  <a:txBody>
-                    <a:bodyPr wrap="square"/>
-                    <a:lstStyle/>
-                    <a:p>
-                      <a:r>
-                        <a:rPr sz="1600" b="0">
+              <a:tr h="381000">
+                <a:tc>
+                  <a:txBody>
+                    <a:bodyPr wrap="square"/>
+                    <a:lstStyle/>
+                    <a:p>
+                      <a:r>
+                        <a:rPr sz="1000" b="0">
                           <a:solidFill>
                             <a:srgbClr val="191D2E"/>
                           </a:solidFill>
@@ -15956,7 +15160,7 @@
                     <a:lstStyle/>
                     <a:p>
                       <a:r>
-                        <a:rPr sz="1600" b="0">
+                        <a:rPr sz="1000" b="0">
                           <a:solidFill>
                             <a:srgbClr val="191D2E"/>
                           </a:solidFill>
@@ -15978,7 +15182,7 @@
                     <a:lstStyle/>
                     <a:p>
                       <a:r>
-                        <a:rPr sz="1600" b="0">
+                        <a:rPr sz="1000" b="0">
                           <a:solidFill>
                             <a:srgbClr val="191D2E"/>
                           </a:solidFill>
@@ -16000,7 +15204,7 @@
                     <a:lstStyle/>
                     <a:p>
                       <a:r>
-                        <a:rPr sz="1600" b="0">
+                        <a:rPr sz="1000" b="0">
                           <a:solidFill>
                             <a:srgbClr val="191D2E"/>
                           </a:solidFill>
@@ -16017,14 +15221,14 @@
                   </a:tcPr>
                 </a:tc>
               </a:tr>
-              <a:tr h="146538">
-                <a:tc>
-                  <a:txBody>
-                    <a:bodyPr wrap="square"/>
-                    <a:lstStyle/>
-                    <a:p>
-                      <a:r>
-                        <a:rPr sz="1600" b="0">
+              <a:tr h="381000">
+                <a:tc>
+                  <a:txBody>
+                    <a:bodyPr wrap="square"/>
+                    <a:lstStyle/>
+                    <a:p>
+                      <a:r>
+                        <a:rPr sz="1000" b="0">
                           <a:solidFill>
                             <a:srgbClr val="191D2E"/>
                           </a:solidFill>
@@ -16046,7 +15250,7 @@
                     <a:lstStyle/>
                     <a:p>
                       <a:r>
-                        <a:rPr sz="1600" b="0">
+                        <a:rPr sz="1000" b="0">
                           <a:solidFill>
                             <a:srgbClr val="191D2E"/>
                           </a:solidFill>
@@ -16068,7 +15272,7 @@
                     <a:lstStyle/>
                     <a:p>
                       <a:r>
-                        <a:rPr sz="1600" b="0">
+                        <a:rPr sz="1000" b="0">
                           <a:solidFill>
                             <a:srgbClr val="191D2E"/>
                           </a:solidFill>
@@ -16090,7 +15294,7 @@
                     <a:lstStyle/>
                     <a:p>
                       <a:r>
-                        <a:rPr sz="1600" b="0">
+                        <a:rPr sz="1000" b="0">
                           <a:solidFill>
                             <a:srgbClr val="191D2E"/>
                           </a:solidFill>
@@ -16107,14 +15311,14 @@
                   </a:tcPr>
                 </a:tc>
               </a:tr>
-              <a:tr h="146538">
-                <a:tc>
-                  <a:txBody>
-                    <a:bodyPr wrap="square"/>
-                    <a:lstStyle/>
-                    <a:p>
-                      <a:r>
-                        <a:rPr sz="1600" b="0">
+              <a:tr h="381000">
+                <a:tc>
+                  <a:txBody>
+                    <a:bodyPr wrap="square"/>
+                    <a:lstStyle/>
+                    <a:p>
+                      <a:r>
+                        <a:rPr sz="1000" b="0">
                           <a:solidFill>
                             <a:srgbClr val="191D2E"/>
                           </a:solidFill>
@@ -16136,7 +15340,7 @@
                     <a:lstStyle/>
                     <a:p>
                       <a:r>
-                        <a:rPr sz="1600" b="0">
+                        <a:rPr sz="1000" b="0">
                           <a:solidFill>
                             <a:srgbClr val="191D2E"/>
                           </a:solidFill>
@@ -16158,7 +15362,7 @@
                     <a:lstStyle/>
                     <a:p>
                       <a:r>
-                        <a:rPr sz="1600" b="0">
+                        <a:rPr sz="1000" b="0">
                           <a:solidFill>
                             <a:srgbClr val="191D2E"/>
                           </a:solidFill>
@@ -16180,7 +15384,7 @@
                     <a:lstStyle/>
                     <a:p>
                       <a:r>
-                        <a:rPr sz="1600" b="0">
+                        <a:rPr sz="1000" b="0">
                           <a:solidFill>
                             <a:srgbClr val="191D2E"/>
                           </a:solidFill>
@@ -16197,14 +15401,14 @@
                   </a:tcPr>
                 </a:tc>
               </a:tr>
-              <a:tr h="146538">
-                <a:tc>
-                  <a:txBody>
-                    <a:bodyPr wrap="square"/>
-                    <a:lstStyle/>
-                    <a:p>
-                      <a:r>
-                        <a:rPr sz="1600" b="0">
+              <a:tr h="381000">
+                <a:tc>
+                  <a:txBody>
+                    <a:bodyPr wrap="square"/>
+                    <a:lstStyle/>
+                    <a:p>
+                      <a:r>
+                        <a:rPr sz="1000" b="0">
                           <a:solidFill>
                             <a:srgbClr val="191D2E"/>
                           </a:solidFill>
@@ -16226,7 +15430,7 @@
                     <a:lstStyle/>
                     <a:p>
                       <a:r>
-                        <a:rPr sz="1600" b="0">
+                        <a:rPr sz="1000" b="0">
                           <a:solidFill>
                             <a:srgbClr val="191D2E"/>
                           </a:solidFill>
@@ -16248,7 +15452,7 @@
                     <a:lstStyle/>
                     <a:p>
                       <a:r>
-                        <a:rPr sz="1600" b="0">
+                        <a:rPr sz="1000" b="0">
                           <a:solidFill>
                             <a:srgbClr val="191D2E"/>
                           </a:solidFill>
@@ -16270,7 +15474,7 @@
                     <a:lstStyle/>
                     <a:p>
                       <a:r>
-                        <a:rPr sz="1600" b="0">
+                        <a:rPr sz="1000" b="0">
                           <a:solidFill>
                             <a:srgbClr val="191D2E"/>
                           </a:solidFill>
@@ -16287,14 +15491,14 @@
                   </a:tcPr>
                 </a:tc>
               </a:tr>
-              <a:tr h="146538">
-                <a:tc>
-                  <a:txBody>
-                    <a:bodyPr wrap="square"/>
-                    <a:lstStyle/>
-                    <a:p>
-                      <a:r>
-                        <a:rPr sz="1600" b="0">
+              <a:tr h="381000">
+                <a:tc>
+                  <a:txBody>
+                    <a:bodyPr wrap="square"/>
+                    <a:lstStyle/>
+                    <a:p>
+                      <a:r>
+                        <a:rPr sz="1000" b="0">
                           <a:solidFill>
                             <a:srgbClr val="191D2E"/>
                           </a:solidFill>
@@ -16316,7 +15520,7 @@
                     <a:lstStyle/>
                     <a:p>
                       <a:r>
-                        <a:rPr sz="1600" b="0">
+                        <a:rPr sz="1000" b="0">
                           <a:solidFill>
                             <a:srgbClr val="191D2E"/>
                           </a:solidFill>
@@ -16338,7 +15542,7 @@
                     <a:lstStyle/>
                     <a:p>
                       <a:r>
-                        <a:rPr sz="1600" b="0">
+                        <a:rPr sz="1000" b="0">
                           <a:solidFill>
                             <a:srgbClr val="191D2E"/>
                           </a:solidFill>
@@ -16360,7 +15564,7 @@
                     <a:lstStyle/>
                     <a:p>
                       <a:r>
-                        <a:rPr sz="1600" b="0">
+                        <a:rPr sz="1000" b="0">
                           <a:solidFill>
                             <a:srgbClr val="191D2E"/>
                           </a:solidFill>
@@ -16377,14 +15581,14 @@
                   </a:tcPr>
                 </a:tc>
               </a:tr>
-              <a:tr h="146538">
-                <a:tc>
-                  <a:txBody>
-                    <a:bodyPr wrap="square"/>
-                    <a:lstStyle/>
-                    <a:p>
-                      <a:r>
-                        <a:rPr sz="1600" b="0">
+              <a:tr h="381000">
+                <a:tc>
+                  <a:txBody>
+                    <a:bodyPr wrap="square"/>
+                    <a:lstStyle/>
+                    <a:p>
+                      <a:r>
+                        <a:rPr sz="1000" b="0">
                           <a:solidFill>
                             <a:srgbClr val="191D2E"/>
                           </a:solidFill>
@@ -16406,7 +15610,7 @@
                     <a:lstStyle/>
                     <a:p>
                       <a:r>
-                        <a:rPr sz="1600" b="0">
+                        <a:rPr sz="1000" b="0">
                           <a:solidFill>
                             <a:srgbClr val="191D2E"/>
                           </a:solidFill>
@@ -16428,7 +15632,7 @@
                     <a:lstStyle/>
                     <a:p>
                       <a:r>
-                        <a:rPr sz="1600" b="0">
+                        <a:rPr sz="1000" b="0">
                           <a:solidFill>
                             <a:srgbClr val="191D2E"/>
                           </a:solidFill>
@@ -16450,7 +15654,7 @@
                     <a:lstStyle/>
                     <a:p>
                       <a:r>
-                        <a:rPr sz="1600" b="0">
+                        <a:rPr sz="1000" b="0">
                           <a:solidFill>
                             <a:srgbClr val="191D2E"/>
                           </a:solidFill>
@@ -16467,14 +15671,14 @@
                   </a:tcPr>
                 </a:tc>
               </a:tr>
-              <a:tr h="146538">
-                <a:tc>
-                  <a:txBody>
-                    <a:bodyPr wrap="square"/>
-                    <a:lstStyle/>
-                    <a:p>
-                      <a:r>
-                        <a:rPr sz="1600" b="0">
+              <a:tr h="381000">
+                <a:tc>
+                  <a:txBody>
+                    <a:bodyPr wrap="square"/>
+                    <a:lstStyle/>
+                    <a:p>
+                      <a:r>
+                        <a:rPr sz="1000" b="0">
                           <a:solidFill>
                             <a:srgbClr val="191D2E"/>
                           </a:solidFill>
@@ -16496,7 +15700,7 @@
                     <a:lstStyle/>
                     <a:p>
                       <a:r>
-                        <a:rPr sz="1600" b="0">
+                        <a:rPr sz="1000" b="0">
                           <a:solidFill>
                             <a:srgbClr val="191D2E"/>
                           </a:solidFill>
@@ -16518,7 +15722,7 @@
                     <a:lstStyle/>
                     <a:p>
                       <a:r>
-                        <a:rPr sz="1600" b="0">
+                        <a:rPr sz="1000" b="0">
                           <a:solidFill>
                             <a:srgbClr val="191D2E"/>
                           </a:solidFill>
@@ -16540,7 +15744,7 @@
                     <a:lstStyle/>
                     <a:p>
                       <a:r>
-                        <a:rPr sz="1600" b="0">
+                        <a:rPr sz="1000" b="0">
                           <a:solidFill>
                             <a:srgbClr val="191D2E"/>
                           </a:solidFill>
@@ -16557,14 +15761,14 @@
                   </a:tcPr>
                 </a:tc>
               </a:tr>
-              <a:tr h="146538">
-                <a:tc>
-                  <a:txBody>
-                    <a:bodyPr wrap="square"/>
-                    <a:lstStyle/>
-                    <a:p>
-                      <a:r>
-                        <a:rPr sz="1600" b="0">
+              <a:tr h="381000">
+                <a:tc>
+                  <a:txBody>
+                    <a:bodyPr wrap="square"/>
+                    <a:lstStyle/>
+                    <a:p>
+                      <a:r>
+                        <a:rPr sz="1000" b="0">
                           <a:solidFill>
                             <a:srgbClr val="191D2E"/>
                           </a:solidFill>
@@ -16586,7 +15790,7 @@
                     <a:lstStyle/>
                     <a:p>
                       <a:r>
-                        <a:rPr sz="1600" b="0">
+                        <a:rPr sz="1000" b="0">
                           <a:solidFill>
                             <a:srgbClr val="191D2E"/>
                           </a:solidFill>
@@ -16608,7 +15812,7 @@
                     <a:lstStyle/>
                     <a:p>
                       <a:r>
-                        <a:rPr sz="1600" b="0">
+                        <a:rPr sz="1000" b="0">
                           <a:solidFill>
                             <a:srgbClr val="191D2E"/>
                           </a:solidFill>
@@ -16630,7 +15834,7 @@
                     <a:lstStyle/>
                     <a:p>
                       <a:r>
-                        <a:rPr sz="1600" b="0">
+                        <a:rPr sz="1000" b="0">
                           <a:solidFill>
                             <a:srgbClr val="191D2E"/>
                           </a:solidFill>
@@ -16647,14 +15851,14 @@
                   </a:tcPr>
                 </a:tc>
               </a:tr>
-              <a:tr h="146550">
-                <a:tc>
-                  <a:txBody>
-                    <a:bodyPr wrap="square"/>
-                    <a:lstStyle/>
-                    <a:p>
-                      <a:r>
-                        <a:rPr sz="1600" b="0">
+              <a:tr h="381000">
+                <a:tc>
+                  <a:txBody>
+                    <a:bodyPr wrap="square"/>
+                    <a:lstStyle/>
+                    <a:p>
+                      <a:r>
+                        <a:rPr sz="1000" b="0">
                           <a:solidFill>
                             <a:srgbClr val="191D2E"/>
                           </a:solidFill>
@@ -16676,7 +15880,7 @@
                     <a:lstStyle/>
                     <a:p>
                       <a:r>
-                        <a:rPr sz="1600" b="0">
+                        <a:rPr sz="1000" b="0">
                           <a:solidFill>
                             <a:srgbClr val="191D2E"/>
                           </a:solidFill>
@@ -16698,7 +15902,7 @@
                     <a:lstStyle/>
                     <a:p>
                       <a:r>
-                        <a:rPr sz="1600" b="0">
+                        <a:rPr sz="1000" b="0">
                           <a:solidFill>
                             <a:srgbClr val="191D2E"/>
                           </a:solidFill>
@@ -16720,7 +15924,7 @@
                     <a:lstStyle/>
                     <a:p>
                       <a:r>
-                        <a:rPr sz="1600" b="0">
+                        <a:rPr sz="1000" b="0">
                           <a:solidFill>
                             <a:srgbClr val="191D2E"/>
                           </a:solidFill>

--- a/public/downloads/praesentation/M04.pptx
+++ b/public/downloads/praesentation/M04.pptx
@@ -3447,7 +3447,7 @@
     <p:bg>
       <p:bgPr>
         <a:solidFill>
-          <a:srgbClr val="191D2E"/>
+          <a:srgbClr val="1F2B56"/>
         </a:solidFill>
         <a:effectLst/>
       </p:bgPr>
@@ -3956,7 +3956,7 @@
                   </a:txBody>
                   <a:tcPr>
                     <a:solidFill>
-                      <a:srgbClr val="191D2E"/>
+                      <a:srgbClr val="1F2B56"/>
                     </a:solidFill>
                   </a:tcPr>
                 </a:tc>
@@ -3978,7 +3978,7 @@
                   </a:txBody>
                   <a:tcPr>
                     <a:solidFill>
-                      <a:srgbClr val="191D2E"/>
+                      <a:srgbClr val="1F2B56"/>
                     </a:solidFill>
                   </a:tcPr>
                 </a:tc>
@@ -4000,7 +4000,7 @@
                   </a:txBody>
                   <a:tcPr>
                     <a:solidFill>
-                      <a:srgbClr val="191D2E"/>
+                      <a:srgbClr val="1F2B56"/>
                     </a:solidFill>
                   </a:tcPr>
                 </a:tc>
@@ -4022,7 +4022,7 @@
                   </a:txBody>
                   <a:tcPr>
                     <a:solidFill>
-                      <a:srgbClr val="191D2E"/>
+                      <a:srgbClr val="1F2B56"/>
                     </a:solidFill>
                   </a:tcPr>
                 </a:tc>
@@ -4844,7 +4844,7 @@
         <p:spPr>
           <a:xfrm>
             <a:off x="609600" y="920750"/>
-            <a:ext cx="10972800" cy="1778000"/>
+            <a:ext cx="4826000" cy="1778000"/>
           </a:xfrm>
           <a:prstGeom prst="rect">
             <a:avLst/>
@@ -4872,57 +4872,14 @@
       </p:sp>
       <p:sp>
         <p:nvSpPr>
-          <p:cNvPr id="7" name="Rectangle 6"/>
-          <p:cNvSpPr/>
+          <p:cNvPr id="7" name="TextBox 6"/>
+          <p:cNvSpPr txBox="1"/>
           <p:nvPr/>
         </p:nvSpPr>
         <p:spPr>
           <a:xfrm>
-            <a:off x="609600" y="2762250"/>
-            <a:ext cx="10972800" cy="6350"/>
-          </a:xfrm>
-          <a:prstGeom prst="rect">
-            <a:avLst/>
-          </a:prstGeom>
-          <a:solidFill>
-            <a:srgbClr val="E0E0E8"/>
-          </a:solidFill>
-          <a:ln>
-            <a:noFill/>
-          </a:ln>
-        </p:spPr>
-        <p:style>
-          <a:lnRef idx="1">
-            <a:schemeClr val="accent1"/>
-          </a:lnRef>
-          <a:fillRef idx="3">
-            <a:schemeClr val="accent1"/>
-          </a:fillRef>
-          <a:effectRef idx="2">
-            <a:schemeClr val="accent1"/>
-          </a:effectRef>
-          <a:fontRef idx="minor">
-            <a:schemeClr val="lt1"/>
-          </a:fontRef>
-        </p:style>
-        <p:txBody>
-          <a:bodyPr rtlCol="0" anchor="ctr"/>
-          <a:lstStyle/>
-          <a:p>
-            <a:pPr algn="ctr"/>
-          </a:p>
-        </p:txBody>
-      </p:sp>
-      <p:sp>
-        <p:nvSpPr>
-          <p:cNvPr id="8" name="TextBox 7"/>
-          <p:cNvSpPr txBox="1"/>
-          <p:nvPr/>
-        </p:nvSpPr>
-        <p:spPr>
-          <a:xfrm>
-            <a:off x="609600" y="2876550"/>
-            <a:ext cx="254000" cy="355600"/>
+            <a:off x="609600" y="2825750"/>
+            <a:ext cx="4826000" cy="1016000"/>
           </a:xfrm>
           <a:prstGeom prst="rect">
             <a:avLst/>
@@ -4937,44 +4894,9 @@
           <a:p>
             <a:pPr algn="l"/>
             <a:r>
-              <a:rPr sz="2200" b="0" i="0">
-                <a:solidFill>
-                  <a:srgbClr val="1F2B56"/>
-                </a:solidFill>
-                <a:latin typeface="Georgia"/>
-              </a:rPr>
-              <a:t>–</a:t>
-            </a:r>
-          </a:p>
-        </p:txBody>
-      </p:sp>
-      <p:sp>
-        <p:nvSpPr>
-          <p:cNvPr id="9" name="TextBox 8"/>
-          <p:cNvSpPr txBox="1"/>
-          <p:nvPr/>
-        </p:nvSpPr>
-        <p:spPr>
-          <a:xfrm>
-            <a:off x="939799" y="2851150"/>
-            <a:ext cx="10642600" cy="508000"/>
-          </a:xfrm>
-          <a:prstGeom prst="rect">
-            <a:avLst/>
-          </a:prstGeom>
-          <a:noFill/>
-        </p:spPr>
-        <p:txBody>
-          <a:bodyPr wrap="square">
-            <a:normAutofit/>
-          </a:bodyPr>
-          <a:lstStyle/>
-          <a:p>
-            <a:pPr algn="l"/>
-            <a:r>
               <a:rPr sz="1400" b="0" i="0">
                 <a:solidFill>
-                  <a:srgbClr val="191D2E"/>
+                  <a:srgbClr val="4D5270"/>
                 </a:solidFill>
                 <a:latin typeface="Georgia"/>
               </a:rPr>
@@ -4983,49 +4905,707 @@
           </a:p>
         </p:txBody>
       </p:sp>
-      <p:sp>
-        <p:nvSpPr>
-          <p:cNvPr id="10" name="Rectangle 9"/>
-          <p:cNvSpPr/>
+      <p:graphicFrame>
+        <p:nvGraphicFramePr>
+          <p:cNvPr id="8" name="Table 7"/>
+          <p:cNvGraphicFramePr>
+            <a:graphicFrameLocks noGrp="1"/>
+          </p:cNvGraphicFramePr>
           <p:nvPr/>
-        </p:nvSpPr>
-        <p:spPr>
-          <a:xfrm>
-            <a:off x="939799" y="3333750"/>
-            <a:ext cx="10642600" cy="6350"/>
-          </a:xfrm>
-          <a:prstGeom prst="rect">
-            <a:avLst/>
-          </a:prstGeom>
-          <a:solidFill>
-            <a:srgbClr val="E0E0E8"/>
-          </a:solidFill>
-          <a:ln>
-            <a:noFill/>
-          </a:ln>
-        </p:spPr>
-        <p:style>
-          <a:lnRef idx="1">
-            <a:schemeClr val="accent1"/>
-          </a:lnRef>
-          <a:fillRef idx="3">
-            <a:schemeClr val="accent1"/>
-          </a:fillRef>
-          <a:effectRef idx="2">
-            <a:schemeClr val="accent1"/>
-          </a:effectRef>
-          <a:fontRef idx="minor">
-            <a:schemeClr val="lt1"/>
-          </a:fontRef>
-        </p:style>
-        <p:txBody>
-          <a:bodyPr rtlCol="0" anchor="ctr"/>
-          <a:lstStyle/>
-          <a:p>
-            <a:pPr algn="ctr"/>
-          </a:p>
-        </p:txBody>
-      </p:sp>
+        </p:nvGraphicFramePr>
+        <p:xfrm>
+          <a:off x="5715000" y="920750"/>
+          <a:ext cx="5867400" cy="2286000"/>
+        </p:xfrm>
+        <a:graphic>
+          <a:graphicData uri="http://schemas.openxmlformats.org/drawingml/2006/table">
+            <a:tbl>
+              <a:tblPr firstRow="1" bandRow="1">
+                <a:tableStyleId>{5C22544A-7EE6-4342-B048-85BDC9FD1C3A}</a:tableStyleId>
+              </a:tblPr>
+              <a:tblGrid>
+                <a:gridCol w="1173480"/>
+                <a:gridCol w="1173480"/>
+                <a:gridCol w="1173480"/>
+                <a:gridCol w="1173480"/>
+                <a:gridCol w="1173480"/>
+              </a:tblGrid>
+              <a:tr h="381000">
+                <a:tc>
+                  <a:txBody>
+                    <a:bodyPr wrap="square"/>
+                    <a:lstStyle/>
+                    <a:p>
+                      <a:r>
+                        <a:rPr sz="1000" b="1">
+                          <a:solidFill>
+                            <a:srgbClr val="F8F8FA"/>
+                          </a:solidFill>
+                          <a:latin typeface="Courier New"/>
+                        </a:rPr>
+                        <a:t>Aussage</a:t>
+                      </a:r>
+                    </a:p>
+                  </a:txBody>
+                  <a:tcPr>
+                    <a:solidFill>
+                      <a:srgbClr val="1F2B56"/>
+                    </a:solidFill>
+                  </a:tcPr>
+                </a:tc>
+                <a:tc>
+                  <a:txBody>
+                    <a:bodyPr wrap="square"/>
+                    <a:lstStyle/>
+                    <a:p>
+                      <a:r>
+                        <a:rPr sz="1000" b="1">
+                          <a:solidFill>
+                            <a:srgbClr val="F8F8FA"/>
+                          </a:solidFill>
+                          <a:latin typeface="Courier New"/>
+                        </a:rPr>
+                        <a:t>4 – voll</a:t>
+                      </a:r>
+                    </a:p>
+                  </a:txBody>
+                  <a:tcPr>
+                    <a:solidFill>
+                      <a:srgbClr val="1F2B56"/>
+                    </a:solidFill>
+                  </a:tcPr>
+                </a:tc>
+                <a:tc>
+                  <a:txBody>
+                    <a:bodyPr wrap="square"/>
+                    <a:lstStyle/>
+                    <a:p>
+                      <a:r>
+                        <a:rPr sz="1000" b="1">
+                          <a:solidFill>
+                            <a:srgbClr val="F8F8FA"/>
+                          </a:solidFill>
+                          <a:latin typeface="Courier New"/>
+                        </a:rPr>
+                        <a:t>3 – eher</a:t>
+                      </a:r>
+                    </a:p>
+                  </a:txBody>
+                  <a:tcPr>
+                    <a:solidFill>
+                      <a:srgbClr val="1F2B56"/>
+                    </a:solidFill>
+                  </a:tcPr>
+                </a:tc>
+                <a:tc>
+                  <a:txBody>
+                    <a:bodyPr wrap="square"/>
+                    <a:lstStyle/>
+                    <a:p>
+                      <a:r>
+                        <a:rPr sz="1000" b="1">
+                          <a:solidFill>
+                            <a:srgbClr val="F8F8FA"/>
+                          </a:solidFill>
+                          <a:latin typeface="Courier New"/>
+                        </a:rPr>
+                        <a:t>2 – kaum</a:t>
+                      </a:r>
+                    </a:p>
+                  </a:txBody>
+                  <a:tcPr>
+                    <a:solidFill>
+                      <a:srgbClr val="1F2B56"/>
+                    </a:solidFill>
+                  </a:tcPr>
+                </a:tc>
+                <a:tc>
+                  <a:txBody>
+                    <a:bodyPr wrap="square"/>
+                    <a:lstStyle/>
+                    <a:p>
+                      <a:r>
+                        <a:rPr sz="1000" b="1">
+                          <a:solidFill>
+                            <a:srgbClr val="F8F8FA"/>
+                          </a:solidFill>
+                          <a:latin typeface="Courier New"/>
+                        </a:rPr>
+                        <a:t>1 – nicht</a:t>
+                      </a:r>
+                    </a:p>
+                  </a:txBody>
+                  <a:tcPr>
+                    <a:solidFill>
+                      <a:srgbClr val="1F2B56"/>
+                    </a:solidFill>
+                  </a:tcPr>
+                </a:tc>
+              </a:tr>
+              <a:tr h="381000">
+                <a:tc>
+                  <a:txBody>
+                    <a:bodyPr wrap="square"/>
+                    <a:lstStyle/>
+                    <a:p>
+                      <a:r>
+                        <a:rPr sz="1000" b="0">
+                          <a:solidFill>
+                            <a:srgbClr val="191D2E"/>
+                          </a:solidFill>
+                          <a:latin typeface="Courier New"/>
+                        </a:rPr>
+                        <a:t>Ich habe die Ampel-Checkliste bei mind. 3 Kunden selbstständig angewendet.</a:t>
+                      </a:r>
+                    </a:p>
+                  </a:txBody>
+                  <a:tcPr>
+                    <a:solidFill>
+                      <a:srgbClr val="F8F8FA"/>
+                    </a:solidFill>
+                  </a:tcPr>
+                </a:tc>
+                <a:tc>
+                  <a:txBody>
+                    <a:bodyPr wrap="square"/>
+                    <a:lstStyle/>
+                    <a:p>
+                      <a:r>
+                        <a:rPr sz="1000" b="0">
+                          <a:solidFill>
+                            <a:srgbClr val="191D2E"/>
+                          </a:solidFill>
+                          <a:latin typeface="Courier New"/>
+                        </a:rPr>
+                        <a:t>☐</a:t>
+                      </a:r>
+                    </a:p>
+                  </a:txBody>
+                  <a:tcPr>
+                    <a:solidFill>
+                      <a:srgbClr val="F8F8FA"/>
+                    </a:solidFill>
+                  </a:tcPr>
+                </a:tc>
+                <a:tc>
+                  <a:txBody>
+                    <a:bodyPr wrap="square"/>
+                    <a:lstStyle/>
+                    <a:p>
+                      <a:r>
+                        <a:rPr sz="1000" b="0">
+                          <a:solidFill>
+                            <a:srgbClr val="191D2E"/>
+                          </a:solidFill>
+                          <a:latin typeface="Courier New"/>
+                        </a:rPr>
+                        <a:t>☐</a:t>
+                      </a:r>
+                    </a:p>
+                  </a:txBody>
+                  <a:tcPr>
+                    <a:solidFill>
+                      <a:srgbClr val="F8F8FA"/>
+                    </a:solidFill>
+                  </a:tcPr>
+                </a:tc>
+                <a:tc>
+                  <a:txBody>
+                    <a:bodyPr wrap="square"/>
+                    <a:lstStyle/>
+                    <a:p>
+                      <a:r>
+                        <a:rPr sz="1000" b="0">
+                          <a:solidFill>
+                            <a:srgbClr val="191D2E"/>
+                          </a:solidFill>
+                          <a:latin typeface="Courier New"/>
+                        </a:rPr>
+                        <a:t>☐</a:t>
+                      </a:r>
+                    </a:p>
+                  </a:txBody>
+                  <a:tcPr>
+                    <a:solidFill>
+                      <a:srgbClr val="F8F8FA"/>
+                    </a:solidFill>
+                  </a:tcPr>
+                </a:tc>
+                <a:tc>
+                  <a:txBody>
+                    <a:bodyPr wrap="square"/>
+                    <a:lstStyle/>
+                    <a:p>
+                      <a:r>
+                        <a:rPr sz="1000" b="0">
+                          <a:solidFill>
+                            <a:srgbClr val="191D2E"/>
+                          </a:solidFill>
+                          <a:latin typeface="Courier New"/>
+                        </a:rPr>
+                        <a:t>☐</a:t>
+                      </a:r>
+                    </a:p>
+                  </a:txBody>
+                  <a:tcPr>
+                    <a:solidFill>
+                      <a:srgbClr val="F8F8FA"/>
+                    </a:solidFill>
+                  </a:tcPr>
+                </a:tc>
+              </a:tr>
+              <a:tr h="381000">
+                <a:tc>
+                  <a:txBody>
+                    <a:bodyPr wrap="square"/>
+                    <a:lstStyle/>
+                    <a:p>
+                      <a:r>
+                        <a:rPr sz="1000" b="0">
+                          <a:solidFill>
+                            <a:srgbClr val="191D2E"/>
+                          </a:solidFill>
+                          <a:latin typeface="Courier New"/>
+                        </a:rPr>
+                        <a:t>Ich kann quantitative und qualitative Signale klar voneinander abgrenzen.</a:t>
+                      </a:r>
+                    </a:p>
+                  </a:txBody>
+                  <a:tcPr>
+                    <a:solidFill>
+                      <a:srgbClr val="F0F0F5"/>
+                    </a:solidFill>
+                  </a:tcPr>
+                </a:tc>
+                <a:tc>
+                  <a:txBody>
+                    <a:bodyPr wrap="square"/>
+                    <a:lstStyle/>
+                    <a:p>
+                      <a:r>
+                        <a:rPr sz="1000" b="0">
+                          <a:solidFill>
+                            <a:srgbClr val="191D2E"/>
+                          </a:solidFill>
+                          <a:latin typeface="Courier New"/>
+                        </a:rPr>
+                        <a:t>☐</a:t>
+                      </a:r>
+                    </a:p>
+                  </a:txBody>
+                  <a:tcPr>
+                    <a:solidFill>
+                      <a:srgbClr val="F0F0F5"/>
+                    </a:solidFill>
+                  </a:tcPr>
+                </a:tc>
+                <a:tc>
+                  <a:txBody>
+                    <a:bodyPr wrap="square"/>
+                    <a:lstStyle/>
+                    <a:p>
+                      <a:r>
+                        <a:rPr sz="1000" b="0">
+                          <a:solidFill>
+                            <a:srgbClr val="191D2E"/>
+                          </a:solidFill>
+                          <a:latin typeface="Courier New"/>
+                        </a:rPr>
+                        <a:t>☐</a:t>
+                      </a:r>
+                    </a:p>
+                  </a:txBody>
+                  <a:tcPr>
+                    <a:solidFill>
+                      <a:srgbClr val="F0F0F5"/>
+                    </a:solidFill>
+                  </a:tcPr>
+                </a:tc>
+                <a:tc>
+                  <a:txBody>
+                    <a:bodyPr wrap="square"/>
+                    <a:lstStyle/>
+                    <a:p>
+                      <a:r>
+                        <a:rPr sz="1000" b="0">
+                          <a:solidFill>
+                            <a:srgbClr val="191D2E"/>
+                          </a:solidFill>
+                          <a:latin typeface="Courier New"/>
+                        </a:rPr>
+                        <a:t>☐</a:t>
+                      </a:r>
+                    </a:p>
+                  </a:txBody>
+                  <a:tcPr>
+                    <a:solidFill>
+                      <a:srgbClr val="F0F0F5"/>
+                    </a:solidFill>
+                  </a:tcPr>
+                </a:tc>
+                <a:tc>
+                  <a:txBody>
+                    <a:bodyPr wrap="square"/>
+                    <a:lstStyle/>
+                    <a:p>
+                      <a:r>
+                        <a:rPr sz="1000" b="0">
+                          <a:solidFill>
+                            <a:srgbClr val="191D2E"/>
+                          </a:solidFill>
+                          <a:latin typeface="Courier New"/>
+                        </a:rPr>
+                        <a:t>☐</a:t>
+                      </a:r>
+                    </a:p>
+                  </a:txBody>
+                  <a:tcPr>
+                    <a:solidFill>
+                      <a:srgbClr val="F0F0F5"/>
+                    </a:solidFill>
+                  </a:tcPr>
+                </a:tc>
+              </a:tr>
+              <a:tr h="381000">
+                <a:tc>
+                  <a:txBody>
+                    <a:bodyPr wrap="square"/>
+                    <a:lstStyle/>
+                    <a:p>
+                      <a:r>
+                        <a:rPr sz="1000" b="0">
+                          <a:solidFill>
+                            <a:srgbClr val="191D2E"/>
+                          </a:solidFill>
+                          <a:latin typeface="Courier New"/>
+                        </a:rPr>
+                        <a:t>Ich weiß, wann ich an Teamleiter / Problemkreditabteilung eskaliere.</a:t>
+                      </a:r>
+                    </a:p>
+                  </a:txBody>
+                  <a:tcPr>
+                    <a:solidFill>
+                      <a:srgbClr val="F8F8FA"/>
+                    </a:solidFill>
+                  </a:tcPr>
+                </a:tc>
+                <a:tc>
+                  <a:txBody>
+                    <a:bodyPr wrap="square"/>
+                    <a:lstStyle/>
+                    <a:p>
+                      <a:r>
+                        <a:rPr sz="1000" b="0">
+                          <a:solidFill>
+                            <a:srgbClr val="191D2E"/>
+                          </a:solidFill>
+                          <a:latin typeface="Courier New"/>
+                        </a:rPr>
+                        <a:t>☐</a:t>
+                      </a:r>
+                    </a:p>
+                  </a:txBody>
+                  <a:tcPr>
+                    <a:solidFill>
+                      <a:srgbClr val="F8F8FA"/>
+                    </a:solidFill>
+                  </a:tcPr>
+                </a:tc>
+                <a:tc>
+                  <a:txBody>
+                    <a:bodyPr wrap="square"/>
+                    <a:lstStyle/>
+                    <a:p>
+                      <a:r>
+                        <a:rPr sz="1000" b="0">
+                          <a:solidFill>
+                            <a:srgbClr val="191D2E"/>
+                          </a:solidFill>
+                          <a:latin typeface="Courier New"/>
+                        </a:rPr>
+                        <a:t>☐</a:t>
+                      </a:r>
+                    </a:p>
+                  </a:txBody>
+                  <a:tcPr>
+                    <a:solidFill>
+                      <a:srgbClr val="F8F8FA"/>
+                    </a:solidFill>
+                  </a:tcPr>
+                </a:tc>
+                <a:tc>
+                  <a:txBody>
+                    <a:bodyPr wrap="square"/>
+                    <a:lstStyle/>
+                    <a:p>
+                      <a:r>
+                        <a:rPr sz="1000" b="0">
+                          <a:solidFill>
+                            <a:srgbClr val="191D2E"/>
+                          </a:solidFill>
+                          <a:latin typeface="Courier New"/>
+                        </a:rPr>
+                        <a:t>☐</a:t>
+                      </a:r>
+                    </a:p>
+                  </a:txBody>
+                  <a:tcPr>
+                    <a:solidFill>
+                      <a:srgbClr val="F8F8FA"/>
+                    </a:solidFill>
+                  </a:tcPr>
+                </a:tc>
+                <a:tc>
+                  <a:txBody>
+                    <a:bodyPr wrap="square"/>
+                    <a:lstStyle/>
+                    <a:p>
+                      <a:r>
+                        <a:rPr sz="1000" b="0">
+                          <a:solidFill>
+                            <a:srgbClr val="191D2E"/>
+                          </a:solidFill>
+                          <a:latin typeface="Courier New"/>
+                        </a:rPr>
+                        <a:t>☐</a:t>
+                      </a:r>
+                    </a:p>
+                  </a:txBody>
+                  <a:tcPr>
+                    <a:solidFill>
+                      <a:srgbClr val="F8F8FA"/>
+                    </a:solidFill>
+                  </a:tcPr>
+                </a:tc>
+              </a:tr>
+              <a:tr h="381000">
+                <a:tc>
+                  <a:txBody>
+                    <a:bodyPr wrap="square"/>
+                    <a:lstStyle/>
+                    <a:p>
+                      <a:r>
+                        <a:rPr sz="1000" b="0">
+                          <a:solidFill>
+                            <a:srgbClr val="191D2E"/>
+                          </a:solidFill>
+                          <a:latin typeface="Courier New"/>
+                        </a:rPr>
+                        <a:t>Ich habe einen Gelb- oder Rot-Fall mit meiner Führungskraft besprochen.</a:t>
+                      </a:r>
+                    </a:p>
+                  </a:txBody>
+                  <a:tcPr>
+                    <a:solidFill>
+                      <a:srgbClr val="F0F0F5"/>
+                    </a:solidFill>
+                  </a:tcPr>
+                </a:tc>
+                <a:tc>
+                  <a:txBody>
+                    <a:bodyPr wrap="square"/>
+                    <a:lstStyle/>
+                    <a:p>
+                      <a:r>
+                        <a:rPr sz="1000" b="0">
+                          <a:solidFill>
+                            <a:srgbClr val="191D2E"/>
+                          </a:solidFill>
+                          <a:latin typeface="Courier New"/>
+                        </a:rPr>
+                        <a:t>☐</a:t>
+                      </a:r>
+                    </a:p>
+                  </a:txBody>
+                  <a:tcPr>
+                    <a:solidFill>
+                      <a:srgbClr val="F0F0F5"/>
+                    </a:solidFill>
+                  </a:tcPr>
+                </a:tc>
+                <a:tc>
+                  <a:txBody>
+                    <a:bodyPr wrap="square"/>
+                    <a:lstStyle/>
+                    <a:p>
+                      <a:r>
+                        <a:rPr sz="1000" b="0">
+                          <a:solidFill>
+                            <a:srgbClr val="191D2E"/>
+                          </a:solidFill>
+                          <a:latin typeface="Courier New"/>
+                        </a:rPr>
+                        <a:t>☐</a:t>
+                      </a:r>
+                    </a:p>
+                  </a:txBody>
+                  <a:tcPr>
+                    <a:solidFill>
+                      <a:srgbClr val="F0F0F5"/>
+                    </a:solidFill>
+                  </a:tcPr>
+                </a:tc>
+                <a:tc>
+                  <a:txBody>
+                    <a:bodyPr wrap="square"/>
+                    <a:lstStyle/>
+                    <a:p>
+                      <a:r>
+                        <a:rPr sz="1000" b="0">
+                          <a:solidFill>
+                            <a:srgbClr val="191D2E"/>
+                          </a:solidFill>
+                          <a:latin typeface="Courier New"/>
+                        </a:rPr>
+                        <a:t>☐</a:t>
+                      </a:r>
+                    </a:p>
+                  </a:txBody>
+                  <a:tcPr>
+                    <a:solidFill>
+                      <a:srgbClr val="F0F0F5"/>
+                    </a:solidFill>
+                  </a:tcPr>
+                </a:tc>
+                <a:tc>
+                  <a:txBody>
+                    <a:bodyPr wrap="square"/>
+                    <a:lstStyle/>
+                    <a:p>
+                      <a:r>
+                        <a:rPr sz="1000" b="0">
+                          <a:solidFill>
+                            <a:srgbClr val="191D2E"/>
+                          </a:solidFill>
+                          <a:latin typeface="Courier New"/>
+                        </a:rPr>
+                        <a:t>☐</a:t>
+                      </a:r>
+                    </a:p>
+                  </a:txBody>
+                  <a:tcPr>
+                    <a:solidFill>
+                      <a:srgbClr val="F0F0F5"/>
+                    </a:solidFill>
+                  </a:tcPr>
+                </a:tc>
+              </a:tr>
+              <a:tr h="381000">
+                <a:tc>
+                  <a:txBody>
+                    <a:bodyPr wrap="square"/>
+                    <a:lstStyle/>
+                    <a:p>
+                      <a:r>
+                        <a:rPr sz="1000" b="0">
+                          <a:solidFill>
+                            <a:srgbClr val="191D2E"/>
+                          </a:solidFill>
+                          <a:latin typeface="Courier New"/>
+                        </a:rPr>
+                        <a:t>Ich dokumentiere Risikoeinschätzungen revisionssicher in agree.</a:t>
+                      </a:r>
+                    </a:p>
+                  </a:txBody>
+                  <a:tcPr>
+                    <a:solidFill>
+                      <a:srgbClr val="F8F8FA"/>
+                    </a:solidFill>
+                  </a:tcPr>
+                </a:tc>
+                <a:tc>
+                  <a:txBody>
+                    <a:bodyPr wrap="square"/>
+                    <a:lstStyle/>
+                    <a:p>
+                      <a:r>
+                        <a:rPr sz="1000" b="0">
+                          <a:solidFill>
+                            <a:srgbClr val="191D2E"/>
+                          </a:solidFill>
+                          <a:latin typeface="Courier New"/>
+                        </a:rPr>
+                        <a:t>☐</a:t>
+                      </a:r>
+                    </a:p>
+                  </a:txBody>
+                  <a:tcPr>
+                    <a:solidFill>
+                      <a:srgbClr val="F8F8FA"/>
+                    </a:solidFill>
+                  </a:tcPr>
+                </a:tc>
+                <a:tc>
+                  <a:txBody>
+                    <a:bodyPr wrap="square"/>
+                    <a:lstStyle/>
+                    <a:p>
+                      <a:r>
+                        <a:rPr sz="1000" b="0">
+                          <a:solidFill>
+                            <a:srgbClr val="191D2E"/>
+                          </a:solidFill>
+                          <a:latin typeface="Courier New"/>
+                        </a:rPr>
+                        <a:t>☐</a:t>
+                      </a:r>
+                    </a:p>
+                  </a:txBody>
+                  <a:tcPr>
+                    <a:solidFill>
+                      <a:srgbClr val="F8F8FA"/>
+                    </a:solidFill>
+                  </a:tcPr>
+                </a:tc>
+                <a:tc>
+                  <a:txBody>
+                    <a:bodyPr wrap="square"/>
+                    <a:lstStyle/>
+                    <a:p>
+                      <a:r>
+                        <a:rPr sz="1000" b="0">
+                          <a:solidFill>
+                            <a:srgbClr val="191D2E"/>
+                          </a:solidFill>
+                          <a:latin typeface="Courier New"/>
+                        </a:rPr>
+                        <a:t>☐</a:t>
+                      </a:r>
+                    </a:p>
+                  </a:txBody>
+                  <a:tcPr>
+                    <a:solidFill>
+                      <a:srgbClr val="F8F8FA"/>
+                    </a:solidFill>
+                  </a:tcPr>
+                </a:tc>
+                <a:tc>
+                  <a:txBody>
+                    <a:bodyPr wrap="square"/>
+                    <a:lstStyle/>
+                    <a:p>
+                      <a:r>
+                        <a:rPr sz="1000" b="0">
+                          <a:solidFill>
+                            <a:srgbClr val="191D2E"/>
+                          </a:solidFill>
+                          <a:latin typeface="Courier New"/>
+                        </a:rPr>
+                        <a:t>☐</a:t>
+                      </a:r>
+                    </a:p>
+                  </a:txBody>
+                  <a:tcPr>
+                    <a:solidFill>
+                      <a:srgbClr val="F8F8FA"/>
+                    </a:solidFill>
+                  </a:tcPr>
+                </a:tc>
+              </a:tr>
+            </a:tbl>
+          </a:graphicData>
+        </a:graphic>
+      </p:graphicFrame>
     </p:spTree>
   </p:cSld>
   <p:clrMapOvr>
@@ -5744,7 +6324,7 @@
     <p:bg>
       <p:bgPr>
         <a:solidFill>
-          <a:srgbClr val="191D2E"/>
+          <a:srgbClr val="1F2B56"/>
         </a:solidFill>
         <a:effectLst/>
       </p:bgPr>
@@ -6541,8 +7121,8 @@
         </p:nvSpPr>
         <p:spPr>
           <a:xfrm>
-            <a:off x="4064000" y="927100"/>
-            <a:ext cx="508000" cy="647700"/>
+            <a:off x="4064000" y="939799"/>
+            <a:ext cx="762000" cy="647700"/>
           </a:xfrm>
           <a:prstGeom prst="rect">
             <a:avLst/>
@@ -6550,20 +7130,20 @@
           <a:noFill/>
         </p:spPr>
         <p:txBody>
-          <a:bodyPr wrap="square">
+          <a:bodyPr wrap="none">
             <a:normAutofit/>
           </a:bodyPr>
           <a:lstStyle/>
           <a:p>
             <a:pPr algn="l"/>
             <a:r>
-              <a:rPr sz="2600" b="0" i="1">
+              <a:rPr sz="2400" b="0" i="1">
                 <a:solidFill>
                   <a:srgbClr val="1F2B56"/>
                 </a:solidFill>
                 <a:latin typeface="Georgia"/>
               </a:rPr>
-              <a:t>I.</a:t>
+              <a:t>I</a:t>
             </a:r>
           </a:p>
         </p:txBody>
@@ -6576,8 +7156,8 @@
         </p:nvSpPr>
         <p:spPr>
           <a:xfrm>
-            <a:off x="4699000" y="952500"/>
-            <a:ext cx="6858000" cy="622300"/>
+            <a:off x="4953000" y="952500"/>
+            <a:ext cx="6629400" cy="635000"/>
           </a:xfrm>
           <a:prstGeom prst="rect">
             <a:avLst/>
@@ -6611,7 +7191,7 @@
         </p:nvSpPr>
         <p:spPr>
           <a:xfrm>
-            <a:off x="4064000" y="1574800"/>
+            <a:off x="4064000" y="1587500"/>
             <a:ext cx="7518399" cy="6350"/>
           </a:xfrm>
           <a:prstGeom prst="rect">
@@ -6654,8 +7234,8 @@
         </p:nvSpPr>
         <p:spPr>
           <a:xfrm>
-            <a:off x="4064000" y="1612900"/>
-            <a:ext cx="508000" cy="647700"/>
+            <a:off x="4064000" y="1638300"/>
+            <a:ext cx="762000" cy="647700"/>
           </a:xfrm>
           <a:prstGeom prst="rect">
             <a:avLst/>
@@ -6663,20 +7243,20 @@
           <a:noFill/>
         </p:spPr>
         <p:txBody>
-          <a:bodyPr wrap="square">
+          <a:bodyPr wrap="none">
             <a:normAutofit/>
           </a:bodyPr>
           <a:lstStyle/>
           <a:p>
             <a:pPr algn="l"/>
             <a:r>
-              <a:rPr sz="2600" b="0" i="1">
+              <a:rPr sz="2400" b="0" i="1">
                 <a:solidFill>
                   <a:srgbClr val="1F2B56"/>
                 </a:solidFill>
                 <a:latin typeface="Georgia"/>
               </a:rPr>
-              <a:t>II.</a:t>
+              <a:t>II</a:t>
             </a:r>
           </a:p>
         </p:txBody>
@@ -6689,8 +7269,8 @@
         </p:nvSpPr>
         <p:spPr>
           <a:xfrm>
-            <a:off x="4699000" y="1638300"/>
-            <a:ext cx="6858000" cy="622300"/>
+            <a:off x="4953000" y="1651000"/>
+            <a:ext cx="6629400" cy="635000"/>
           </a:xfrm>
           <a:prstGeom prst="rect">
             <a:avLst/>
@@ -6724,7 +7304,7 @@
         </p:nvSpPr>
         <p:spPr>
           <a:xfrm>
-            <a:off x="4064000" y="2260600"/>
+            <a:off x="4064000" y="2286000"/>
             <a:ext cx="7518399" cy="6350"/>
           </a:xfrm>
           <a:prstGeom prst="rect">
@@ -6767,8 +7347,8 @@
         </p:nvSpPr>
         <p:spPr>
           <a:xfrm>
-            <a:off x="4064000" y="2298700"/>
-            <a:ext cx="508000" cy="647700"/>
+            <a:off x="4064000" y="2336800"/>
+            <a:ext cx="762000" cy="647700"/>
           </a:xfrm>
           <a:prstGeom prst="rect">
             <a:avLst/>
@@ -6776,20 +7356,20 @@
           <a:noFill/>
         </p:spPr>
         <p:txBody>
-          <a:bodyPr wrap="square">
+          <a:bodyPr wrap="none">
             <a:normAutofit/>
           </a:bodyPr>
           <a:lstStyle/>
           <a:p>
             <a:pPr algn="l"/>
             <a:r>
-              <a:rPr sz="2600" b="0" i="1">
+              <a:rPr sz="2400" b="0" i="1">
                 <a:solidFill>
                   <a:srgbClr val="1F2B56"/>
                 </a:solidFill>
                 <a:latin typeface="Georgia"/>
               </a:rPr>
-              <a:t>III.</a:t>
+              <a:t>III</a:t>
             </a:r>
           </a:p>
         </p:txBody>
@@ -6802,8 +7382,8 @@
         </p:nvSpPr>
         <p:spPr>
           <a:xfrm>
-            <a:off x="4699000" y="2324100"/>
-            <a:ext cx="6858000" cy="622300"/>
+            <a:off x="4953000" y="2349500"/>
+            <a:ext cx="6629400" cy="635000"/>
           </a:xfrm>
           <a:prstGeom prst="rect">
             <a:avLst/>
@@ -6837,7 +7417,7 @@
         </p:nvSpPr>
         <p:spPr>
           <a:xfrm>
-            <a:off x="4064000" y="2946400"/>
+            <a:off x="4064000" y="2984500"/>
             <a:ext cx="7518399" cy="6350"/>
           </a:xfrm>
           <a:prstGeom prst="rect">
@@ -6880,8 +7460,8 @@
         </p:nvSpPr>
         <p:spPr>
           <a:xfrm>
-            <a:off x="4064000" y="2984500"/>
-            <a:ext cx="508000" cy="647700"/>
+            <a:off x="4064000" y="3035300"/>
+            <a:ext cx="762000" cy="647700"/>
           </a:xfrm>
           <a:prstGeom prst="rect">
             <a:avLst/>
@@ -6889,20 +7469,20 @@
           <a:noFill/>
         </p:spPr>
         <p:txBody>
-          <a:bodyPr wrap="square">
+          <a:bodyPr wrap="none">
             <a:normAutofit/>
           </a:bodyPr>
           <a:lstStyle/>
           <a:p>
             <a:pPr algn="l"/>
             <a:r>
-              <a:rPr sz="2600" b="0" i="1">
+              <a:rPr sz="2400" b="0" i="1">
                 <a:solidFill>
                   <a:srgbClr val="1F2B56"/>
                 </a:solidFill>
                 <a:latin typeface="Georgia"/>
               </a:rPr>
-              <a:t>IV.</a:t>
+              <a:t>IV</a:t>
             </a:r>
           </a:p>
         </p:txBody>
@@ -6915,8 +7495,8 @@
         </p:nvSpPr>
         <p:spPr>
           <a:xfrm>
-            <a:off x="4699000" y="3009900"/>
-            <a:ext cx="6858000" cy="622300"/>
+            <a:off x="4953000" y="3048000"/>
+            <a:ext cx="6629400" cy="635000"/>
           </a:xfrm>
           <a:prstGeom prst="rect">
             <a:avLst/>
@@ -6956,7 +7536,7 @@
     <p:bg>
       <p:bgPr>
         <a:solidFill>
-          <a:srgbClr val="191D2E"/>
+          <a:srgbClr val="1F2B56"/>
         </a:solidFill>
         <a:effectLst/>
       </p:bgPr>
@@ -7464,7 +8044,7 @@
                   </a:txBody>
                   <a:tcPr>
                     <a:solidFill>
-                      <a:srgbClr val="191D2E"/>
+                      <a:srgbClr val="1F2B56"/>
                     </a:solidFill>
                   </a:tcPr>
                 </a:tc>
@@ -7486,7 +8066,7 @@
                   </a:txBody>
                   <a:tcPr>
                     <a:solidFill>
-                      <a:srgbClr val="191D2E"/>
+                      <a:srgbClr val="1F2B56"/>
                     </a:solidFill>
                   </a:tcPr>
                 </a:tc>
@@ -7508,7 +8088,7 @@
                   </a:txBody>
                   <a:tcPr>
                     <a:solidFill>
-                      <a:srgbClr val="191D2E"/>
+                      <a:srgbClr val="1F2B56"/>
                     </a:solidFill>
                   </a:tcPr>
                 </a:tc>
@@ -8009,7 +8589,7 @@
                   </a:txBody>
                   <a:tcPr>
                     <a:solidFill>
-                      <a:srgbClr val="191D2E"/>
+                      <a:srgbClr val="1F2B56"/>
                     </a:solidFill>
                   </a:tcPr>
                 </a:tc>
@@ -8031,7 +8611,7 @@
                   </a:txBody>
                   <a:tcPr>
                     <a:solidFill>
-                      <a:srgbClr val="191D2E"/>
+                      <a:srgbClr val="1F2B56"/>
                     </a:solidFill>
                   </a:tcPr>
                 </a:tc>
@@ -8053,7 +8633,7 @@
                   </a:txBody>
                   <a:tcPr>
                     <a:solidFill>
-                      <a:srgbClr val="191D2E"/>
+                      <a:srgbClr val="1F2B56"/>
                     </a:solidFill>
                   </a:tcPr>
                 </a:tc>
@@ -8075,7 +8655,7 @@
                   </a:txBody>
                   <a:tcPr>
                     <a:solidFill>
-                      <a:srgbClr val="191D2E"/>
+                      <a:srgbClr val="1F2B56"/>
                     </a:solidFill>
                   </a:tcPr>
                 </a:tc>
@@ -8097,7 +8677,7 @@
                   </a:txBody>
                   <a:tcPr>
                     <a:solidFill>
-                      <a:srgbClr val="191D2E"/>
+                      <a:srgbClr val="1F2B56"/>
                     </a:solidFill>
                   </a:tcPr>
                 </a:tc>
@@ -8842,7 +9422,7 @@
                   </a:txBody>
                   <a:tcPr>
                     <a:solidFill>
-                      <a:srgbClr val="191D2E"/>
+                      <a:srgbClr val="1F2B56"/>
                     </a:solidFill>
                   </a:tcPr>
                 </a:tc>
@@ -8864,7 +9444,7 @@
                   </a:txBody>
                   <a:tcPr>
                     <a:solidFill>
-                      <a:srgbClr val="191D2E"/>
+                      <a:srgbClr val="1F2B56"/>
                     </a:solidFill>
                   </a:tcPr>
                 </a:tc>
@@ -8886,7 +9466,7 @@
                   </a:txBody>
                   <a:tcPr>
                     <a:solidFill>
-                      <a:srgbClr val="191D2E"/>
+                      <a:srgbClr val="1F2B56"/>
                     </a:solidFill>
                   </a:tcPr>
                 </a:tc>
@@ -8908,7 +9488,7 @@
                   </a:txBody>
                   <a:tcPr>
                     <a:solidFill>
-                      <a:srgbClr val="191D2E"/>
+                      <a:srgbClr val="1F2B56"/>
                     </a:solidFill>
                   </a:tcPr>
                 </a:tc>
@@ -8930,7 +9510,7 @@
                   </a:txBody>
                   <a:tcPr>
                     <a:solidFill>
-                      <a:srgbClr val="191D2E"/>
+                      <a:srgbClr val="1F2B56"/>
                     </a:solidFill>
                   </a:tcPr>
                 </a:tc>
@@ -10572,7 +11152,7 @@
                   </a:txBody>
                   <a:tcPr>
                     <a:solidFill>
-                      <a:srgbClr val="191D2E"/>
+                      <a:srgbClr val="1F2B56"/>
                     </a:solidFill>
                   </a:tcPr>
                 </a:tc>
@@ -10594,7 +11174,7 @@
                   </a:txBody>
                   <a:tcPr>
                     <a:solidFill>
-                      <a:srgbClr val="191D2E"/>
+                      <a:srgbClr val="1F2B56"/>
                     </a:solidFill>
                   </a:tcPr>
                 </a:tc>
@@ -10616,7 +11196,7 @@
                   </a:txBody>
                   <a:tcPr>
                     <a:solidFill>
-                      <a:srgbClr val="191D2E"/>
+                      <a:srgbClr val="1F2B56"/>
                     </a:solidFill>
                   </a:tcPr>
                 </a:tc>
@@ -10638,7 +11218,7 @@
                   </a:txBody>
                   <a:tcPr>
                     <a:solidFill>
-                      <a:srgbClr val="191D2E"/>
+                      <a:srgbClr val="1F2B56"/>
                     </a:solidFill>
                   </a:tcPr>
                 </a:tc>
@@ -10660,7 +11240,7 @@
                   </a:txBody>
                   <a:tcPr>
                     <a:solidFill>
-                      <a:srgbClr val="191D2E"/>
+                      <a:srgbClr val="1F2B56"/>
                     </a:solidFill>
                   </a:tcPr>
                 </a:tc>
@@ -10682,7 +11262,7 @@
                   </a:txBody>
                   <a:tcPr>
                     <a:solidFill>
-                      <a:srgbClr val="191D2E"/>
+                      <a:srgbClr val="1F2B56"/>
                     </a:solidFill>
                   </a:tcPr>
                 </a:tc>
@@ -12988,7 +13568,7 @@
                   </a:txBody>
                   <a:tcPr>
                     <a:solidFill>
-                      <a:srgbClr val="191D2E"/>
+                      <a:srgbClr val="1F2B56"/>
                     </a:solidFill>
                   </a:tcPr>
                 </a:tc>
@@ -13010,7 +13590,7 @@
                   </a:txBody>
                   <a:tcPr>
                     <a:solidFill>
-                      <a:srgbClr val="191D2E"/>
+                      <a:srgbClr val="1F2B56"/>
                     </a:solidFill>
                   </a:tcPr>
                 </a:tc>
@@ -13032,7 +13612,7 @@
                   </a:txBody>
                   <a:tcPr>
                     <a:solidFill>
-                      <a:srgbClr val="191D2E"/>
+                      <a:srgbClr val="1F2B56"/>
                     </a:solidFill>
                   </a:tcPr>
                 </a:tc>
@@ -13054,7 +13634,7 @@
                   </a:txBody>
                   <a:tcPr>
                     <a:solidFill>
-                      <a:srgbClr val="191D2E"/>
+                      <a:srgbClr val="1F2B56"/>
                     </a:solidFill>
                   </a:tcPr>
                 </a:tc>
@@ -13620,7 +14200,7 @@
                   </a:txBody>
                   <a:tcPr>
                     <a:solidFill>
-                      <a:srgbClr val="191D2E"/>
+                      <a:srgbClr val="1F2B56"/>
                     </a:solidFill>
                   </a:tcPr>
                 </a:tc>
@@ -13642,7 +14222,7 @@
                   </a:txBody>
                   <a:tcPr>
                     <a:solidFill>
-                      <a:srgbClr val="191D2E"/>
+                      <a:srgbClr val="1F2B56"/>
                     </a:solidFill>
                   </a:tcPr>
                 </a:tc>
@@ -13664,7 +14244,7 @@
                   </a:txBody>
                   <a:tcPr>
                     <a:solidFill>
-                      <a:srgbClr val="191D2E"/>
+                      <a:srgbClr val="1F2B56"/>
                     </a:solidFill>
                   </a:tcPr>
                 </a:tc>
@@ -13686,7 +14266,7 @@
                   </a:txBody>
                   <a:tcPr>
                     <a:solidFill>
-                      <a:srgbClr val="191D2E"/>
+                      <a:srgbClr val="1F2B56"/>
                     </a:solidFill>
                   </a:tcPr>
                 </a:tc>
